--- a/docs/工作項目狀態.pptx
+++ b/docs/工作項目狀態.pptx
@@ -13,9 +13,13 @@
     <p:sldId id="261" r:id="rId7"/>
     <p:sldId id="262" r:id="rId8"/>
     <p:sldId id="263" r:id="rId9"/>
+    <p:sldId id="264" r:id="rId10"/>
+    <p:sldId id="265" r:id="rId11"/>
+    <p:sldId id="266" r:id="rId12"/>
+    <p:sldId id="267" r:id="rId13"/>
   </p:sldIdLst>
   <p:notesMasterIdLst>
-    <p:notesMasterId r:id="rId10"/>
+    <p:notesMasterId r:id="rId14"/>
   </p:notesMasterIdLst>
   <p:sldSz cx="12192000" cy="6858000"/>
   <p:notesSz cx="6858000" cy="12192000"/>
@@ -533,6 +537,270 @@
             <a:fld id="{F7021451-1387-4CA6-816F-3879F97B5CBC}" type="slidenum">
               <a:rPr lang="en-US"/>
               <a:t>1</a:t>
+            </a:fld>
+            <a:endParaRPr lang="en-US"/>
+          </a:p>
+        </p:txBody>
+      </p:sp>
+    </p:spTree>
+    <p:extLst>
+      <p:ext uri="{BB962C8B-B14F-4D97-AF65-F5344CB8AC3E}">
+        <p14:creationId xmlns:p14="http://schemas.microsoft.com/office/powerpoint/2010/main" val="1024086991"/>
+      </p:ext>
+    </p:extLst>
+  </p:cSld>
+  <p:clrMapOvr>
+    <a:masterClrMapping/>
+  </p:clrMapOvr>
+</p:notes>
+</file>
+
+<file path=ppt/notesSlides/notesSlide10.xml><?xml version="1.0" encoding="utf-8"?>
+<p:notes xmlns:a="http://schemas.openxmlformats.org/drawingml/2006/main" xmlns:r="http://schemas.openxmlformats.org/officeDocument/2006/relationships" xmlns:p="http://schemas.openxmlformats.org/presentationml/2006/main">
+  <p:cSld>
+    <p:spTree>
+      <p:nvGrpSpPr>
+        <p:cNvPr id="1" name=""/>
+        <p:cNvGrpSpPr/>
+        <p:nvPr/>
+      </p:nvGrpSpPr>
+      <p:grpSpPr>
+        <a:xfrm>
+          <a:off x="0" y="0"/>
+          <a:ext cx="0" cy="0"/>
+          <a:chOff x="0" y="0"/>
+          <a:chExt cx="0" cy="0"/>
+        </a:xfrm>
+      </p:grpSpPr>
+      <p:sp>
+        <p:nvSpPr>
+          <p:cNvPr id="2" name="Slide Image Placeholder 1"/>
+          <p:cNvSpPr>
+            <a:spLocks noGrp="1" noRot="1" noChangeAspect="1"/>
+          </p:cNvSpPr>
+          <p:nvPr>
+            <p:ph type="sldImg"/>
+          </p:nvPr>
+        </p:nvSpPr>
+        <p:spPr/>
+      </p:sp>
+      <p:sp>
+        <p:nvSpPr>
+          <p:cNvPr id="3" name="Notes Placeholder 2"/>
+          <p:cNvSpPr>
+            <a:spLocks noGrp="1"/>
+          </p:cNvSpPr>
+          <p:nvPr>
+            <p:ph type="body" idx="1"/>
+          </p:nvPr>
+        </p:nvSpPr>
+        <p:spPr/>
+        <p:txBody>
+          <a:bodyPr/>
+          <a:lstStyle/>
+          <a:p>
+            <a:r>
+              <a:rPr lang="en-US" dirty="0"/>
+              <a:t/>
+            </a:r>
+            <a:endParaRPr lang="en-US" dirty="0"/>
+          </a:p>
+        </p:txBody>
+      </p:sp>
+      <p:sp>
+        <p:nvSpPr>
+          <p:cNvPr id="4" name="Slide Number Placeholder 3"/>
+          <p:cNvSpPr>
+            <a:spLocks noGrp="1"/>
+          </p:cNvSpPr>
+          <p:nvPr>
+            <p:ph type="sldNum" sz="quarter" idx="10"/>
+          </p:nvPr>
+        </p:nvSpPr>
+        <p:spPr/>
+        <p:txBody>
+          <a:bodyPr/>
+          <a:lstStyle/>
+          <a:p>
+            <a:fld id="{F7021451-1387-4CA6-816F-3879F97B5CBC}" type="slidenum">
+              <a:rPr lang="en-US"/>
+              <a:t>10</a:t>
+            </a:fld>
+            <a:endParaRPr lang="en-US"/>
+          </a:p>
+        </p:txBody>
+      </p:sp>
+    </p:spTree>
+    <p:extLst>
+      <p:ext uri="{BB962C8B-B14F-4D97-AF65-F5344CB8AC3E}">
+        <p14:creationId xmlns:p14="http://schemas.microsoft.com/office/powerpoint/2010/main" val="1024086991"/>
+      </p:ext>
+    </p:extLst>
+  </p:cSld>
+  <p:clrMapOvr>
+    <a:masterClrMapping/>
+  </p:clrMapOvr>
+</p:notes>
+</file>
+
+<file path=ppt/notesSlides/notesSlide11.xml><?xml version="1.0" encoding="utf-8"?>
+<p:notes xmlns:a="http://schemas.openxmlformats.org/drawingml/2006/main" xmlns:r="http://schemas.openxmlformats.org/officeDocument/2006/relationships" xmlns:p="http://schemas.openxmlformats.org/presentationml/2006/main">
+  <p:cSld>
+    <p:spTree>
+      <p:nvGrpSpPr>
+        <p:cNvPr id="1" name=""/>
+        <p:cNvGrpSpPr/>
+        <p:nvPr/>
+      </p:nvGrpSpPr>
+      <p:grpSpPr>
+        <a:xfrm>
+          <a:off x="0" y="0"/>
+          <a:ext cx="0" cy="0"/>
+          <a:chOff x="0" y="0"/>
+          <a:chExt cx="0" cy="0"/>
+        </a:xfrm>
+      </p:grpSpPr>
+      <p:sp>
+        <p:nvSpPr>
+          <p:cNvPr id="2" name="Slide Image Placeholder 1"/>
+          <p:cNvSpPr>
+            <a:spLocks noGrp="1" noRot="1" noChangeAspect="1"/>
+          </p:cNvSpPr>
+          <p:nvPr>
+            <p:ph type="sldImg"/>
+          </p:nvPr>
+        </p:nvSpPr>
+        <p:spPr/>
+      </p:sp>
+      <p:sp>
+        <p:nvSpPr>
+          <p:cNvPr id="3" name="Notes Placeholder 2"/>
+          <p:cNvSpPr>
+            <a:spLocks noGrp="1"/>
+          </p:cNvSpPr>
+          <p:nvPr>
+            <p:ph type="body" idx="1"/>
+          </p:nvPr>
+        </p:nvSpPr>
+        <p:spPr/>
+        <p:txBody>
+          <a:bodyPr/>
+          <a:lstStyle/>
+          <a:p>
+            <a:r>
+              <a:rPr lang="en-US" dirty="0"/>
+              <a:t/>
+            </a:r>
+            <a:endParaRPr lang="en-US" dirty="0"/>
+          </a:p>
+        </p:txBody>
+      </p:sp>
+      <p:sp>
+        <p:nvSpPr>
+          <p:cNvPr id="4" name="Slide Number Placeholder 3"/>
+          <p:cNvSpPr>
+            <a:spLocks noGrp="1"/>
+          </p:cNvSpPr>
+          <p:nvPr>
+            <p:ph type="sldNum" sz="quarter" idx="10"/>
+          </p:nvPr>
+        </p:nvSpPr>
+        <p:spPr/>
+        <p:txBody>
+          <a:bodyPr/>
+          <a:lstStyle/>
+          <a:p>
+            <a:fld id="{F7021451-1387-4CA6-816F-3879F97B5CBC}" type="slidenum">
+              <a:rPr lang="en-US"/>
+              <a:t>11</a:t>
+            </a:fld>
+            <a:endParaRPr lang="en-US"/>
+          </a:p>
+        </p:txBody>
+      </p:sp>
+    </p:spTree>
+    <p:extLst>
+      <p:ext uri="{BB962C8B-B14F-4D97-AF65-F5344CB8AC3E}">
+        <p14:creationId xmlns:p14="http://schemas.microsoft.com/office/powerpoint/2010/main" val="1024086991"/>
+      </p:ext>
+    </p:extLst>
+  </p:cSld>
+  <p:clrMapOvr>
+    <a:masterClrMapping/>
+  </p:clrMapOvr>
+</p:notes>
+</file>
+
+<file path=ppt/notesSlides/notesSlide12.xml><?xml version="1.0" encoding="utf-8"?>
+<p:notes xmlns:a="http://schemas.openxmlformats.org/drawingml/2006/main" xmlns:r="http://schemas.openxmlformats.org/officeDocument/2006/relationships" xmlns:p="http://schemas.openxmlformats.org/presentationml/2006/main">
+  <p:cSld>
+    <p:spTree>
+      <p:nvGrpSpPr>
+        <p:cNvPr id="1" name=""/>
+        <p:cNvGrpSpPr/>
+        <p:nvPr/>
+      </p:nvGrpSpPr>
+      <p:grpSpPr>
+        <a:xfrm>
+          <a:off x="0" y="0"/>
+          <a:ext cx="0" cy="0"/>
+          <a:chOff x="0" y="0"/>
+          <a:chExt cx="0" cy="0"/>
+        </a:xfrm>
+      </p:grpSpPr>
+      <p:sp>
+        <p:nvSpPr>
+          <p:cNvPr id="2" name="Slide Image Placeholder 1"/>
+          <p:cNvSpPr>
+            <a:spLocks noGrp="1" noRot="1" noChangeAspect="1"/>
+          </p:cNvSpPr>
+          <p:nvPr>
+            <p:ph type="sldImg"/>
+          </p:nvPr>
+        </p:nvSpPr>
+        <p:spPr/>
+      </p:sp>
+      <p:sp>
+        <p:nvSpPr>
+          <p:cNvPr id="3" name="Notes Placeholder 2"/>
+          <p:cNvSpPr>
+            <a:spLocks noGrp="1"/>
+          </p:cNvSpPr>
+          <p:nvPr>
+            <p:ph type="body" idx="1"/>
+          </p:nvPr>
+        </p:nvSpPr>
+        <p:spPr/>
+        <p:txBody>
+          <a:bodyPr/>
+          <a:lstStyle/>
+          <a:p>
+            <a:r>
+              <a:rPr lang="en-US" dirty="0"/>
+              <a:t/>
+            </a:r>
+            <a:endParaRPr lang="en-US" dirty="0"/>
+          </a:p>
+        </p:txBody>
+      </p:sp>
+      <p:sp>
+        <p:nvSpPr>
+          <p:cNvPr id="4" name="Slide Number Placeholder 3"/>
+          <p:cNvSpPr>
+            <a:spLocks noGrp="1"/>
+          </p:cNvSpPr>
+          <p:nvPr>
+            <p:ph type="sldNum" sz="quarter" idx="10"/>
+          </p:nvPr>
+        </p:nvSpPr>
+        <p:spPr/>
+        <p:txBody>
+          <a:bodyPr/>
+          <a:lstStyle/>
+          <a:p>
+            <a:fld id="{F7021451-1387-4CA6-816F-3879F97B5CBC}" type="slidenum">
+              <a:rPr lang="en-US"/>
+              <a:t>12</a:t>
             </a:fld>
             <a:endParaRPr lang="en-US"/>
           </a:p>
@@ -1167,6 +1435,94 @@
 </p:notes>
 </file>
 
+<file path=ppt/notesSlides/notesSlide9.xml><?xml version="1.0" encoding="utf-8"?>
+<p:notes xmlns:a="http://schemas.openxmlformats.org/drawingml/2006/main" xmlns:r="http://schemas.openxmlformats.org/officeDocument/2006/relationships" xmlns:p="http://schemas.openxmlformats.org/presentationml/2006/main">
+  <p:cSld>
+    <p:spTree>
+      <p:nvGrpSpPr>
+        <p:cNvPr id="1" name=""/>
+        <p:cNvGrpSpPr/>
+        <p:nvPr/>
+      </p:nvGrpSpPr>
+      <p:grpSpPr>
+        <a:xfrm>
+          <a:off x="0" y="0"/>
+          <a:ext cx="0" cy="0"/>
+          <a:chOff x="0" y="0"/>
+          <a:chExt cx="0" cy="0"/>
+        </a:xfrm>
+      </p:grpSpPr>
+      <p:sp>
+        <p:nvSpPr>
+          <p:cNvPr id="2" name="Slide Image Placeholder 1"/>
+          <p:cNvSpPr>
+            <a:spLocks noGrp="1" noRot="1" noChangeAspect="1"/>
+          </p:cNvSpPr>
+          <p:nvPr>
+            <p:ph type="sldImg"/>
+          </p:nvPr>
+        </p:nvSpPr>
+        <p:spPr/>
+      </p:sp>
+      <p:sp>
+        <p:nvSpPr>
+          <p:cNvPr id="3" name="Notes Placeholder 2"/>
+          <p:cNvSpPr>
+            <a:spLocks noGrp="1"/>
+          </p:cNvSpPr>
+          <p:nvPr>
+            <p:ph type="body" idx="1"/>
+          </p:nvPr>
+        </p:nvSpPr>
+        <p:spPr/>
+        <p:txBody>
+          <a:bodyPr/>
+          <a:lstStyle/>
+          <a:p>
+            <a:r>
+              <a:rPr lang="en-US" dirty="0"/>
+              <a:t/>
+            </a:r>
+            <a:endParaRPr lang="en-US" dirty="0"/>
+          </a:p>
+        </p:txBody>
+      </p:sp>
+      <p:sp>
+        <p:nvSpPr>
+          <p:cNvPr id="4" name="Slide Number Placeholder 3"/>
+          <p:cNvSpPr>
+            <a:spLocks noGrp="1"/>
+          </p:cNvSpPr>
+          <p:nvPr>
+            <p:ph type="sldNum" sz="quarter" idx="10"/>
+          </p:nvPr>
+        </p:nvSpPr>
+        <p:spPr/>
+        <p:txBody>
+          <a:bodyPr/>
+          <a:lstStyle/>
+          <a:p>
+            <a:fld id="{F7021451-1387-4CA6-816F-3879F97B5CBC}" type="slidenum">
+              <a:rPr lang="en-US"/>
+              <a:t>9</a:t>
+            </a:fld>
+            <a:endParaRPr lang="en-US"/>
+          </a:p>
+        </p:txBody>
+      </p:sp>
+    </p:spTree>
+    <p:extLst>
+      <p:ext uri="{BB962C8B-B14F-4D97-AF65-F5344CB8AC3E}">
+        <p14:creationId xmlns:p14="http://schemas.microsoft.com/office/powerpoint/2010/main" val="1024086991"/>
+      </p:ext>
+    </p:extLst>
+  </p:cSld>
+  <p:clrMapOvr>
+    <a:masterClrMapping/>
+  </p:clrMapOvr>
+</p:notes>
+</file>
+
 <file path=ppt/slideLayouts/slideLayout1.xml><?xml version="1.0" encoding="utf-8"?>
 <p:sldLayout xmlns:a="http://schemas.openxmlformats.org/drawingml/2006/main" xmlns:r="http://schemas.openxmlformats.org/officeDocument/2006/relationships" xmlns:p="http://schemas.openxmlformats.org/presentationml/2006/main" preserve="1">
   <p:cSld name="DEFAULT">
@@ -1671,6 +2027,2319 @@
               <a:t>盤點日 2026/07/19｜決賽 8/1–8/2｜完整版：docs/STATUS.md</a:t>
             </a:r>
             <a:endParaRPr lang="en-US" sz="1300" dirty="0"/>
+          </a:p>
+        </p:txBody>
+      </p:sp>
+    </p:spTree>
+  </p:cSld>
+  <p:clrMapOvr>
+    <a:masterClrMapping/>
+  </p:clrMapOvr>
+</p:sld>
+</file>
+
+<file path=ppt/slides/slide10.xml><?xml version="1.0" encoding="utf-8"?>
+<p:sld xmlns:a="http://schemas.openxmlformats.org/drawingml/2006/main" xmlns:r="http://schemas.openxmlformats.org/officeDocument/2006/relationships" xmlns:p="http://schemas.openxmlformats.org/presentationml/2006/main">
+  <p:cSld name="Slide 10">
+    <p:bg>
+      <p:bgPr>
+        <a:solidFill>
+          <a:srgbClr val="FFFFFF"/>
+        </a:solidFill>
+      </p:bgPr>
+    </p:bg>
+    <p:spTree>
+      <p:nvGrpSpPr>
+        <p:cNvPr id="1" name=""/>
+        <p:cNvGrpSpPr/>
+        <p:nvPr/>
+      </p:nvGrpSpPr>
+      <p:grpSpPr>
+        <a:xfrm>
+          <a:off x="0" y="0"/>
+          <a:ext cx="0" cy="0"/>
+          <a:chOff x="0" y="0"/>
+          <a:chExt cx="0" cy="0"/>
+        </a:xfrm>
+      </p:grpSpPr>
+      <p:sp>
+        <p:nvSpPr>
+          <p:cNvPr id="2" name="Text 0"/>
+          <p:cNvSpPr/>
+          <p:nvPr/>
+        </p:nvSpPr>
+        <p:spPr>
+          <a:xfrm>
+            <a:off x="548640" y="411480"/>
+            <a:ext cx="11091672" cy="640080"/>
+          </a:xfrm>
+          <a:prstGeom prst="rect">
+            <a:avLst/>
+          </a:prstGeom>
+          <a:noFill/>
+          <a:ln/>
+        </p:spPr>
+        <p:txBody>
+          <a:bodyPr wrap="square" lIns="0" tIns="0" rIns="0" bIns="0" rtlCol="0" anchor="ctr"/>
+          <a:lstStyle/>
+          <a:p>
+            <a:pPr indent="0" marL="0">
+              <a:buNone/>
+            </a:pPr>
+            <a:r>
+              <a:rPr lang="en-US" sz="2700" b="1" dirty="0">
+                <a:solidFill>
+                  <a:srgbClr val="16224D"/>
+                </a:solidFill>
+                <a:latin typeface="Microsoft JhengHei" pitchFamily="34" charset="0"/>
+                <a:ea typeface="Microsoft JhengHei" pitchFamily="34" charset="-122"/>
+                <a:cs typeface="Microsoft JhengHei" pitchFamily="34" charset="-120"/>
+              </a:rPr>
+              <a:t>Kiro 開發｜日常循環：領任務 → 開分支 → Kiro 做 → 合回去</a:t>
+            </a:r>
+            <a:endParaRPr lang="en-US" sz="2700" dirty="0"/>
+          </a:p>
+        </p:txBody>
+      </p:sp>
+      <p:sp>
+        <p:nvSpPr>
+          <p:cNvPr id="3" name="Shape 1"/>
+          <p:cNvSpPr/>
+          <p:nvPr/>
+        </p:nvSpPr>
+        <p:spPr>
+          <a:xfrm>
+            <a:off x="548640" y="1581912"/>
+            <a:ext cx="502920" cy="502920"/>
+          </a:xfrm>
+          <a:prstGeom prst="ellipse">
+            <a:avLst/>
+          </a:prstGeom>
+          <a:solidFill>
+            <a:srgbClr val="16224D"/>
+          </a:solidFill>
+          <a:ln/>
+        </p:spPr>
+      </p:sp>
+      <p:sp>
+        <p:nvSpPr>
+          <p:cNvPr id="4" name="Text 2"/>
+          <p:cNvSpPr/>
+          <p:nvPr/>
+        </p:nvSpPr>
+        <p:spPr>
+          <a:xfrm>
+            <a:off x="548640" y="1581912"/>
+            <a:ext cx="502920" cy="502920"/>
+          </a:xfrm>
+          <a:prstGeom prst="rect">
+            <a:avLst/>
+          </a:prstGeom>
+          <a:noFill/>
+          <a:ln/>
+        </p:spPr>
+        <p:txBody>
+          <a:bodyPr wrap="square" lIns="0" tIns="0" rIns="0" bIns="0" rtlCol="0" anchor="ctr"/>
+          <a:lstStyle/>
+          <a:p>
+            <a:pPr algn="ctr" indent="0" marL="0">
+              <a:buNone/>
+            </a:pPr>
+            <a:r>
+              <a:rPr lang="en-US" sz="1600" b="1" dirty="0">
+                <a:solidFill>
+                  <a:srgbClr val="FFFFFF"/>
+                </a:solidFill>
+                <a:latin typeface="Microsoft JhengHei" pitchFamily="34" charset="0"/>
+                <a:ea typeface="Microsoft JhengHei" pitchFamily="34" charset="-122"/>
+                <a:cs typeface="Microsoft JhengHei" pitchFamily="34" charset="-120"/>
+              </a:rPr>
+              <a:t>1</a:t>
+            </a:r>
+            <a:endParaRPr lang="en-US" sz="1600" dirty="0"/>
+          </a:p>
+        </p:txBody>
+      </p:sp>
+      <p:sp>
+        <p:nvSpPr>
+          <p:cNvPr id="5" name="Text 3"/>
+          <p:cNvSpPr/>
+          <p:nvPr/>
+        </p:nvSpPr>
+        <p:spPr>
+          <a:xfrm>
+            <a:off x="1280160" y="1508760"/>
+            <a:ext cx="1554480" cy="685800"/>
+          </a:xfrm>
+          <a:prstGeom prst="rect">
+            <a:avLst/>
+          </a:prstGeom>
+          <a:noFill/>
+          <a:ln/>
+        </p:spPr>
+        <p:txBody>
+          <a:bodyPr wrap="square" lIns="0" tIns="0" rIns="0" bIns="0" rtlCol="0" anchor="ctr"/>
+          <a:lstStyle/>
+          <a:p>
+            <a:pPr indent="0" marL="0">
+              <a:buNone/>
+            </a:pPr>
+            <a:r>
+              <a:rPr lang="en-US" sz="1500" b="1" dirty="0">
+                <a:solidFill>
+                  <a:srgbClr val="16224D"/>
+                </a:solidFill>
+                <a:latin typeface="Microsoft JhengHei" pitchFamily="34" charset="0"/>
+                <a:ea typeface="Microsoft JhengHei" pitchFamily="34" charset="-122"/>
+                <a:cs typeface="Microsoft JhengHei" pitchFamily="34" charset="-120"/>
+              </a:rPr>
+              <a:t>領任務</a:t>
+            </a:r>
+            <a:endParaRPr lang="en-US" sz="1500" dirty="0"/>
+          </a:p>
+        </p:txBody>
+      </p:sp>
+      <p:sp>
+        <p:nvSpPr>
+          <p:cNvPr id="6" name="Text 4"/>
+          <p:cNvSpPr/>
+          <p:nvPr/>
+        </p:nvSpPr>
+        <p:spPr>
+          <a:xfrm>
+            <a:off x="2926080" y="1508760"/>
+            <a:ext cx="8778240" cy="685800"/>
+          </a:xfrm>
+          <a:prstGeom prst="rect">
+            <a:avLst/>
+          </a:prstGeom>
+          <a:noFill/>
+          <a:ln/>
+        </p:spPr>
+        <p:txBody>
+          <a:bodyPr wrap="square" lIns="0" tIns="0" rIns="0" bIns="0" rtlCol="0" anchor="ctr"/>
+          <a:lstStyle/>
+          <a:p>
+            <a:pPr indent="0" marL="0">
+              <a:buNone/>
+            </a:pPr>
+            <a:r>
+              <a:rPr lang="en-US" sz="1250" dirty="0">
+                <a:solidFill>
+                  <a:srgbClr val="1F2937"/>
+                </a:solidFill>
+                <a:latin typeface="Microsoft JhengHei" pitchFamily="34" charset="0"/>
+                <a:ea typeface="Microsoft JhengHei" pitchFamily="34" charset="-122"/>
+                <a:cs typeface="Microsoft JhengHei" pitchFamily="34" charset="-120"/>
+              </a:rPr>
+              <a:t>GitHub Issues 認領（開會分配的工作包），Slack #dev 說一聲避免撞車</a:t>
+            </a:r>
+            <a:endParaRPr lang="en-US" sz="1250" dirty="0"/>
+          </a:p>
+        </p:txBody>
+      </p:sp>
+      <p:sp>
+        <p:nvSpPr>
+          <p:cNvPr id="7" name="Shape 5"/>
+          <p:cNvSpPr/>
+          <p:nvPr/>
+        </p:nvSpPr>
+        <p:spPr>
+          <a:xfrm>
+            <a:off x="548640" y="2441448"/>
+            <a:ext cx="502920" cy="502920"/>
+          </a:xfrm>
+          <a:prstGeom prst="ellipse">
+            <a:avLst/>
+          </a:prstGeom>
+          <a:solidFill>
+            <a:srgbClr val="16224D"/>
+          </a:solidFill>
+          <a:ln/>
+        </p:spPr>
+      </p:sp>
+      <p:sp>
+        <p:nvSpPr>
+          <p:cNvPr id="8" name="Text 6"/>
+          <p:cNvSpPr/>
+          <p:nvPr/>
+        </p:nvSpPr>
+        <p:spPr>
+          <a:xfrm>
+            <a:off x="548640" y="2441448"/>
+            <a:ext cx="502920" cy="502920"/>
+          </a:xfrm>
+          <a:prstGeom prst="rect">
+            <a:avLst/>
+          </a:prstGeom>
+          <a:noFill/>
+          <a:ln/>
+        </p:spPr>
+        <p:txBody>
+          <a:bodyPr wrap="square" lIns="0" tIns="0" rIns="0" bIns="0" rtlCol="0" anchor="ctr"/>
+          <a:lstStyle/>
+          <a:p>
+            <a:pPr algn="ctr" indent="0" marL="0">
+              <a:buNone/>
+            </a:pPr>
+            <a:r>
+              <a:rPr lang="en-US" sz="1600" b="1" dirty="0">
+                <a:solidFill>
+                  <a:srgbClr val="FFFFFF"/>
+                </a:solidFill>
+                <a:latin typeface="Microsoft JhengHei" pitchFamily="34" charset="0"/>
+                <a:ea typeface="Microsoft JhengHei" pitchFamily="34" charset="-122"/>
+                <a:cs typeface="Microsoft JhengHei" pitchFamily="34" charset="-120"/>
+              </a:rPr>
+              <a:t>2</a:t>
+            </a:r>
+            <a:endParaRPr lang="en-US" sz="1600" dirty="0"/>
+          </a:p>
+        </p:txBody>
+      </p:sp>
+      <p:sp>
+        <p:nvSpPr>
+          <p:cNvPr id="9" name="Text 7"/>
+          <p:cNvSpPr/>
+          <p:nvPr/>
+        </p:nvSpPr>
+        <p:spPr>
+          <a:xfrm>
+            <a:off x="1280160" y="2368296"/>
+            <a:ext cx="1554480" cy="685800"/>
+          </a:xfrm>
+          <a:prstGeom prst="rect">
+            <a:avLst/>
+          </a:prstGeom>
+          <a:noFill/>
+          <a:ln/>
+        </p:spPr>
+        <p:txBody>
+          <a:bodyPr wrap="square" lIns="0" tIns="0" rIns="0" bIns="0" rtlCol="0" anchor="ctr"/>
+          <a:lstStyle/>
+          <a:p>
+            <a:pPr indent="0" marL="0">
+              <a:buNone/>
+            </a:pPr>
+            <a:r>
+              <a:rPr lang="en-US" sz="1500" b="1" dirty="0">
+                <a:solidFill>
+                  <a:srgbClr val="16224D"/>
+                </a:solidFill>
+                <a:latin typeface="Microsoft JhengHei" pitchFamily="34" charset="0"/>
+                <a:ea typeface="Microsoft JhengHei" pitchFamily="34" charset="-122"/>
+                <a:cs typeface="Microsoft JhengHei" pitchFamily="34" charset="-120"/>
+              </a:rPr>
+              <a:t>開分支</a:t>
+            </a:r>
+            <a:endParaRPr lang="en-US" sz="1500" dirty="0"/>
+          </a:p>
+        </p:txBody>
+      </p:sp>
+      <p:sp>
+        <p:nvSpPr>
+          <p:cNvPr id="10" name="Text 8"/>
+          <p:cNvSpPr/>
+          <p:nvPr/>
+        </p:nvSpPr>
+        <p:spPr>
+          <a:xfrm>
+            <a:off x="2926080" y="2368296"/>
+            <a:ext cx="8778240" cy="685800"/>
+          </a:xfrm>
+          <a:prstGeom prst="rect">
+            <a:avLst/>
+          </a:prstGeom>
+          <a:noFill/>
+          <a:ln/>
+        </p:spPr>
+        <p:txBody>
+          <a:bodyPr wrap="square" lIns="0" tIns="0" rIns="0" bIns="0" rtlCol="0" anchor="ctr"/>
+          <a:lstStyle/>
+          <a:p>
+            <a:pPr indent="0" marL="0">
+              <a:buNone/>
+            </a:pPr>
+            <a:r>
+              <a:rPr lang="en-US" sz="1250" dirty="0">
+                <a:solidFill>
+                  <a:srgbClr val="1F2937"/>
+                </a:solidFill>
+                <a:latin typeface="Microsoft JhengHei" pitchFamily="34" charset="0"/>
+                <a:ea typeface="Microsoft JhengHei" pitchFamily="34" charset="-122"/>
+                <a:cs typeface="Microsoft JhengHei" pitchFamily="34" charset="-120"/>
+              </a:rPr>
+              <a:t>git checkout -b feat/任務名（從最新 main 開）</a:t>
+            </a:r>
+            <a:endParaRPr lang="en-US" sz="1250" dirty="0"/>
+          </a:p>
+        </p:txBody>
+      </p:sp>
+      <p:sp>
+        <p:nvSpPr>
+          <p:cNvPr id="11" name="Shape 9"/>
+          <p:cNvSpPr/>
+          <p:nvPr/>
+        </p:nvSpPr>
+        <p:spPr>
+          <a:xfrm>
+            <a:off x="548640" y="3300984"/>
+            <a:ext cx="502920" cy="502920"/>
+          </a:xfrm>
+          <a:prstGeom prst="ellipse">
+            <a:avLst/>
+          </a:prstGeom>
+          <a:solidFill>
+            <a:srgbClr val="E8A13A"/>
+          </a:solidFill>
+          <a:ln/>
+        </p:spPr>
+      </p:sp>
+      <p:sp>
+        <p:nvSpPr>
+          <p:cNvPr id="12" name="Text 10"/>
+          <p:cNvSpPr/>
+          <p:nvPr/>
+        </p:nvSpPr>
+        <p:spPr>
+          <a:xfrm>
+            <a:off x="548640" y="3300984"/>
+            <a:ext cx="502920" cy="502920"/>
+          </a:xfrm>
+          <a:prstGeom prst="rect">
+            <a:avLst/>
+          </a:prstGeom>
+          <a:noFill/>
+          <a:ln/>
+        </p:spPr>
+        <p:txBody>
+          <a:bodyPr wrap="square" lIns="0" tIns="0" rIns="0" bIns="0" rtlCol="0" anchor="ctr"/>
+          <a:lstStyle/>
+          <a:p>
+            <a:pPr algn="ctr" indent="0" marL="0">
+              <a:buNone/>
+            </a:pPr>
+            <a:r>
+              <a:rPr lang="en-US" sz="1600" b="1" dirty="0">
+                <a:solidFill>
+                  <a:srgbClr val="FFFFFF"/>
+                </a:solidFill>
+                <a:latin typeface="Microsoft JhengHei" pitchFamily="34" charset="0"/>
+                <a:ea typeface="Microsoft JhengHei" pitchFamily="34" charset="-122"/>
+                <a:cs typeface="Microsoft JhengHei" pitchFamily="34" charset="-120"/>
+              </a:rPr>
+              <a:t>3</a:t>
+            </a:r>
+            <a:endParaRPr lang="en-US" sz="1600" dirty="0"/>
+          </a:p>
+        </p:txBody>
+      </p:sp>
+      <p:sp>
+        <p:nvSpPr>
+          <p:cNvPr id="13" name="Text 11"/>
+          <p:cNvSpPr/>
+          <p:nvPr/>
+        </p:nvSpPr>
+        <p:spPr>
+          <a:xfrm>
+            <a:off x="1280160" y="3227832"/>
+            <a:ext cx="1554480" cy="685800"/>
+          </a:xfrm>
+          <a:prstGeom prst="rect">
+            <a:avLst/>
+          </a:prstGeom>
+          <a:noFill/>
+          <a:ln/>
+        </p:spPr>
+        <p:txBody>
+          <a:bodyPr wrap="square" lIns="0" tIns="0" rIns="0" bIns="0" rtlCol="0" anchor="ctr"/>
+          <a:lstStyle/>
+          <a:p>
+            <a:pPr indent="0" marL="0">
+              <a:buNone/>
+            </a:pPr>
+            <a:r>
+              <a:rPr lang="en-US" sz="1500" b="1" dirty="0">
+                <a:solidFill>
+                  <a:srgbClr val="16224D"/>
+                </a:solidFill>
+                <a:latin typeface="Microsoft JhengHei" pitchFamily="34" charset="0"/>
+                <a:ea typeface="Microsoft JhengHei" pitchFamily="34" charset="-122"/>
+                <a:cs typeface="Microsoft JhengHei" pitchFamily="34" charset="-120"/>
+              </a:rPr>
+              <a:t>Kiro 執行</a:t>
+            </a:r>
+            <a:endParaRPr lang="en-US" sz="1500" dirty="0"/>
+          </a:p>
+        </p:txBody>
+      </p:sp>
+      <p:sp>
+        <p:nvSpPr>
+          <p:cNvPr id="14" name="Text 12"/>
+          <p:cNvSpPr/>
+          <p:nvPr/>
+        </p:nvSpPr>
+        <p:spPr>
+          <a:xfrm>
+            <a:off x="2926080" y="3227832"/>
+            <a:ext cx="8778240" cy="685800"/>
+          </a:xfrm>
+          <a:prstGeom prst="rect">
+            <a:avLst/>
+          </a:prstGeom>
+          <a:noFill/>
+          <a:ln/>
+        </p:spPr>
+        <p:txBody>
+          <a:bodyPr wrap="square" lIns="0" tIns="0" rIns="0" bIns="0" rtlCol="0" anchor="ctr"/>
+          <a:lstStyle/>
+          <a:p>
+            <a:pPr indent="0" marL="0">
+              <a:buNone/>
+            </a:pPr>
+            <a:r>
+              <a:rPr lang="en-US" sz="1250" dirty="0">
+                <a:solidFill>
+                  <a:srgbClr val="1F2937"/>
+                </a:solidFill>
+                <a:latin typeface="Microsoft JhengHei" pitchFamily="34" charset="0"/>
+                <a:ea typeface="Microsoft JhengHei" pitchFamily="34" charset="-122"/>
+                <a:cs typeface="Microsoft JhengHei" pitchFamily="34" charset="-120"/>
+              </a:rPr>
+              <a:t>Specs 面板 → 對應 spec → tasks → 點「Start task」。Kiro 讀 requirements+design 上下文動手改碼；做完自己看 diff 再收</a:t>
+            </a:r>
+            <a:endParaRPr lang="en-US" sz="1250" dirty="0"/>
+          </a:p>
+        </p:txBody>
+      </p:sp>
+      <p:sp>
+        <p:nvSpPr>
+          <p:cNvPr id="15" name="Shape 13"/>
+          <p:cNvSpPr/>
+          <p:nvPr/>
+        </p:nvSpPr>
+        <p:spPr>
+          <a:xfrm>
+            <a:off x="548640" y="4160520"/>
+            <a:ext cx="502920" cy="502920"/>
+          </a:xfrm>
+          <a:prstGeom prst="ellipse">
+            <a:avLst/>
+          </a:prstGeom>
+          <a:solidFill>
+            <a:srgbClr val="1F9D66"/>
+          </a:solidFill>
+          <a:ln/>
+        </p:spPr>
+      </p:sp>
+      <p:sp>
+        <p:nvSpPr>
+          <p:cNvPr id="16" name="Text 14"/>
+          <p:cNvSpPr/>
+          <p:nvPr/>
+        </p:nvSpPr>
+        <p:spPr>
+          <a:xfrm>
+            <a:off x="548640" y="4160520"/>
+            <a:ext cx="502920" cy="502920"/>
+          </a:xfrm>
+          <a:prstGeom prst="rect">
+            <a:avLst/>
+          </a:prstGeom>
+          <a:noFill/>
+          <a:ln/>
+        </p:spPr>
+        <p:txBody>
+          <a:bodyPr wrap="square" lIns="0" tIns="0" rIns="0" bIns="0" rtlCol="0" anchor="ctr"/>
+          <a:lstStyle/>
+          <a:p>
+            <a:pPr algn="ctr" indent="0" marL="0">
+              <a:buNone/>
+            </a:pPr>
+            <a:r>
+              <a:rPr lang="en-US" sz="1600" b="1" dirty="0">
+                <a:solidFill>
+                  <a:srgbClr val="FFFFFF"/>
+                </a:solidFill>
+                <a:latin typeface="Microsoft JhengHei" pitchFamily="34" charset="0"/>
+                <a:ea typeface="Microsoft JhengHei" pitchFamily="34" charset="-122"/>
+                <a:cs typeface="Microsoft JhengHei" pitchFamily="34" charset="-120"/>
+              </a:rPr>
+              <a:t>4</a:t>
+            </a:r>
+            <a:endParaRPr lang="en-US" sz="1600" dirty="0"/>
+          </a:p>
+        </p:txBody>
+      </p:sp>
+      <p:sp>
+        <p:nvSpPr>
+          <p:cNvPr id="17" name="Text 15"/>
+          <p:cNvSpPr/>
+          <p:nvPr/>
+        </p:nvSpPr>
+        <p:spPr>
+          <a:xfrm>
+            <a:off x="1280160" y="4087368"/>
+            <a:ext cx="1554480" cy="685800"/>
+          </a:xfrm>
+          <a:prstGeom prst="rect">
+            <a:avLst/>
+          </a:prstGeom>
+          <a:noFill/>
+          <a:ln/>
+        </p:spPr>
+        <p:txBody>
+          <a:bodyPr wrap="square" lIns="0" tIns="0" rIns="0" bIns="0" rtlCol="0" anchor="ctr"/>
+          <a:lstStyle/>
+          <a:p>
+            <a:pPr indent="0" marL="0">
+              <a:buNone/>
+            </a:pPr>
+            <a:r>
+              <a:rPr lang="en-US" sz="1500" b="1" dirty="0">
+                <a:solidFill>
+                  <a:srgbClr val="16224D"/>
+                </a:solidFill>
+                <a:latin typeface="Microsoft JhengHei" pitchFamily="34" charset="0"/>
+                <a:ea typeface="Microsoft JhengHei" pitchFamily="34" charset="-122"/>
+                <a:cs typeface="Microsoft JhengHei" pitchFamily="34" charset="-120"/>
+              </a:rPr>
+              <a:t>驗證</a:t>
+            </a:r>
+            <a:endParaRPr lang="en-US" sz="1500" dirty="0"/>
+          </a:p>
+        </p:txBody>
+      </p:sp>
+      <p:sp>
+        <p:nvSpPr>
+          <p:cNvPr id="18" name="Text 16"/>
+          <p:cNvSpPr/>
+          <p:nvPr/>
+        </p:nvSpPr>
+        <p:spPr>
+          <a:xfrm>
+            <a:off x="2926080" y="4087368"/>
+            <a:ext cx="8778240" cy="685800"/>
+          </a:xfrm>
+          <a:prstGeom prst="rect">
+            <a:avLst/>
+          </a:prstGeom>
+          <a:noFill/>
+          <a:ln/>
+        </p:spPr>
+        <p:txBody>
+          <a:bodyPr wrap="square" lIns="0" tIns="0" rIns="0" bIns="0" rtlCol="0" anchor="ctr"/>
+          <a:lstStyle/>
+          <a:p>
+            <a:pPr indent="0" marL="0">
+              <a:buNone/>
+            </a:pPr>
+            <a:r>
+              <a:rPr lang="en-US" sz="1250" dirty="0">
+                <a:solidFill>
+                  <a:srgbClr val="1F2937"/>
+                </a:solidFill>
+                <a:latin typeface="Microsoft JhengHei" pitchFamily="34" charset="0"/>
+                <a:ea typeface="Microsoft JhengHei" pitchFamily="34" charset="-122"/>
+                <a:cs typeface="Microsoft JhengHei" pitchFamily="34" charset="-120"/>
+              </a:rPr>
+              <a:t>跑該 spec tasks.md 的驗收條件（單元測試/劇本），過了才算完成、打勾</a:t>
+            </a:r>
+            <a:endParaRPr lang="en-US" sz="1250" dirty="0"/>
+          </a:p>
+        </p:txBody>
+      </p:sp>
+      <p:sp>
+        <p:nvSpPr>
+          <p:cNvPr id="19" name="Shape 17"/>
+          <p:cNvSpPr/>
+          <p:nvPr/>
+        </p:nvSpPr>
+        <p:spPr>
+          <a:xfrm>
+            <a:off x="548640" y="5020056"/>
+            <a:ext cx="502920" cy="502920"/>
+          </a:xfrm>
+          <a:prstGeom prst="ellipse">
+            <a:avLst/>
+          </a:prstGeom>
+          <a:solidFill>
+            <a:srgbClr val="1F9D66"/>
+          </a:solidFill>
+          <a:ln/>
+        </p:spPr>
+      </p:sp>
+      <p:sp>
+        <p:nvSpPr>
+          <p:cNvPr id="20" name="Text 18"/>
+          <p:cNvSpPr/>
+          <p:nvPr/>
+        </p:nvSpPr>
+        <p:spPr>
+          <a:xfrm>
+            <a:off x="548640" y="5020056"/>
+            <a:ext cx="502920" cy="502920"/>
+          </a:xfrm>
+          <a:prstGeom prst="rect">
+            <a:avLst/>
+          </a:prstGeom>
+          <a:noFill/>
+          <a:ln/>
+        </p:spPr>
+        <p:txBody>
+          <a:bodyPr wrap="square" lIns="0" tIns="0" rIns="0" bIns="0" rtlCol="0" anchor="ctr"/>
+          <a:lstStyle/>
+          <a:p>
+            <a:pPr algn="ctr" indent="0" marL="0">
+              <a:buNone/>
+            </a:pPr>
+            <a:r>
+              <a:rPr lang="en-US" sz="1600" b="1" dirty="0">
+                <a:solidFill>
+                  <a:srgbClr val="FFFFFF"/>
+                </a:solidFill>
+                <a:latin typeface="Microsoft JhengHei" pitchFamily="34" charset="0"/>
+                <a:ea typeface="Microsoft JhengHei" pitchFamily="34" charset="-122"/>
+                <a:cs typeface="Microsoft JhengHei" pitchFamily="34" charset="-120"/>
+              </a:rPr>
+              <a:t>5</a:t>
+            </a:r>
+            <a:endParaRPr lang="en-US" sz="1600" dirty="0"/>
+          </a:p>
+        </p:txBody>
+      </p:sp>
+      <p:sp>
+        <p:nvSpPr>
+          <p:cNvPr id="21" name="Text 19"/>
+          <p:cNvSpPr/>
+          <p:nvPr/>
+        </p:nvSpPr>
+        <p:spPr>
+          <a:xfrm>
+            <a:off x="1280160" y="4946904"/>
+            <a:ext cx="1554480" cy="685800"/>
+          </a:xfrm>
+          <a:prstGeom prst="rect">
+            <a:avLst/>
+          </a:prstGeom>
+          <a:noFill/>
+          <a:ln/>
+        </p:spPr>
+        <p:txBody>
+          <a:bodyPr wrap="square" lIns="0" tIns="0" rIns="0" bIns="0" rtlCol="0" anchor="ctr"/>
+          <a:lstStyle/>
+          <a:p>
+            <a:pPr indent="0" marL="0">
+              <a:buNone/>
+            </a:pPr>
+            <a:r>
+              <a:rPr lang="en-US" sz="1500" b="1" dirty="0">
+                <a:solidFill>
+                  <a:srgbClr val="16224D"/>
+                </a:solidFill>
+                <a:latin typeface="Microsoft JhengHei" pitchFamily="34" charset="0"/>
+                <a:ea typeface="Microsoft JhengHei" pitchFamily="34" charset="-122"/>
+                <a:cs typeface="Microsoft JhengHei" pitchFamily="34" charset="-120"/>
+              </a:rPr>
+              <a:t>合回去</a:t>
+            </a:r>
+            <a:endParaRPr lang="en-US" sz="1500" dirty="0"/>
+          </a:p>
+        </p:txBody>
+      </p:sp>
+      <p:sp>
+        <p:nvSpPr>
+          <p:cNvPr id="22" name="Text 20"/>
+          <p:cNvSpPr/>
+          <p:nvPr/>
+        </p:nvSpPr>
+        <p:spPr>
+          <a:xfrm>
+            <a:off x="2926080" y="4946904"/>
+            <a:ext cx="8778240" cy="685800"/>
+          </a:xfrm>
+          <a:prstGeom prst="rect">
+            <a:avLst/>
+          </a:prstGeom>
+          <a:noFill/>
+          <a:ln/>
+        </p:spPr>
+        <p:txBody>
+          <a:bodyPr wrap="square" lIns="0" tIns="0" rIns="0" bIns="0" rtlCol="0" anchor="ctr"/>
+          <a:lstStyle/>
+          <a:p>
+            <a:pPr indent="0" marL="0">
+              <a:buNone/>
+            </a:pPr>
+            <a:r>
+              <a:rPr lang="en-US" sz="1250" dirty="0">
+                <a:solidFill>
+                  <a:srgbClr val="1F2937"/>
+                </a:solidFill>
+                <a:latin typeface="Microsoft JhengHei" pitchFamily="34" charset="0"/>
+                <a:ea typeface="Microsoft JhengHei" pitchFamily="34" charset="-122"/>
+                <a:cs typeface="Microsoft JhengHei" pitchFamily="34" charset="-120"/>
+              </a:rPr>
+              <a:t>git pull --rebase → push → PR（賽前）或直合（決賽現場求快）</a:t>
+            </a:r>
+            <a:endParaRPr lang="en-US" sz="1250" dirty="0"/>
+          </a:p>
+        </p:txBody>
+      </p:sp>
+      <p:sp>
+        <p:nvSpPr>
+          <p:cNvPr id="23" name="Shape 21"/>
+          <p:cNvSpPr/>
+          <p:nvPr/>
+        </p:nvSpPr>
+        <p:spPr>
+          <a:xfrm>
+            <a:off x="548640" y="5806440"/>
+            <a:ext cx="11091672" cy="685800"/>
+          </a:xfrm>
+          <a:prstGeom prst="roundRect">
+            <a:avLst>
+              <a:gd name="adj" fmla="val 12000"/>
+            </a:avLst>
+          </a:prstGeom>
+          <a:solidFill>
+            <a:srgbClr val="FFF4E0"/>
+          </a:solidFill>
+          <a:ln/>
+        </p:spPr>
+      </p:sp>
+      <p:sp>
+        <p:nvSpPr>
+          <p:cNvPr id="24" name="Text 22"/>
+          <p:cNvSpPr/>
+          <p:nvPr/>
+        </p:nvSpPr>
+        <p:spPr>
+          <a:xfrm>
+            <a:off x="822960" y="5897880"/>
+            <a:ext cx="10543032" cy="502920"/>
+          </a:xfrm>
+          <a:prstGeom prst="rect">
+            <a:avLst/>
+          </a:prstGeom>
+          <a:noFill/>
+          <a:ln/>
+        </p:spPr>
+        <p:txBody>
+          <a:bodyPr wrap="square" lIns="0" tIns="0" rIns="0" bIns="0" rtlCol="0" anchor="ctr"/>
+          <a:lstStyle/>
+          <a:p>
+            <a:pPr indent="0" marL="0">
+              <a:buNone/>
+            </a:pPr>
+            <a:r>
+              <a:rPr lang="en-US" sz="1250" b="1" dirty="0">
+                <a:solidFill>
+                  <a:srgbClr val="16224D"/>
+                </a:solidFill>
+                <a:latin typeface="Microsoft JhengHei" pitchFamily="34" charset="0"/>
+                <a:ea typeface="Microsoft JhengHei" pitchFamily="34" charset="-122"/>
+                <a:cs typeface="Microsoft JhengHei" pitchFamily="34" charset="-120"/>
+              </a:rPr>
+              <a:t>要開 spec 沒涵蓋的新功能時：</a:t>
+            </a:r>
+            <a:pPr indent="0" marL="0">
+              <a:buNone/>
+            </a:pPr>
+            <a:r>
+              <a:rPr lang="en-US" sz="1250" dirty="0">
+                <a:solidFill>
+                  <a:srgbClr val="1F2937"/>
+                </a:solidFill>
+                <a:latin typeface="Microsoft JhengHei" pitchFamily="34" charset="0"/>
+                <a:ea typeface="Microsoft JhengHei" pitchFamily="34" charset="-122"/>
+                <a:cs typeface="Microsoft JhengHei" pitchFamily="34" charset="-120"/>
+              </a:rPr>
+              <a:t>先對 Kiro 說「幫我為 XX 建立 spec」，人審過 requirements 再讓它動手——規格便宜，返工很貴。</a:t>
+            </a:r>
+            <a:endParaRPr lang="en-US" sz="1250" dirty="0"/>
+          </a:p>
+        </p:txBody>
+      </p:sp>
+    </p:spTree>
+  </p:cSld>
+  <p:clrMapOvr>
+    <a:masterClrMapping/>
+  </p:clrMapOvr>
+</p:sld>
+</file>
+
+<file path=ppt/slides/slide11.xml><?xml version="1.0" encoding="utf-8"?>
+<p:sld xmlns:a="http://schemas.openxmlformats.org/drawingml/2006/main" xmlns:r="http://schemas.openxmlformats.org/officeDocument/2006/relationships" xmlns:p="http://schemas.openxmlformats.org/presentationml/2006/main">
+  <p:cSld name="Slide 11">
+    <p:bg>
+      <p:bgPr>
+        <a:solidFill>
+          <a:srgbClr val="FFFFFF"/>
+        </a:solidFill>
+      </p:bgPr>
+    </p:bg>
+    <p:spTree>
+      <p:nvGrpSpPr>
+        <p:cNvPr id="1" name=""/>
+        <p:cNvGrpSpPr/>
+        <p:nvPr/>
+      </p:nvGrpSpPr>
+      <p:grpSpPr>
+        <a:xfrm>
+          <a:off x="0" y="0"/>
+          <a:ext cx="0" cy="0"/>
+          <a:chOff x="0" y="0"/>
+          <a:chExt cx="0" cy="0"/>
+        </a:xfrm>
+      </p:grpSpPr>
+      <p:sp>
+        <p:nvSpPr>
+          <p:cNvPr id="2" name="Text 0"/>
+          <p:cNvSpPr/>
+          <p:nvPr/>
+        </p:nvSpPr>
+        <p:spPr>
+          <a:xfrm>
+            <a:off x="548640" y="411480"/>
+            <a:ext cx="11091672" cy="640080"/>
+          </a:xfrm>
+          <a:prstGeom prst="rect">
+            <a:avLst/>
+          </a:prstGeom>
+          <a:noFill/>
+          <a:ln/>
+        </p:spPr>
+        <p:txBody>
+          <a:bodyPr wrap="square" lIns="0" tIns="0" rIns="0" bIns="0" rtlCol="0" anchor="ctr"/>
+          <a:lstStyle/>
+          <a:p>
+            <a:pPr indent="0" marL="0">
+              <a:buNone/>
+            </a:pPr>
+            <a:r>
+              <a:rPr lang="en-US" sz="2700" b="1" dirty="0">
+                <a:solidFill>
+                  <a:srgbClr val="16224D"/>
+                </a:solidFill>
+                <a:latin typeface="Microsoft JhengHei" pitchFamily="34" charset="0"/>
+                <a:ea typeface="Microsoft JhengHei" pitchFamily="34" charset="-122"/>
+                <a:cs typeface="Microsoft JhengHei" pitchFamily="34" charset="-120"/>
+              </a:rPr>
+              <a:t>Kiro｜Credit 紀律與雷區</a:t>
+            </a:r>
+            <a:endParaRPr lang="en-US" sz="2700" dirty="0"/>
+          </a:p>
+        </p:txBody>
+      </p:sp>
+      <p:sp>
+        <p:nvSpPr>
+          <p:cNvPr id="3" name="Text 1"/>
+          <p:cNvSpPr/>
+          <p:nvPr/>
+        </p:nvSpPr>
+        <p:spPr>
+          <a:xfrm>
+            <a:off x="548640" y="1024128"/>
+            <a:ext cx="11091672" cy="320040"/>
+          </a:xfrm>
+          <a:prstGeom prst="rect">
+            <a:avLst/>
+          </a:prstGeom>
+          <a:noFill/>
+          <a:ln/>
+        </p:spPr>
+        <p:txBody>
+          <a:bodyPr wrap="square" lIns="0" tIns="0" rIns="0" bIns="0" rtlCol="0" anchor="ctr"/>
+          <a:lstStyle/>
+          <a:p>
+            <a:pPr indent="0" marL="0">
+              <a:buNone/>
+            </a:pPr>
+            <a:r>
+              <a:rPr lang="en-US" sz="1250" dirty="0">
+                <a:solidFill>
+                  <a:srgbClr val="6B7280"/>
+                </a:solidFill>
+                <a:latin typeface="Microsoft JhengHei" pitchFamily="34" charset="0"/>
+                <a:ea typeface="Microsoft JhengHei" pitchFamily="34" charset="-122"/>
+                <a:cs typeface="Microsoft JhengHei" pitchFamily="34" charset="-120"/>
+              </a:rPr>
+              <a:t>2000 點只發一次、用完不補——全隊共同資產</a:t>
+            </a:r>
+            <a:endParaRPr lang="en-US" sz="1250" dirty="0"/>
+          </a:p>
+        </p:txBody>
+      </p:sp>
+      <p:sp>
+        <p:nvSpPr>
+          <p:cNvPr id="4" name="Shape 2"/>
+          <p:cNvSpPr/>
+          <p:nvPr/>
+        </p:nvSpPr>
+        <p:spPr>
+          <a:xfrm>
+            <a:off x="548640" y="1554480"/>
+            <a:ext cx="5394960" cy="4023360"/>
+          </a:xfrm>
+          <a:prstGeom prst="roundRect">
+            <a:avLst>
+              <a:gd name="adj" fmla="val 2045"/>
+            </a:avLst>
+          </a:prstGeom>
+          <a:solidFill>
+            <a:srgbClr val="EAF0FB"/>
+          </a:solidFill>
+          <a:ln/>
+        </p:spPr>
+      </p:sp>
+      <p:sp>
+        <p:nvSpPr>
+          <p:cNvPr id="5" name="Text 3"/>
+          <p:cNvSpPr/>
+          <p:nvPr/>
+        </p:nvSpPr>
+        <p:spPr>
+          <a:xfrm>
+            <a:off x="868680" y="1783080"/>
+            <a:ext cx="4754880" cy="411480"/>
+          </a:xfrm>
+          <a:prstGeom prst="rect">
+            <a:avLst/>
+          </a:prstGeom>
+          <a:noFill/>
+          <a:ln/>
+        </p:spPr>
+        <p:txBody>
+          <a:bodyPr wrap="square" lIns="0" tIns="0" rIns="0" bIns="0" rtlCol="0" anchor="ctr"/>
+          <a:lstStyle/>
+          <a:p>
+            <a:pPr indent="0" marL="0">
+              <a:buNone/>
+            </a:pPr>
+            <a:r>
+              <a:rPr lang="en-US" sz="1600" b="1" dirty="0">
+                <a:solidFill>
+                  <a:srgbClr val="16224D"/>
+                </a:solidFill>
+                <a:latin typeface="Microsoft JhengHei" pitchFamily="34" charset="0"/>
+                <a:ea typeface="Microsoft JhengHei" pitchFamily="34" charset="-122"/>
+                <a:cs typeface="Microsoft JhengHei" pitchFamily="34" charset="-120"/>
+              </a:rPr>
+              <a:t>預算分配（每人）</a:t>
+            </a:r>
+            <a:endParaRPr lang="en-US" sz="1600" dirty="0"/>
+          </a:p>
+        </p:txBody>
+      </p:sp>
+      <p:sp>
+        <p:nvSpPr>
+          <p:cNvPr id="6" name="Shape 4"/>
+          <p:cNvSpPr/>
+          <p:nvPr/>
+        </p:nvSpPr>
+        <p:spPr>
+          <a:xfrm>
+            <a:off x="868680" y="2331720"/>
+            <a:ext cx="4754880" cy="822960"/>
+          </a:xfrm>
+          <a:prstGeom prst="roundRect">
+            <a:avLst>
+              <a:gd name="adj" fmla="val 10000"/>
+            </a:avLst>
+          </a:prstGeom>
+          <a:solidFill>
+            <a:srgbClr val="FFFFFF"/>
+          </a:solidFill>
+          <a:ln/>
+        </p:spPr>
+      </p:sp>
+      <p:sp>
+        <p:nvSpPr>
+          <p:cNvPr id="7" name="Text 5"/>
+          <p:cNvSpPr/>
+          <p:nvPr/>
+        </p:nvSpPr>
+        <p:spPr>
+          <a:xfrm>
+            <a:off x="1097280" y="2404872"/>
+            <a:ext cx="2834640" cy="685800"/>
+          </a:xfrm>
+          <a:prstGeom prst="rect">
+            <a:avLst/>
+          </a:prstGeom>
+          <a:noFill/>
+          <a:ln/>
+        </p:spPr>
+        <p:txBody>
+          <a:bodyPr wrap="square" lIns="0" tIns="0" rIns="0" bIns="0" rtlCol="0" anchor="ctr"/>
+          <a:lstStyle/>
+          <a:p>
+            <a:pPr indent="0" marL="0">
+              <a:buNone/>
+            </a:pPr>
+            <a:r>
+              <a:rPr lang="en-US" sz="1350" dirty="0">
+                <a:solidFill>
+                  <a:srgbClr val="1F2937"/>
+                </a:solidFill>
+                <a:latin typeface="Microsoft JhengHei" pitchFamily="34" charset="0"/>
+                <a:ea typeface="Microsoft JhengHei" pitchFamily="34" charset="-122"/>
+                <a:cs typeface="Microsoft JhengHei" pitchFamily="34" charset="-120"/>
+              </a:rPr>
+              <a:t>練習期（～7/22）</a:t>
+            </a:r>
+            <a:endParaRPr lang="en-US" sz="1350" dirty="0"/>
+          </a:p>
+        </p:txBody>
+      </p:sp>
+      <p:sp>
+        <p:nvSpPr>
+          <p:cNvPr id="8" name="Text 6"/>
+          <p:cNvSpPr/>
+          <p:nvPr/>
+        </p:nvSpPr>
+        <p:spPr>
+          <a:xfrm>
+            <a:off x="3931920" y="2404872"/>
+            <a:ext cx="1554480" cy="685800"/>
+          </a:xfrm>
+          <a:prstGeom prst="rect">
+            <a:avLst/>
+          </a:prstGeom>
+          <a:noFill/>
+          <a:ln/>
+        </p:spPr>
+        <p:txBody>
+          <a:bodyPr wrap="square" lIns="0" tIns="0" rIns="0" bIns="0" rtlCol="0" anchor="ctr"/>
+          <a:lstStyle/>
+          <a:p>
+            <a:pPr indent="0" marL="0">
+              <a:buNone/>
+            </a:pPr>
+            <a:r>
+              <a:rPr lang="en-US" sz="2000" b="1" dirty="0">
+                <a:solidFill>
+                  <a:srgbClr val="E8A13A"/>
+                </a:solidFill>
+                <a:latin typeface="Microsoft JhengHei" pitchFamily="34" charset="0"/>
+                <a:ea typeface="Microsoft JhengHei" pitchFamily="34" charset="-122"/>
+                <a:cs typeface="Microsoft JhengHei" pitchFamily="34" charset="-120"/>
+              </a:rPr>
+              <a:t>≤ 300</a:t>
+            </a:r>
+            <a:endParaRPr lang="en-US" sz="2000" dirty="0"/>
+          </a:p>
+        </p:txBody>
+      </p:sp>
+      <p:sp>
+        <p:nvSpPr>
+          <p:cNvPr id="9" name="Shape 7"/>
+          <p:cNvSpPr/>
+          <p:nvPr/>
+        </p:nvSpPr>
+        <p:spPr>
+          <a:xfrm>
+            <a:off x="868680" y="3291840"/>
+            <a:ext cx="4754880" cy="822960"/>
+          </a:xfrm>
+          <a:prstGeom prst="roundRect">
+            <a:avLst>
+              <a:gd name="adj" fmla="val 10000"/>
+            </a:avLst>
+          </a:prstGeom>
+          <a:solidFill>
+            <a:srgbClr val="FFFFFF"/>
+          </a:solidFill>
+          <a:ln/>
+        </p:spPr>
+      </p:sp>
+      <p:sp>
+        <p:nvSpPr>
+          <p:cNvPr id="10" name="Text 8"/>
+          <p:cNvSpPr/>
+          <p:nvPr/>
+        </p:nvSpPr>
+        <p:spPr>
+          <a:xfrm>
+            <a:off x="1097280" y="3364992"/>
+            <a:ext cx="2834640" cy="685800"/>
+          </a:xfrm>
+          <a:prstGeom prst="rect">
+            <a:avLst/>
+          </a:prstGeom>
+          <a:noFill/>
+          <a:ln/>
+        </p:spPr>
+        <p:txBody>
+          <a:bodyPr wrap="square" lIns="0" tIns="0" rIns="0" bIns="0" rtlCol="0" anchor="ctr"/>
+          <a:lstStyle/>
+          <a:p>
+            <a:pPr indent="0" marL="0">
+              <a:buNone/>
+            </a:pPr>
+            <a:r>
+              <a:rPr lang="en-US" sz="1350" dirty="0">
+                <a:solidFill>
+                  <a:srgbClr val="1F2937"/>
+                </a:solidFill>
+                <a:latin typeface="Microsoft JhengHei" pitchFamily="34" charset="0"/>
+                <a:ea typeface="Microsoft JhengHei" pitchFamily="34" charset="-122"/>
+                <a:cs typeface="Microsoft JhengHei" pitchFamily="34" charset="-120"/>
+              </a:rPr>
+              <a:t>開發期（7/23–31）</a:t>
+            </a:r>
+            <a:endParaRPr lang="en-US" sz="1350" dirty="0"/>
+          </a:p>
+        </p:txBody>
+      </p:sp>
+      <p:sp>
+        <p:nvSpPr>
+          <p:cNvPr id="11" name="Text 9"/>
+          <p:cNvSpPr/>
+          <p:nvPr/>
+        </p:nvSpPr>
+        <p:spPr>
+          <a:xfrm>
+            <a:off x="3931920" y="3364992"/>
+            <a:ext cx="1554480" cy="685800"/>
+          </a:xfrm>
+          <a:prstGeom prst="rect">
+            <a:avLst/>
+          </a:prstGeom>
+          <a:noFill/>
+          <a:ln/>
+        </p:spPr>
+        <p:txBody>
+          <a:bodyPr wrap="square" lIns="0" tIns="0" rIns="0" bIns="0" rtlCol="0" anchor="ctr"/>
+          <a:lstStyle/>
+          <a:p>
+            <a:pPr indent="0" marL="0">
+              <a:buNone/>
+            </a:pPr>
+            <a:r>
+              <a:rPr lang="en-US" sz="2000" b="1" dirty="0">
+                <a:solidFill>
+                  <a:srgbClr val="16224D"/>
+                </a:solidFill>
+                <a:latin typeface="Microsoft JhengHei" pitchFamily="34" charset="0"/>
+                <a:ea typeface="Microsoft JhengHei" pitchFamily="34" charset="-122"/>
+                <a:cs typeface="Microsoft JhengHei" pitchFamily="34" charset="-120"/>
+              </a:rPr>
+              <a:t>~ 1000</a:t>
+            </a:r>
+            <a:endParaRPr lang="en-US" sz="2000" dirty="0"/>
+          </a:p>
+        </p:txBody>
+      </p:sp>
+      <p:sp>
+        <p:nvSpPr>
+          <p:cNvPr id="12" name="Shape 10"/>
+          <p:cNvSpPr/>
+          <p:nvPr/>
+        </p:nvSpPr>
+        <p:spPr>
+          <a:xfrm>
+            <a:off x="868680" y="4251960"/>
+            <a:ext cx="4754880" cy="822960"/>
+          </a:xfrm>
+          <a:prstGeom prst="roundRect">
+            <a:avLst>
+              <a:gd name="adj" fmla="val 10000"/>
+            </a:avLst>
+          </a:prstGeom>
+          <a:solidFill>
+            <a:srgbClr val="FFFFFF"/>
+          </a:solidFill>
+          <a:ln/>
+        </p:spPr>
+      </p:sp>
+      <p:sp>
+        <p:nvSpPr>
+          <p:cNvPr id="13" name="Text 11"/>
+          <p:cNvSpPr/>
+          <p:nvPr/>
+        </p:nvSpPr>
+        <p:spPr>
+          <a:xfrm>
+            <a:off x="1097280" y="4325112"/>
+            <a:ext cx="2834640" cy="685800"/>
+          </a:xfrm>
+          <a:prstGeom prst="rect">
+            <a:avLst/>
+          </a:prstGeom>
+          <a:noFill/>
+          <a:ln/>
+        </p:spPr>
+        <p:txBody>
+          <a:bodyPr wrap="square" lIns="0" tIns="0" rIns="0" bIns="0" rtlCol="0" anchor="ctr"/>
+          <a:lstStyle/>
+          <a:p>
+            <a:pPr indent="0" marL="0">
+              <a:buNone/>
+            </a:pPr>
+            <a:r>
+              <a:rPr lang="en-US" sz="1350" dirty="0">
+                <a:solidFill>
+                  <a:srgbClr val="1F2937"/>
+                </a:solidFill>
+                <a:latin typeface="Microsoft JhengHei" pitchFamily="34" charset="0"/>
+                <a:ea typeface="Microsoft JhengHei" pitchFamily="34" charset="-122"/>
+                <a:cs typeface="Microsoft JhengHei" pitchFamily="34" charset="-120"/>
+              </a:rPr>
+              <a:t>決賽保底（8/1–2）</a:t>
+            </a:r>
+            <a:endParaRPr lang="en-US" sz="1350" dirty="0"/>
+          </a:p>
+        </p:txBody>
+      </p:sp>
+      <p:sp>
+        <p:nvSpPr>
+          <p:cNvPr id="14" name="Text 12"/>
+          <p:cNvSpPr/>
+          <p:nvPr/>
+        </p:nvSpPr>
+        <p:spPr>
+          <a:xfrm>
+            <a:off x="3931920" y="4325112"/>
+            <a:ext cx="1554480" cy="685800"/>
+          </a:xfrm>
+          <a:prstGeom prst="rect">
+            <a:avLst/>
+          </a:prstGeom>
+          <a:noFill/>
+          <a:ln/>
+        </p:spPr>
+        <p:txBody>
+          <a:bodyPr wrap="square" lIns="0" tIns="0" rIns="0" bIns="0" rtlCol="0" anchor="ctr"/>
+          <a:lstStyle/>
+          <a:p>
+            <a:pPr indent="0" marL="0">
+              <a:buNone/>
+            </a:pPr>
+            <a:r>
+              <a:rPr lang="en-US" sz="2000" b="1" dirty="0">
+                <a:solidFill>
+                  <a:srgbClr val="D64550"/>
+                </a:solidFill>
+                <a:latin typeface="Microsoft JhengHei" pitchFamily="34" charset="0"/>
+                <a:ea typeface="Microsoft JhengHei" pitchFamily="34" charset="-122"/>
+                <a:cs typeface="Microsoft JhengHei" pitchFamily="34" charset="-120"/>
+              </a:rPr>
+              <a:t>≥ 700</a:t>
+            </a:r>
+            <a:endParaRPr lang="en-US" sz="2000" dirty="0"/>
+          </a:p>
+        </p:txBody>
+      </p:sp>
+      <p:sp>
+        <p:nvSpPr>
+          <p:cNvPr id="15" name="Shape 13"/>
+          <p:cNvSpPr/>
+          <p:nvPr/>
+        </p:nvSpPr>
+        <p:spPr>
+          <a:xfrm>
+            <a:off x="6263640" y="1554480"/>
+            <a:ext cx="5394960" cy="4023360"/>
+          </a:xfrm>
+          <a:prstGeom prst="roundRect">
+            <a:avLst>
+              <a:gd name="adj" fmla="val 2045"/>
+            </a:avLst>
+          </a:prstGeom>
+          <a:solidFill>
+            <a:srgbClr val="FDF0EF"/>
+          </a:solidFill>
+          <a:ln/>
+        </p:spPr>
+      </p:sp>
+      <p:sp>
+        <p:nvSpPr>
+          <p:cNvPr id="16" name="Text 14"/>
+          <p:cNvSpPr/>
+          <p:nvPr/>
+        </p:nvSpPr>
+        <p:spPr>
+          <a:xfrm>
+            <a:off x="6583680" y="1783080"/>
+            <a:ext cx="4754880" cy="411480"/>
+          </a:xfrm>
+          <a:prstGeom prst="rect">
+            <a:avLst/>
+          </a:prstGeom>
+          <a:noFill/>
+          <a:ln/>
+        </p:spPr>
+        <p:txBody>
+          <a:bodyPr wrap="square" lIns="0" tIns="0" rIns="0" bIns="0" rtlCol="0" anchor="ctr"/>
+          <a:lstStyle/>
+          <a:p>
+            <a:pPr indent="0" marL="0">
+              <a:buNone/>
+            </a:pPr>
+            <a:r>
+              <a:rPr lang="en-US" sz="1600" b="1" dirty="0">
+                <a:solidFill>
+                  <a:srgbClr val="D64550"/>
+                </a:solidFill>
+                <a:latin typeface="Microsoft JhengHei" pitchFamily="34" charset="0"/>
+                <a:ea typeface="Microsoft JhengHei" pitchFamily="34" charset="-122"/>
+                <a:cs typeface="Microsoft JhengHei" pitchFamily="34" charset="-120"/>
+              </a:rPr>
+              <a:t>四個雷區</a:t>
+            </a:r>
+            <a:endParaRPr lang="en-US" sz="1600" dirty="0"/>
+          </a:p>
+        </p:txBody>
+      </p:sp>
+      <p:sp>
+        <p:nvSpPr>
+          <p:cNvPr id="17" name="Text 15"/>
+          <p:cNvSpPr/>
+          <p:nvPr/>
+        </p:nvSpPr>
+        <p:spPr>
+          <a:xfrm>
+            <a:off x="6583680" y="2331720"/>
+            <a:ext cx="4846320" cy="3017520"/>
+          </a:xfrm>
+          <a:prstGeom prst="rect">
+            <a:avLst/>
+          </a:prstGeom>
+          <a:noFill/>
+          <a:ln/>
+        </p:spPr>
+        <p:txBody>
+          <a:bodyPr wrap="square" lIns="0" tIns="0" rIns="0" bIns="0" rtlCol="0" anchor="ctr"/>
+          <a:lstStyle/>
+          <a:p>
+            <a:pPr marL="342900" indent="-342900">
+              <a:spcAft>
+                <a:spcPts val="1000"/>
+              </a:spcAft>
+              <a:buSzPct val="100000"/>
+              <a:buChar char="•"/>
+            </a:pPr>
+            <a:r>
+              <a:rPr lang="en-US" sz="1250" dirty="0">
+                <a:solidFill>
+                  <a:srgbClr val="1F2937"/>
+                </a:solidFill>
+                <a:latin typeface="Microsoft JhengHei" pitchFamily="34" charset="0"/>
+                <a:ea typeface="Microsoft JhengHei" pitchFamily="34" charset="-122"/>
+                <a:cs typeface="Microsoft JhengHei" pitchFamily="34" charset="-120"/>
+              </a:rPr>
+              <a:t>Autopilot 只在跑定義好的 task 時開——探索、跟課、隨便問問一律關，它會自主連跑燒點數</a:t>
+            </a:r>
+            <a:endParaRPr lang="en-US" sz="1250" dirty="0"/>
+          </a:p>
+          <a:p>
+            <a:pPr marL="342900" indent="-342900">
+              <a:spcAft>
+                <a:spcPts val="1000"/>
+              </a:spcAft>
+              <a:buSzPct val="100000"/>
+              <a:buChar char="•"/>
+            </a:pPr>
+            <a:r>
+              <a:rPr lang="en-US" sz="1250" dirty="0">
+                <a:solidFill>
+                  <a:srgbClr val="1F2937"/>
+                </a:solidFill>
+                <a:latin typeface="Microsoft JhengHei" pitchFamily="34" charset="0"/>
+                <a:ea typeface="Microsoft JhengHei" pitchFamily="34" charset="-122"/>
+                <a:cs typeface="Microsoft JhengHei" pitchFamily="34" charset="-120"/>
+              </a:rPr>
+              <a:t>小改動自己動手改，讓 Kiro 做「一個 task 一次到位」的活</a:t>
+            </a:r>
+            <a:endParaRPr lang="en-US" sz="1250" dirty="0"/>
+          </a:p>
+          <a:p>
+            <a:pPr marL="342900" indent="-342900">
+              <a:spcAft>
+                <a:spcPts val="1000"/>
+              </a:spcAft>
+              <a:buSzPct val="100000"/>
+              <a:buChar char="•"/>
+            </a:pPr>
+            <a:r>
+              <a:rPr lang="en-US" sz="1250" dirty="0">
+                <a:solidFill>
+                  <a:srgbClr val="1F2937"/>
+                </a:solidFill>
+                <a:latin typeface="Microsoft JhengHei" pitchFamily="34" charset="0"/>
+                <a:ea typeface="Microsoft JhengHei" pitchFamily="34" charset="-122"/>
+                <a:cs typeface="Microsoft JhengHei" pitchFamily="34" charset="-120"/>
+              </a:rPr>
+              <a:t>同一個問題別在 Kiro 裡反覆重試——換個問法前先想清楚要什麼</a:t>
+            </a:r>
+            <a:endParaRPr lang="en-US" sz="1250" dirty="0"/>
+          </a:p>
+          <a:p>
+            <a:pPr marL="342900" indent="-342900">
+              <a:spcAft>
+                <a:spcPts val="1000"/>
+              </a:spcAft>
+              <a:buSzPct val="100000"/>
+              <a:buChar char="•"/>
+            </a:pPr>
+            <a:r>
+              <a:rPr lang="en-US" sz="1250" dirty="0">
+                <a:solidFill>
+                  <a:srgbClr val="1F2937"/>
+                </a:solidFill>
+                <a:latin typeface="Microsoft JhengHei" pitchFamily="34" charset="0"/>
+                <a:ea typeface="Microsoft JhengHei" pitchFamily="34" charset="-122"/>
+                <a:cs typeface="Microsoft JhengHei" pitchFamily="34" charset="-120"/>
+              </a:rPr>
+              <a:t>頭像選單隨時看剩餘點數；低於個人決賽保底就停手回報</a:t>
+            </a:r>
+            <a:endParaRPr lang="en-US" sz="1250" dirty="0"/>
+          </a:p>
+        </p:txBody>
+      </p:sp>
+      <p:sp>
+        <p:nvSpPr>
+          <p:cNvPr id="18" name="Text 16"/>
+          <p:cNvSpPr/>
+          <p:nvPr/>
+        </p:nvSpPr>
+        <p:spPr>
+          <a:xfrm>
+            <a:off x="548640" y="5852160"/>
+            <a:ext cx="11091672" cy="411480"/>
+          </a:xfrm>
+          <a:prstGeom prst="rect">
+            <a:avLst/>
+          </a:prstGeom>
+          <a:noFill/>
+          <a:ln/>
+        </p:spPr>
+        <p:txBody>
+          <a:bodyPr wrap="square" lIns="0" tIns="0" rIns="0" bIns="0" rtlCol="0" anchor="ctr"/>
+          <a:lstStyle/>
+          <a:p>
+            <a:pPr indent="0" marL="0">
+              <a:buNone/>
+            </a:pPr>
+            <a:r>
+              <a:rPr lang="en-US" sz="1200" dirty="0">
+                <a:solidFill>
+                  <a:srgbClr val="6B7280"/>
+                </a:solidFill>
+                <a:latin typeface="Microsoft JhengHei" pitchFamily="34" charset="0"/>
+                <a:ea typeface="Microsoft JhengHei" pitchFamily="34" charset="-122"/>
+                <a:cs typeface="Microsoft JhengHei" pitchFamily="34" charset="-120"/>
+              </a:rPr>
+              <a:t>加分項證據：過程隨手截 Specs 面板／task 執行／MCP 查行情畫面，丟 Drive「Kiro證據」資料夾。</a:t>
+            </a:r>
+            <a:endParaRPr lang="en-US" sz="1200" dirty="0"/>
+          </a:p>
+        </p:txBody>
+      </p:sp>
+    </p:spTree>
+  </p:cSld>
+  <p:clrMapOvr>
+    <a:masterClrMapping/>
+  </p:clrMapOvr>
+</p:sld>
+</file>
+
+<file path=ppt/slides/slide12.xml><?xml version="1.0" encoding="utf-8"?>
+<p:sld xmlns:a="http://schemas.openxmlformats.org/drawingml/2006/main" xmlns:r="http://schemas.openxmlformats.org/officeDocument/2006/relationships" xmlns:p="http://schemas.openxmlformats.org/presentationml/2006/main">
+  <p:cSld name="Slide 12">
+    <p:bg>
+      <p:bgPr>
+        <a:solidFill>
+          <a:srgbClr val="0D1530"/>
+        </a:solidFill>
+      </p:bgPr>
+    </p:bg>
+    <p:spTree>
+      <p:nvGrpSpPr>
+        <p:cNvPr id="1" name=""/>
+        <p:cNvGrpSpPr/>
+        <p:nvPr/>
+      </p:nvGrpSpPr>
+      <p:grpSpPr>
+        <a:xfrm>
+          <a:off x="0" y="0"/>
+          <a:ext cx="0" cy="0"/>
+          <a:chOff x="0" y="0"/>
+          <a:chExt cx="0" cy="0"/>
+        </a:xfrm>
+      </p:grpSpPr>
+      <p:sp>
+        <p:nvSpPr>
+          <p:cNvPr id="2" name="Text 0"/>
+          <p:cNvSpPr/>
+          <p:nvPr/>
+        </p:nvSpPr>
+        <p:spPr>
+          <a:xfrm>
+            <a:off x="548640" y="502920"/>
+            <a:ext cx="11091672" cy="640080"/>
+          </a:xfrm>
+          <a:prstGeom prst="rect">
+            <a:avLst/>
+          </a:prstGeom>
+          <a:noFill/>
+          <a:ln/>
+        </p:spPr>
+        <p:txBody>
+          <a:bodyPr wrap="square" lIns="0" tIns="0" rIns="0" bIns="0" rtlCol="0" anchor="ctr"/>
+          <a:lstStyle/>
+          <a:p>
+            <a:pPr indent="0" marL="0">
+              <a:buNone/>
+            </a:pPr>
+            <a:r>
+              <a:rPr lang="en-US" sz="2800" b="1" dirty="0">
+                <a:solidFill>
+                  <a:srgbClr val="FFFFFF"/>
+                </a:solidFill>
+                <a:latin typeface="Microsoft JhengHei" pitchFamily="34" charset="0"/>
+                <a:ea typeface="Microsoft JhengHei" pitchFamily="34" charset="-122"/>
+                <a:cs typeface="Microsoft JhengHei" pitchFamily="34" charset="-120"/>
+              </a:rPr>
+              <a:t>時間軸：賽前做完，決賽只上架</a:t>
+            </a:r>
+            <a:endParaRPr lang="en-US" sz="2800" dirty="0"/>
+          </a:p>
+        </p:txBody>
+      </p:sp>
+      <p:sp>
+        <p:nvSpPr>
+          <p:cNvPr id="3" name="Shape 1"/>
+          <p:cNvSpPr/>
+          <p:nvPr/>
+        </p:nvSpPr>
+        <p:spPr>
+          <a:xfrm>
+            <a:off x="548640" y="1463040"/>
+            <a:ext cx="1554480" cy="777240"/>
+          </a:xfrm>
+          <a:prstGeom prst="roundRect">
+            <a:avLst>
+              <a:gd name="adj" fmla="val 9412"/>
+            </a:avLst>
+          </a:prstGeom>
+          <a:solidFill>
+            <a:srgbClr val="E8A13A"/>
+          </a:solidFill>
+          <a:ln/>
+        </p:spPr>
+      </p:sp>
+      <p:sp>
+        <p:nvSpPr>
+          <p:cNvPr id="4" name="Text 2"/>
+          <p:cNvSpPr/>
+          <p:nvPr/>
+        </p:nvSpPr>
+        <p:spPr>
+          <a:xfrm>
+            <a:off x="548640" y="1463040"/>
+            <a:ext cx="1554480" cy="777240"/>
+          </a:xfrm>
+          <a:prstGeom prst="rect">
+            <a:avLst/>
+          </a:prstGeom>
+          <a:noFill/>
+          <a:ln/>
+        </p:spPr>
+        <p:txBody>
+          <a:bodyPr wrap="square" lIns="0" tIns="0" rIns="0" bIns="0" rtlCol="0" anchor="ctr"/>
+          <a:lstStyle/>
+          <a:p>
+            <a:pPr algn="ctr" indent="0" marL="0">
+              <a:buNone/>
+            </a:pPr>
+            <a:r>
+              <a:rPr lang="en-US" sz="1400" b="1" dirty="0">
+                <a:solidFill>
+                  <a:srgbClr val="0D1530"/>
+                </a:solidFill>
+                <a:latin typeface="Microsoft JhengHei" pitchFamily="34" charset="0"/>
+                <a:ea typeface="Microsoft JhengHei" pitchFamily="34" charset="-122"/>
+                <a:cs typeface="Microsoft JhengHei" pitchFamily="34" charset="-120"/>
+              </a:rPr>
+              <a:t>～7/22</a:t>
+            </a:r>
+            <a:endParaRPr lang="en-US" sz="1400" dirty="0"/>
+          </a:p>
+        </p:txBody>
+      </p:sp>
+      <p:sp>
+        <p:nvSpPr>
+          <p:cNvPr id="5" name="Text 3"/>
+          <p:cNvSpPr/>
+          <p:nvPr/>
+        </p:nvSpPr>
+        <p:spPr>
+          <a:xfrm>
+            <a:off x="2331720" y="1463040"/>
+            <a:ext cx="2011680" cy="777240"/>
+          </a:xfrm>
+          <a:prstGeom prst="rect">
+            <a:avLst/>
+          </a:prstGeom>
+          <a:noFill/>
+          <a:ln/>
+        </p:spPr>
+        <p:txBody>
+          <a:bodyPr wrap="square" lIns="0" tIns="0" rIns="0" bIns="0" rtlCol="0" anchor="ctr"/>
+          <a:lstStyle/>
+          <a:p>
+            <a:pPr indent="0" marL="0">
+              <a:buNone/>
+            </a:pPr>
+            <a:r>
+              <a:rPr lang="en-US" sz="1500" b="1" dirty="0">
+                <a:solidFill>
+                  <a:srgbClr val="FFFFFF"/>
+                </a:solidFill>
+                <a:latin typeface="Microsoft JhengHei" pitchFamily="34" charset="0"/>
+                <a:ea typeface="Microsoft JhengHei" pitchFamily="34" charset="-122"/>
+                <a:cs typeface="Microsoft JhengHei" pitchFamily="34" charset="-120"/>
+              </a:rPr>
+              <a:t>定案與就位</a:t>
+            </a:r>
+            <a:endParaRPr lang="en-US" sz="1500" dirty="0"/>
+          </a:p>
+        </p:txBody>
+      </p:sp>
+      <p:sp>
+        <p:nvSpPr>
+          <p:cNvPr id="6" name="Text 4"/>
+          <p:cNvSpPr/>
+          <p:nvPr/>
+        </p:nvSpPr>
+        <p:spPr>
+          <a:xfrm>
+            <a:off x="4434840" y="1463040"/>
+            <a:ext cx="7223760" cy="777240"/>
+          </a:xfrm>
+          <a:prstGeom prst="rect">
+            <a:avLst/>
+          </a:prstGeom>
+          <a:noFill/>
+          <a:ln/>
+        </p:spPr>
+        <p:txBody>
+          <a:bodyPr wrap="square" lIns="0" tIns="0" rIns="0" bIns="0" rtlCol="0" anchor="ctr"/>
+          <a:lstStyle/>
+          <a:p>
+            <a:pPr indent="0" marL="0">
+              <a:buNone/>
+            </a:pPr>
+            <a:r>
+              <a:rPr lang="en-US" sz="1250" dirty="0">
+                <a:solidFill>
+                  <a:srgbClr val="C9D4EE"/>
+                </a:solidFill>
+                <a:latin typeface="Microsoft JhengHei" pitchFamily="34" charset="0"/>
+                <a:ea typeface="Microsoft JhengHei" pitchFamily="34" charset="-122"/>
+                <a:cs typeface="Microsoft JhengHei" pitchFamily="34" charset="-120"/>
+              </a:rPr>
+              <a:t>KYC・環境設定・AWS帳號・架構拍板・#1 #2 開工</a:t>
+            </a:r>
+            <a:endParaRPr lang="en-US" sz="1250" dirty="0"/>
+          </a:p>
+        </p:txBody>
+      </p:sp>
+      <p:sp>
+        <p:nvSpPr>
+          <p:cNvPr id="7" name="Shape 5"/>
+          <p:cNvSpPr/>
+          <p:nvPr/>
+        </p:nvSpPr>
+        <p:spPr>
+          <a:xfrm>
+            <a:off x="548640" y="2395728"/>
+            <a:ext cx="1554480" cy="777240"/>
+          </a:xfrm>
+          <a:prstGeom prst="roundRect">
+            <a:avLst>
+              <a:gd name="adj" fmla="val 9412"/>
+            </a:avLst>
+          </a:prstGeom>
+          <a:solidFill>
+            <a:srgbClr val="E8A13A"/>
+          </a:solidFill>
+          <a:ln/>
+        </p:spPr>
+      </p:sp>
+      <p:sp>
+        <p:nvSpPr>
+          <p:cNvPr id="8" name="Text 6"/>
+          <p:cNvSpPr/>
+          <p:nvPr/>
+        </p:nvSpPr>
+        <p:spPr>
+          <a:xfrm>
+            <a:off x="548640" y="2395728"/>
+            <a:ext cx="1554480" cy="777240"/>
+          </a:xfrm>
+          <a:prstGeom prst="rect">
+            <a:avLst/>
+          </a:prstGeom>
+          <a:noFill/>
+          <a:ln/>
+        </p:spPr>
+        <p:txBody>
+          <a:bodyPr wrap="square" lIns="0" tIns="0" rIns="0" bIns="0" rtlCol="0" anchor="ctr"/>
+          <a:lstStyle/>
+          <a:p>
+            <a:pPr algn="ctr" indent="0" marL="0">
+              <a:buNone/>
+            </a:pPr>
+            <a:r>
+              <a:rPr lang="en-US" sz="1400" b="1" dirty="0">
+                <a:solidFill>
+                  <a:srgbClr val="0D1530"/>
+                </a:solidFill>
+                <a:latin typeface="Microsoft JhengHei" pitchFamily="34" charset="0"/>
+                <a:ea typeface="Microsoft JhengHei" pitchFamily="34" charset="-122"/>
+                <a:cs typeface="Microsoft JhengHei" pitchFamily="34" charset="-120"/>
+              </a:rPr>
+              <a:t>7/23–27</a:t>
+            </a:r>
+            <a:endParaRPr lang="en-US" sz="1400" dirty="0"/>
+          </a:p>
+        </p:txBody>
+      </p:sp>
+      <p:sp>
+        <p:nvSpPr>
+          <p:cNvPr id="9" name="Text 7"/>
+          <p:cNvSpPr/>
+          <p:nvPr/>
+        </p:nvSpPr>
+        <p:spPr>
+          <a:xfrm>
+            <a:off x="2331720" y="2395728"/>
+            <a:ext cx="2011680" cy="777240"/>
+          </a:xfrm>
+          <a:prstGeom prst="rect">
+            <a:avLst/>
+          </a:prstGeom>
+          <a:noFill/>
+          <a:ln/>
+        </p:spPr>
+        <p:txBody>
+          <a:bodyPr wrap="square" lIns="0" tIns="0" rIns="0" bIns="0" rtlCol="0" anchor="ctr"/>
+          <a:lstStyle/>
+          <a:p>
+            <a:pPr indent="0" marL="0">
+              <a:buNone/>
+            </a:pPr>
+            <a:r>
+              <a:rPr lang="en-US" sz="1500" b="1" dirty="0">
+                <a:solidFill>
+                  <a:srgbClr val="FFFFFF"/>
+                </a:solidFill>
+                <a:latin typeface="Microsoft JhengHei" pitchFamily="34" charset="0"/>
+                <a:ea typeface="Microsoft JhengHei" pitchFamily="34" charset="-122"/>
+                <a:cs typeface="Microsoft JhengHei" pitchFamily="34" charset="-120"/>
+              </a:rPr>
+              <a:t>核心構建週</a:t>
+            </a:r>
+            <a:endParaRPr lang="en-US" sz="1500" dirty="0"/>
+          </a:p>
+        </p:txBody>
+      </p:sp>
+      <p:sp>
+        <p:nvSpPr>
+          <p:cNvPr id="10" name="Text 8"/>
+          <p:cNvSpPr/>
+          <p:nvPr/>
+        </p:nvSpPr>
+        <p:spPr>
+          <a:xfrm>
+            <a:off x="4434840" y="2395728"/>
+            <a:ext cx="7223760" cy="777240"/>
+          </a:xfrm>
+          <a:prstGeom prst="rect">
+            <a:avLst/>
+          </a:prstGeom>
+          <a:noFill/>
+          <a:ln/>
+        </p:spPr>
+        <p:txBody>
+          <a:bodyPr wrap="square" lIns="0" tIns="0" rIns="0" bIns="0" rtlCol="0" anchor="ctr"/>
+          <a:lstStyle/>
+          <a:p>
+            <a:pPr indent="0" marL="0">
+              <a:buNone/>
+            </a:pPr>
+            <a:r>
+              <a:rPr lang="en-US" sz="1250" dirty="0">
+                <a:solidFill>
+                  <a:srgbClr val="C9D4EE"/>
+                </a:solidFill>
+                <a:latin typeface="Microsoft JhengHei" pitchFamily="34" charset="0"/>
+                <a:ea typeface="Microsoft JhengHei" pitchFamily="34" charset="-122"/>
+                <a:cs typeface="Microsoft JhengHei" pitchFamily="34" charset="-120"/>
+              </a:rPr>
+              <a:t>Golden Path 全鏈路＋RAG＋手機版；7/27 晚自家 AWS 跑通全程</a:t>
+            </a:r>
+            <a:endParaRPr lang="en-US" sz="1250" dirty="0"/>
+          </a:p>
+        </p:txBody>
+      </p:sp>
+      <p:sp>
+        <p:nvSpPr>
+          <p:cNvPr id="11" name="Shape 9"/>
+          <p:cNvSpPr/>
+          <p:nvPr/>
+        </p:nvSpPr>
+        <p:spPr>
+          <a:xfrm>
+            <a:off x="548640" y="3328416"/>
+            <a:ext cx="1554480" cy="777240"/>
+          </a:xfrm>
+          <a:prstGeom prst="roundRect">
+            <a:avLst>
+              <a:gd name="adj" fmla="val 9412"/>
+            </a:avLst>
+          </a:prstGeom>
+          <a:solidFill>
+            <a:srgbClr val="1F9D66"/>
+          </a:solidFill>
+          <a:ln/>
+        </p:spPr>
+      </p:sp>
+      <p:sp>
+        <p:nvSpPr>
+          <p:cNvPr id="12" name="Text 10"/>
+          <p:cNvSpPr/>
+          <p:nvPr/>
+        </p:nvSpPr>
+        <p:spPr>
+          <a:xfrm>
+            <a:off x="548640" y="3328416"/>
+            <a:ext cx="1554480" cy="777240"/>
+          </a:xfrm>
+          <a:prstGeom prst="rect">
+            <a:avLst/>
+          </a:prstGeom>
+          <a:noFill/>
+          <a:ln/>
+        </p:spPr>
+        <p:txBody>
+          <a:bodyPr wrap="square" lIns="0" tIns="0" rIns="0" bIns="0" rtlCol="0" anchor="ctr"/>
+          <a:lstStyle/>
+          <a:p>
+            <a:pPr algn="ctr" indent="0" marL="0">
+              <a:buNone/>
+            </a:pPr>
+            <a:r>
+              <a:rPr lang="en-US" sz="1400" b="1" dirty="0">
+                <a:solidFill>
+                  <a:srgbClr val="FFFFFF"/>
+                </a:solidFill>
+                <a:latin typeface="Microsoft JhengHei" pitchFamily="34" charset="0"/>
+                <a:ea typeface="Microsoft JhengHei" pitchFamily="34" charset="-122"/>
+                <a:cs typeface="Microsoft JhengHei" pitchFamily="34" charset="-120"/>
+              </a:rPr>
+              <a:t>7/28–30</a:t>
+            </a:r>
+            <a:endParaRPr lang="en-US" sz="1400" dirty="0"/>
+          </a:p>
+        </p:txBody>
+      </p:sp>
+      <p:sp>
+        <p:nvSpPr>
+          <p:cNvPr id="13" name="Text 11"/>
+          <p:cNvSpPr/>
+          <p:nvPr/>
+        </p:nvSpPr>
+        <p:spPr>
+          <a:xfrm>
+            <a:off x="2331720" y="3328416"/>
+            <a:ext cx="2011680" cy="777240"/>
+          </a:xfrm>
+          <a:prstGeom prst="rect">
+            <a:avLst/>
+          </a:prstGeom>
+          <a:noFill/>
+          <a:ln/>
+        </p:spPr>
+        <p:txBody>
+          <a:bodyPr wrap="square" lIns="0" tIns="0" rIns="0" bIns="0" rtlCol="0" anchor="ctr"/>
+          <a:lstStyle/>
+          <a:p>
+            <a:pPr indent="0" marL="0">
+              <a:buNone/>
+            </a:pPr>
+            <a:r>
+              <a:rPr lang="en-US" sz="1500" b="1" dirty="0">
+                <a:solidFill>
+                  <a:srgbClr val="FFFFFF"/>
+                </a:solidFill>
+                <a:latin typeface="Microsoft JhengHei" pitchFamily="34" charset="0"/>
+                <a:ea typeface="Microsoft JhengHei" pitchFamily="34" charset="-122"/>
+                <a:cs typeface="Microsoft JhengHei" pitchFamily="34" charset="-120"/>
+              </a:rPr>
+              <a:t>整合排練週</a:t>
+            </a:r>
+            <a:endParaRPr lang="en-US" sz="1500" dirty="0"/>
+          </a:p>
+        </p:txBody>
+      </p:sp>
+      <p:sp>
+        <p:nvSpPr>
+          <p:cNvPr id="14" name="Text 12"/>
+          <p:cNvSpPr/>
+          <p:nvPr/>
+        </p:nvSpPr>
+        <p:spPr>
+          <a:xfrm>
+            <a:off x="4434840" y="3328416"/>
+            <a:ext cx="7223760" cy="777240"/>
+          </a:xfrm>
+          <a:prstGeom prst="rect">
+            <a:avLst/>
+          </a:prstGeom>
+          <a:noFill/>
+          <a:ln/>
+        </p:spPr>
+        <p:txBody>
+          <a:bodyPr wrap="square" lIns="0" tIns="0" rIns="0" bIns="0" rtlCol="0" anchor="ctr"/>
+          <a:lstStyle/>
+          <a:p>
+            <a:pPr indent="0" marL="0">
+              <a:buNone/>
+            </a:pPr>
+            <a:r>
+              <a:rPr lang="en-US" sz="1250" dirty="0">
+                <a:solidFill>
+                  <a:srgbClr val="C9D4EE"/>
+                </a:solidFill>
+                <a:latin typeface="Microsoft JhengHei" pitchFamily="34" charset="0"/>
+                <a:ea typeface="Microsoft JhengHei" pitchFamily="34" charset="-122"/>
+                <a:cs typeface="Microsoft JhengHei" pitchFamily="34" charset="-120"/>
+              </a:rPr>
+              <a:t>E2E・離線備援・預錄影片 v1・簡報定稿・pitch 兩輪</a:t>
+            </a:r>
+            <a:endParaRPr lang="en-US" sz="1250" dirty="0"/>
+          </a:p>
+        </p:txBody>
+      </p:sp>
+      <p:sp>
+        <p:nvSpPr>
+          <p:cNvPr id="15" name="Shape 13"/>
+          <p:cNvSpPr/>
+          <p:nvPr/>
+        </p:nvSpPr>
+        <p:spPr>
+          <a:xfrm>
+            <a:off x="548640" y="4261104"/>
+            <a:ext cx="1554480" cy="777240"/>
+          </a:xfrm>
+          <a:prstGeom prst="roundRect">
+            <a:avLst>
+              <a:gd name="adj" fmla="val 9412"/>
+            </a:avLst>
+          </a:prstGeom>
+          <a:solidFill>
+            <a:srgbClr val="2B6CB0"/>
+          </a:solidFill>
+          <a:ln/>
+        </p:spPr>
+      </p:sp>
+      <p:sp>
+        <p:nvSpPr>
+          <p:cNvPr id="16" name="Text 14"/>
+          <p:cNvSpPr/>
+          <p:nvPr/>
+        </p:nvSpPr>
+        <p:spPr>
+          <a:xfrm>
+            <a:off x="548640" y="4261104"/>
+            <a:ext cx="1554480" cy="777240"/>
+          </a:xfrm>
+          <a:prstGeom prst="rect">
+            <a:avLst/>
+          </a:prstGeom>
+          <a:noFill/>
+          <a:ln/>
+        </p:spPr>
+        <p:txBody>
+          <a:bodyPr wrap="square" lIns="0" tIns="0" rIns="0" bIns="0" rtlCol="0" anchor="ctr"/>
+          <a:lstStyle/>
+          <a:p>
+            <a:pPr algn="ctr" indent="0" marL="0">
+              <a:buNone/>
+            </a:pPr>
+            <a:r>
+              <a:rPr lang="en-US" sz="1400" b="1" dirty="0">
+                <a:solidFill>
+                  <a:srgbClr val="FFFFFF"/>
+                </a:solidFill>
+                <a:latin typeface="Microsoft JhengHei" pitchFamily="34" charset="0"/>
+                <a:ea typeface="Microsoft JhengHei" pitchFamily="34" charset="-122"/>
+                <a:cs typeface="Microsoft JhengHei" pitchFamily="34" charset="-120"/>
+              </a:rPr>
+              <a:t>7/31</a:t>
+            </a:r>
+            <a:endParaRPr lang="en-US" sz="1400" dirty="0"/>
+          </a:p>
+        </p:txBody>
+      </p:sp>
+      <p:sp>
+        <p:nvSpPr>
+          <p:cNvPr id="17" name="Text 15"/>
+          <p:cNvSpPr/>
+          <p:nvPr/>
+        </p:nvSpPr>
+        <p:spPr>
+          <a:xfrm>
+            <a:off x="2331720" y="4261104"/>
+            <a:ext cx="2011680" cy="777240"/>
+          </a:xfrm>
+          <a:prstGeom prst="rect">
+            <a:avLst/>
+          </a:prstGeom>
+          <a:noFill/>
+          <a:ln/>
+        </p:spPr>
+        <p:txBody>
+          <a:bodyPr wrap="square" lIns="0" tIns="0" rIns="0" bIns="0" rtlCol="0" anchor="ctr"/>
+          <a:lstStyle/>
+          <a:p>
+            <a:pPr indent="0" marL="0">
+              <a:buNone/>
+            </a:pPr>
+            <a:r>
+              <a:rPr lang="en-US" sz="1500" b="1" dirty="0">
+                <a:solidFill>
+                  <a:srgbClr val="FFFFFF"/>
+                </a:solidFill>
+                <a:latin typeface="Microsoft JhengHei" pitchFamily="34" charset="0"/>
+                <a:ea typeface="Microsoft JhengHei" pitchFamily="34" charset="-122"/>
+                <a:cs typeface="Microsoft JhengHei" pitchFamily="34" charset="-120"/>
+              </a:rPr>
+              <a:t>凍結日</a:t>
+            </a:r>
+            <a:endParaRPr lang="en-US" sz="1500" dirty="0"/>
+          </a:p>
+        </p:txBody>
+      </p:sp>
+      <p:sp>
+        <p:nvSpPr>
+          <p:cNvPr id="18" name="Text 16"/>
+          <p:cNvSpPr/>
+          <p:nvPr/>
+        </p:nvSpPr>
+        <p:spPr>
+          <a:xfrm>
+            <a:off x="4434840" y="4261104"/>
+            <a:ext cx="7223760" cy="777240"/>
+          </a:xfrm>
+          <a:prstGeom prst="rect">
+            <a:avLst/>
+          </a:prstGeom>
+          <a:noFill/>
+          <a:ln/>
+        </p:spPr>
+        <p:txBody>
+          <a:bodyPr wrap="square" lIns="0" tIns="0" rIns="0" bIns="0" rtlCol="0" anchor="ctr"/>
+          <a:lstStyle/>
+          <a:p>
+            <a:pPr indent="0" marL="0">
+              <a:buNone/>
+            </a:pPr>
+            <a:r>
+              <a:rPr lang="en-US" sz="1250" dirty="0">
+                <a:solidFill>
+                  <a:srgbClr val="C9D4EE"/>
+                </a:solidFill>
+                <a:latin typeface="Microsoft JhengHei" pitchFamily="34" charset="0"/>
+                <a:ea typeface="Microsoft JhengHei" pitchFamily="34" charset="-122"/>
+                <a:cs typeface="Microsoft JhengHei" pitchFamily="34" charset="-120"/>
+              </a:rPr>
+              <a:t>code freeze・DEPLOY.md 定稿・部署演練・早睡</a:t>
+            </a:r>
+            <a:endParaRPr lang="en-US" sz="1250" dirty="0"/>
+          </a:p>
+        </p:txBody>
+      </p:sp>
+      <p:sp>
+        <p:nvSpPr>
+          <p:cNvPr id="19" name="Shape 17"/>
+          <p:cNvSpPr/>
+          <p:nvPr/>
+        </p:nvSpPr>
+        <p:spPr>
+          <a:xfrm>
+            <a:off x="548640" y="5193792"/>
+            <a:ext cx="1554480" cy="777240"/>
+          </a:xfrm>
+          <a:prstGeom prst="roundRect">
+            <a:avLst>
+              <a:gd name="adj" fmla="val 9412"/>
+            </a:avLst>
+          </a:prstGeom>
+          <a:solidFill>
+            <a:srgbClr val="D64550"/>
+          </a:solidFill>
+          <a:ln/>
+        </p:spPr>
+      </p:sp>
+      <p:sp>
+        <p:nvSpPr>
+          <p:cNvPr id="20" name="Text 18"/>
+          <p:cNvSpPr/>
+          <p:nvPr/>
+        </p:nvSpPr>
+        <p:spPr>
+          <a:xfrm>
+            <a:off x="548640" y="5193792"/>
+            <a:ext cx="1554480" cy="777240"/>
+          </a:xfrm>
+          <a:prstGeom prst="rect">
+            <a:avLst/>
+          </a:prstGeom>
+          <a:noFill/>
+          <a:ln/>
+        </p:spPr>
+        <p:txBody>
+          <a:bodyPr wrap="square" lIns="0" tIns="0" rIns="0" bIns="0" rtlCol="0" anchor="ctr"/>
+          <a:lstStyle/>
+          <a:p>
+            <a:pPr algn="ctr" indent="0" marL="0">
+              <a:buNone/>
+            </a:pPr>
+            <a:r>
+              <a:rPr lang="en-US" sz="1400" b="1" dirty="0">
+                <a:solidFill>
+                  <a:srgbClr val="FFFFFF"/>
+                </a:solidFill>
+                <a:latin typeface="Microsoft JhengHei" pitchFamily="34" charset="0"/>
+                <a:ea typeface="Microsoft JhengHei" pitchFamily="34" charset="-122"/>
+                <a:cs typeface="Microsoft JhengHei" pitchFamily="34" charset="-120"/>
+              </a:rPr>
+              <a:t>8/1–8/2</a:t>
+            </a:r>
+            <a:endParaRPr lang="en-US" sz="1400" dirty="0"/>
+          </a:p>
+        </p:txBody>
+      </p:sp>
+      <p:sp>
+        <p:nvSpPr>
+          <p:cNvPr id="21" name="Text 19"/>
+          <p:cNvSpPr/>
+          <p:nvPr/>
+        </p:nvSpPr>
+        <p:spPr>
+          <a:xfrm>
+            <a:off x="2331720" y="5193792"/>
+            <a:ext cx="2011680" cy="777240"/>
+          </a:xfrm>
+          <a:prstGeom prst="rect">
+            <a:avLst/>
+          </a:prstGeom>
+          <a:noFill/>
+          <a:ln/>
+        </p:spPr>
+        <p:txBody>
+          <a:bodyPr wrap="square" lIns="0" tIns="0" rIns="0" bIns="0" rtlCol="0" anchor="ctr"/>
+          <a:lstStyle/>
+          <a:p>
+            <a:pPr indent="0" marL="0">
+              <a:buNone/>
+            </a:pPr>
+            <a:r>
+              <a:rPr lang="en-US" sz="1500" b="1" dirty="0">
+                <a:solidFill>
+                  <a:srgbClr val="FFFFFF"/>
+                </a:solidFill>
+                <a:latin typeface="Microsoft JhengHei" pitchFamily="34" charset="0"/>
+                <a:ea typeface="Microsoft JhengHei" pitchFamily="34" charset="-122"/>
+                <a:cs typeface="Microsoft JhengHei" pitchFamily="34" charset="-120"/>
+              </a:rPr>
+              <a:t>決賽 30hr</a:t>
+            </a:r>
+            <a:endParaRPr lang="en-US" sz="1500" dirty="0"/>
+          </a:p>
+        </p:txBody>
+      </p:sp>
+      <p:sp>
+        <p:nvSpPr>
+          <p:cNvPr id="22" name="Text 20"/>
+          <p:cNvSpPr/>
+          <p:nvPr/>
+        </p:nvSpPr>
+        <p:spPr>
+          <a:xfrm>
+            <a:off x="4434840" y="5193792"/>
+            <a:ext cx="7223760" cy="777240"/>
+          </a:xfrm>
+          <a:prstGeom prst="rect">
+            <a:avLst/>
+          </a:prstGeom>
+          <a:noFill/>
+          <a:ln/>
+        </p:spPr>
+        <p:txBody>
+          <a:bodyPr wrap="square" lIns="0" tIns="0" rIns="0" bIns="0" rtlCol="0" anchor="ctr"/>
+          <a:lstStyle/>
+          <a:p>
+            <a:pPr indent="0" marL="0">
+              <a:buNone/>
+            </a:pPr>
+            <a:r>
+              <a:rPr lang="en-US" sz="1250" dirty="0">
+                <a:solidFill>
+                  <a:srgbClr val="C9D4EE"/>
+                </a:solidFill>
+                <a:latin typeface="Microsoft JhengHei" pitchFamily="34" charset="0"/>
+                <a:ea typeface="Microsoft JhengHei" pitchFamily="34" charset="-122"/>
+                <a:cs typeface="Microsoft JhengHei" pitchFamily="34" charset="-120"/>
+              </a:rPr>
+              <a:t>官方環境重部署(1hr)・現場調整・最終錄影・上台</a:t>
+            </a:r>
+            <a:endParaRPr lang="en-US" sz="1250" dirty="0"/>
+          </a:p>
+        </p:txBody>
+      </p:sp>
+      <p:sp>
+        <p:nvSpPr>
+          <p:cNvPr id="23" name="Text 21"/>
+          <p:cNvSpPr/>
+          <p:nvPr/>
+        </p:nvSpPr>
+        <p:spPr>
+          <a:xfrm>
+            <a:off x="548640" y="6263640"/>
+            <a:ext cx="11091672" cy="365760"/>
+          </a:xfrm>
+          <a:prstGeom prst="rect">
+            <a:avLst/>
+          </a:prstGeom>
+          <a:noFill/>
+          <a:ln/>
+        </p:spPr>
+        <p:txBody>
+          <a:bodyPr wrap="square" lIns="0" tIns="0" rIns="0" bIns="0" rtlCol="0" anchor="ctr"/>
+          <a:lstStyle/>
+          <a:p>
+            <a:pPr indent="0" marL="0">
+              <a:buNone/>
+            </a:pPr>
+            <a:r>
+              <a:rPr lang="en-US" sz="1200" dirty="0">
+                <a:solidFill>
+                  <a:srgbClr val="8FA0C9"/>
+                </a:solidFill>
+                <a:latin typeface="Microsoft JhengHei" pitchFamily="34" charset="0"/>
+                <a:ea typeface="Microsoft JhengHei" pitchFamily="34" charset="-122"/>
+                <a:cs typeface="Microsoft JhengHei" pitchFamily="34" charset="-120"/>
+              </a:rPr>
+              <a:t>Kiro credit 紀律：練習 ≤300／開發 ~1000／決賽保底 700（只發一次不補）</a:t>
+            </a:r>
+            <a:endParaRPr lang="en-US" sz="1200" dirty="0"/>
           </a:p>
         </p:txBody>
       </p:sp>
@@ -15244,7 +17913,7 @@
     <p:bg>
       <p:bgPr>
         <a:solidFill>
-          <a:srgbClr val="0D1530"/>
+          <a:srgbClr val="FFFFFF"/>
         </a:solidFill>
       </p:bgPr>
     </p:bg>
@@ -15270,7 +17939,7 @@
         </p:nvSpPr>
         <p:spPr>
           <a:xfrm>
-            <a:off x="548640" y="502920"/>
+            <a:off x="548640" y="411480"/>
             <a:ext cx="11091672" cy="640080"/>
           </a:xfrm>
           <a:prstGeom prst="rect">
@@ -15287,52 +17956,89 @@
               <a:buNone/>
             </a:pPr>
             <a:r>
-              <a:rPr lang="en-US" sz="2800" b="1" dirty="0">
+              <a:rPr lang="en-US" sz="2700" b="1" dirty="0">
                 <a:solidFill>
-                  <a:srgbClr val="FFFFFF"/>
+                  <a:srgbClr val="16224D"/>
                 </a:solidFill>
                 <a:latin typeface="Microsoft JhengHei" pitchFamily="34" charset="0"/>
                 <a:ea typeface="Microsoft JhengHei" pitchFamily="34" charset="-122"/>
                 <a:cs typeface="Microsoft JhengHei" pitchFamily="34" charset="-120"/>
               </a:rPr>
-              <a:t>時間軸：賽前做完，決賽只上架</a:t>
+              <a:t>Kiro 部署｜每人一次設定（約 15 分鐘）</a:t>
             </a:r>
-            <a:endParaRPr lang="en-US" sz="2800" dirty="0"/>
+            <a:endParaRPr lang="en-US" sz="2700" dirty="0"/>
           </a:p>
         </p:txBody>
       </p:sp>
       <p:sp>
         <p:nvSpPr>
-          <p:cNvPr id="3" name="Shape 1"/>
+          <p:cNvPr id="3" name="Text 1"/>
           <p:cNvSpPr/>
           <p:nvPr/>
         </p:nvSpPr>
         <p:spPr>
           <a:xfrm>
-            <a:off x="548640" y="1463040"/>
-            <a:ext cx="1554480" cy="777240"/>
+            <a:off x="548640" y="1024128"/>
+            <a:ext cx="11091672" cy="320040"/>
           </a:xfrm>
-          <a:prstGeom prst="roundRect">
-            <a:avLst>
-              <a:gd name="adj" fmla="val 9412"/>
-            </a:avLst>
+          <a:prstGeom prst="rect">
+            <a:avLst/>
+          </a:prstGeom>
+          <a:noFill/>
+          <a:ln/>
+        </p:spPr>
+        <p:txBody>
+          <a:bodyPr wrap="square" lIns="0" tIns="0" rIns="0" bIns="0" rtlCol="0" anchor="ctr"/>
+          <a:lstStyle/>
+          <a:p>
+            <a:pPr indent="0" marL="0">
+              <a:buNone/>
+            </a:pPr>
+            <a:r>
+              <a:rPr lang="en-US" sz="1250" dirty="0">
+                <a:solidFill>
+                  <a:srgbClr val="6B7280"/>
+                </a:solidFill>
+                <a:latin typeface="Microsoft JhengHei" pitchFamily="34" charset="0"/>
+                <a:ea typeface="Microsoft JhengHei" pitchFamily="34" charset="-122"/>
+                <a:cs typeface="Microsoft JhengHei" pitchFamily="34" charset="-120"/>
+              </a:rPr>
+              <a:t>認領工作包後，先把這頁做完才開工</a:t>
+            </a:r>
+            <a:endParaRPr lang="en-US" sz="1250" dirty="0"/>
+          </a:p>
+        </p:txBody>
+      </p:sp>
+      <p:sp>
+        <p:nvSpPr>
+          <p:cNvPr id="4" name="Shape 2"/>
+          <p:cNvSpPr/>
+          <p:nvPr/>
+        </p:nvSpPr>
+        <p:spPr>
+          <a:xfrm>
+            <a:off x="548640" y="1627632"/>
+            <a:ext cx="502920" cy="502920"/>
+          </a:xfrm>
+          <a:prstGeom prst="ellipse">
+            <a:avLst/>
           </a:prstGeom>
           <a:solidFill>
-            <a:srgbClr val="E8A13A"/>
+            <a:srgbClr val="16224D"/>
           </a:solidFill>
           <a:ln/>
         </p:spPr>
       </p:sp>
       <p:sp>
         <p:nvSpPr>
-          <p:cNvPr id="4" name="Text 2"/>
+          <p:cNvPr id="5" name="Text 3"/>
           <p:cNvSpPr/>
           <p:nvPr/>
         </p:nvSpPr>
         <p:spPr>
           <a:xfrm>
-            <a:off x="548640" y="1463040"/>
-            <a:ext cx="1554480" cy="777240"/>
+            <a:off x="548640" y="1627632"/>
+            <a:ext cx="502920" cy="502920"/>
           </a:xfrm>
           <a:prstGeom prst="rect">
             <a:avLst/>
@@ -15348,30 +18054,30 @@
               <a:buNone/>
             </a:pPr>
             <a:r>
-              <a:rPr lang="en-US" sz="1400" b="1" dirty="0">
+              <a:rPr lang="en-US" sz="1600" b="1" dirty="0">
                 <a:solidFill>
-                  <a:srgbClr val="0D1530"/>
+                  <a:srgbClr val="FFFFFF"/>
                 </a:solidFill>
                 <a:latin typeface="Microsoft JhengHei" pitchFamily="34" charset="0"/>
                 <a:ea typeface="Microsoft JhengHei" pitchFamily="34" charset="-122"/>
                 <a:cs typeface="Microsoft JhengHei" pitchFamily="34" charset="-120"/>
               </a:rPr>
-              <a:t>～7/22</a:t>
+              <a:t>1</a:t>
             </a:r>
-            <a:endParaRPr lang="en-US" sz="1400" dirty="0"/>
+            <a:endParaRPr lang="en-US" sz="1600" dirty="0"/>
           </a:p>
         </p:txBody>
       </p:sp>
       <p:sp>
         <p:nvSpPr>
-          <p:cNvPr id="5" name="Text 3"/>
+          <p:cNvPr id="6" name="Text 4"/>
           <p:cNvSpPr/>
           <p:nvPr/>
         </p:nvSpPr>
         <p:spPr>
           <a:xfrm>
-            <a:off x="2331720" y="1463040"/>
-            <a:ext cx="2011680" cy="777240"/>
+            <a:off x="1280160" y="1554480"/>
+            <a:ext cx="1737360" cy="685800"/>
           </a:xfrm>
           <a:prstGeom prst="rect">
             <a:avLst/>
@@ -15389,13 +18095,13 @@
             <a:r>
               <a:rPr lang="en-US" sz="1500" b="1" dirty="0">
                 <a:solidFill>
-                  <a:srgbClr val="FFFFFF"/>
+                  <a:srgbClr val="16224D"/>
                 </a:solidFill>
                 <a:latin typeface="Microsoft JhengHei" pitchFamily="34" charset="0"/>
                 <a:ea typeface="Microsoft JhengHei" pitchFamily="34" charset="-122"/>
                 <a:cs typeface="Microsoft JhengHei" pitchFamily="34" charset="-120"/>
               </a:rPr>
-              <a:t>定案與就位</a:t>
+              <a:t>下載安裝</a:t>
             </a:r>
             <a:endParaRPr lang="en-US" sz="1500" dirty="0"/>
           </a:p>
@@ -15403,14 +18109,711 @@
       </p:sp>
       <p:sp>
         <p:nvSpPr>
-          <p:cNvPr id="6" name="Text 4"/>
+          <p:cNvPr id="7" name="Text 5"/>
           <p:cNvSpPr/>
           <p:nvPr/>
         </p:nvSpPr>
         <p:spPr>
           <a:xfrm>
-            <a:off x="4434840" y="1463040"/>
-            <a:ext cx="7223760" cy="777240"/>
+            <a:off x="3108960" y="1554480"/>
+            <a:ext cx="8595360" cy="685800"/>
+          </a:xfrm>
+          <a:prstGeom prst="rect">
+            <a:avLst/>
+          </a:prstGeom>
+          <a:noFill/>
+          <a:ln/>
+        </p:spPr>
+        <p:txBody>
+          <a:bodyPr wrap="square" lIns="0" tIns="0" rIns="0" bIns="0" rtlCol="0" anchor="ctr"/>
+          <a:lstStyle/>
+          <a:p>
+            <a:pPr indent="0" marL="0">
+              <a:buNone/>
+            </a:pPr>
+            <a:r>
+              <a:rPr lang="en-US" sz="1300" dirty="0">
+                <a:solidFill>
+                  <a:srgbClr val="1F2937"/>
+                </a:solidFill>
+                <a:latin typeface="Microsoft JhengHei" pitchFamily="34" charset="0"/>
+                <a:ea typeface="Microsoft JhengHei" pitchFamily="34" charset="-122"/>
+                <a:cs typeface="Microsoft JhengHei" pitchFamily="34" charset="-120"/>
+              </a:rPr>
+              <a:t>kiro.dev 下載（Mac/Windows）。介面就是 VS Code，不用重學</a:t>
+            </a:r>
+            <a:endParaRPr lang="en-US" sz="1300" dirty="0"/>
+          </a:p>
+        </p:txBody>
+      </p:sp>
+      <p:sp>
+        <p:nvSpPr>
+          <p:cNvPr id="8" name="Shape 6"/>
+          <p:cNvSpPr/>
+          <p:nvPr/>
+        </p:nvSpPr>
+        <p:spPr>
+          <a:xfrm>
+            <a:off x="548640" y="2496312"/>
+            <a:ext cx="502920" cy="502920"/>
+          </a:xfrm>
+          <a:prstGeom prst="ellipse">
+            <a:avLst/>
+          </a:prstGeom>
+          <a:solidFill>
+            <a:srgbClr val="16224D"/>
+          </a:solidFill>
+          <a:ln/>
+        </p:spPr>
+      </p:sp>
+      <p:sp>
+        <p:nvSpPr>
+          <p:cNvPr id="9" name="Text 7"/>
+          <p:cNvSpPr/>
+          <p:nvPr/>
+        </p:nvSpPr>
+        <p:spPr>
+          <a:xfrm>
+            <a:off x="548640" y="2496312"/>
+            <a:ext cx="502920" cy="502920"/>
+          </a:xfrm>
+          <a:prstGeom prst="rect">
+            <a:avLst/>
+          </a:prstGeom>
+          <a:noFill/>
+          <a:ln/>
+        </p:spPr>
+        <p:txBody>
+          <a:bodyPr wrap="square" lIns="0" tIns="0" rIns="0" bIns="0" rtlCol="0" anchor="ctr"/>
+          <a:lstStyle/>
+          <a:p>
+            <a:pPr algn="ctr" indent="0" marL="0">
+              <a:buNone/>
+            </a:pPr>
+            <a:r>
+              <a:rPr lang="en-US" sz="1600" b="1" dirty="0">
+                <a:solidFill>
+                  <a:srgbClr val="FFFFFF"/>
+                </a:solidFill>
+                <a:latin typeface="Microsoft JhengHei" pitchFamily="34" charset="0"/>
+                <a:ea typeface="Microsoft JhengHei" pitchFamily="34" charset="-122"/>
+                <a:cs typeface="Microsoft JhengHei" pitchFamily="34" charset="-120"/>
+              </a:rPr>
+              <a:t>2</a:t>
+            </a:r>
+            <a:endParaRPr lang="en-US" sz="1600" dirty="0"/>
+          </a:p>
+        </p:txBody>
+      </p:sp>
+      <p:sp>
+        <p:nvSpPr>
+          <p:cNvPr id="10" name="Text 8"/>
+          <p:cNvSpPr/>
+          <p:nvPr/>
+        </p:nvSpPr>
+        <p:spPr>
+          <a:xfrm>
+            <a:off x="1280160" y="2423160"/>
+            <a:ext cx="1737360" cy="685800"/>
+          </a:xfrm>
+          <a:prstGeom prst="rect">
+            <a:avLst/>
+          </a:prstGeom>
+          <a:noFill/>
+          <a:ln/>
+        </p:spPr>
+        <p:txBody>
+          <a:bodyPr wrap="square" lIns="0" tIns="0" rIns="0" bIns="0" rtlCol="0" anchor="ctr"/>
+          <a:lstStyle/>
+          <a:p>
+            <a:pPr indent="0" marL="0">
+              <a:buNone/>
+            </a:pPr>
+            <a:r>
+              <a:rPr lang="en-US" sz="1500" b="1" dirty="0">
+                <a:solidFill>
+                  <a:srgbClr val="16224D"/>
+                </a:solidFill>
+                <a:latin typeface="Microsoft JhengHei" pitchFamily="34" charset="0"/>
+                <a:ea typeface="Microsoft JhengHei" pitchFamily="34" charset="-122"/>
+                <a:cs typeface="Microsoft JhengHei" pitchFamily="34" charset="-120"/>
+              </a:rPr>
+              <a:t>登入</a:t>
+            </a:r>
+            <a:endParaRPr lang="en-US" sz="1500" dirty="0"/>
+          </a:p>
+        </p:txBody>
+      </p:sp>
+      <p:sp>
+        <p:nvSpPr>
+          <p:cNvPr id="11" name="Text 9"/>
+          <p:cNvSpPr/>
+          <p:nvPr/>
+        </p:nvSpPr>
+        <p:spPr>
+          <a:xfrm>
+            <a:off x="3108960" y="2423160"/>
+            <a:ext cx="8595360" cy="685800"/>
+          </a:xfrm>
+          <a:prstGeom prst="rect">
+            <a:avLst/>
+          </a:prstGeom>
+          <a:noFill/>
+          <a:ln/>
+        </p:spPr>
+        <p:txBody>
+          <a:bodyPr wrap="square" lIns="0" tIns="0" rIns="0" bIns="0" rtlCol="0" anchor="ctr"/>
+          <a:lstStyle/>
+          <a:p>
+            <a:pPr indent="0" marL="0">
+              <a:buNone/>
+            </a:pPr>
+            <a:r>
+              <a:rPr lang="en-US" sz="1300" dirty="0">
+                <a:solidFill>
+                  <a:srgbClr val="1F2937"/>
+                </a:solidFill>
+                <a:latin typeface="Microsoft JhengHei" pitchFamily="34" charset="0"/>
+                <a:ea typeface="Microsoft JhengHei" pitchFamily="34" charset="-122"/>
+                <a:cs typeface="Microsoft JhengHei" pitchFamily="34" charset="-120"/>
+              </a:rPr>
+              <a:t>用自己的 Google 帳號。帳號與額度不能共用（主辦規定，違者取消資格）</a:t>
+            </a:r>
+            <a:endParaRPr lang="en-US" sz="1300" dirty="0"/>
+          </a:p>
+        </p:txBody>
+      </p:sp>
+      <p:sp>
+        <p:nvSpPr>
+          <p:cNvPr id="12" name="Shape 10"/>
+          <p:cNvSpPr/>
+          <p:nvPr/>
+        </p:nvSpPr>
+        <p:spPr>
+          <a:xfrm>
+            <a:off x="548640" y="3364992"/>
+            <a:ext cx="502920" cy="502920"/>
+          </a:xfrm>
+          <a:prstGeom prst="ellipse">
+            <a:avLst/>
+          </a:prstGeom>
+          <a:solidFill>
+            <a:srgbClr val="E8A13A"/>
+          </a:solidFill>
+          <a:ln/>
+        </p:spPr>
+      </p:sp>
+      <p:sp>
+        <p:nvSpPr>
+          <p:cNvPr id="13" name="Text 11"/>
+          <p:cNvSpPr/>
+          <p:nvPr/>
+        </p:nvSpPr>
+        <p:spPr>
+          <a:xfrm>
+            <a:off x="548640" y="3364992"/>
+            <a:ext cx="502920" cy="502920"/>
+          </a:xfrm>
+          <a:prstGeom prst="rect">
+            <a:avLst/>
+          </a:prstGeom>
+          <a:noFill/>
+          <a:ln/>
+        </p:spPr>
+        <p:txBody>
+          <a:bodyPr wrap="square" lIns="0" tIns="0" rIns="0" bIns="0" rtlCol="0" anchor="ctr"/>
+          <a:lstStyle/>
+          <a:p>
+            <a:pPr algn="ctr" indent="0" marL="0">
+              <a:buNone/>
+            </a:pPr>
+            <a:r>
+              <a:rPr lang="en-US" sz="1600" b="1" dirty="0">
+                <a:solidFill>
+                  <a:srgbClr val="FFFFFF"/>
+                </a:solidFill>
+                <a:latin typeface="Microsoft JhengHei" pitchFamily="34" charset="0"/>
+                <a:ea typeface="Microsoft JhengHei" pitchFamily="34" charset="-122"/>
+                <a:cs typeface="Microsoft JhengHei" pitchFamily="34" charset="-120"/>
+              </a:rPr>
+              <a:t>3</a:t>
+            </a:r>
+            <a:endParaRPr lang="en-US" sz="1600" dirty="0"/>
+          </a:p>
+        </p:txBody>
+      </p:sp>
+      <p:sp>
+        <p:nvSpPr>
+          <p:cNvPr id="14" name="Text 12"/>
+          <p:cNvSpPr/>
+          <p:nvPr/>
+        </p:nvSpPr>
+        <p:spPr>
+          <a:xfrm>
+            <a:off x="1280160" y="3291840"/>
+            <a:ext cx="1737360" cy="685800"/>
+          </a:xfrm>
+          <a:prstGeom prst="rect">
+            <a:avLst/>
+          </a:prstGeom>
+          <a:noFill/>
+          <a:ln/>
+        </p:spPr>
+        <p:txBody>
+          <a:bodyPr wrap="square" lIns="0" tIns="0" rIns="0" bIns="0" rtlCol="0" anchor="ctr"/>
+          <a:lstStyle/>
+          <a:p>
+            <a:pPr indent="0" marL="0">
+              <a:buNone/>
+            </a:pPr>
+            <a:r>
+              <a:rPr lang="en-US" sz="1500" b="1" dirty="0">
+                <a:solidFill>
+                  <a:srgbClr val="16224D"/>
+                </a:solidFill>
+                <a:latin typeface="Microsoft JhengHei" pitchFamily="34" charset="0"/>
+                <a:ea typeface="Microsoft JhengHei" pitchFamily="34" charset="-122"/>
+                <a:cs typeface="Microsoft JhengHei" pitchFamily="34" charset="-120"/>
+              </a:rPr>
+              <a:t>兌換額度</a:t>
+            </a:r>
+            <a:endParaRPr lang="en-US" sz="1500" dirty="0"/>
+          </a:p>
+        </p:txBody>
+      </p:sp>
+      <p:sp>
+        <p:nvSpPr>
+          <p:cNvPr id="15" name="Text 13"/>
+          <p:cNvSpPr/>
+          <p:nvPr/>
+        </p:nvSpPr>
+        <p:spPr>
+          <a:xfrm>
+            <a:off x="3108960" y="3291840"/>
+            <a:ext cx="8595360" cy="685800"/>
+          </a:xfrm>
+          <a:prstGeom prst="rect">
+            <a:avLst/>
+          </a:prstGeom>
+          <a:noFill/>
+          <a:ln/>
+        </p:spPr>
+        <p:txBody>
+          <a:bodyPr wrap="square" lIns="0" tIns="0" rIns="0" bIns="0" rtlCol="0" anchor="ctr"/>
+          <a:lstStyle/>
+          <a:p>
+            <a:pPr indent="0" marL="0">
+              <a:buNone/>
+            </a:pPr>
+            <a:r>
+              <a:rPr lang="en-US" sz="1300" dirty="0">
+                <a:solidFill>
+                  <a:srgbClr val="1F2937"/>
+                </a:solidFill>
+                <a:latin typeface="Microsoft JhengHei" pitchFamily="34" charset="0"/>
+                <a:ea typeface="Microsoft JhengHei" pitchFamily="34" charset="-122"/>
+                <a:cs typeface="Microsoft JhengHei" pitchFamily="34" charset="-120"/>
+              </a:rPr>
+              <a:t>輸入兌換碼 GenAIHack26 → 頭像選單看到 Bonus Credits 2000 即成功，截圖存證</a:t>
+            </a:r>
+            <a:endParaRPr lang="en-US" sz="1300" dirty="0"/>
+          </a:p>
+        </p:txBody>
+      </p:sp>
+      <p:sp>
+        <p:nvSpPr>
+          <p:cNvPr id="16" name="Shape 14"/>
+          <p:cNvSpPr/>
+          <p:nvPr/>
+        </p:nvSpPr>
+        <p:spPr>
+          <a:xfrm>
+            <a:off x="548640" y="4233672"/>
+            <a:ext cx="502920" cy="502920"/>
+          </a:xfrm>
+          <a:prstGeom prst="ellipse">
+            <a:avLst/>
+          </a:prstGeom>
+          <a:solidFill>
+            <a:srgbClr val="1F9D66"/>
+          </a:solidFill>
+          <a:ln/>
+        </p:spPr>
+      </p:sp>
+      <p:sp>
+        <p:nvSpPr>
+          <p:cNvPr id="17" name="Text 15"/>
+          <p:cNvSpPr/>
+          <p:nvPr/>
+        </p:nvSpPr>
+        <p:spPr>
+          <a:xfrm>
+            <a:off x="548640" y="4233672"/>
+            <a:ext cx="502920" cy="502920"/>
+          </a:xfrm>
+          <a:prstGeom prst="rect">
+            <a:avLst/>
+          </a:prstGeom>
+          <a:noFill/>
+          <a:ln/>
+        </p:spPr>
+        <p:txBody>
+          <a:bodyPr wrap="square" lIns="0" tIns="0" rIns="0" bIns="0" rtlCol="0" anchor="ctr"/>
+          <a:lstStyle/>
+          <a:p>
+            <a:pPr algn="ctr" indent="0" marL="0">
+              <a:buNone/>
+            </a:pPr>
+            <a:r>
+              <a:rPr lang="en-US" sz="1600" b="1" dirty="0">
+                <a:solidFill>
+                  <a:srgbClr val="FFFFFF"/>
+                </a:solidFill>
+                <a:latin typeface="Microsoft JhengHei" pitchFamily="34" charset="0"/>
+                <a:ea typeface="Microsoft JhengHei" pitchFamily="34" charset="-122"/>
+                <a:cs typeface="Microsoft JhengHei" pitchFamily="34" charset="-120"/>
+              </a:rPr>
+              <a:t>4</a:t>
+            </a:r>
+            <a:endParaRPr lang="en-US" sz="1600" dirty="0"/>
+          </a:p>
+        </p:txBody>
+      </p:sp>
+      <p:sp>
+        <p:nvSpPr>
+          <p:cNvPr id="18" name="Text 16"/>
+          <p:cNvSpPr/>
+          <p:nvPr/>
+        </p:nvSpPr>
+        <p:spPr>
+          <a:xfrm>
+            <a:off x="1280160" y="4160520"/>
+            <a:ext cx="1737360" cy="685800"/>
+          </a:xfrm>
+          <a:prstGeom prst="rect">
+            <a:avLst/>
+          </a:prstGeom>
+          <a:noFill/>
+          <a:ln/>
+        </p:spPr>
+        <p:txBody>
+          <a:bodyPr wrap="square" lIns="0" tIns="0" rIns="0" bIns="0" rtlCol="0" anchor="ctr"/>
+          <a:lstStyle/>
+          <a:p>
+            <a:pPr indent="0" marL="0">
+              <a:buNone/>
+            </a:pPr>
+            <a:r>
+              <a:rPr lang="en-US" sz="1500" b="1" dirty="0">
+                <a:solidFill>
+                  <a:srgbClr val="16224D"/>
+                </a:solidFill>
+                <a:latin typeface="Microsoft JhengHei" pitchFamily="34" charset="0"/>
+                <a:ea typeface="Microsoft JhengHei" pitchFamily="34" charset="-122"/>
+                <a:cs typeface="Microsoft JhengHei" pitchFamily="34" charset="-120"/>
+              </a:rPr>
+              <a:t>開啟專案</a:t>
+            </a:r>
+            <a:endParaRPr lang="en-US" sz="1500" dirty="0"/>
+          </a:p>
+        </p:txBody>
+      </p:sp>
+      <p:sp>
+        <p:nvSpPr>
+          <p:cNvPr id="19" name="Text 17"/>
+          <p:cNvSpPr/>
+          <p:nvPr/>
+        </p:nvSpPr>
+        <p:spPr>
+          <a:xfrm>
+            <a:off x="3108960" y="4160520"/>
+            <a:ext cx="8595360" cy="685800"/>
+          </a:xfrm>
+          <a:prstGeom prst="rect">
+            <a:avLst/>
+          </a:prstGeom>
+          <a:noFill/>
+          <a:ln/>
+        </p:spPr>
+        <p:txBody>
+          <a:bodyPr wrap="square" lIns="0" tIns="0" rIns="0" bIns="0" rtlCol="0" anchor="ctr"/>
+          <a:lstStyle/>
+          <a:p>
+            <a:pPr indent="0" marL="0">
+              <a:buNone/>
+            </a:pPr>
+            <a:r>
+              <a:rPr lang="en-US" sz="1300" dirty="0">
+                <a:solidFill>
+                  <a:srgbClr val="1F2937"/>
+                </a:solidFill>
+                <a:latin typeface="Microsoft JhengHei" pitchFamily="34" charset="0"/>
+                <a:ea typeface="Microsoft JhengHei" pitchFamily="34" charset="-122"/>
+                <a:cs typeface="Microsoft JhengHei" pitchFamily="34" charset="-120"/>
+              </a:rPr>
+              <a:t>git clone github.com/giont565/MaiMate → Kiro「Open Folder」選 MaiMate 資料夾</a:t>
+            </a:r>
+            <a:endParaRPr lang="en-US" sz="1300" dirty="0"/>
+          </a:p>
+        </p:txBody>
+      </p:sp>
+      <p:sp>
+        <p:nvSpPr>
+          <p:cNvPr id="20" name="Shape 18"/>
+          <p:cNvSpPr/>
+          <p:nvPr/>
+        </p:nvSpPr>
+        <p:spPr>
+          <a:xfrm>
+            <a:off x="548640" y="5102352"/>
+            <a:ext cx="502920" cy="502920"/>
+          </a:xfrm>
+          <a:prstGeom prst="ellipse">
+            <a:avLst/>
+          </a:prstGeom>
+          <a:solidFill>
+            <a:srgbClr val="1F9D66"/>
+          </a:solidFill>
+          <a:ln/>
+        </p:spPr>
+      </p:sp>
+      <p:sp>
+        <p:nvSpPr>
+          <p:cNvPr id="21" name="Text 19"/>
+          <p:cNvSpPr/>
+          <p:nvPr/>
+        </p:nvSpPr>
+        <p:spPr>
+          <a:xfrm>
+            <a:off x="548640" y="5102352"/>
+            <a:ext cx="502920" cy="502920"/>
+          </a:xfrm>
+          <a:prstGeom prst="rect">
+            <a:avLst/>
+          </a:prstGeom>
+          <a:noFill/>
+          <a:ln/>
+        </p:spPr>
+        <p:txBody>
+          <a:bodyPr wrap="square" lIns="0" tIns="0" rIns="0" bIns="0" rtlCol="0" anchor="ctr"/>
+          <a:lstStyle/>
+          <a:p>
+            <a:pPr algn="ctr" indent="0" marL="0">
+              <a:buNone/>
+            </a:pPr>
+            <a:r>
+              <a:rPr lang="en-US" sz="1600" b="1" dirty="0">
+                <a:solidFill>
+                  <a:srgbClr val="FFFFFF"/>
+                </a:solidFill>
+                <a:latin typeface="Microsoft JhengHei" pitchFamily="34" charset="0"/>
+                <a:ea typeface="Microsoft JhengHei" pitchFamily="34" charset="-122"/>
+                <a:cs typeface="Microsoft JhengHei" pitchFamily="34" charset="-120"/>
+              </a:rPr>
+              <a:t>5</a:t>
+            </a:r>
+            <a:endParaRPr lang="en-US" sz="1600" dirty="0"/>
+          </a:p>
+        </p:txBody>
+      </p:sp>
+      <p:sp>
+        <p:nvSpPr>
+          <p:cNvPr id="22" name="Text 20"/>
+          <p:cNvSpPr/>
+          <p:nvPr/>
+        </p:nvSpPr>
+        <p:spPr>
+          <a:xfrm>
+            <a:off x="1280160" y="5029200"/>
+            <a:ext cx="1737360" cy="685800"/>
+          </a:xfrm>
+          <a:prstGeom prst="rect">
+            <a:avLst/>
+          </a:prstGeom>
+          <a:noFill/>
+          <a:ln/>
+        </p:spPr>
+        <p:txBody>
+          <a:bodyPr wrap="square" lIns="0" tIns="0" rIns="0" bIns="0" rtlCol="0" anchor="ctr"/>
+          <a:lstStyle/>
+          <a:p>
+            <a:pPr indent="0" marL="0">
+              <a:buNone/>
+            </a:pPr>
+            <a:r>
+              <a:rPr lang="en-US" sz="1500" b="1" dirty="0">
+                <a:solidFill>
+                  <a:srgbClr val="16224D"/>
+                </a:solidFill>
+                <a:latin typeface="Microsoft JhengHei" pitchFamily="34" charset="0"/>
+                <a:ea typeface="Microsoft JhengHei" pitchFamily="34" charset="-122"/>
+                <a:cs typeface="Microsoft JhengHei" pitchFamily="34" charset="-120"/>
+              </a:rPr>
+              <a:t>確認載入</a:t>
+            </a:r>
+            <a:endParaRPr lang="en-US" sz="1500" dirty="0"/>
+          </a:p>
+        </p:txBody>
+      </p:sp>
+      <p:sp>
+        <p:nvSpPr>
+          <p:cNvPr id="23" name="Text 21"/>
+          <p:cNvSpPr/>
+          <p:nvPr/>
+        </p:nvSpPr>
+        <p:spPr>
+          <a:xfrm>
+            <a:off x="3108960" y="5029200"/>
+            <a:ext cx="8595360" cy="685800"/>
+          </a:xfrm>
+          <a:prstGeom prst="rect">
+            <a:avLst/>
+          </a:prstGeom>
+          <a:noFill/>
+          <a:ln/>
+        </p:spPr>
+        <p:txBody>
+          <a:bodyPr wrap="square" lIns="0" tIns="0" rIns="0" bIns="0" rtlCol="0" anchor="ctr"/>
+          <a:lstStyle/>
+          <a:p>
+            <a:pPr indent="0" marL="0">
+              <a:buNone/>
+            </a:pPr>
+            <a:r>
+              <a:rPr lang="en-US" sz="1300" dirty="0">
+                <a:solidFill>
+                  <a:srgbClr val="1F2937"/>
+                </a:solidFill>
+                <a:latin typeface="Microsoft JhengHei" pitchFamily="34" charset="0"/>
+                <a:ea typeface="Microsoft JhengHei" pitchFamily="34" charset="-122"/>
+                <a:cs typeface="Microsoft JhengHei" pitchFamily="34" charset="-120"/>
+              </a:rPr>
+              <a:t>左側出現 Specs 面板（5 個 spec）＝.kiro/ 讀取成功；跑 bash scripts/setup.sh 檢查環境</a:t>
+            </a:r>
+            <a:endParaRPr lang="en-US" sz="1300" dirty="0"/>
+          </a:p>
+        </p:txBody>
+      </p:sp>
+      <p:sp>
+        <p:nvSpPr>
+          <p:cNvPr id="24" name="Text 22"/>
+          <p:cNvSpPr/>
+          <p:nvPr/>
+        </p:nvSpPr>
+        <p:spPr>
+          <a:xfrm>
+            <a:off x="548640" y="5989320"/>
+            <a:ext cx="11091672" cy="411480"/>
+          </a:xfrm>
+          <a:prstGeom prst="rect">
+            <a:avLst/>
+          </a:prstGeom>
+          <a:noFill/>
+          <a:ln/>
+        </p:spPr>
+        <p:txBody>
+          <a:bodyPr wrap="square" lIns="0" tIns="0" rIns="0" bIns="0" rtlCol="0" anchor="ctr"/>
+          <a:lstStyle/>
+          <a:p>
+            <a:pPr indent="0" marL="0">
+              <a:buNone/>
+            </a:pPr>
+            <a:r>
+              <a:rPr lang="en-US" sz="1150" dirty="0">
+                <a:solidFill>
+                  <a:srgbClr val="6B7280"/>
+                </a:solidFill>
+                <a:latin typeface="Microsoft JhengHei" pitchFamily="34" charset="0"/>
+                <a:ea typeface="Microsoft JhengHei" pitchFamily="34" charset="-122"/>
+                <a:cs typeface="Microsoft JhengHei" pitchFamily="34" charset="-120"/>
+              </a:rPr>
+              <a:t>疑難：登入卡住→換瀏覽器完成 OAuth；Specs 面板沒出現→確認開的是 MaiMate 根目錄不是上層資料夾。</a:t>
+            </a:r>
+            <a:endParaRPr lang="en-US" sz="1150" dirty="0"/>
+          </a:p>
+        </p:txBody>
+      </p:sp>
+    </p:spTree>
+  </p:cSld>
+  <p:clrMapOvr>
+    <a:masterClrMapping/>
+  </p:clrMapOvr>
+</p:sld>
+</file>
+
+<file path=ppt/slides/slide9.xml><?xml version="1.0" encoding="utf-8"?>
+<p:sld xmlns:a="http://schemas.openxmlformats.org/drawingml/2006/main" xmlns:r="http://schemas.openxmlformats.org/officeDocument/2006/relationships" xmlns:p="http://schemas.openxmlformats.org/presentationml/2006/main">
+  <p:cSld name="Slide 9">
+    <p:bg>
+      <p:bgPr>
+        <a:solidFill>
+          <a:srgbClr val="FFFFFF"/>
+        </a:solidFill>
+      </p:bgPr>
+    </p:bg>
+    <p:spTree>
+      <p:nvGrpSpPr>
+        <p:cNvPr id="1" name=""/>
+        <p:cNvGrpSpPr/>
+        <p:nvPr/>
+      </p:nvGrpSpPr>
+      <p:grpSpPr>
+        <a:xfrm>
+          <a:off x="0" y="0"/>
+          <a:ext cx="0" cy="0"/>
+          <a:chOff x="0" y="0"/>
+          <a:chExt cx="0" cy="0"/>
+        </a:xfrm>
+      </p:grpSpPr>
+      <p:sp>
+        <p:nvSpPr>
+          <p:cNvPr id="2" name="Text 0"/>
+          <p:cNvSpPr/>
+          <p:nvPr/>
+        </p:nvSpPr>
+        <p:spPr>
+          <a:xfrm>
+            <a:off x="548640" y="411480"/>
+            <a:ext cx="11091672" cy="640080"/>
+          </a:xfrm>
+          <a:prstGeom prst="rect">
+            <a:avLst/>
+          </a:prstGeom>
+          <a:noFill/>
+          <a:ln/>
+        </p:spPr>
+        <p:txBody>
+          <a:bodyPr wrap="square" lIns="0" tIns="0" rIns="0" bIns="0" rtlCol="0" anchor="ctr"/>
+          <a:lstStyle/>
+          <a:p>
+            <a:pPr indent="0" marL="0">
+              <a:buNone/>
+            </a:pPr>
+            <a:r>
+              <a:rPr lang="en-US" sz="2700" b="1" dirty="0">
+                <a:solidFill>
+                  <a:srgbClr val="16224D"/>
+                </a:solidFill>
+                <a:latin typeface="Microsoft JhengHei" pitchFamily="34" charset="0"/>
+                <a:ea typeface="Microsoft JhengHei" pitchFamily="34" charset="-122"/>
+                <a:cs typeface="Microsoft JhengHei" pitchFamily="34" charset="-120"/>
+              </a:rPr>
+              <a:t>Kiro 開發｜.kiro 目錄就是團隊大腦</a:t>
+            </a:r>
+            <a:endParaRPr lang="en-US" sz="2700" dirty="0"/>
+          </a:p>
+        </p:txBody>
+      </p:sp>
+      <p:sp>
+        <p:nvSpPr>
+          <p:cNvPr id="3" name="Text 1"/>
+          <p:cNvSpPr/>
+          <p:nvPr/>
+        </p:nvSpPr>
+        <p:spPr>
+          <a:xfrm>
+            <a:off x="548640" y="1024128"/>
+            <a:ext cx="11091672" cy="320040"/>
           </a:xfrm>
           <a:prstGeom prst="rect">
             <a:avLst/>
@@ -15428,13 +18831,13 @@
             <a:r>
               <a:rPr lang="en-US" sz="1250" dirty="0">
                 <a:solidFill>
-                  <a:srgbClr val="C9D4EE"/>
+                  <a:srgbClr val="6B7280"/>
                 </a:solidFill>
                 <a:latin typeface="Microsoft JhengHei" pitchFamily="34" charset="0"/>
                 <a:ea typeface="Microsoft JhengHei" pitchFamily="34" charset="-122"/>
                 <a:cs typeface="Microsoft JhengHei" pitchFamily="34" charset="-120"/>
               </a:rPr>
-              <a:t>KYC・環境設定・AWS帳號・架構拍板・#1 #2 開工</a:t>
+              <a:t>打開專案它就懂我們的規矩——不用自己記紅線</a:t>
             </a:r>
             <a:endParaRPr lang="en-US" sz="1250" dirty="0"/>
           </a:p>
@@ -15442,75 +18845,36 @@
       </p:sp>
       <p:sp>
         <p:nvSpPr>
-          <p:cNvPr id="7" name="Shape 5"/>
+          <p:cNvPr id="4" name="Shape 2"/>
           <p:cNvSpPr/>
           <p:nvPr/>
         </p:nvSpPr>
         <p:spPr>
           <a:xfrm>
-            <a:off x="548640" y="2395728"/>
-            <a:ext cx="1554480" cy="777240"/>
+            <a:off x="548640" y="1554480"/>
+            <a:ext cx="11091672" cy="1280160"/>
           </a:xfrm>
           <a:prstGeom prst="roundRect">
             <a:avLst>
-              <a:gd name="adj" fmla="val 9412"/>
+              <a:gd name="adj" fmla="val 6429"/>
             </a:avLst>
           </a:prstGeom>
           <a:solidFill>
-            <a:srgbClr val="E8A13A"/>
+            <a:srgbClr val="EAF0FB"/>
           </a:solidFill>
           <a:ln/>
         </p:spPr>
       </p:sp>
       <p:sp>
         <p:nvSpPr>
-          <p:cNvPr id="8" name="Text 6"/>
+          <p:cNvPr id="5" name="Text 3"/>
           <p:cNvSpPr/>
           <p:nvPr/>
         </p:nvSpPr>
         <p:spPr>
           <a:xfrm>
-            <a:off x="548640" y="2395728"/>
-            <a:ext cx="1554480" cy="777240"/>
-          </a:xfrm>
-          <a:prstGeom prst="rect">
-            <a:avLst/>
-          </a:prstGeom>
-          <a:noFill/>
-          <a:ln/>
-        </p:spPr>
-        <p:txBody>
-          <a:bodyPr wrap="square" lIns="0" tIns="0" rIns="0" bIns="0" rtlCol="0" anchor="ctr"/>
-          <a:lstStyle/>
-          <a:p>
-            <a:pPr algn="ctr" indent="0" marL="0">
-              <a:buNone/>
-            </a:pPr>
-            <a:r>
-              <a:rPr lang="en-US" sz="1400" b="1" dirty="0">
-                <a:solidFill>
-                  <a:srgbClr val="0D1530"/>
-                </a:solidFill>
-                <a:latin typeface="Microsoft JhengHei" pitchFamily="34" charset="0"/>
-                <a:ea typeface="Microsoft JhengHei" pitchFamily="34" charset="-122"/>
-                <a:cs typeface="Microsoft JhengHei" pitchFamily="34" charset="-120"/>
-              </a:rPr>
-              <a:t>7/23–27</a:t>
-            </a:r>
-            <a:endParaRPr lang="en-US" sz="1400" dirty="0"/>
-          </a:p>
-        </p:txBody>
-      </p:sp>
-      <p:sp>
-        <p:nvSpPr>
-          <p:cNvPr id="9" name="Text 7"/>
-          <p:cNvSpPr/>
-          <p:nvPr/>
-        </p:nvSpPr>
-        <p:spPr>
-          <a:xfrm>
-            <a:off x="2331720" y="2395728"/>
-            <a:ext cx="2011680" cy="777240"/>
+            <a:off x="868680" y="1691640"/>
+            <a:ext cx="3108960" cy="457200"/>
           </a:xfrm>
           <a:prstGeom prst="rect">
             <a:avLst/>
@@ -15526,30 +18890,30 @@
               <a:buNone/>
             </a:pPr>
             <a:r>
-              <a:rPr lang="en-US" sz="1500" b="1" dirty="0">
+              <a:rPr lang="en-US" sz="1400" b="1" dirty="0">
                 <a:solidFill>
-                  <a:srgbClr val="FFFFFF"/>
+                  <a:srgbClr val="16224D"/>
                 </a:solidFill>
-                <a:latin typeface="Microsoft JhengHei" pitchFamily="34" charset="0"/>
-                <a:ea typeface="Microsoft JhengHei" pitchFamily="34" charset="-122"/>
-                <a:cs typeface="Microsoft JhengHei" pitchFamily="34" charset="-120"/>
+                <a:latin typeface="Courier New" pitchFamily="34" charset="0"/>
+                <a:ea typeface="Courier New" pitchFamily="34" charset="-122"/>
+                <a:cs typeface="Courier New" pitchFamily="34" charset="-120"/>
               </a:rPr>
-              <a:t>核心構建週</a:t>
+              <a:t>.kiro/steering/</a:t>
             </a:r>
-            <a:endParaRPr lang="en-US" sz="1500" dirty="0"/>
+            <a:endParaRPr lang="en-US" sz="1400" dirty="0"/>
           </a:p>
         </p:txBody>
       </p:sp>
       <p:sp>
         <p:nvSpPr>
-          <p:cNvPr id="10" name="Text 8"/>
+          <p:cNvPr id="6" name="Text 4"/>
           <p:cNvSpPr/>
           <p:nvPr/>
         </p:nvSpPr>
         <p:spPr>
           <a:xfrm>
-            <a:off x="4434840" y="2395728"/>
-            <a:ext cx="7223760" cy="777240"/>
+            <a:off x="868680" y="2176272"/>
+            <a:ext cx="3108960" cy="365760"/>
           </a:xfrm>
           <a:prstGeom prst="rect">
             <a:avLst/>
@@ -15565,447 +18929,30 @@
               <a:buNone/>
             </a:pPr>
             <a:r>
-              <a:rPr lang="en-US" sz="1250" dirty="0">
+              <a:rPr lang="en-US" sz="1100" b="1" dirty="0">
                 <a:solidFill>
-                  <a:srgbClr val="C9D4EE"/>
+                  <a:srgbClr val="E8A13A"/>
                 </a:solidFill>
                 <a:latin typeface="Microsoft JhengHei" pitchFamily="34" charset="0"/>
                 <a:ea typeface="Microsoft JhengHei" pitchFamily="34" charset="-122"/>
                 <a:cs typeface="Microsoft JhengHei" pitchFamily="34" charset="-120"/>
               </a:rPr>
-              <a:t>Golden Path 全鏈路＋RAG＋手機版；7/27 晚自家 AWS 跑通全程</a:t>
+              <a:t>自動載入的團隊約定</a:t>
             </a:r>
-            <a:endParaRPr lang="en-US" sz="1250" dirty="0"/>
+            <a:endParaRPr lang="en-US" sz="1100" dirty="0"/>
           </a:p>
         </p:txBody>
       </p:sp>
       <p:sp>
         <p:nvSpPr>
-          <p:cNvPr id="11" name="Shape 9"/>
+          <p:cNvPr id="7" name="Text 5"/>
           <p:cNvSpPr/>
           <p:nvPr/>
         </p:nvSpPr>
         <p:spPr>
           <a:xfrm>
-            <a:off x="548640" y="3328416"/>
-            <a:ext cx="1554480" cy="777240"/>
-          </a:xfrm>
-          <a:prstGeom prst="roundRect">
-            <a:avLst>
-              <a:gd name="adj" fmla="val 9412"/>
-            </a:avLst>
-          </a:prstGeom>
-          <a:solidFill>
-            <a:srgbClr val="1F9D66"/>
-          </a:solidFill>
-          <a:ln/>
-        </p:spPr>
-      </p:sp>
-      <p:sp>
-        <p:nvSpPr>
-          <p:cNvPr id="12" name="Text 10"/>
-          <p:cNvSpPr/>
-          <p:nvPr/>
-        </p:nvSpPr>
-        <p:spPr>
-          <a:xfrm>
-            <a:off x="548640" y="3328416"/>
-            <a:ext cx="1554480" cy="777240"/>
-          </a:xfrm>
-          <a:prstGeom prst="rect">
-            <a:avLst/>
-          </a:prstGeom>
-          <a:noFill/>
-          <a:ln/>
-        </p:spPr>
-        <p:txBody>
-          <a:bodyPr wrap="square" lIns="0" tIns="0" rIns="0" bIns="0" rtlCol="0" anchor="ctr"/>
-          <a:lstStyle/>
-          <a:p>
-            <a:pPr algn="ctr" indent="0" marL="0">
-              <a:buNone/>
-            </a:pPr>
-            <a:r>
-              <a:rPr lang="en-US" sz="1400" b="1" dirty="0">
-                <a:solidFill>
-                  <a:srgbClr val="FFFFFF"/>
-                </a:solidFill>
-                <a:latin typeface="Microsoft JhengHei" pitchFamily="34" charset="0"/>
-                <a:ea typeface="Microsoft JhengHei" pitchFamily="34" charset="-122"/>
-                <a:cs typeface="Microsoft JhengHei" pitchFamily="34" charset="-120"/>
-              </a:rPr>
-              <a:t>7/28–30</a:t>
-            </a:r>
-            <a:endParaRPr lang="en-US" sz="1400" dirty="0"/>
-          </a:p>
-        </p:txBody>
-      </p:sp>
-      <p:sp>
-        <p:nvSpPr>
-          <p:cNvPr id="13" name="Text 11"/>
-          <p:cNvSpPr/>
-          <p:nvPr/>
-        </p:nvSpPr>
-        <p:spPr>
-          <a:xfrm>
-            <a:off x="2331720" y="3328416"/>
-            <a:ext cx="2011680" cy="777240"/>
-          </a:xfrm>
-          <a:prstGeom prst="rect">
-            <a:avLst/>
-          </a:prstGeom>
-          <a:noFill/>
-          <a:ln/>
-        </p:spPr>
-        <p:txBody>
-          <a:bodyPr wrap="square" lIns="0" tIns="0" rIns="0" bIns="0" rtlCol="0" anchor="ctr"/>
-          <a:lstStyle/>
-          <a:p>
-            <a:pPr indent="0" marL="0">
-              <a:buNone/>
-            </a:pPr>
-            <a:r>
-              <a:rPr lang="en-US" sz="1500" b="1" dirty="0">
-                <a:solidFill>
-                  <a:srgbClr val="FFFFFF"/>
-                </a:solidFill>
-                <a:latin typeface="Microsoft JhengHei" pitchFamily="34" charset="0"/>
-                <a:ea typeface="Microsoft JhengHei" pitchFamily="34" charset="-122"/>
-                <a:cs typeface="Microsoft JhengHei" pitchFamily="34" charset="-120"/>
-              </a:rPr>
-              <a:t>整合排練週</a:t>
-            </a:r>
-            <a:endParaRPr lang="en-US" sz="1500" dirty="0"/>
-          </a:p>
-        </p:txBody>
-      </p:sp>
-      <p:sp>
-        <p:nvSpPr>
-          <p:cNvPr id="14" name="Text 12"/>
-          <p:cNvSpPr/>
-          <p:nvPr/>
-        </p:nvSpPr>
-        <p:spPr>
-          <a:xfrm>
-            <a:off x="4434840" y="3328416"/>
-            <a:ext cx="7223760" cy="777240"/>
-          </a:xfrm>
-          <a:prstGeom prst="rect">
-            <a:avLst/>
-          </a:prstGeom>
-          <a:noFill/>
-          <a:ln/>
-        </p:spPr>
-        <p:txBody>
-          <a:bodyPr wrap="square" lIns="0" tIns="0" rIns="0" bIns="0" rtlCol="0" anchor="ctr"/>
-          <a:lstStyle/>
-          <a:p>
-            <a:pPr indent="0" marL="0">
-              <a:buNone/>
-            </a:pPr>
-            <a:r>
-              <a:rPr lang="en-US" sz="1250" dirty="0">
-                <a:solidFill>
-                  <a:srgbClr val="C9D4EE"/>
-                </a:solidFill>
-                <a:latin typeface="Microsoft JhengHei" pitchFamily="34" charset="0"/>
-                <a:ea typeface="Microsoft JhengHei" pitchFamily="34" charset="-122"/>
-                <a:cs typeface="Microsoft JhengHei" pitchFamily="34" charset="-120"/>
-              </a:rPr>
-              <a:t>E2E・離線備援・預錄影片 v1・簡報定稿・pitch 兩輪</a:t>
-            </a:r>
-            <a:endParaRPr lang="en-US" sz="1250" dirty="0"/>
-          </a:p>
-        </p:txBody>
-      </p:sp>
-      <p:sp>
-        <p:nvSpPr>
-          <p:cNvPr id="15" name="Shape 13"/>
-          <p:cNvSpPr/>
-          <p:nvPr/>
-        </p:nvSpPr>
-        <p:spPr>
-          <a:xfrm>
-            <a:off x="548640" y="4261104"/>
-            <a:ext cx="1554480" cy="777240"/>
-          </a:xfrm>
-          <a:prstGeom prst="roundRect">
-            <a:avLst>
-              <a:gd name="adj" fmla="val 9412"/>
-            </a:avLst>
-          </a:prstGeom>
-          <a:solidFill>
-            <a:srgbClr val="2B6CB0"/>
-          </a:solidFill>
-          <a:ln/>
-        </p:spPr>
-      </p:sp>
-      <p:sp>
-        <p:nvSpPr>
-          <p:cNvPr id="16" name="Text 14"/>
-          <p:cNvSpPr/>
-          <p:nvPr/>
-        </p:nvSpPr>
-        <p:spPr>
-          <a:xfrm>
-            <a:off x="548640" y="4261104"/>
-            <a:ext cx="1554480" cy="777240"/>
-          </a:xfrm>
-          <a:prstGeom prst="rect">
-            <a:avLst/>
-          </a:prstGeom>
-          <a:noFill/>
-          <a:ln/>
-        </p:spPr>
-        <p:txBody>
-          <a:bodyPr wrap="square" lIns="0" tIns="0" rIns="0" bIns="0" rtlCol="0" anchor="ctr"/>
-          <a:lstStyle/>
-          <a:p>
-            <a:pPr algn="ctr" indent="0" marL="0">
-              <a:buNone/>
-            </a:pPr>
-            <a:r>
-              <a:rPr lang="en-US" sz="1400" b="1" dirty="0">
-                <a:solidFill>
-                  <a:srgbClr val="FFFFFF"/>
-                </a:solidFill>
-                <a:latin typeface="Microsoft JhengHei" pitchFamily="34" charset="0"/>
-                <a:ea typeface="Microsoft JhengHei" pitchFamily="34" charset="-122"/>
-                <a:cs typeface="Microsoft JhengHei" pitchFamily="34" charset="-120"/>
-              </a:rPr>
-              <a:t>7/31</a:t>
-            </a:r>
-            <a:endParaRPr lang="en-US" sz="1400" dirty="0"/>
-          </a:p>
-        </p:txBody>
-      </p:sp>
-      <p:sp>
-        <p:nvSpPr>
-          <p:cNvPr id="17" name="Text 15"/>
-          <p:cNvSpPr/>
-          <p:nvPr/>
-        </p:nvSpPr>
-        <p:spPr>
-          <a:xfrm>
-            <a:off x="2331720" y="4261104"/>
-            <a:ext cx="2011680" cy="777240"/>
-          </a:xfrm>
-          <a:prstGeom prst="rect">
-            <a:avLst/>
-          </a:prstGeom>
-          <a:noFill/>
-          <a:ln/>
-        </p:spPr>
-        <p:txBody>
-          <a:bodyPr wrap="square" lIns="0" tIns="0" rIns="0" bIns="0" rtlCol="0" anchor="ctr"/>
-          <a:lstStyle/>
-          <a:p>
-            <a:pPr indent="0" marL="0">
-              <a:buNone/>
-            </a:pPr>
-            <a:r>
-              <a:rPr lang="en-US" sz="1500" b="1" dirty="0">
-                <a:solidFill>
-                  <a:srgbClr val="FFFFFF"/>
-                </a:solidFill>
-                <a:latin typeface="Microsoft JhengHei" pitchFamily="34" charset="0"/>
-                <a:ea typeface="Microsoft JhengHei" pitchFamily="34" charset="-122"/>
-                <a:cs typeface="Microsoft JhengHei" pitchFamily="34" charset="-120"/>
-              </a:rPr>
-              <a:t>凍結日</a:t>
-            </a:r>
-            <a:endParaRPr lang="en-US" sz="1500" dirty="0"/>
-          </a:p>
-        </p:txBody>
-      </p:sp>
-      <p:sp>
-        <p:nvSpPr>
-          <p:cNvPr id="18" name="Text 16"/>
-          <p:cNvSpPr/>
-          <p:nvPr/>
-        </p:nvSpPr>
-        <p:spPr>
-          <a:xfrm>
-            <a:off x="4434840" y="4261104"/>
-            <a:ext cx="7223760" cy="777240"/>
-          </a:xfrm>
-          <a:prstGeom prst="rect">
-            <a:avLst/>
-          </a:prstGeom>
-          <a:noFill/>
-          <a:ln/>
-        </p:spPr>
-        <p:txBody>
-          <a:bodyPr wrap="square" lIns="0" tIns="0" rIns="0" bIns="0" rtlCol="0" anchor="ctr"/>
-          <a:lstStyle/>
-          <a:p>
-            <a:pPr indent="0" marL="0">
-              <a:buNone/>
-            </a:pPr>
-            <a:r>
-              <a:rPr lang="en-US" sz="1250" dirty="0">
-                <a:solidFill>
-                  <a:srgbClr val="C9D4EE"/>
-                </a:solidFill>
-                <a:latin typeface="Microsoft JhengHei" pitchFamily="34" charset="0"/>
-                <a:ea typeface="Microsoft JhengHei" pitchFamily="34" charset="-122"/>
-                <a:cs typeface="Microsoft JhengHei" pitchFamily="34" charset="-120"/>
-              </a:rPr>
-              <a:t>code freeze・DEPLOY.md 定稿・部署演練・早睡</a:t>
-            </a:r>
-            <a:endParaRPr lang="en-US" sz="1250" dirty="0"/>
-          </a:p>
-        </p:txBody>
-      </p:sp>
-      <p:sp>
-        <p:nvSpPr>
-          <p:cNvPr id="19" name="Shape 17"/>
-          <p:cNvSpPr/>
-          <p:nvPr/>
-        </p:nvSpPr>
-        <p:spPr>
-          <a:xfrm>
-            <a:off x="548640" y="5193792"/>
-            <a:ext cx="1554480" cy="777240"/>
-          </a:xfrm>
-          <a:prstGeom prst="roundRect">
-            <a:avLst>
-              <a:gd name="adj" fmla="val 9412"/>
-            </a:avLst>
-          </a:prstGeom>
-          <a:solidFill>
-            <a:srgbClr val="D64550"/>
-          </a:solidFill>
-          <a:ln/>
-        </p:spPr>
-      </p:sp>
-      <p:sp>
-        <p:nvSpPr>
-          <p:cNvPr id="20" name="Text 18"/>
-          <p:cNvSpPr/>
-          <p:nvPr/>
-        </p:nvSpPr>
-        <p:spPr>
-          <a:xfrm>
-            <a:off x="548640" y="5193792"/>
-            <a:ext cx="1554480" cy="777240"/>
-          </a:xfrm>
-          <a:prstGeom prst="rect">
-            <a:avLst/>
-          </a:prstGeom>
-          <a:noFill/>
-          <a:ln/>
-        </p:spPr>
-        <p:txBody>
-          <a:bodyPr wrap="square" lIns="0" tIns="0" rIns="0" bIns="0" rtlCol="0" anchor="ctr"/>
-          <a:lstStyle/>
-          <a:p>
-            <a:pPr algn="ctr" indent="0" marL="0">
-              <a:buNone/>
-            </a:pPr>
-            <a:r>
-              <a:rPr lang="en-US" sz="1400" b="1" dirty="0">
-                <a:solidFill>
-                  <a:srgbClr val="FFFFFF"/>
-                </a:solidFill>
-                <a:latin typeface="Microsoft JhengHei" pitchFamily="34" charset="0"/>
-                <a:ea typeface="Microsoft JhengHei" pitchFamily="34" charset="-122"/>
-                <a:cs typeface="Microsoft JhengHei" pitchFamily="34" charset="-120"/>
-              </a:rPr>
-              <a:t>8/1–8/2</a:t>
-            </a:r>
-            <a:endParaRPr lang="en-US" sz="1400" dirty="0"/>
-          </a:p>
-        </p:txBody>
-      </p:sp>
-      <p:sp>
-        <p:nvSpPr>
-          <p:cNvPr id="21" name="Text 19"/>
-          <p:cNvSpPr/>
-          <p:nvPr/>
-        </p:nvSpPr>
-        <p:spPr>
-          <a:xfrm>
-            <a:off x="2331720" y="5193792"/>
-            <a:ext cx="2011680" cy="777240"/>
-          </a:xfrm>
-          <a:prstGeom prst="rect">
-            <a:avLst/>
-          </a:prstGeom>
-          <a:noFill/>
-          <a:ln/>
-        </p:spPr>
-        <p:txBody>
-          <a:bodyPr wrap="square" lIns="0" tIns="0" rIns="0" bIns="0" rtlCol="0" anchor="ctr"/>
-          <a:lstStyle/>
-          <a:p>
-            <a:pPr indent="0" marL="0">
-              <a:buNone/>
-            </a:pPr>
-            <a:r>
-              <a:rPr lang="en-US" sz="1500" b="1" dirty="0">
-                <a:solidFill>
-                  <a:srgbClr val="FFFFFF"/>
-                </a:solidFill>
-                <a:latin typeface="Microsoft JhengHei" pitchFamily="34" charset="0"/>
-                <a:ea typeface="Microsoft JhengHei" pitchFamily="34" charset="-122"/>
-                <a:cs typeface="Microsoft JhengHei" pitchFamily="34" charset="-120"/>
-              </a:rPr>
-              <a:t>決賽 30hr</a:t>
-            </a:r>
-            <a:endParaRPr lang="en-US" sz="1500" dirty="0"/>
-          </a:p>
-        </p:txBody>
-      </p:sp>
-      <p:sp>
-        <p:nvSpPr>
-          <p:cNvPr id="22" name="Text 20"/>
-          <p:cNvSpPr/>
-          <p:nvPr/>
-        </p:nvSpPr>
-        <p:spPr>
-          <a:xfrm>
-            <a:off x="4434840" y="5193792"/>
-            <a:ext cx="7223760" cy="777240"/>
-          </a:xfrm>
-          <a:prstGeom prst="rect">
-            <a:avLst/>
-          </a:prstGeom>
-          <a:noFill/>
-          <a:ln/>
-        </p:spPr>
-        <p:txBody>
-          <a:bodyPr wrap="square" lIns="0" tIns="0" rIns="0" bIns="0" rtlCol="0" anchor="ctr"/>
-          <a:lstStyle/>
-          <a:p>
-            <a:pPr indent="0" marL="0">
-              <a:buNone/>
-            </a:pPr>
-            <a:r>
-              <a:rPr lang="en-US" sz="1250" dirty="0">
-                <a:solidFill>
-                  <a:srgbClr val="C9D4EE"/>
-                </a:solidFill>
-                <a:latin typeface="Microsoft JhengHei" pitchFamily="34" charset="0"/>
-                <a:ea typeface="Microsoft JhengHei" pitchFamily="34" charset="-122"/>
-                <a:cs typeface="Microsoft JhengHei" pitchFamily="34" charset="-120"/>
-              </a:rPr>
-              <a:t>官方環境重部署(1hr)・現場調整・最終錄影・上台</a:t>
-            </a:r>
-            <a:endParaRPr lang="en-US" sz="1250" dirty="0"/>
-          </a:p>
-        </p:txBody>
-      </p:sp>
-      <p:sp>
-        <p:nvSpPr>
-          <p:cNvPr id="23" name="Text 21"/>
-          <p:cNvSpPr/>
-          <p:nvPr/>
-        </p:nvSpPr>
-        <p:spPr>
-          <a:xfrm>
-            <a:off x="548640" y="6263640"/>
-            <a:ext cx="11091672" cy="365760"/>
+            <a:off x="4160520" y="1664208"/>
+            <a:ext cx="7498080" cy="1097280"/>
           </a:xfrm>
           <a:prstGeom prst="rect">
             <a:avLst/>
@@ -16023,15 +18970,332 @@
             <a:r>
               <a:rPr lang="en-US" sz="1200" dirty="0">
                 <a:solidFill>
-                  <a:srgbClr val="8FA0C9"/>
+                  <a:srgbClr val="1F2937"/>
                 </a:solidFill>
                 <a:latin typeface="Microsoft JhengHei" pitchFamily="34" charset="0"/>
                 <a:ea typeface="Microsoft JhengHei" pitchFamily="34" charset="-122"/>
                 <a:cs typeface="Microsoft JhengHei" pitchFamily="34" charset="-120"/>
               </a:rPr>
-              <a:t>Kiro credit 紀律：練習 ≤300／開發 ~1000／決賽保底 700（只發一次不補）</a:t>
+              <a:t>product.md 紅線（不報明牌/下單必確認）、data-schema.md 欄位與 API 格式、tech.md 架構規範。Kiro 生成的每行程式都遵守</a:t>
             </a:r>
             <a:endParaRPr lang="en-US" sz="1200" dirty="0"/>
+          </a:p>
+        </p:txBody>
+      </p:sp>
+      <p:sp>
+        <p:nvSpPr>
+          <p:cNvPr id="8" name="Shape 6"/>
+          <p:cNvSpPr/>
+          <p:nvPr/>
+        </p:nvSpPr>
+        <p:spPr>
+          <a:xfrm>
+            <a:off x="548640" y="2971800"/>
+            <a:ext cx="11091672" cy="1280160"/>
+          </a:xfrm>
+          <a:prstGeom prst="roundRect">
+            <a:avLst>
+              <a:gd name="adj" fmla="val 6429"/>
+            </a:avLst>
+          </a:prstGeom>
+          <a:solidFill>
+            <a:srgbClr val="EAF0FB"/>
+          </a:solidFill>
+          <a:ln/>
+        </p:spPr>
+      </p:sp>
+      <p:sp>
+        <p:nvSpPr>
+          <p:cNvPr id="9" name="Text 7"/>
+          <p:cNvSpPr/>
+          <p:nvPr/>
+        </p:nvSpPr>
+        <p:spPr>
+          <a:xfrm>
+            <a:off x="868680" y="3108960"/>
+            <a:ext cx="3108960" cy="457200"/>
+          </a:xfrm>
+          <a:prstGeom prst="rect">
+            <a:avLst/>
+          </a:prstGeom>
+          <a:noFill/>
+          <a:ln/>
+        </p:spPr>
+        <p:txBody>
+          <a:bodyPr wrap="square" lIns="0" tIns="0" rIns="0" bIns="0" rtlCol="0" anchor="ctr"/>
+          <a:lstStyle/>
+          <a:p>
+            <a:pPr indent="0" marL="0">
+              <a:buNone/>
+            </a:pPr>
+            <a:r>
+              <a:rPr lang="en-US" sz="1400" b="1" dirty="0">
+                <a:solidFill>
+                  <a:srgbClr val="16224D"/>
+                </a:solidFill>
+                <a:latin typeface="Courier New" pitchFamily="34" charset="0"/>
+                <a:ea typeface="Courier New" pitchFamily="34" charset="-122"/>
+                <a:cs typeface="Courier New" pitchFamily="34" charset="-120"/>
+              </a:rPr>
+              <a:t>.kiro/specs/&lt;功能&gt;/</a:t>
+            </a:r>
+            <a:endParaRPr lang="en-US" sz="1400" dirty="0"/>
+          </a:p>
+        </p:txBody>
+      </p:sp>
+      <p:sp>
+        <p:nvSpPr>
+          <p:cNvPr id="10" name="Text 8"/>
+          <p:cNvSpPr/>
+          <p:nvPr/>
+        </p:nvSpPr>
+        <p:spPr>
+          <a:xfrm>
+            <a:off x="868680" y="3593592"/>
+            <a:ext cx="3108960" cy="365760"/>
+          </a:xfrm>
+          <a:prstGeom prst="rect">
+            <a:avLst/>
+          </a:prstGeom>
+          <a:noFill/>
+          <a:ln/>
+        </p:spPr>
+        <p:txBody>
+          <a:bodyPr wrap="square" lIns="0" tIns="0" rIns="0" bIns="0" rtlCol="0" anchor="ctr"/>
+          <a:lstStyle/>
+          <a:p>
+            <a:pPr indent="0" marL="0">
+              <a:buNone/>
+            </a:pPr>
+            <a:r>
+              <a:rPr lang="en-US" sz="1100" b="1" dirty="0">
+                <a:solidFill>
+                  <a:srgbClr val="E8A13A"/>
+                </a:solidFill>
+                <a:latin typeface="Microsoft JhengHei" pitchFamily="34" charset="0"/>
+                <a:ea typeface="Microsoft JhengHei" pitchFamily="34" charset="-122"/>
+                <a:cs typeface="Microsoft JhengHei" pitchFamily="34" charset="-120"/>
+              </a:rPr>
+              <a:t>五個功能規格（三件套）</a:t>
+            </a:r>
+            <a:endParaRPr lang="en-US" sz="1100" dirty="0"/>
+          </a:p>
+        </p:txBody>
+      </p:sp>
+      <p:sp>
+        <p:nvSpPr>
+          <p:cNvPr id="11" name="Text 9"/>
+          <p:cNvSpPr/>
+          <p:nvPr/>
+        </p:nvSpPr>
+        <p:spPr>
+          <a:xfrm>
+            <a:off x="4160520" y="3081528"/>
+            <a:ext cx="7498080" cy="1097280"/>
+          </a:xfrm>
+          <a:prstGeom prst="rect">
+            <a:avLst/>
+          </a:prstGeom>
+          <a:noFill/>
+          <a:ln/>
+        </p:spPr>
+        <p:txBody>
+          <a:bodyPr wrap="square" lIns="0" tIns="0" rIns="0" bIns="0" rtlCol="0" anchor="ctr"/>
+          <a:lstStyle/>
+          <a:p>
+            <a:pPr indent="0" marL="0">
+              <a:buNone/>
+            </a:pPr>
+            <a:r>
+              <a:rPr lang="en-US" sz="1200" dirty="0">
+                <a:solidFill>
+                  <a:srgbClr val="1F2937"/>
+                </a:solidFill>
+                <a:latin typeface="Microsoft JhengHei" pitchFamily="34" charset="0"/>
+                <a:ea typeface="Microsoft JhengHei" pitchFamily="34" charset="-122"/>
+                <a:cs typeface="Microsoft JhengHei" pitchFamily="34" charset="-120"/>
+              </a:rPr>
+              <a:t>requirements.md 驗收條件（EARS）→ design.md 設計 → tasks.md 任務清單。已備：chat-agent、behavior-engine、order-flow、profile-engine、trade-scenarios、audit-log</a:t>
+            </a:r>
+            <a:endParaRPr lang="en-US" sz="1200" dirty="0"/>
+          </a:p>
+        </p:txBody>
+      </p:sp>
+      <p:sp>
+        <p:nvSpPr>
+          <p:cNvPr id="12" name="Shape 10"/>
+          <p:cNvSpPr/>
+          <p:nvPr/>
+        </p:nvSpPr>
+        <p:spPr>
+          <a:xfrm>
+            <a:off x="548640" y="4389120"/>
+            <a:ext cx="11091672" cy="1280160"/>
+          </a:xfrm>
+          <a:prstGeom prst="roundRect">
+            <a:avLst>
+              <a:gd name="adj" fmla="val 6429"/>
+            </a:avLst>
+          </a:prstGeom>
+          <a:solidFill>
+            <a:srgbClr val="EAF0FB"/>
+          </a:solidFill>
+          <a:ln/>
+        </p:spPr>
+      </p:sp>
+      <p:sp>
+        <p:nvSpPr>
+          <p:cNvPr id="13" name="Text 11"/>
+          <p:cNvSpPr/>
+          <p:nvPr/>
+        </p:nvSpPr>
+        <p:spPr>
+          <a:xfrm>
+            <a:off x="868680" y="4526280"/>
+            <a:ext cx="3108960" cy="457200"/>
+          </a:xfrm>
+          <a:prstGeom prst="rect">
+            <a:avLst/>
+          </a:prstGeom>
+          <a:noFill/>
+          <a:ln/>
+        </p:spPr>
+        <p:txBody>
+          <a:bodyPr wrap="square" lIns="0" tIns="0" rIns="0" bIns="0" rtlCol="0" anchor="ctr"/>
+          <a:lstStyle/>
+          <a:p>
+            <a:pPr indent="0" marL="0">
+              <a:buNone/>
+            </a:pPr>
+            <a:r>
+              <a:rPr lang="en-US" sz="1400" b="1" dirty="0">
+                <a:solidFill>
+                  <a:srgbClr val="16224D"/>
+                </a:solidFill>
+                <a:latin typeface="Courier New" pitchFamily="34" charset="0"/>
+                <a:ea typeface="Courier New" pitchFamily="34" charset="-122"/>
+                <a:cs typeface="Courier New" pitchFamily="34" charset="-120"/>
+              </a:rPr>
+              <a:t>.kiro/settings/mcp.json</a:t>
+            </a:r>
+            <a:endParaRPr lang="en-US" sz="1400" dirty="0"/>
+          </a:p>
+        </p:txBody>
+      </p:sp>
+      <p:sp>
+        <p:nvSpPr>
+          <p:cNvPr id="14" name="Text 12"/>
+          <p:cNvSpPr/>
+          <p:nvPr/>
+        </p:nvSpPr>
+        <p:spPr>
+          <a:xfrm>
+            <a:off x="868680" y="5010912"/>
+            <a:ext cx="3108960" cy="365760"/>
+          </a:xfrm>
+          <a:prstGeom prst="rect">
+            <a:avLst/>
+          </a:prstGeom>
+          <a:noFill/>
+          <a:ln/>
+        </p:spPr>
+        <p:txBody>
+          <a:bodyPr wrap="square" lIns="0" tIns="0" rIns="0" bIns="0" rtlCol="0" anchor="ctr"/>
+          <a:lstStyle/>
+          <a:p>
+            <a:pPr indent="0" marL="0">
+              <a:buNone/>
+            </a:pPr>
+            <a:r>
+              <a:rPr lang="en-US" sz="1100" b="1" dirty="0">
+                <a:solidFill>
+                  <a:srgbClr val="E8A13A"/>
+                </a:solidFill>
+                <a:latin typeface="Microsoft JhengHei" pitchFamily="34" charset="0"/>
+                <a:ea typeface="Microsoft JhengHei" pitchFamily="34" charset="-122"/>
+                <a:cs typeface="Microsoft JhengHei" pitchFamily="34" charset="-120"/>
+              </a:rPr>
+              <a:t>MAX MCP 接入</a:t>
+            </a:r>
+            <a:endParaRPr lang="en-US" sz="1100" dirty="0"/>
+          </a:p>
+        </p:txBody>
+      </p:sp>
+      <p:sp>
+        <p:nvSpPr>
+          <p:cNvPr id="15" name="Text 13"/>
+          <p:cNvSpPr/>
+          <p:nvPr/>
+        </p:nvSpPr>
+        <p:spPr>
+          <a:xfrm>
+            <a:off x="4160520" y="4498848"/>
+            <a:ext cx="7498080" cy="1097280"/>
+          </a:xfrm>
+          <a:prstGeom prst="rect">
+            <a:avLst/>
+          </a:prstGeom>
+          <a:noFill/>
+          <a:ln/>
+        </p:spPr>
+        <p:txBody>
+          <a:bodyPr wrap="square" lIns="0" tIns="0" rIns="0" bIns="0" rtlCol="0" anchor="ctr"/>
+          <a:lstStyle/>
+          <a:p>
+            <a:pPr indent="0" marL="0">
+              <a:buNone/>
+            </a:pPr>
+            <a:r>
+              <a:rPr lang="en-US" sz="1200" dirty="0">
+                <a:solidFill>
+                  <a:srgbClr val="1F2937"/>
+                </a:solidFill>
+                <a:latin typeface="Microsoft JhengHei" pitchFamily="34" charset="0"/>
+                <a:ea typeface="Microsoft JhengHei" pitchFamily="34" charset="-122"/>
+                <a:cs typeface="Microsoft JhengHei" pitchFamily="34" charset="-120"/>
+              </a:rPr>
+              <a:t>把 REPLACE_WITH_LOCAL_PATH 改成本機 clone 的 max-mcp-server 路徑；金鑰走環境變數。之後對 Kiro 說「查 BTC 現價」它直接打 MAX API</a:t>
+            </a:r>
+            <a:endParaRPr lang="en-US" sz="1200" dirty="0"/>
+          </a:p>
+        </p:txBody>
+      </p:sp>
+      <p:sp>
+        <p:nvSpPr>
+          <p:cNvPr id="16" name="Text 14"/>
+          <p:cNvSpPr/>
+          <p:nvPr/>
+        </p:nvSpPr>
+        <p:spPr>
+          <a:xfrm>
+            <a:off x="548640" y="5989320"/>
+            <a:ext cx="11091672" cy="411480"/>
+          </a:xfrm>
+          <a:prstGeom prst="rect">
+            <a:avLst/>
+          </a:prstGeom>
+          <a:noFill/>
+          <a:ln/>
+        </p:spPr>
+        <p:txBody>
+          <a:bodyPr wrap="square" lIns="0" tIns="0" rIns="0" bIns="0" rtlCol="0" anchor="ctr"/>
+          <a:lstStyle/>
+          <a:p>
+            <a:pPr indent="0" marL="0">
+              <a:buNone/>
+            </a:pPr>
+            <a:r>
+              <a:rPr lang="en-US" sz="1300" b="1" dirty="0">
+                <a:solidFill>
+                  <a:srgbClr val="16224D"/>
+                </a:solidFill>
+                <a:latin typeface="Microsoft JhengHei" pitchFamily="34" charset="0"/>
+                <a:ea typeface="Microsoft JhengHei" pitchFamily="34" charset="-122"/>
+                <a:cs typeface="Microsoft JhengHei" pitchFamily="34" charset="-120"/>
+              </a:rPr>
+              <a:t>Steering 寫得越清楚，Kiro 來回修正越少——這就是我們省 credit 的主要手段。</a:t>
+            </a:r>
+            <a:endParaRPr lang="en-US" sz="1300" dirty="0"/>
           </a:p>
         </p:txBody>
       </p:sp>

--- a/docs/工作項目狀態.pptx
+++ b/docs/工作項目狀態.pptx
@@ -17,9 +17,12 @@
     <p:sldId id="265" r:id="rId11"/>
     <p:sldId id="266" r:id="rId12"/>
     <p:sldId id="267" r:id="rId13"/>
+    <p:sldId id="268" r:id="rId14"/>
+    <p:sldId id="269" r:id="rId15"/>
+    <p:sldId id="270" r:id="rId16"/>
   </p:sldIdLst>
   <p:notesMasterIdLst>
-    <p:notesMasterId r:id="rId14"/>
+    <p:notesMasterId r:id="rId17"/>
   </p:notesMasterIdLst>
   <p:sldSz cx="12192000" cy="6858000"/>
   <p:notesSz cx="6858000" cy="12192000"/>
@@ -801,6 +804,270 @@
             <a:fld id="{F7021451-1387-4CA6-816F-3879F97B5CBC}" type="slidenum">
               <a:rPr lang="en-US"/>
               <a:t>12</a:t>
+            </a:fld>
+            <a:endParaRPr lang="en-US"/>
+          </a:p>
+        </p:txBody>
+      </p:sp>
+    </p:spTree>
+    <p:extLst>
+      <p:ext uri="{BB962C8B-B14F-4D97-AF65-F5344CB8AC3E}">
+        <p14:creationId xmlns:p14="http://schemas.microsoft.com/office/powerpoint/2010/main" val="1024086991"/>
+      </p:ext>
+    </p:extLst>
+  </p:cSld>
+  <p:clrMapOvr>
+    <a:masterClrMapping/>
+  </p:clrMapOvr>
+</p:notes>
+</file>
+
+<file path=ppt/notesSlides/notesSlide13.xml><?xml version="1.0" encoding="utf-8"?>
+<p:notes xmlns:a="http://schemas.openxmlformats.org/drawingml/2006/main" xmlns:r="http://schemas.openxmlformats.org/officeDocument/2006/relationships" xmlns:p="http://schemas.openxmlformats.org/presentationml/2006/main">
+  <p:cSld>
+    <p:spTree>
+      <p:nvGrpSpPr>
+        <p:cNvPr id="1" name=""/>
+        <p:cNvGrpSpPr/>
+        <p:nvPr/>
+      </p:nvGrpSpPr>
+      <p:grpSpPr>
+        <a:xfrm>
+          <a:off x="0" y="0"/>
+          <a:ext cx="0" cy="0"/>
+          <a:chOff x="0" y="0"/>
+          <a:chExt cx="0" cy="0"/>
+        </a:xfrm>
+      </p:grpSpPr>
+      <p:sp>
+        <p:nvSpPr>
+          <p:cNvPr id="2" name="Slide Image Placeholder 1"/>
+          <p:cNvSpPr>
+            <a:spLocks noGrp="1" noRot="1" noChangeAspect="1"/>
+          </p:cNvSpPr>
+          <p:nvPr>
+            <p:ph type="sldImg"/>
+          </p:nvPr>
+        </p:nvSpPr>
+        <p:spPr/>
+      </p:sp>
+      <p:sp>
+        <p:nvSpPr>
+          <p:cNvPr id="3" name="Notes Placeholder 2"/>
+          <p:cNvSpPr>
+            <a:spLocks noGrp="1"/>
+          </p:cNvSpPr>
+          <p:nvPr>
+            <p:ph type="body" idx="1"/>
+          </p:nvPr>
+        </p:nvSpPr>
+        <p:spPr/>
+        <p:txBody>
+          <a:bodyPr/>
+          <a:lstStyle/>
+          <a:p>
+            <a:r>
+              <a:rPr lang="en-US" dirty="0"/>
+              <a:t/>
+            </a:r>
+            <a:endParaRPr lang="en-US" dirty="0"/>
+          </a:p>
+        </p:txBody>
+      </p:sp>
+      <p:sp>
+        <p:nvSpPr>
+          <p:cNvPr id="4" name="Slide Number Placeholder 3"/>
+          <p:cNvSpPr>
+            <a:spLocks noGrp="1"/>
+          </p:cNvSpPr>
+          <p:nvPr>
+            <p:ph type="sldNum" sz="quarter" idx="10"/>
+          </p:nvPr>
+        </p:nvSpPr>
+        <p:spPr/>
+        <p:txBody>
+          <a:bodyPr/>
+          <a:lstStyle/>
+          <a:p>
+            <a:fld id="{F7021451-1387-4CA6-816F-3879F97B5CBC}" type="slidenum">
+              <a:rPr lang="en-US"/>
+              <a:t>13</a:t>
+            </a:fld>
+            <a:endParaRPr lang="en-US"/>
+          </a:p>
+        </p:txBody>
+      </p:sp>
+    </p:spTree>
+    <p:extLst>
+      <p:ext uri="{BB962C8B-B14F-4D97-AF65-F5344CB8AC3E}">
+        <p14:creationId xmlns:p14="http://schemas.microsoft.com/office/powerpoint/2010/main" val="1024086991"/>
+      </p:ext>
+    </p:extLst>
+  </p:cSld>
+  <p:clrMapOvr>
+    <a:masterClrMapping/>
+  </p:clrMapOvr>
+</p:notes>
+</file>
+
+<file path=ppt/notesSlides/notesSlide14.xml><?xml version="1.0" encoding="utf-8"?>
+<p:notes xmlns:a="http://schemas.openxmlformats.org/drawingml/2006/main" xmlns:r="http://schemas.openxmlformats.org/officeDocument/2006/relationships" xmlns:p="http://schemas.openxmlformats.org/presentationml/2006/main">
+  <p:cSld>
+    <p:spTree>
+      <p:nvGrpSpPr>
+        <p:cNvPr id="1" name=""/>
+        <p:cNvGrpSpPr/>
+        <p:nvPr/>
+      </p:nvGrpSpPr>
+      <p:grpSpPr>
+        <a:xfrm>
+          <a:off x="0" y="0"/>
+          <a:ext cx="0" cy="0"/>
+          <a:chOff x="0" y="0"/>
+          <a:chExt cx="0" cy="0"/>
+        </a:xfrm>
+      </p:grpSpPr>
+      <p:sp>
+        <p:nvSpPr>
+          <p:cNvPr id="2" name="Slide Image Placeholder 1"/>
+          <p:cNvSpPr>
+            <a:spLocks noGrp="1" noRot="1" noChangeAspect="1"/>
+          </p:cNvSpPr>
+          <p:nvPr>
+            <p:ph type="sldImg"/>
+          </p:nvPr>
+        </p:nvSpPr>
+        <p:spPr/>
+      </p:sp>
+      <p:sp>
+        <p:nvSpPr>
+          <p:cNvPr id="3" name="Notes Placeholder 2"/>
+          <p:cNvSpPr>
+            <a:spLocks noGrp="1"/>
+          </p:cNvSpPr>
+          <p:nvPr>
+            <p:ph type="body" idx="1"/>
+          </p:nvPr>
+        </p:nvSpPr>
+        <p:spPr/>
+        <p:txBody>
+          <a:bodyPr/>
+          <a:lstStyle/>
+          <a:p>
+            <a:r>
+              <a:rPr lang="en-US" dirty="0"/>
+              <a:t/>
+            </a:r>
+            <a:endParaRPr lang="en-US" dirty="0"/>
+          </a:p>
+        </p:txBody>
+      </p:sp>
+      <p:sp>
+        <p:nvSpPr>
+          <p:cNvPr id="4" name="Slide Number Placeholder 3"/>
+          <p:cNvSpPr>
+            <a:spLocks noGrp="1"/>
+          </p:cNvSpPr>
+          <p:nvPr>
+            <p:ph type="sldNum" sz="quarter" idx="10"/>
+          </p:nvPr>
+        </p:nvSpPr>
+        <p:spPr/>
+        <p:txBody>
+          <a:bodyPr/>
+          <a:lstStyle/>
+          <a:p>
+            <a:fld id="{F7021451-1387-4CA6-816F-3879F97B5CBC}" type="slidenum">
+              <a:rPr lang="en-US"/>
+              <a:t>14</a:t>
+            </a:fld>
+            <a:endParaRPr lang="en-US"/>
+          </a:p>
+        </p:txBody>
+      </p:sp>
+    </p:spTree>
+    <p:extLst>
+      <p:ext uri="{BB962C8B-B14F-4D97-AF65-F5344CB8AC3E}">
+        <p14:creationId xmlns:p14="http://schemas.microsoft.com/office/powerpoint/2010/main" val="1024086991"/>
+      </p:ext>
+    </p:extLst>
+  </p:cSld>
+  <p:clrMapOvr>
+    <a:masterClrMapping/>
+  </p:clrMapOvr>
+</p:notes>
+</file>
+
+<file path=ppt/notesSlides/notesSlide15.xml><?xml version="1.0" encoding="utf-8"?>
+<p:notes xmlns:a="http://schemas.openxmlformats.org/drawingml/2006/main" xmlns:r="http://schemas.openxmlformats.org/officeDocument/2006/relationships" xmlns:p="http://schemas.openxmlformats.org/presentationml/2006/main">
+  <p:cSld>
+    <p:spTree>
+      <p:nvGrpSpPr>
+        <p:cNvPr id="1" name=""/>
+        <p:cNvGrpSpPr/>
+        <p:nvPr/>
+      </p:nvGrpSpPr>
+      <p:grpSpPr>
+        <a:xfrm>
+          <a:off x="0" y="0"/>
+          <a:ext cx="0" cy="0"/>
+          <a:chOff x="0" y="0"/>
+          <a:chExt cx="0" cy="0"/>
+        </a:xfrm>
+      </p:grpSpPr>
+      <p:sp>
+        <p:nvSpPr>
+          <p:cNvPr id="2" name="Slide Image Placeholder 1"/>
+          <p:cNvSpPr>
+            <a:spLocks noGrp="1" noRot="1" noChangeAspect="1"/>
+          </p:cNvSpPr>
+          <p:nvPr>
+            <p:ph type="sldImg"/>
+          </p:nvPr>
+        </p:nvSpPr>
+        <p:spPr/>
+      </p:sp>
+      <p:sp>
+        <p:nvSpPr>
+          <p:cNvPr id="3" name="Notes Placeholder 2"/>
+          <p:cNvSpPr>
+            <a:spLocks noGrp="1"/>
+          </p:cNvSpPr>
+          <p:nvPr>
+            <p:ph type="body" idx="1"/>
+          </p:nvPr>
+        </p:nvSpPr>
+        <p:spPr/>
+        <p:txBody>
+          <a:bodyPr/>
+          <a:lstStyle/>
+          <a:p>
+            <a:r>
+              <a:rPr lang="en-US" dirty="0"/>
+              <a:t/>
+            </a:r>
+            <a:endParaRPr lang="en-US" dirty="0"/>
+          </a:p>
+        </p:txBody>
+      </p:sp>
+      <p:sp>
+        <p:nvSpPr>
+          <p:cNvPr id="4" name="Slide Number Placeholder 3"/>
+          <p:cNvSpPr>
+            <a:spLocks noGrp="1"/>
+          </p:cNvSpPr>
+          <p:nvPr>
+            <p:ph type="sldNum" sz="quarter" idx="10"/>
+          </p:nvPr>
+        </p:nvSpPr>
+        <p:spPr/>
+        <p:txBody>
+          <a:bodyPr/>
+          <a:lstStyle/>
+          <a:p>
+            <a:fld id="{F7021451-1387-4CA6-816F-3879F97B5CBC}" type="slidenum">
+              <a:rPr lang="en-US"/>
+              <a:t>15</a:t>
             </a:fld>
             <a:endParaRPr lang="en-US"/>
           </a:p>
@@ -2095,6 +2362,3656 @@
                 <a:ea typeface="Microsoft JhengHei" pitchFamily="34" charset="-122"/>
                 <a:cs typeface="Microsoft JhengHei" pitchFamily="34" charset="-120"/>
               </a:rPr>
+              <a:t>Golden Path 分鏡：90 秒，評審每一刻看到什麼</a:t>
+            </a:r>
+            <a:endParaRPr lang="en-US" sz="2700" dirty="0"/>
+          </a:p>
+        </p:txBody>
+      </p:sp>
+      <p:graphicFrame>
+        <p:nvGraphicFramePr>
+          <p:cNvPr id="11" name="Table 0"/>
+          <p:cNvGraphicFramePr>
+            <a:graphicFrameLocks noGrp="1"/>
+          </p:cNvGraphicFramePr>
+          <p:nvPr>
+            <p:extLst>
+              <p:ext uri="{D42A27DB-BD31-4B8C-83A1-F6EECF244321}">
+                <p14:modId xmlns:p14="http://schemas.microsoft.com/office/powerpoint/2010/main" val="1579011935"/>
+              </p:ext>
+            </p:extLst>
+          </p:nvPr>
+        </p:nvGraphicFramePr>
+        <p:xfrm>
+          <a:off x="548640" y="1463040"/>
+          <a:ext cx="11091672" cy="914400"/>
+        </p:xfrm>
+        <a:graphic>
+          <a:graphicData uri="http://schemas.openxmlformats.org/drawingml/2006/table">
+            <a:tbl>
+              <a:tblPr/>
+              <a:tblGrid>
+                <a:gridCol w="1371600"/>
+                <a:gridCol w="4114800"/>
+                <a:gridCol w="3931920"/>
+                <a:gridCol w="1673352"/>
+              </a:tblGrid>
+              <a:tr h="566928">
+                <a:tc>
+                  <a:txBody>
+                    <a:bodyPr/>
+                    <a:lstStyle/>
+                    <a:p>
+                      <a:pPr indent="0" marL="0">
+                        <a:buNone/>
+                      </a:pPr>
+                      <a:r>
+                        <a:rPr lang="en-US" sz="1050" b="1" dirty="0">
+                          <a:solidFill>
+                            <a:srgbClr val="FFFFFF"/>
+                          </a:solidFill>
+                          <a:latin typeface="Microsoft JhengHei" pitchFamily="34" charset="0"/>
+                          <a:ea typeface="Microsoft JhengHei" pitchFamily="34" charset="-122"/>
+                          <a:cs typeface="Microsoft JhengHei" pitchFamily="34" charset="-120"/>
+                        </a:rPr>
+                        <a:t>步驟</a:t>
+                      </a:r>
+                      <a:endParaRPr lang="en-US" sz="1050" dirty="0">
+                        <a:latin typeface="Microsoft JhengHei" charset="0"/>
+                        <a:ea typeface="Microsoft JhengHei" charset="0"/>
+                        <a:cs typeface="Microsoft JhengHei" charset="0"/>
+                      </a:endParaRPr>
+                    </a:p>
+                  </a:txBody>
+                  <a:tcPr marL="54864" marR="54864" marT="54864" marB="54864" anchor="ctr">
+                    <a:lnL w="9525" cap="flat" cmpd="sng" algn="ctr">
+                      <a:solidFill>
+                        <a:srgbClr val="D5DEF0"/>
+                      </a:solidFill>
+                      <a:prstDash val="solid"/>
+                      <a:round/>
+                      <a:headEnd type="none" w="med" len="med"/>
+                      <a:tailEnd type="none" w="med" len="med"/>
+                    </a:lnL>
+                    <a:lnR w="9525" cap="flat" cmpd="sng" algn="ctr">
+                      <a:solidFill>
+                        <a:srgbClr val="D5DEF0"/>
+                      </a:solidFill>
+                      <a:prstDash val="solid"/>
+                      <a:round/>
+                      <a:headEnd type="none" w="med" len="med"/>
+                      <a:tailEnd type="none" w="med" len="med"/>
+                    </a:lnR>
+                    <a:lnT w="9525" cap="flat" cmpd="sng" algn="ctr">
+                      <a:solidFill>
+                        <a:srgbClr val="D5DEF0"/>
+                      </a:solidFill>
+                      <a:prstDash val="solid"/>
+                      <a:round/>
+                      <a:headEnd type="none" w="med" len="med"/>
+                      <a:tailEnd type="none" w="med" len="med"/>
+                    </a:lnT>
+                    <a:lnB w="9525" cap="flat" cmpd="sng" algn="ctr">
+                      <a:solidFill>
+                        <a:srgbClr val="D5DEF0"/>
+                      </a:solidFill>
+                      <a:prstDash val="solid"/>
+                      <a:round/>
+                      <a:headEnd type="none" w="med" len="med"/>
+                      <a:tailEnd type="none" w="med" len="med"/>
+                    </a:lnB>
+                    <a:solidFill>
+                      <a:srgbClr val="16224D"/>
+                    </a:solidFill>
+                  </a:tcPr>
+                </a:tc>
+                <a:tc>
+                  <a:txBody>
+                    <a:bodyPr/>
+                    <a:lstStyle/>
+                    <a:p>
+                      <a:pPr indent="0" marL="0">
+                        <a:buNone/>
+                      </a:pPr>
+                      <a:r>
+                        <a:rPr lang="en-US" sz="1050" b="1" dirty="0">
+                          <a:solidFill>
+                            <a:srgbClr val="FFFFFF"/>
+                          </a:solidFill>
+                          <a:latin typeface="Microsoft JhengHei" pitchFamily="34" charset="0"/>
+                          <a:ea typeface="Microsoft JhengHei" pitchFamily="34" charset="-122"/>
+                          <a:cs typeface="Microsoft JhengHei" pitchFamily="34" charset="-120"/>
+                        </a:rPr>
+                        <a:t>畫面上發生的事</a:t>
+                      </a:r>
+                      <a:endParaRPr lang="en-US" sz="1050" dirty="0">
+                        <a:latin typeface="Microsoft JhengHei" charset="0"/>
+                        <a:ea typeface="Microsoft JhengHei" charset="0"/>
+                        <a:cs typeface="Microsoft JhengHei" charset="0"/>
+                      </a:endParaRPr>
+                    </a:p>
+                  </a:txBody>
+                  <a:tcPr marL="54864" marR="54864" marT="54864" marB="54864" anchor="ctr">
+                    <a:lnL w="9525" cap="flat" cmpd="sng" algn="ctr">
+                      <a:solidFill>
+                        <a:srgbClr val="D5DEF0"/>
+                      </a:solidFill>
+                      <a:prstDash val="solid"/>
+                      <a:round/>
+                      <a:headEnd type="none" w="med" len="med"/>
+                      <a:tailEnd type="none" w="med" len="med"/>
+                    </a:lnL>
+                    <a:lnR w="9525" cap="flat" cmpd="sng" algn="ctr">
+                      <a:solidFill>
+                        <a:srgbClr val="D5DEF0"/>
+                      </a:solidFill>
+                      <a:prstDash val="solid"/>
+                      <a:round/>
+                      <a:headEnd type="none" w="med" len="med"/>
+                      <a:tailEnd type="none" w="med" len="med"/>
+                    </a:lnR>
+                    <a:lnT w="9525" cap="flat" cmpd="sng" algn="ctr">
+                      <a:solidFill>
+                        <a:srgbClr val="D5DEF0"/>
+                      </a:solidFill>
+                      <a:prstDash val="solid"/>
+                      <a:round/>
+                      <a:headEnd type="none" w="med" len="med"/>
+                      <a:tailEnd type="none" w="med" len="med"/>
+                    </a:lnT>
+                    <a:lnB w="9525" cap="flat" cmpd="sng" algn="ctr">
+                      <a:solidFill>
+                        <a:srgbClr val="D5DEF0"/>
+                      </a:solidFill>
+                      <a:prstDash val="solid"/>
+                      <a:round/>
+                      <a:headEnd type="none" w="med" len="med"/>
+                      <a:tailEnd type="none" w="med" len="med"/>
+                    </a:lnB>
+                    <a:solidFill>
+                      <a:srgbClr val="16224D"/>
+                    </a:solidFill>
+                  </a:tcPr>
+                </a:tc>
+                <a:tc>
+                  <a:txBody>
+                    <a:bodyPr/>
+                    <a:lstStyle/>
+                    <a:p>
+                      <a:pPr indent="0" marL="0">
+                        <a:buNone/>
+                      </a:pPr>
+                      <a:r>
+                        <a:rPr lang="en-US" sz="1050" b="1" dirty="0">
+                          <a:solidFill>
+                            <a:srgbClr val="FFFFFF"/>
+                          </a:solidFill>
+                          <a:latin typeface="Microsoft JhengHei" pitchFamily="34" charset="0"/>
+                          <a:ea typeface="Microsoft JhengHei" pitchFamily="34" charset="-122"/>
+                          <a:cs typeface="Microsoft JhengHei" pitchFamily="34" charset="-120"/>
+                        </a:rPr>
+                        <a:t>評審看點</a:t>
+                      </a:r>
+                      <a:endParaRPr lang="en-US" sz="1050" dirty="0">
+                        <a:latin typeface="Microsoft JhengHei" charset="0"/>
+                        <a:ea typeface="Microsoft JhengHei" charset="0"/>
+                        <a:cs typeface="Microsoft JhengHei" charset="0"/>
+                      </a:endParaRPr>
+                    </a:p>
+                  </a:txBody>
+                  <a:tcPr marL="54864" marR="54864" marT="54864" marB="54864" anchor="ctr">
+                    <a:lnL w="9525" cap="flat" cmpd="sng" algn="ctr">
+                      <a:solidFill>
+                        <a:srgbClr val="D5DEF0"/>
+                      </a:solidFill>
+                      <a:prstDash val="solid"/>
+                      <a:round/>
+                      <a:headEnd type="none" w="med" len="med"/>
+                      <a:tailEnd type="none" w="med" len="med"/>
+                    </a:lnL>
+                    <a:lnR w="9525" cap="flat" cmpd="sng" algn="ctr">
+                      <a:solidFill>
+                        <a:srgbClr val="D5DEF0"/>
+                      </a:solidFill>
+                      <a:prstDash val="solid"/>
+                      <a:round/>
+                      <a:headEnd type="none" w="med" len="med"/>
+                      <a:tailEnd type="none" w="med" len="med"/>
+                    </a:lnR>
+                    <a:lnT w="9525" cap="flat" cmpd="sng" algn="ctr">
+                      <a:solidFill>
+                        <a:srgbClr val="D5DEF0"/>
+                      </a:solidFill>
+                      <a:prstDash val="solid"/>
+                      <a:round/>
+                      <a:headEnd type="none" w="med" len="med"/>
+                      <a:tailEnd type="none" w="med" len="med"/>
+                    </a:lnT>
+                    <a:lnB w="9525" cap="flat" cmpd="sng" algn="ctr">
+                      <a:solidFill>
+                        <a:srgbClr val="D5DEF0"/>
+                      </a:solidFill>
+                      <a:prstDash val="solid"/>
+                      <a:round/>
+                      <a:headEnd type="none" w="med" len="med"/>
+                      <a:tailEnd type="none" w="med" len="med"/>
+                    </a:lnB>
+                    <a:solidFill>
+                      <a:srgbClr val="16224D"/>
+                    </a:solidFill>
+                  </a:tcPr>
+                </a:tc>
+                <a:tc>
+                  <a:txBody>
+                    <a:bodyPr/>
+                    <a:lstStyle/>
+                    <a:p>
+                      <a:pPr indent="0" marL="0">
+                        <a:buNone/>
+                      </a:pPr>
+                      <a:r>
+                        <a:rPr lang="en-US" sz="1050" b="1" dirty="0">
+                          <a:solidFill>
+                            <a:srgbClr val="FFFFFF"/>
+                          </a:solidFill>
+                          <a:latin typeface="Microsoft JhengHei" pitchFamily="34" charset="0"/>
+                          <a:ea typeface="Microsoft JhengHei" pitchFamily="34" charset="-122"/>
+                          <a:cs typeface="Microsoft JhengHei" pitchFamily="34" charset="-120"/>
+                        </a:rPr>
+                        <a:t>對應評分</a:t>
+                      </a:r>
+                      <a:endParaRPr lang="en-US" sz="1050" dirty="0">
+                        <a:latin typeface="Microsoft JhengHei" charset="0"/>
+                        <a:ea typeface="Microsoft JhengHei" charset="0"/>
+                        <a:cs typeface="Microsoft JhengHei" charset="0"/>
+                      </a:endParaRPr>
+                    </a:p>
+                  </a:txBody>
+                  <a:tcPr marL="54864" marR="54864" marT="54864" marB="54864" anchor="ctr">
+                    <a:lnL w="9525" cap="flat" cmpd="sng" algn="ctr">
+                      <a:solidFill>
+                        <a:srgbClr val="D5DEF0"/>
+                      </a:solidFill>
+                      <a:prstDash val="solid"/>
+                      <a:round/>
+                      <a:headEnd type="none" w="med" len="med"/>
+                      <a:tailEnd type="none" w="med" len="med"/>
+                    </a:lnL>
+                    <a:lnR w="9525" cap="flat" cmpd="sng" algn="ctr">
+                      <a:solidFill>
+                        <a:srgbClr val="D5DEF0"/>
+                      </a:solidFill>
+                      <a:prstDash val="solid"/>
+                      <a:round/>
+                      <a:headEnd type="none" w="med" len="med"/>
+                      <a:tailEnd type="none" w="med" len="med"/>
+                    </a:lnR>
+                    <a:lnT w="9525" cap="flat" cmpd="sng" algn="ctr">
+                      <a:solidFill>
+                        <a:srgbClr val="D5DEF0"/>
+                      </a:solidFill>
+                      <a:prstDash val="solid"/>
+                      <a:round/>
+                      <a:headEnd type="none" w="med" len="med"/>
+                      <a:tailEnd type="none" w="med" len="med"/>
+                    </a:lnT>
+                    <a:lnB w="9525" cap="flat" cmpd="sng" algn="ctr">
+                      <a:solidFill>
+                        <a:srgbClr val="D5DEF0"/>
+                      </a:solidFill>
+                      <a:prstDash val="solid"/>
+                      <a:round/>
+                      <a:headEnd type="none" w="med" len="med"/>
+                      <a:tailEnd type="none" w="med" len="med"/>
+                    </a:lnB>
+                    <a:solidFill>
+                      <a:srgbClr val="16224D"/>
+                    </a:solidFill>
+                  </a:tcPr>
+                </a:tc>
+              </a:tr>
+              <a:tr h="566928">
+                <a:tc>
+                  <a:txBody>
+                    <a:bodyPr/>
+                    <a:lstStyle/>
+                    <a:p>
+                      <a:pPr indent="0" marL="0">
+                        <a:buNone/>
+                      </a:pPr>
+                      <a:r>
+                        <a:rPr lang="en-US" sz="1050" b="1" dirty="0">
+                          <a:solidFill>
+                            <a:srgbClr val="16224D"/>
+                          </a:solidFill>
+                          <a:latin typeface="Microsoft JhengHei" pitchFamily="34" charset="0"/>
+                          <a:ea typeface="Microsoft JhengHei" pitchFamily="34" charset="-122"/>
+                          <a:cs typeface="Microsoft JhengHei" pitchFamily="34" charset="-120"/>
+                        </a:rPr>
+                        <a:t>0. 開場</a:t>
+                      </a:r>
+                      <a:endParaRPr lang="en-US" sz="1050" dirty="0">
+                        <a:latin typeface="Microsoft JhengHei" charset="0"/>
+                        <a:ea typeface="Microsoft JhengHei" charset="0"/>
+                        <a:cs typeface="Microsoft JhengHei" charset="0"/>
+                      </a:endParaRPr>
+                    </a:p>
+                  </a:txBody>
+                  <a:tcPr marL="54864" marR="54864" marT="54864" marB="54864" anchor="ctr">
+                    <a:lnL w="9525" cap="flat" cmpd="sng" algn="ctr">
+                      <a:solidFill>
+                        <a:srgbClr val="D5DEF0"/>
+                      </a:solidFill>
+                      <a:prstDash val="solid"/>
+                      <a:round/>
+                      <a:headEnd type="none" w="med" len="med"/>
+                      <a:tailEnd type="none" w="med" len="med"/>
+                    </a:lnL>
+                    <a:lnR w="9525" cap="flat" cmpd="sng" algn="ctr">
+                      <a:solidFill>
+                        <a:srgbClr val="D5DEF0"/>
+                      </a:solidFill>
+                      <a:prstDash val="solid"/>
+                      <a:round/>
+                      <a:headEnd type="none" w="med" len="med"/>
+                      <a:tailEnd type="none" w="med" len="med"/>
+                    </a:lnR>
+                    <a:lnT w="9525" cap="flat" cmpd="sng" algn="ctr">
+                      <a:solidFill>
+                        <a:srgbClr val="D5DEF0"/>
+                      </a:solidFill>
+                      <a:prstDash val="solid"/>
+                      <a:round/>
+                      <a:headEnd type="none" w="med" len="med"/>
+                      <a:tailEnd type="none" w="med" len="med"/>
+                    </a:lnT>
+                    <a:lnB w="9525" cap="flat" cmpd="sng" algn="ctr">
+                      <a:solidFill>
+                        <a:srgbClr val="D5DEF0"/>
+                      </a:solidFill>
+                      <a:prstDash val="solid"/>
+                      <a:round/>
+                      <a:headEnd type="none" w="med" len="med"/>
+                      <a:tailEnd type="none" w="med" len="med"/>
+                    </a:lnB>
+                  </a:tcPr>
+                </a:tc>
+                <a:tc>
+                  <a:txBody>
+                    <a:bodyPr/>
+                    <a:lstStyle/>
+                    <a:p>
+                      <a:pPr indent="0" marL="0">
+                        <a:buNone/>
+                      </a:pPr>
+                      <a:r>
+                        <a:rPr lang="en-US" sz="1050" dirty="0">
+                          <a:solidFill>
+                            <a:srgbClr val="1F2937"/>
+                          </a:solidFill>
+                          <a:latin typeface="Microsoft JhengHei" pitchFamily="34" charset="0"/>
+                          <a:ea typeface="Microsoft JhengHei" pitchFamily="34" charset="-122"/>
+                          <a:cs typeface="Microsoft JhengHei" pitchFamily="34" charset="-120"/>
+                        </a:rPr>
+                        <a:t>健檢首屏：追高 65%、機會成本 2,660 萬</a:t>
+                      </a:r>
+                      <a:endParaRPr lang="en-US" sz="1050" dirty="0">
+                        <a:latin typeface="Microsoft JhengHei" charset="0"/>
+                        <a:ea typeface="Microsoft JhengHei" charset="0"/>
+                        <a:cs typeface="Microsoft JhengHei" charset="0"/>
+                      </a:endParaRPr>
+                    </a:p>
+                  </a:txBody>
+                  <a:tcPr marL="54864" marR="54864" marT="54864" marB="54864" anchor="ctr">
+                    <a:lnL w="9525" cap="flat" cmpd="sng" algn="ctr">
+                      <a:solidFill>
+                        <a:srgbClr val="D5DEF0"/>
+                      </a:solidFill>
+                      <a:prstDash val="solid"/>
+                      <a:round/>
+                      <a:headEnd type="none" w="med" len="med"/>
+                      <a:tailEnd type="none" w="med" len="med"/>
+                    </a:lnL>
+                    <a:lnR w="9525" cap="flat" cmpd="sng" algn="ctr">
+                      <a:solidFill>
+                        <a:srgbClr val="D5DEF0"/>
+                      </a:solidFill>
+                      <a:prstDash val="solid"/>
+                      <a:round/>
+                      <a:headEnd type="none" w="med" len="med"/>
+                      <a:tailEnd type="none" w="med" len="med"/>
+                    </a:lnR>
+                    <a:lnT w="9525" cap="flat" cmpd="sng" algn="ctr">
+                      <a:solidFill>
+                        <a:srgbClr val="D5DEF0"/>
+                      </a:solidFill>
+                      <a:prstDash val="solid"/>
+                      <a:round/>
+                      <a:headEnd type="none" w="med" len="med"/>
+                      <a:tailEnd type="none" w="med" len="med"/>
+                    </a:lnT>
+                    <a:lnB w="9525" cap="flat" cmpd="sng" algn="ctr">
+                      <a:solidFill>
+                        <a:srgbClr val="D5DEF0"/>
+                      </a:solidFill>
+                      <a:prstDash val="solid"/>
+                      <a:round/>
+                      <a:headEnd type="none" w="med" len="med"/>
+                      <a:tailEnd type="none" w="med" len="med"/>
+                    </a:lnB>
+                  </a:tcPr>
+                </a:tc>
+                <a:tc>
+                  <a:txBody>
+                    <a:bodyPr/>
+                    <a:lstStyle/>
+                    <a:p>
+                      <a:pPr indent="0" marL="0">
+                        <a:buNone/>
+                      </a:pPr>
+                      <a:r>
+                        <a:rPr lang="en-US" sz="1050" dirty="0">
+                          <a:solidFill>
+                            <a:srgbClr val="1F2937"/>
+                          </a:solidFill>
+                          <a:latin typeface="Microsoft JhengHei" pitchFamily="34" charset="0"/>
+                          <a:ea typeface="Microsoft JhengHei" pitchFamily="34" charset="-122"/>
+                          <a:cs typeface="Microsoft JhengHei" pitchFamily="34" charset="-120"/>
+                        </a:rPr>
+                        <a:t>「這數字哪來的？」→ 評審自己給的資料</a:t>
+                      </a:r>
+                      <a:endParaRPr lang="en-US" sz="1050" dirty="0">
+                        <a:latin typeface="Microsoft JhengHei" charset="0"/>
+                        <a:ea typeface="Microsoft JhengHei" charset="0"/>
+                        <a:cs typeface="Microsoft JhengHei" charset="0"/>
+                      </a:endParaRPr>
+                    </a:p>
+                  </a:txBody>
+                  <a:tcPr marL="54864" marR="54864" marT="54864" marB="54864" anchor="ctr">
+                    <a:lnL w="9525" cap="flat" cmpd="sng" algn="ctr">
+                      <a:solidFill>
+                        <a:srgbClr val="D5DEF0"/>
+                      </a:solidFill>
+                      <a:prstDash val="solid"/>
+                      <a:round/>
+                      <a:headEnd type="none" w="med" len="med"/>
+                      <a:tailEnd type="none" w="med" len="med"/>
+                    </a:lnL>
+                    <a:lnR w="9525" cap="flat" cmpd="sng" algn="ctr">
+                      <a:solidFill>
+                        <a:srgbClr val="D5DEF0"/>
+                      </a:solidFill>
+                      <a:prstDash val="solid"/>
+                      <a:round/>
+                      <a:headEnd type="none" w="med" len="med"/>
+                      <a:tailEnd type="none" w="med" len="med"/>
+                    </a:lnR>
+                    <a:lnT w="9525" cap="flat" cmpd="sng" algn="ctr">
+                      <a:solidFill>
+                        <a:srgbClr val="D5DEF0"/>
+                      </a:solidFill>
+                      <a:prstDash val="solid"/>
+                      <a:round/>
+                      <a:headEnd type="none" w="med" len="med"/>
+                      <a:tailEnd type="none" w="med" len="med"/>
+                    </a:lnT>
+                    <a:lnB w="9525" cap="flat" cmpd="sng" algn="ctr">
+                      <a:solidFill>
+                        <a:srgbClr val="D5DEF0"/>
+                      </a:solidFill>
+                      <a:prstDash val="solid"/>
+                      <a:round/>
+                      <a:headEnd type="none" w="med" len="med"/>
+                      <a:tailEnd type="none" w="med" len="med"/>
+                    </a:lnB>
+                  </a:tcPr>
+                </a:tc>
+                <a:tc>
+                  <a:txBody>
+                    <a:bodyPr/>
+                    <a:lstStyle/>
+                    <a:p>
+                      <a:pPr indent="0" marL="0">
+                        <a:buNone/>
+                      </a:pPr>
+                      <a:r>
+                        <a:rPr lang="en-US" sz="1050" b="1" dirty="0">
+                          <a:solidFill>
+                            <a:srgbClr val="E8A13A"/>
+                          </a:solidFill>
+                          <a:latin typeface="Microsoft JhengHei" pitchFamily="34" charset="0"/>
+                          <a:ea typeface="Microsoft JhengHei" pitchFamily="34" charset="-122"/>
+                          <a:cs typeface="Microsoft JhengHei" pitchFamily="34" charset="-120"/>
+                        </a:rPr>
+                        <a:t>創意 25</a:t>
+                      </a:r>
+                      <a:endParaRPr lang="en-US" sz="1050" dirty="0">
+                        <a:latin typeface="Microsoft JhengHei" charset="0"/>
+                        <a:ea typeface="Microsoft JhengHei" charset="0"/>
+                        <a:cs typeface="Microsoft JhengHei" charset="0"/>
+                      </a:endParaRPr>
+                    </a:p>
+                  </a:txBody>
+                  <a:tcPr marL="54864" marR="54864" marT="54864" marB="54864" anchor="ctr">
+                    <a:lnL w="9525" cap="flat" cmpd="sng" algn="ctr">
+                      <a:solidFill>
+                        <a:srgbClr val="D5DEF0"/>
+                      </a:solidFill>
+                      <a:prstDash val="solid"/>
+                      <a:round/>
+                      <a:headEnd type="none" w="med" len="med"/>
+                      <a:tailEnd type="none" w="med" len="med"/>
+                    </a:lnL>
+                    <a:lnR w="9525" cap="flat" cmpd="sng" algn="ctr">
+                      <a:solidFill>
+                        <a:srgbClr val="D5DEF0"/>
+                      </a:solidFill>
+                      <a:prstDash val="solid"/>
+                      <a:round/>
+                      <a:headEnd type="none" w="med" len="med"/>
+                      <a:tailEnd type="none" w="med" len="med"/>
+                    </a:lnR>
+                    <a:lnT w="9525" cap="flat" cmpd="sng" algn="ctr">
+                      <a:solidFill>
+                        <a:srgbClr val="D5DEF0"/>
+                      </a:solidFill>
+                      <a:prstDash val="solid"/>
+                      <a:round/>
+                      <a:headEnd type="none" w="med" len="med"/>
+                      <a:tailEnd type="none" w="med" len="med"/>
+                    </a:lnT>
+                    <a:lnB w="9525" cap="flat" cmpd="sng" algn="ctr">
+                      <a:solidFill>
+                        <a:srgbClr val="D5DEF0"/>
+                      </a:solidFill>
+                      <a:prstDash val="solid"/>
+                      <a:round/>
+                      <a:headEnd type="none" w="med" len="med"/>
+                      <a:tailEnd type="none" w="med" len="med"/>
+                    </a:lnB>
+                  </a:tcPr>
+                </a:tc>
+              </a:tr>
+              <a:tr h="566928">
+                <a:tc>
+                  <a:txBody>
+                    <a:bodyPr/>
+                    <a:lstStyle/>
+                    <a:p>
+                      <a:pPr indent="0" marL="0">
+                        <a:buNone/>
+                      </a:pPr>
+                      <a:r>
+                        <a:rPr lang="en-US" sz="1050" b="1" dirty="0">
+                          <a:solidFill>
+                            <a:srgbClr val="16224D"/>
+                          </a:solidFill>
+                          <a:latin typeface="Microsoft JhengHei" pitchFamily="34" charset="0"/>
+                          <a:ea typeface="Microsoft JhengHei" pitchFamily="34" charset="-122"/>
+                          <a:cs typeface="Microsoft JhengHei" pitchFamily="34" charset="-120"/>
+                        </a:rPr>
+                        <a:t>1. 使用者輸入</a:t>
+                      </a:r>
+                      <a:endParaRPr lang="en-US" sz="1050" dirty="0">
+                        <a:latin typeface="Microsoft JhengHei" charset="0"/>
+                        <a:ea typeface="Microsoft JhengHei" charset="0"/>
+                        <a:cs typeface="Microsoft JhengHei" charset="0"/>
+                      </a:endParaRPr>
+                    </a:p>
+                  </a:txBody>
+                  <a:tcPr marL="54864" marR="54864" marT="54864" marB="54864" anchor="ctr">
+                    <a:lnL w="9525" cap="flat" cmpd="sng" algn="ctr">
+                      <a:solidFill>
+                        <a:srgbClr val="D5DEF0"/>
+                      </a:solidFill>
+                      <a:prstDash val="solid"/>
+                      <a:round/>
+                      <a:headEnd type="none" w="med" len="med"/>
+                      <a:tailEnd type="none" w="med" len="med"/>
+                    </a:lnL>
+                    <a:lnR w="9525" cap="flat" cmpd="sng" algn="ctr">
+                      <a:solidFill>
+                        <a:srgbClr val="D5DEF0"/>
+                      </a:solidFill>
+                      <a:prstDash val="solid"/>
+                      <a:round/>
+                      <a:headEnd type="none" w="med" len="med"/>
+                      <a:tailEnd type="none" w="med" len="med"/>
+                    </a:lnR>
+                    <a:lnT w="9525" cap="flat" cmpd="sng" algn="ctr">
+                      <a:solidFill>
+                        <a:srgbClr val="D5DEF0"/>
+                      </a:solidFill>
+                      <a:prstDash val="solid"/>
+                      <a:round/>
+                      <a:headEnd type="none" w="med" len="med"/>
+                      <a:tailEnd type="none" w="med" len="med"/>
+                    </a:lnT>
+                    <a:lnB w="9525" cap="flat" cmpd="sng" algn="ctr">
+                      <a:solidFill>
+                        <a:srgbClr val="D5DEF0"/>
+                      </a:solidFill>
+                      <a:prstDash val="solid"/>
+                      <a:round/>
+                      <a:headEnd type="none" w="med" len="med"/>
+                      <a:tailEnd type="none" w="med" len="med"/>
+                    </a:lnB>
+                  </a:tcPr>
+                </a:tc>
+                <a:tc>
+                  <a:txBody>
+                    <a:bodyPr/>
+                    <a:lstStyle/>
+                    <a:p>
+                      <a:pPr indent="0" marL="0">
+                        <a:buNone/>
+                      </a:pPr>
+                      <a:r>
+                        <a:rPr lang="en-US" sz="1050" dirty="0">
+                          <a:solidFill>
+                            <a:srgbClr val="1F2937"/>
+                          </a:solidFill>
+                          <a:latin typeface="Microsoft JhengHei" pitchFamily="34" charset="0"/>
+                          <a:ea typeface="Microsoft JhengHei" pitchFamily="34" charset="-122"/>
+                          <a:cs typeface="Microsoft JhengHei" pitchFamily="34" charset="-120"/>
+                        </a:rPr>
+                        <a:t>「ETH 跌太多，幫我全部賣掉」</a:t>
+                      </a:r>
+                      <a:endParaRPr lang="en-US" sz="1050" dirty="0">
+                        <a:latin typeface="Microsoft JhengHei" charset="0"/>
+                        <a:ea typeface="Microsoft JhengHei" charset="0"/>
+                        <a:cs typeface="Microsoft JhengHei" charset="0"/>
+                      </a:endParaRPr>
+                    </a:p>
+                  </a:txBody>
+                  <a:tcPr marL="54864" marR="54864" marT="54864" marB="54864" anchor="ctr">
+                    <a:lnL w="9525" cap="flat" cmpd="sng" algn="ctr">
+                      <a:solidFill>
+                        <a:srgbClr val="D5DEF0"/>
+                      </a:solidFill>
+                      <a:prstDash val="solid"/>
+                      <a:round/>
+                      <a:headEnd type="none" w="med" len="med"/>
+                      <a:tailEnd type="none" w="med" len="med"/>
+                    </a:lnL>
+                    <a:lnR w="9525" cap="flat" cmpd="sng" algn="ctr">
+                      <a:solidFill>
+                        <a:srgbClr val="D5DEF0"/>
+                      </a:solidFill>
+                      <a:prstDash val="solid"/>
+                      <a:round/>
+                      <a:headEnd type="none" w="med" len="med"/>
+                      <a:tailEnd type="none" w="med" len="med"/>
+                    </a:lnR>
+                    <a:lnT w="9525" cap="flat" cmpd="sng" algn="ctr">
+                      <a:solidFill>
+                        <a:srgbClr val="D5DEF0"/>
+                      </a:solidFill>
+                      <a:prstDash val="solid"/>
+                      <a:round/>
+                      <a:headEnd type="none" w="med" len="med"/>
+                      <a:tailEnd type="none" w="med" len="med"/>
+                    </a:lnT>
+                    <a:lnB w="9525" cap="flat" cmpd="sng" algn="ctr">
+                      <a:solidFill>
+                        <a:srgbClr val="D5DEF0"/>
+                      </a:solidFill>
+                      <a:prstDash val="solid"/>
+                      <a:round/>
+                      <a:headEnd type="none" w="med" len="med"/>
+                      <a:tailEnd type="none" w="med" len="med"/>
+                    </a:lnB>
+                  </a:tcPr>
+                </a:tc>
+                <a:tc>
+                  <a:txBody>
+                    <a:bodyPr/>
+                    <a:lstStyle/>
+                    <a:p>
+                      <a:pPr indent="0" marL="0">
+                        <a:buNone/>
+                      </a:pPr>
+                      <a:r>
+                        <a:rPr lang="en-US" sz="1050" dirty="0">
+                          <a:solidFill>
+                            <a:srgbClr val="1F2937"/>
+                          </a:solidFill>
+                          <a:latin typeface="Microsoft JhengHei" pitchFamily="34" charset="0"/>
+                          <a:ea typeface="Microsoft JhengHei" pitchFamily="34" charset="-122"/>
+                          <a:cs typeface="Microsoft JhengHei" pitchFamily="34" charset="-120"/>
+                        </a:rPr>
+                        <a:t>真實的恐慌場景，不是安排好的軟球</a:t>
+                      </a:r>
+                      <a:endParaRPr lang="en-US" sz="1050" dirty="0">
+                        <a:latin typeface="Microsoft JhengHei" charset="0"/>
+                        <a:ea typeface="Microsoft JhengHei" charset="0"/>
+                        <a:cs typeface="Microsoft JhengHei" charset="0"/>
+                      </a:endParaRPr>
+                    </a:p>
+                  </a:txBody>
+                  <a:tcPr marL="54864" marR="54864" marT="54864" marB="54864" anchor="ctr">
+                    <a:lnL w="9525" cap="flat" cmpd="sng" algn="ctr">
+                      <a:solidFill>
+                        <a:srgbClr val="D5DEF0"/>
+                      </a:solidFill>
+                      <a:prstDash val="solid"/>
+                      <a:round/>
+                      <a:headEnd type="none" w="med" len="med"/>
+                      <a:tailEnd type="none" w="med" len="med"/>
+                    </a:lnL>
+                    <a:lnR w="9525" cap="flat" cmpd="sng" algn="ctr">
+                      <a:solidFill>
+                        <a:srgbClr val="D5DEF0"/>
+                      </a:solidFill>
+                      <a:prstDash val="solid"/>
+                      <a:round/>
+                      <a:headEnd type="none" w="med" len="med"/>
+                      <a:tailEnd type="none" w="med" len="med"/>
+                    </a:lnR>
+                    <a:lnT w="9525" cap="flat" cmpd="sng" algn="ctr">
+                      <a:solidFill>
+                        <a:srgbClr val="D5DEF0"/>
+                      </a:solidFill>
+                      <a:prstDash val="solid"/>
+                      <a:round/>
+                      <a:headEnd type="none" w="med" len="med"/>
+                      <a:tailEnd type="none" w="med" len="med"/>
+                    </a:lnT>
+                    <a:lnB w="9525" cap="flat" cmpd="sng" algn="ctr">
+                      <a:solidFill>
+                        <a:srgbClr val="D5DEF0"/>
+                      </a:solidFill>
+                      <a:prstDash val="solid"/>
+                      <a:round/>
+                      <a:headEnd type="none" w="med" len="med"/>
+                      <a:tailEnd type="none" w="med" len="med"/>
+                    </a:lnB>
+                  </a:tcPr>
+                </a:tc>
+                <a:tc>
+                  <a:txBody>
+                    <a:bodyPr/>
+                    <a:lstStyle/>
+                    <a:p>
+                      <a:pPr indent="0" marL="0">
+                        <a:buNone/>
+                      </a:pPr>
+                      <a:r>
+                        <a:rPr lang="en-US" sz="1050" b="1" dirty="0">
+                          <a:solidFill>
+                            <a:srgbClr val="E8A13A"/>
+                          </a:solidFill>
+                          <a:latin typeface="Microsoft JhengHei" pitchFamily="34" charset="0"/>
+                          <a:ea typeface="Microsoft JhengHei" pitchFamily="34" charset="-122"/>
+                          <a:cs typeface="Microsoft JhengHei" pitchFamily="34" charset="-120"/>
+                        </a:rPr>
+                        <a:t>商業 20</a:t>
+                      </a:r>
+                      <a:endParaRPr lang="en-US" sz="1050" dirty="0">
+                        <a:latin typeface="Microsoft JhengHei" charset="0"/>
+                        <a:ea typeface="Microsoft JhengHei" charset="0"/>
+                        <a:cs typeface="Microsoft JhengHei" charset="0"/>
+                      </a:endParaRPr>
+                    </a:p>
+                  </a:txBody>
+                  <a:tcPr marL="54864" marR="54864" marT="54864" marB="54864" anchor="ctr">
+                    <a:lnL w="9525" cap="flat" cmpd="sng" algn="ctr">
+                      <a:solidFill>
+                        <a:srgbClr val="D5DEF0"/>
+                      </a:solidFill>
+                      <a:prstDash val="solid"/>
+                      <a:round/>
+                      <a:headEnd type="none" w="med" len="med"/>
+                      <a:tailEnd type="none" w="med" len="med"/>
+                    </a:lnL>
+                    <a:lnR w="9525" cap="flat" cmpd="sng" algn="ctr">
+                      <a:solidFill>
+                        <a:srgbClr val="D5DEF0"/>
+                      </a:solidFill>
+                      <a:prstDash val="solid"/>
+                      <a:round/>
+                      <a:headEnd type="none" w="med" len="med"/>
+                      <a:tailEnd type="none" w="med" len="med"/>
+                    </a:lnR>
+                    <a:lnT w="9525" cap="flat" cmpd="sng" algn="ctr">
+                      <a:solidFill>
+                        <a:srgbClr val="D5DEF0"/>
+                      </a:solidFill>
+                      <a:prstDash val="solid"/>
+                      <a:round/>
+                      <a:headEnd type="none" w="med" len="med"/>
+                      <a:tailEnd type="none" w="med" len="med"/>
+                    </a:lnT>
+                    <a:lnB w="9525" cap="flat" cmpd="sng" algn="ctr">
+                      <a:solidFill>
+                        <a:srgbClr val="D5DEF0"/>
+                      </a:solidFill>
+                      <a:prstDash val="solid"/>
+                      <a:round/>
+                      <a:headEnd type="none" w="med" len="med"/>
+                      <a:tailEnd type="none" w="med" len="med"/>
+                    </a:lnB>
+                  </a:tcPr>
+                </a:tc>
+              </a:tr>
+              <a:tr h="566928">
+                <a:tc>
+                  <a:txBody>
+                    <a:bodyPr/>
+                    <a:lstStyle/>
+                    <a:p>
+                      <a:pPr indent="0" marL="0">
+                        <a:buNone/>
+                      </a:pPr>
+                      <a:r>
+                        <a:rPr lang="en-US" sz="1050" b="1" dirty="0">
+                          <a:solidFill>
+                            <a:srgbClr val="16224D"/>
+                          </a:solidFill>
+                          <a:latin typeface="Microsoft JhengHei" pitchFamily="34" charset="0"/>
+                          <a:ea typeface="Microsoft JhengHei" pitchFamily="34" charset="-122"/>
+                          <a:cs typeface="Microsoft JhengHei" pitchFamily="34" charset="-120"/>
+                        </a:rPr>
+                        <a:t>2. AI 思考</a:t>
+                      </a:r>
+                      <a:endParaRPr lang="en-US" sz="1050" dirty="0">
+                        <a:latin typeface="Microsoft JhengHei" charset="0"/>
+                        <a:ea typeface="Microsoft JhengHei" charset="0"/>
+                        <a:cs typeface="Microsoft JhengHei" charset="0"/>
+                      </a:endParaRPr>
+                    </a:p>
+                  </a:txBody>
+                  <a:tcPr marL="54864" marR="54864" marT="54864" marB="54864" anchor="ctr">
+                    <a:lnL w="9525" cap="flat" cmpd="sng" algn="ctr">
+                      <a:solidFill>
+                        <a:srgbClr val="D5DEF0"/>
+                      </a:solidFill>
+                      <a:prstDash val="solid"/>
+                      <a:round/>
+                      <a:headEnd type="none" w="med" len="med"/>
+                      <a:tailEnd type="none" w="med" len="med"/>
+                    </a:lnL>
+                    <a:lnR w="9525" cap="flat" cmpd="sng" algn="ctr">
+                      <a:solidFill>
+                        <a:srgbClr val="D5DEF0"/>
+                      </a:solidFill>
+                      <a:prstDash val="solid"/>
+                      <a:round/>
+                      <a:headEnd type="none" w="med" len="med"/>
+                      <a:tailEnd type="none" w="med" len="med"/>
+                    </a:lnR>
+                    <a:lnT w="9525" cap="flat" cmpd="sng" algn="ctr">
+                      <a:solidFill>
+                        <a:srgbClr val="D5DEF0"/>
+                      </a:solidFill>
+                      <a:prstDash val="solid"/>
+                      <a:round/>
+                      <a:headEnd type="none" w="med" len="med"/>
+                      <a:tailEnd type="none" w="med" len="med"/>
+                    </a:lnT>
+                    <a:lnB w="9525" cap="flat" cmpd="sng" algn="ctr">
+                      <a:solidFill>
+                        <a:srgbClr val="D5DEF0"/>
+                      </a:solidFill>
+                      <a:prstDash val="solid"/>
+                      <a:round/>
+                      <a:headEnd type="none" w="med" len="med"/>
+                      <a:tailEnd type="none" w="med" len="med"/>
+                    </a:lnB>
+                  </a:tcPr>
+                </a:tc>
+                <a:tc>
+                  <a:txBody>
+                    <a:bodyPr/>
+                    <a:lstStyle/>
+                    <a:p>
+                      <a:pPr indent="0" marL="0">
+                        <a:buNone/>
+                      </a:pPr>
+                      <a:r>
+                        <a:rPr lang="en-US" sz="1050" dirty="0">
+                          <a:solidFill>
+                            <a:srgbClr val="1F2937"/>
+                          </a:solidFill>
+                          <a:latin typeface="Microsoft JhengHei" pitchFamily="34" charset="0"/>
+                          <a:ea typeface="Microsoft JhengHei" pitchFamily="34" charset="-122"/>
+                          <a:cs typeface="Microsoft JhengHei" pitchFamily="34" charset="-120"/>
+                        </a:rPr>
+                        <a:t>畫面顯示工具呼叫中：查持倉→查行情→查歷史→判斷模式</a:t>
+                      </a:r>
+                      <a:endParaRPr lang="en-US" sz="1050" dirty="0">
+                        <a:latin typeface="Microsoft JhengHei" charset="0"/>
+                        <a:ea typeface="Microsoft JhengHei" charset="0"/>
+                        <a:cs typeface="Microsoft JhengHei" charset="0"/>
+                      </a:endParaRPr>
+                    </a:p>
+                  </a:txBody>
+                  <a:tcPr marL="54864" marR="54864" marT="54864" marB="54864" anchor="ctr">
+                    <a:lnL w="9525" cap="flat" cmpd="sng" algn="ctr">
+                      <a:solidFill>
+                        <a:srgbClr val="D5DEF0"/>
+                      </a:solidFill>
+                      <a:prstDash val="solid"/>
+                      <a:round/>
+                      <a:headEnd type="none" w="med" len="med"/>
+                      <a:tailEnd type="none" w="med" len="med"/>
+                    </a:lnL>
+                    <a:lnR w="9525" cap="flat" cmpd="sng" algn="ctr">
+                      <a:solidFill>
+                        <a:srgbClr val="D5DEF0"/>
+                      </a:solidFill>
+                      <a:prstDash val="solid"/>
+                      <a:round/>
+                      <a:headEnd type="none" w="med" len="med"/>
+                      <a:tailEnd type="none" w="med" len="med"/>
+                    </a:lnR>
+                    <a:lnT w="9525" cap="flat" cmpd="sng" algn="ctr">
+                      <a:solidFill>
+                        <a:srgbClr val="D5DEF0"/>
+                      </a:solidFill>
+                      <a:prstDash val="solid"/>
+                      <a:round/>
+                      <a:headEnd type="none" w="med" len="med"/>
+                      <a:tailEnd type="none" w="med" len="med"/>
+                    </a:lnT>
+                    <a:lnB w="9525" cap="flat" cmpd="sng" algn="ctr">
+                      <a:solidFill>
+                        <a:srgbClr val="D5DEF0"/>
+                      </a:solidFill>
+                      <a:prstDash val="solid"/>
+                      <a:round/>
+                      <a:headEnd type="none" w="med" len="med"/>
+                      <a:tailEnd type="none" w="med" len="med"/>
+                    </a:lnB>
+                  </a:tcPr>
+                </a:tc>
+                <a:tc>
+                  <a:txBody>
+                    <a:bodyPr/>
+                    <a:lstStyle/>
+                    <a:p>
+                      <a:pPr indent="0" marL="0">
+                        <a:buNone/>
+                      </a:pPr>
+                      <a:r>
+                        <a:rPr lang="en-US" sz="1050" dirty="0">
+                          <a:solidFill>
+                            <a:srgbClr val="1F2937"/>
+                          </a:solidFill>
+                          <a:latin typeface="Microsoft JhengHei" pitchFamily="34" charset="0"/>
+                          <a:ea typeface="Microsoft JhengHei" pitchFamily="34" charset="-122"/>
+                          <a:cs typeface="Microsoft JhengHei" pitchFamily="34" charset="-120"/>
+                        </a:rPr>
+                        <a:t>AI 不是憑感覺，先查資料——看得見的推理</a:t>
+                      </a:r>
+                      <a:endParaRPr lang="en-US" sz="1050" dirty="0">
+                        <a:latin typeface="Microsoft JhengHei" charset="0"/>
+                        <a:ea typeface="Microsoft JhengHei" charset="0"/>
+                        <a:cs typeface="Microsoft JhengHei" charset="0"/>
+                      </a:endParaRPr>
+                    </a:p>
+                  </a:txBody>
+                  <a:tcPr marL="54864" marR="54864" marT="54864" marB="54864" anchor="ctr">
+                    <a:lnL w="9525" cap="flat" cmpd="sng" algn="ctr">
+                      <a:solidFill>
+                        <a:srgbClr val="D5DEF0"/>
+                      </a:solidFill>
+                      <a:prstDash val="solid"/>
+                      <a:round/>
+                      <a:headEnd type="none" w="med" len="med"/>
+                      <a:tailEnd type="none" w="med" len="med"/>
+                    </a:lnL>
+                    <a:lnR w="9525" cap="flat" cmpd="sng" algn="ctr">
+                      <a:solidFill>
+                        <a:srgbClr val="D5DEF0"/>
+                      </a:solidFill>
+                      <a:prstDash val="solid"/>
+                      <a:round/>
+                      <a:headEnd type="none" w="med" len="med"/>
+                      <a:tailEnd type="none" w="med" len="med"/>
+                    </a:lnR>
+                    <a:lnT w="9525" cap="flat" cmpd="sng" algn="ctr">
+                      <a:solidFill>
+                        <a:srgbClr val="D5DEF0"/>
+                      </a:solidFill>
+                      <a:prstDash val="solid"/>
+                      <a:round/>
+                      <a:headEnd type="none" w="med" len="med"/>
+                      <a:tailEnd type="none" w="med" len="med"/>
+                    </a:lnT>
+                    <a:lnB w="9525" cap="flat" cmpd="sng" algn="ctr">
+                      <a:solidFill>
+                        <a:srgbClr val="D5DEF0"/>
+                      </a:solidFill>
+                      <a:prstDash val="solid"/>
+                      <a:round/>
+                      <a:headEnd type="none" w="med" len="med"/>
+                      <a:tailEnd type="none" w="med" len="med"/>
+                    </a:lnB>
+                  </a:tcPr>
+                </a:tc>
+                <a:tc>
+                  <a:txBody>
+                    <a:bodyPr/>
+                    <a:lstStyle/>
+                    <a:p>
+                      <a:pPr indent="0" marL="0">
+                        <a:buNone/>
+                      </a:pPr>
+                      <a:r>
+                        <a:rPr lang="en-US" sz="1050" b="1" dirty="0">
+                          <a:solidFill>
+                            <a:srgbClr val="E8A13A"/>
+                          </a:solidFill>
+                          <a:latin typeface="Microsoft JhengHei" pitchFamily="34" charset="0"/>
+                          <a:ea typeface="Microsoft JhengHei" pitchFamily="34" charset="-122"/>
+                          <a:cs typeface="Microsoft JhengHei" pitchFamily="34" charset="-120"/>
+                        </a:rPr>
+                        <a:t>AI設計 15</a:t>
+                      </a:r>
+                      <a:endParaRPr lang="en-US" sz="1050" dirty="0">
+                        <a:latin typeface="Microsoft JhengHei" charset="0"/>
+                        <a:ea typeface="Microsoft JhengHei" charset="0"/>
+                        <a:cs typeface="Microsoft JhengHei" charset="0"/>
+                      </a:endParaRPr>
+                    </a:p>
+                  </a:txBody>
+                  <a:tcPr marL="54864" marR="54864" marT="54864" marB="54864" anchor="ctr">
+                    <a:lnL w="9525" cap="flat" cmpd="sng" algn="ctr">
+                      <a:solidFill>
+                        <a:srgbClr val="D5DEF0"/>
+                      </a:solidFill>
+                      <a:prstDash val="solid"/>
+                      <a:round/>
+                      <a:headEnd type="none" w="med" len="med"/>
+                      <a:tailEnd type="none" w="med" len="med"/>
+                    </a:lnL>
+                    <a:lnR w="9525" cap="flat" cmpd="sng" algn="ctr">
+                      <a:solidFill>
+                        <a:srgbClr val="D5DEF0"/>
+                      </a:solidFill>
+                      <a:prstDash val="solid"/>
+                      <a:round/>
+                      <a:headEnd type="none" w="med" len="med"/>
+                      <a:tailEnd type="none" w="med" len="med"/>
+                    </a:lnR>
+                    <a:lnT w="9525" cap="flat" cmpd="sng" algn="ctr">
+                      <a:solidFill>
+                        <a:srgbClr val="D5DEF0"/>
+                      </a:solidFill>
+                      <a:prstDash val="solid"/>
+                      <a:round/>
+                      <a:headEnd type="none" w="med" len="med"/>
+                      <a:tailEnd type="none" w="med" len="med"/>
+                    </a:lnT>
+                    <a:lnB w="9525" cap="flat" cmpd="sng" algn="ctr">
+                      <a:solidFill>
+                        <a:srgbClr val="D5DEF0"/>
+                      </a:solidFill>
+                      <a:prstDash val="solid"/>
+                      <a:round/>
+                      <a:headEnd type="none" w="med" len="med"/>
+                      <a:tailEnd type="none" w="med" len="med"/>
+                    </a:lnB>
+                  </a:tcPr>
+                </a:tc>
+              </a:tr>
+              <a:tr h="566928">
+                <a:tc>
+                  <a:txBody>
+                    <a:bodyPr/>
+                    <a:lstStyle/>
+                    <a:p>
+                      <a:pPr indent="0" marL="0">
+                        <a:buNone/>
+                      </a:pPr>
+                      <a:r>
+                        <a:rPr lang="en-US" sz="1050" b="1" dirty="0">
+                          <a:solidFill>
+                            <a:srgbClr val="16224D"/>
+                          </a:solidFill>
+                          <a:latin typeface="Microsoft JhengHei" pitchFamily="34" charset="0"/>
+                          <a:ea typeface="Microsoft JhengHei" pitchFamily="34" charset="-122"/>
+                          <a:cs typeface="Microsoft JhengHei" pitchFamily="34" charset="-120"/>
+                        </a:rPr>
+                        <a:t>3. 三方案</a:t>
+                      </a:r>
+                      <a:endParaRPr lang="en-US" sz="1050" dirty="0">
+                        <a:latin typeface="Microsoft JhengHei" charset="0"/>
+                        <a:ea typeface="Microsoft JhengHei" charset="0"/>
+                        <a:cs typeface="Microsoft JhengHei" charset="0"/>
+                      </a:endParaRPr>
+                    </a:p>
+                  </a:txBody>
+                  <a:tcPr marL="54864" marR="54864" marT="54864" marB="54864" anchor="ctr">
+                    <a:lnL w="9525" cap="flat" cmpd="sng" algn="ctr">
+                      <a:solidFill>
+                        <a:srgbClr val="D5DEF0"/>
+                      </a:solidFill>
+                      <a:prstDash val="solid"/>
+                      <a:round/>
+                      <a:headEnd type="none" w="med" len="med"/>
+                      <a:tailEnd type="none" w="med" len="med"/>
+                    </a:lnL>
+                    <a:lnR w="9525" cap="flat" cmpd="sng" algn="ctr">
+                      <a:solidFill>
+                        <a:srgbClr val="D5DEF0"/>
+                      </a:solidFill>
+                      <a:prstDash val="solid"/>
+                      <a:round/>
+                      <a:headEnd type="none" w="med" len="med"/>
+                      <a:tailEnd type="none" w="med" len="med"/>
+                    </a:lnR>
+                    <a:lnT w="9525" cap="flat" cmpd="sng" algn="ctr">
+                      <a:solidFill>
+                        <a:srgbClr val="D5DEF0"/>
+                      </a:solidFill>
+                      <a:prstDash val="solid"/>
+                      <a:round/>
+                      <a:headEnd type="none" w="med" len="med"/>
+                      <a:tailEnd type="none" w="med" len="med"/>
+                    </a:lnT>
+                    <a:lnB w="9525" cap="flat" cmpd="sng" algn="ctr">
+                      <a:solidFill>
+                        <a:srgbClr val="D5DEF0"/>
+                      </a:solidFill>
+                      <a:prstDash val="solid"/>
+                      <a:round/>
+                      <a:headEnd type="none" w="med" len="med"/>
+                      <a:tailEnd type="none" w="med" len="med"/>
+                    </a:lnB>
+                  </a:tcPr>
+                </a:tc>
+                <a:tc>
+                  <a:txBody>
+                    <a:bodyPr/>
+                    <a:lstStyle/>
+                    <a:p>
+                      <a:pPr indent="0" marL="0">
+                        <a:buNone/>
+                      </a:pPr>
+                      <a:r>
+                        <a:rPr lang="en-US" sz="1050" dirty="0">
+                          <a:solidFill>
+                            <a:srgbClr val="1F2937"/>
+                          </a:solidFill>
+                          <a:latin typeface="Microsoft JhengHei" pitchFamily="34" charset="0"/>
+                          <a:ea typeface="Microsoft JhengHei" pitchFamily="34" charset="-122"/>
+                          <a:cs typeface="Microsoft JhengHei" pitchFamily="34" charset="-120"/>
+                        </a:rPr>
+                        <a:t>三張卡：賣25%／全賣／暫停，各附損益・手續費・集中度</a:t>
+                      </a:r>
+                      <a:endParaRPr lang="en-US" sz="1050" dirty="0">
+                        <a:latin typeface="Microsoft JhengHei" charset="0"/>
+                        <a:ea typeface="Microsoft JhengHei" charset="0"/>
+                        <a:cs typeface="Microsoft JhengHei" charset="0"/>
+                      </a:endParaRPr>
+                    </a:p>
+                  </a:txBody>
+                  <a:tcPr marL="54864" marR="54864" marT="54864" marB="54864" anchor="ctr">
+                    <a:lnL w="9525" cap="flat" cmpd="sng" algn="ctr">
+                      <a:solidFill>
+                        <a:srgbClr val="D5DEF0"/>
+                      </a:solidFill>
+                      <a:prstDash val="solid"/>
+                      <a:round/>
+                      <a:headEnd type="none" w="med" len="med"/>
+                      <a:tailEnd type="none" w="med" len="med"/>
+                    </a:lnL>
+                    <a:lnR w="9525" cap="flat" cmpd="sng" algn="ctr">
+                      <a:solidFill>
+                        <a:srgbClr val="D5DEF0"/>
+                      </a:solidFill>
+                      <a:prstDash val="solid"/>
+                      <a:round/>
+                      <a:headEnd type="none" w="med" len="med"/>
+                      <a:tailEnd type="none" w="med" len="med"/>
+                    </a:lnR>
+                    <a:lnT w="9525" cap="flat" cmpd="sng" algn="ctr">
+                      <a:solidFill>
+                        <a:srgbClr val="D5DEF0"/>
+                      </a:solidFill>
+                      <a:prstDash val="solid"/>
+                      <a:round/>
+                      <a:headEnd type="none" w="med" len="med"/>
+                      <a:tailEnd type="none" w="med" len="med"/>
+                    </a:lnT>
+                    <a:lnB w="9525" cap="flat" cmpd="sng" algn="ctr">
+                      <a:solidFill>
+                        <a:srgbClr val="D5DEF0"/>
+                      </a:solidFill>
+                      <a:prstDash val="solid"/>
+                      <a:round/>
+                      <a:headEnd type="none" w="med" len="med"/>
+                      <a:tailEnd type="none" w="med" len="med"/>
+                    </a:lnB>
+                  </a:tcPr>
+                </a:tc>
+                <a:tc>
+                  <a:txBody>
+                    <a:bodyPr/>
+                    <a:lstStyle/>
+                    <a:p>
+                      <a:pPr indent="0" marL="0">
+                        <a:buNone/>
+                      </a:pPr>
+                      <a:r>
+                        <a:rPr lang="en-US" sz="1050" dirty="0">
+                          <a:solidFill>
+                            <a:srgbClr val="1F2937"/>
+                          </a:solidFill>
+                          <a:latin typeface="Microsoft JhengHei" pitchFamily="34" charset="0"/>
+                          <a:ea typeface="Microsoft JhengHei" pitchFamily="34" charset="-122"/>
+                          <a:cs typeface="Microsoft JhengHei" pitchFamily="34" charset="-120"/>
+                        </a:rPr>
+                        <a:t>數字由程式算，AI 只負責講人話</a:t>
+                      </a:r>
+                      <a:endParaRPr lang="en-US" sz="1050" dirty="0">
+                        <a:latin typeface="Microsoft JhengHei" charset="0"/>
+                        <a:ea typeface="Microsoft JhengHei" charset="0"/>
+                        <a:cs typeface="Microsoft JhengHei" charset="0"/>
+                      </a:endParaRPr>
+                    </a:p>
+                  </a:txBody>
+                  <a:tcPr marL="54864" marR="54864" marT="54864" marB="54864" anchor="ctr">
+                    <a:lnL w="9525" cap="flat" cmpd="sng" algn="ctr">
+                      <a:solidFill>
+                        <a:srgbClr val="D5DEF0"/>
+                      </a:solidFill>
+                      <a:prstDash val="solid"/>
+                      <a:round/>
+                      <a:headEnd type="none" w="med" len="med"/>
+                      <a:tailEnd type="none" w="med" len="med"/>
+                    </a:lnL>
+                    <a:lnR w="9525" cap="flat" cmpd="sng" algn="ctr">
+                      <a:solidFill>
+                        <a:srgbClr val="D5DEF0"/>
+                      </a:solidFill>
+                      <a:prstDash val="solid"/>
+                      <a:round/>
+                      <a:headEnd type="none" w="med" len="med"/>
+                      <a:tailEnd type="none" w="med" len="med"/>
+                    </a:lnR>
+                    <a:lnT w="9525" cap="flat" cmpd="sng" algn="ctr">
+                      <a:solidFill>
+                        <a:srgbClr val="D5DEF0"/>
+                      </a:solidFill>
+                      <a:prstDash val="solid"/>
+                      <a:round/>
+                      <a:headEnd type="none" w="med" len="med"/>
+                      <a:tailEnd type="none" w="med" len="med"/>
+                    </a:lnT>
+                    <a:lnB w="9525" cap="flat" cmpd="sng" algn="ctr">
+                      <a:solidFill>
+                        <a:srgbClr val="D5DEF0"/>
+                      </a:solidFill>
+                      <a:prstDash val="solid"/>
+                      <a:round/>
+                      <a:headEnd type="none" w="med" len="med"/>
+                      <a:tailEnd type="none" w="med" len="med"/>
+                    </a:lnB>
+                  </a:tcPr>
+                </a:tc>
+                <a:tc>
+                  <a:txBody>
+                    <a:bodyPr/>
+                    <a:lstStyle/>
+                    <a:p>
+                      <a:pPr indent="0" marL="0">
+                        <a:buNone/>
+                      </a:pPr>
+                      <a:r>
+                        <a:rPr lang="en-US" sz="1050" b="1" dirty="0">
+                          <a:solidFill>
+                            <a:srgbClr val="E8A13A"/>
+                          </a:solidFill>
+                          <a:latin typeface="Microsoft JhengHei" pitchFamily="34" charset="0"/>
+                          <a:ea typeface="Microsoft JhengHei" pitchFamily="34" charset="-122"/>
+                          <a:cs typeface="Microsoft JhengHei" pitchFamily="34" charset="-120"/>
+                        </a:rPr>
+                        <a:t>創意+AI+可行性</a:t>
+                      </a:r>
+                      <a:endParaRPr lang="en-US" sz="1050" dirty="0">
+                        <a:latin typeface="Microsoft JhengHei" charset="0"/>
+                        <a:ea typeface="Microsoft JhengHei" charset="0"/>
+                        <a:cs typeface="Microsoft JhengHei" charset="0"/>
+                      </a:endParaRPr>
+                    </a:p>
+                  </a:txBody>
+                  <a:tcPr marL="54864" marR="54864" marT="54864" marB="54864" anchor="ctr">
+                    <a:lnL w="9525" cap="flat" cmpd="sng" algn="ctr">
+                      <a:solidFill>
+                        <a:srgbClr val="D5DEF0"/>
+                      </a:solidFill>
+                      <a:prstDash val="solid"/>
+                      <a:round/>
+                      <a:headEnd type="none" w="med" len="med"/>
+                      <a:tailEnd type="none" w="med" len="med"/>
+                    </a:lnL>
+                    <a:lnR w="9525" cap="flat" cmpd="sng" algn="ctr">
+                      <a:solidFill>
+                        <a:srgbClr val="D5DEF0"/>
+                      </a:solidFill>
+                      <a:prstDash val="solid"/>
+                      <a:round/>
+                      <a:headEnd type="none" w="med" len="med"/>
+                      <a:tailEnd type="none" w="med" len="med"/>
+                    </a:lnR>
+                    <a:lnT w="9525" cap="flat" cmpd="sng" algn="ctr">
+                      <a:solidFill>
+                        <a:srgbClr val="D5DEF0"/>
+                      </a:solidFill>
+                      <a:prstDash val="solid"/>
+                      <a:round/>
+                      <a:headEnd type="none" w="med" len="med"/>
+                      <a:tailEnd type="none" w="med" len="med"/>
+                    </a:lnT>
+                    <a:lnB w="9525" cap="flat" cmpd="sng" algn="ctr">
+                      <a:solidFill>
+                        <a:srgbClr val="D5DEF0"/>
+                      </a:solidFill>
+                      <a:prstDash val="solid"/>
+                      <a:round/>
+                      <a:headEnd type="none" w="med" len="med"/>
+                      <a:tailEnd type="none" w="med" len="med"/>
+                    </a:lnB>
+                  </a:tcPr>
+                </a:tc>
+              </a:tr>
+              <a:tr h="566928">
+                <a:tc>
+                  <a:txBody>
+                    <a:bodyPr/>
+                    <a:lstStyle/>
+                    <a:p>
+                      <a:pPr indent="0" marL="0">
+                        <a:buNone/>
+                      </a:pPr>
+                      <a:r>
+                        <a:rPr lang="en-US" sz="1050" b="1" dirty="0">
+                          <a:solidFill>
+                            <a:srgbClr val="16224D"/>
+                          </a:solidFill>
+                          <a:latin typeface="Microsoft JhengHei" pitchFamily="34" charset="0"/>
+                          <a:ea typeface="Microsoft JhengHei" pitchFamily="34" charset="-122"/>
+                          <a:cs typeface="Microsoft JhengHei" pitchFamily="34" charset="-120"/>
+                        </a:rPr>
+                        <a:t>4. 恐慌提醒</a:t>
+                      </a:r>
+                      <a:endParaRPr lang="en-US" sz="1050" dirty="0">
+                        <a:latin typeface="Microsoft JhengHei" charset="0"/>
+                        <a:ea typeface="Microsoft JhengHei" charset="0"/>
+                        <a:cs typeface="Microsoft JhengHei" charset="0"/>
+                      </a:endParaRPr>
+                    </a:p>
+                  </a:txBody>
+                  <a:tcPr marL="54864" marR="54864" marT="54864" marB="54864" anchor="ctr">
+                    <a:lnL w="9525" cap="flat" cmpd="sng" algn="ctr">
+                      <a:solidFill>
+                        <a:srgbClr val="D5DEF0"/>
+                      </a:solidFill>
+                      <a:prstDash val="solid"/>
+                      <a:round/>
+                      <a:headEnd type="none" w="med" len="med"/>
+                      <a:tailEnd type="none" w="med" len="med"/>
+                    </a:lnL>
+                    <a:lnR w="9525" cap="flat" cmpd="sng" algn="ctr">
+                      <a:solidFill>
+                        <a:srgbClr val="D5DEF0"/>
+                      </a:solidFill>
+                      <a:prstDash val="solid"/>
+                      <a:round/>
+                      <a:headEnd type="none" w="med" len="med"/>
+                      <a:tailEnd type="none" w="med" len="med"/>
+                    </a:lnR>
+                    <a:lnT w="9525" cap="flat" cmpd="sng" algn="ctr">
+                      <a:solidFill>
+                        <a:srgbClr val="D5DEF0"/>
+                      </a:solidFill>
+                      <a:prstDash val="solid"/>
+                      <a:round/>
+                      <a:headEnd type="none" w="med" len="med"/>
+                      <a:tailEnd type="none" w="med" len="med"/>
+                    </a:lnT>
+                    <a:lnB w="9525" cap="flat" cmpd="sng" algn="ctr">
+                      <a:solidFill>
+                        <a:srgbClr val="D5DEF0"/>
+                      </a:solidFill>
+                      <a:prstDash val="solid"/>
+                      <a:round/>
+                      <a:headEnd type="none" w="med" len="med"/>
+                      <a:tailEnd type="none" w="med" len="med"/>
+                    </a:lnB>
+                  </a:tcPr>
+                </a:tc>
+                <a:tc>
+                  <a:txBody>
+                    <a:bodyPr/>
+                    <a:lstStyle/>
+                    <a:p>
+                      <a:pPr indent="0" marL="0">
+                        <a:buNone/>
+                      </a:pPr>
+                      <a:r>
+                        <a:rPr lang="en-US" sz="1050" dirty="0">
+                          <a:solidFill>
+                            <a:srgbClr val="1F2937"/>
+                          </a:solidFill>
+                          <a:latin typeface="Microsoft JhengHei" pitchFamily="34" charset="0"/>
+                          <a:ea typeface="Microsoft JhengHei" pitchFamily="34" charset="-122"/>
+                          <a:cs typeface="Microsoft JhengHei" pitchFamily="34" charset="-120"/>
+                        </a:rPr>
+                        <a:t>「1/8 你也是這樣，那次少賺 31 萬」</a:t>
+                      </a:r>
+                      <a:endParaRPr lang="en-US" sz="1050" dirty="0">
+                        <a:latin typeface="Microsoft JhengHei" charset="0"/>
+                        <a:ea typeface="Microsoft JhengHei" charset="0"/>
+                        <a:cs typeface="Microsoft JhengHei" charset="0"/>
+                      </a:endParaRPr>
+                    </a:p>
+                  </a:txBody>
+                  <a:tcPr marL="54864" marR="54864" marT="54864" marB="54864" anchor="ctr">
+                    <a:lnL w="9525" cap="flat" cmpd="sng" algn="ctr">
+                      <a:solidFill>
+                        <a:srgbClr val="D5DEF0"/>
+                      </a:solidFill>
+                      <a:prstDash val="solid"/>
+                      <a:round/>
+                      <a:headEnd type="none" w="med" len="med"/>
+                      <a:tailEnd type="none" w="med" len="med"/>
+                    </a:lnL>
+                    <a:lnR w="9525" cap="flat" cmpd="sng" algn="ctr">
+                      <a:solidFill>
+                        <a:srgbClr val="D5DEF0"/>
+                      </a:solidFill>
+                      <a:prstDash val="solid"/>
+                      <a:round/>
+                      <a:headEnd type="none" w="med" len="med"/>
+                      <a:tailEnd type="none" w="med" len="med"/>
+                    </a:lnR>
+                    <a:lnT w="9525" cap="flat" cmpd="sng" algn="ctr">
+                      <a:solidFill>
+                        <a:srgbClr val="D5DEF0"/>
+                      </a:solidFill>
+                      <a:prstDash val="solid"/>
+                      <a:round/>
+                      <a:headEnd type="none" w="med" len="med"/>
+                      <a:tailEnd type="none" w="med" len="med"/>
+                    </a:lnT>
+                    <a:lnB w="9525" cap="flat" cmpd="sng" algn="ctr">
+                      <a:solidFill>
+                        <a:srgbClr val="D5DEF0"/>
+                      </a:solidFill>
+                      <a:prstDash val="solid"/>
+                      <a:round/>
+                      <a:headEnd type="none" w="med" len="med"/>
+                      <a:tailEnd type="none" w="med" len="med"/>
+                    </a:lnB>
+                  </a:tcPr>
+                </a:tc>
+                <a:tc>
+                  <a:txBody>
+                    <a:bodyPr/>
+                    <a:lstStyle/>
+                    <a:p>
+                      <a:pPr indent="0" marL="0">
+                        <a:buNone/>
+                      </a:pPr>
+                      <a:r>
+                        <a:rPr lang="en-US" sz="1050" dirty="0">
+                          <a:solidFill>
+                            <a:srgbClr val="1F2937"/>
+                          </a:solidFill>
+                          <a:latin typeface="Microsoft JhengHei" pitchFamily="34" charset="0"/>
+                          <a:ea typeface="Microsoft JhengHei" pitchFamily="34" charset="-122"/>
+                          <a:cs typeface="Microsoft JhengHei" pitchFamily="34" charset="-120"/>
+                        </a:rPr>
+                        <a:t>用使用者自己的歷史說服他——全場最重一擊</a:t>
+                      </a:r>
+                      <a:endParaRPr lang="en-US" sz="1050" dirty="0">
+                        <a:latin typeface="Microsoft JhengHei" charset="0"/>
+                        <a:ea typeface="Microsoft JhengHei" charset="0"/>
+                        <a:cs typeface="Microsoft JhengHei" charset="0"/>
+                      </a:endParaRPr>
+                    </a:p>
+                  </a:txBody>
+                  <a:tcPr marL="54864" marR="54864" marT="54864" marB="54864" anchor="ctr">
+                    <a:lnL w="9525" cap="flat" cmpd="sng" algn="ctr">
+                      <a:solidFill>
+                        <a:srgbClr val="D5DEF0"/>
+                      </a:solidFill>
+                      <a:prstDash val="solid"/>
+                      <a:round/>
+                      <a:headEnd type="none" w="med" len="med"/>
+                      <a:tailEnd type="none" w="med" len="med"/>
+                    </a:lnL>
+                    <a:lnR w="9525" cap="flat" cmpd="sng" algn="ctr">
+                      <a:solidFill>
+                        <a:srgbClr val="D5DEF0"/>
+                      </a:solidFill>
+                      <a:prstDash val="solid"/>
+                      <a:round/>
+                      <a:headEnd type="none" w="med" len="med"/>
+                      <a:tailEnd type="none" w="med" len="med"/>
+                    </a:lnR>
+                    <a:lnT w="9525" cap="flat" cmpd="sng" algn="ctr">
+                      <a:solidFill>
+                        <a:srgbClr val="D5DEF0"/>
+                      </a:solidFill>
+                      <a:prstDash val="solid"/>
+                      <a:round/>
+                      <a:headEnd type="none" w="med" len="med"/>
+                      <a:tailEnd type="none" w="med" len="med"/>
+                    </a:lnT>
+                    <a:lnB w="9525" cap="flat" cmpd="sng" algn="ctr">
+                      <a:solidFill>
+                        <a:srgbClr val="D5DEF0"/>
+                      </a:solidFill>
+                      <a:prstDash val="solid"/>
+                      <a:round/>
+                      <a:headEnd type="none" w="med" len="med"/>
+                      <a:tailEnd type="none" w="med" len="med"/>
+                    </a:lnB>
+                  </a:tcPr>
+                </a:tc>
+                <a:tc>
+                  <a:txBody>
+                    <a:bodyPr/>
+                    <a:lstStyle/>
+                    <a:p>
+                      <a:pPr indent="0" marL="0">
+                        <a:buNone/>
+                      </a:pPr>
+                      <a:r>
+                        <a:rPr lang="en-US" sz="1050" b="1" dirty="0">
+                          <a:solidFill>
+                            <a:srgbClr val="E8A13A"/>
+                          </a:solidFill>
+                          <a:latin typeface="Microsoft JhengHei" pitchFamily="34" charset="0"/>
+                          <a:ea typeface="Microsoft JhengHei" pitchFamily="34" charset="-122"/>
+                          <a:cs typeface="Microsoft JhengHei" pitchFamily="34" charset="-120"/>
+                        </a:rPr>
+                        <a:t>創意 25</a:t>
+                      </a:r>
+                      <a:endParaRPr lang="en-US" sz="1050" dirty="0">
+                        <a:latin typeface="Microsoft JhengHei" charset="0"/>
+                        <a:ea typeface="Microsoft JhengHei" charset="0"/>
+                        <a:cs typeface="Microsoft JhengHei" charset="0"/>
+                      </a:endParaRPr>
+                    </a:p>
+                  </a:txBody>
+                  <a:tcPr marL="54864" marR="54864" marT="54864" marB="54864" anchor="ctr">
+                    <a:lnL w="9525" cap="flat" cmpd="sng" algn="ctr">
+                      <a:solidFill>
+                        <a:srgbClr val="D5DEF0"/>
+                      </a:solidFill>
+                      <a:prstDash val="solid"/>
+                      <a:round/>
+                      <a:headEnd type="none" w="med" len="med"/>
+                      <a:tailEnd type="none" w="med" len="med"/>
+                    </a:lnL>
+                    <a:lnR w="9525" cap="flat" cmpd="sng" algn="ctr">
+                      <a:solidFill>
+                        <a:srgbClr val="D5DEF0"/>
+                      </a:solidFill>
+                      <a:prstDash val="solid"/>
+                      <a:round/>
+                      <a:headEnd type="none" w="med" len="med"/>
+                      <a:tailEnd type="none" w="med" len="med"/>
+                    </a:lnR>
+                    <a:lnT w="9525" cap="flat" cmpd="sng" algn="ctr">
+                      <a:solidFill>
+                        <a:srgbClr val="D5DEF0"/>
+                      </a:solidFill>
+                      <a:prstDash val="solid"/>
+                      <a:round/>
+                      <a:headEnd type="none" w="med" len="med"/>
+                      <a:tailEnd type="none" w="med" len="med"/>
+                    </a:lnT>
+                    <a:lnB w="9525" cap="flat" cmpd="sng" algn="ctr">
+                      <a:solidFill>
+                        <a:srgbClr val="D5DEF0"/>
+                      </a:solidFill>
+                      <a:prstDash val="solid"/>
+                      <a:round/>
+                      <a:headEnd type="none" w="med" len="med"/>
+                      <a:tailEnd type="none" w="med" len="med"/>
+                    </a:lnB>
+                  </a:tcPr>
+                </a:tc>
+              </a:tr>
+              <a:tr h="566928">
+                <a:tc>
+                  <a:txBody>
+                    <a:bodyPr/>
+                    <a:lstStyle/>
+                    <a:p>
+                      <a:pPr indent="0" marL="0">
+                        <a:buNone/>
+                      </a:pPr>
+                      <a:r>
+                        <a:rPr lang="en-US" sz="1050" b="1" dirty="0">
+                          <a:solidFill>
+                            <a:srgbClr val="16224D"/>
+                          </a:solidFill>
+                          <a:latin typeface="Microsoft JhengHei" pitchFamily="34" charset="0"/>
+                          <a:ea typeface="Microsoft JhengHei" pitchFamily="34" charset="-122"/>
+                          <a:cs typeface="Microsoft JhengHei" pitchFamily="34" charset="-120"/>
+                        </a:rPr>
+                        <a:t>5. 確認→成交</a:t>
+                      </a:r>
+                      <a:endParaRPr lang="en-US" sz="1050" dirty="0">
+                        <a:latin typeface="Microsoft JhengHei" charset="0"/>
+                        <a:ea typeface="Microsoft JhengHei" charset="0"/>
+                        <a:cs typeface="Microsoft JhengHei" charset="0"/>
+                      </a:endParaRPr>
+                    </a:p>
+                  </a:txBody>
+                  <a:tcPr marL="54864" marR="54864" marT="54864" marB="54864" anchor="ctr">
+                    <a:lnL w="9525" cap="flat" cmpd="sng" algn="ctr">
+                      <a:solidFill>
+                        <a:srgbClr val="D5DEF0"/>
+                      </a:solidFill>
+                      <a:prstDash val="solid"/>
+                      <a:round/>
+                      <a:headEnd type="none" w="med" len="med"/>
+                      <a:tailEnd type="none" w="med" len="med"/>
+                    </a:lnL>
+                    <a:lnR w="9525" cap="flat" cmpd="sng" algn="ctr">
+                      <a:solidFill>
+                        <a:srgbClr val="D5DEF0"/>
+                      </a:solidFill>
+                      <a:prstDash val="solid"/>
+                      <a:round/>
+                      <a:headEnd type="none" w="med" len="med"/>
+                      <a:tailEnd type="none" w="med" len="med"/>
+                    </a:lnR>
+                    <a:lnT w="9525" cap="flat" cmpd="sng" algn="ctr">
+                      <a:solidFill>
+                        <a:srgbClr val="D5DEF0"/>
+                      </a:solidFill>
+                      <a:prstDash val="solid"/>
+                      <a:round/>
+                      <a:headEnd type="none" w="med" len="med"/>
+                      <a:tailEnd type="none" w="med" len="med"/>
+                    </a:lnT>
+                    <a:lnB w="9525" cap="flat" cmpd="sng" algn="ctr">
+                      <a:solidFill>
+                        <a:srgbClr val="D5DEF0"/>
+                      </a:solidFill>
+                      <a:prstDash val="solid"/>
+                      <a:round/>
+                      <a:headEnd type="none" w="med" len="med"/>
+                      <a:tailEnd type="none" w="med" len="med"/>
+                    </a:lnB>
+                  </a:tcPr>
+                </a:tc>
+                <a:tc>
+                  <a:txBody>
+                    <a:bodyPr/>
+                    <a:lstStyle/>
+                    <a:p>
+                      <a:pPr indent="0" marL="0">
+                        <a:buNone/>
+                      </a:pPr>
+                      <a:r>
+                        <a:rPr lang="en-US" sz="1050" dirty="0">
+                          <a:solidFill>
+                            <a:srgbClr val="1F2937"/>
+                          </a:solidFill>
+                          <a:latin typeface="Microsoft JhengHei" pitchFamily="34" charset="0"/>
+                          <a:ea typeface="Microsoft JhengHei" pitchFamily="34" charset="-122"/>
+                          <a:cs typeface="Microsoft JhengHei" pitchFamily="34" charset="-120"/>
+                        </a:rPr>
+                        <a:t>選「賣25%」→ 確認卡 → 按下確認 → 真實成交、健檢更新</a:t>
+                      </a:r>
+                      <a:endParaRPr lang="en-US" sz="1050" dirty="0">
+                        <a:latin typeface="Microsoft JhengHei" charset="0"/>
+                        <a:ea typeface="Microsoft JhengHei" charset="0"/>
+                        <a:cs typeface="Microsoft JhengHei" charset="0"/>
+                      </a:endParaRPr>
+                    </a:p>
+                  </a:txBody>
+                  <a:tcPr marL="54864" marR="54864" marT="54864" marB="54864" anchor="ctr">
+                    <a:lnL w="9525" cap="flat" cmpd="sng" algn="ctr">
+                      <a:solidFill>
+                        <a:srgbClr val="D5DEF0"/>
+                      </a:solidFill>
+                      <a:prstDash val="solid"/>
+                      <a:round/>
+                      <a:headEnd type="none" w="med" len="med"/>
+                      <a:tailEnd type="none" w="med" len="med"/>
+                    </a:lnL>
+                    <a:lnR w="9525" cap="flat" cmpd="sng" algn="ctr">
+                      <a:solidFill>
+                        <a:srgbClr val="D5DEF0"/>
+                      </a:solidFill>
+                      <a:prstDash val="solid"/>
+                      <a:round/>
+                      <a:headEnd type="none" w="med" len="med"/>
+                      <a:tailEnd type="none" w="med" len="med"/>
+                    </a:lnR>
+                    <a:lnT w="9525" cap="flat" cmpd="sng" algn="ctr">
+                      <a:solidFill>
+                        <a:srgbClr val="D5DEF0"/>
+                      </a:solidFill>
+                      <a:prstDash val="solid"/>
+                      <a:round/>
+                      <a:headEnd type="none" w="med" len="med"/>
+                      <a:tailEnd type="none" w="med" len="med"/>
+                    </a:lnT>
+                    <a:lnB w="9525" cap="flat" cmpd="sng" algn="ctr">
+                      <a:solidFill>
+                        <a:srgbClr val="D5DEF0"/>
+                      </a:solidFill>
+                      <a:prstDash val="solid"/>
+                      <a:round/>
+                      <a:headEnd type="none" w="med" len="med"/>
+                      <a:tailEnd type="none" w="med" len="med"/>
+                    </a:lnB>
+                  </a:tcPr>
+                </a:tc>
+                <a:tc>
+                  <a:txBody>
+                    <a:bodyPr/>
+                    <a:lstStyle/>
+                    <a:p>
+                      <a:pPr indent="0" marL="0">
+                        <a:buNone/>
+                      </a:pPr>
+                      <a:r>
+                        <a:rPr lang="en-US" sz="1050" dirty="0">
+                          <a:solidFill>
+                            <a:srgbClr val="1F2937"/>
+                          </a:solidFill>
+                          <a:latin typeface="Microsoft JhengHei" pitchFamily="34" charset="0"/>
+                          <a:ea typeface="Microsoft JhengHei" pitchFamily="34" charset="-122"/>
+                          <a:cs typeface="Microsoft JhengHei" pitchFamily="34" charset="-120"/>
+                        </a:rPr>
+                        <a:t>AI 有手但方向盤在人手上；真下單（Lv2）</a:t>
+                      </a:r>
+                      <a:endParaRPr lang="en-US" sz="1050" dirty="0">
+                        <a:latin typeface="Microsoft JhengHei" charset="0"/>
+                        <a:ea typeface="Microsoft JhengHei" charset="0"/>
+                        <a:cs typeface="Microsoft JhengHei" charset="0"/>
+                      </a:endParaRPr>
+                    </a:p>
+                  </a:txBody>
+                  <a:tcPr marL="54864" marR="54864" marT="54864" marB="54864" anchor="ctr">
+                    <a:lnL w="9525" cap="flat" cmpd="sng" algn="ctr">
+                      <a:solidFill>
+                        <a:srgbClr val="D5DEF0"/>
+                      </a:solidFill>
+                      <a:prstDash val="solid"/>
+                      <a:round/>
+                      <a:headEnd type="none" w="med" len="med"/>
+                      <a:tailEnd type="none" w="med" len="med"/>
+                    </a:lnL>
+                    <a:lnR w="9525" cap="flat" cmpd="sng" algn="ctr">
+                      <a:solidFill>
+                        <a:srgbClr val="D5DEF0"/>
+                      </a:solidFill>
+                      <a:prstDash val="solid"/>
+                      <a:round/>
+                      <a:headEnd type="none" w="med" len="med"/>
+                      <a:tailEnd type="none" w="med" len="med"/>
+                    </a:lnR>
+                    <a:lnT w="9525" cap="flat" cmpd="sng" algn="ctr">
+                      <a:solidFill>
+                        <a:srgbClr val="D5DEF0"/>
+                      </a:solidFill>
+                      <a:prstDash val="solid"/>
+                      <a:round/>
+                      <a:headEnd type="none" w="med" len="med"/>
+                      <a:tailEnd type="none" w="med" len="med"/>
+                    </a:lnT>
+                    <a:lnB w="9525" cap="flat" cmpd="sng" algn="ctr">
+                      <a:solidFill>
+                        <a:srgbClr val="D5DEF0"/>
+                      </a:solidFill>
+                      <a:prstDash val="solid"/>
+                      <a:round/>
+                      <a:headEnd type="none" w="med" len="med"/>
+                      <a:tailEnd type="none" w="med" len="med"/>
+                    </a:lnB>
+                  </a:tcPr>
+                </a:tc>
+                <a:tc>
+                  <a:txBody>
+                    <a:bodyPr/>
+                    <a:lstStyle/>
+                    <a:p>
+                      <a:pPr indent="0" marL="0">
+                        <a:buNone/>
+                      </a:pPr>
+                      <a:r>
+                        <a:rPr lang="en-US" sz="1050" b="1" dirty="0">
+                          <a:solidFill>
+                            <a:srgbClr val="E8A13A"/>
+                          </a:solidFill>
+                          <a:latin typeface="Microsoft JhengHei" pitchFamily="34" charset="0"/>
+                          <a:ea typeface="Microsoft JhengHei" pitchFamily="34" charset="-122"/>
+                          <a:cs typeface="Microsoft JhengHei" pitchFamily="34" charset="-120"/>
+                        </a:rPr>
+                        <a:t>加分+5/商業</a:t>
+                      </a:r>
+                      <a:endParaRPr lang="en-US" sz="1050" dirty="0">
+                        <a:latin typeface="Microsoft JhengHei" charset="0"/>
+                        <a:ea typeface="Microsoft JhengHei" charset="0"/>
+                        <a:cs typeface="Microsoft JhengHei" charset="0"/>
+                      </a:endParaRPr>
+                    </a:p>
+                  </a:txBody>
+                  <a:tcPr marL="54864" marR="54864" marT="54864" marB="54864" anchor="ctr">
+                    <a:lnL w="9525" cap="flat" cmpd="sng" algn="ctr">
+                      <a:solidFill>
+                        <a:srgbClr val="D5DEF0"/>
+                      </a:solidFill>
+                      <a:prstDash val="solid"/>
+                      <a:round/>
+                      <a:headEnd type="none" w="med" len="med"/>
+                      <a:tailEnd type="none" w="med" len="med"/>
+                    </a:lnL>
+                    <a:lnR w="9525" cap="flat" cmpd="sng" algn="ctr">
+                      <a:solidFill>
+                        <a:srgbClr val="D5DEF0"/>
+                      </a:solidFill>
+                      <a:prstDash val="solid"/>
+                      <a:round/>
+                      <a:headEnd type="none" w="med" len="med"/>
+                      <a:tailEnd type="none" w="med" len="med"/>
+                    </a:lnR>
+                    <a:lnT w="9525" cap="flat" cmpd="sng" algn="ctr">
+                      <a:solidFill>
+                        <a:srgbClr val="D5DEF0"/>
+                      </a:solidFill>
+                      <a:prstDash val="solid"/>
+                      <a:round/>
+                      <a:headEnd type="none" w="med" len="med"/>
+                      <a:tailEnd type="none" w="med" len="med"/>
+                    </a:lnT>
+                    <a:lnB w="9525" cap="flat" cmpd="sng" algn="ctr">
+                      <a:solidFill>
+                        <a:srgbClr val="D5DEF0"/>
+                      </a:solidFill>
+                      <a:prstDash val="solid"/>
+                      <a:round/>
+                      <a:headEnd type="none" w="med" len="med"/>
+                      <a:tailEnd type="none" w="med" len="med"/>
+                    </a:lnB>
+                  </a:tcPr>
+                </a:tc>
+              </a:tr>
+              <a:tr h="566928">
+                <a:tc>
+                  <a:txBody>
+                    <a:bodyPr/>
+                    <a:lstStyle/>
+                    <a:p>
+                      <a:pPr indent="0" marL="0">
+                        <a:buNone/>
+                      </a:pPr>
+                      <a:r>
+                        <a:rPr lang="en-US" sz="1050" b="1" dirty="0">
+                          <a:solidFill>
+                            <a:srgbClr val="16224D"/>
+                          </a:solidFill>
+                          <a:latin typeface="Microsoft JhengHei" pitchFamily="34" charset="0"/>
+                          <a:ea typeface="Microsoft JhengHei" pitchFamily="34" charset="-122"/>
+                          <a:cs typeface="Microsoft JhengHei" pitchFamily="34" charset="-120"/>
+                        </a:rPr>
+                        <a:t>6. 收尾</a:t>
+                      </a:r>
+                      <a:endParaRPr lang="en-US" sz="1050" dirty="0">
+                        <a:latin typeface="Microsoft JhengHei" charset="0"/>
+                        <a:ea typeface="Microsoft JhengHei" charset="0"/>
+                        <a:cs typeface="Microsoft JhengHei" charset="0"/>
+                      </a:endParaRPr>
+                    </a:p>
+                  </a:txBody>
+                  <a:tcPr marL="54864" marR="54864" marT="54864" marB="54864" anchor="ctr">
+                    <a:lnL w="9525" cap="flat" cmpd="sng" algn="ctr">
+                      <a:solidFill>
+                        <a:srgbClr val="D5DEF0"/>
+                      </a:solidFill>
+                      <a:prstDash val="solid"/>
+                      <a:round/>
+                      <a:headEnd type="none" w="med" len="med"/>
+                      <a:tailEnd type="none" w="med" len="med"/>
+                    </a:lnL>
+                    <a:lnR w="9525" cap="flat" cmpd="sng" algn="ctr">
+                      <a:solidFill>
+                        <a:srgbClr val="D5DEF0"/>
+                      </a:solidFill>
+                      <a:prstDash val="solid"/>
+                      <a:round/>
+                      <a:headEnd type="none" w="med" len="med"/>
+                      <a:tailEnd type="none" w="med" len="med"/>
+                    </a:lnR>
+                    <a:lnT w="9525" cap="flat" cmpd="sng" algn="ctr">
+                      <a:solidFill>
+                        <a:srgbClr val="D5DEF0"/>
+                      </a:solidFill>
+                      <a:prstDash val="solid"/>
+                      <a:round/>
+                      <a:headEnd type="none" w="med" len="med"/>
+                      <a:tailEnd type="none" w="med" len="med"/>
+                    </a:lnT>
+                    <a:lnB w="9525" cap="flat" cmpd="sng" algn="ctr">
+                      <a:solidFill>
+                        <a:srgbClr val="D5DEF0"/>
+                      </a:solidFill>
+                      <a:prstDash val="solid"/>
+                      <a:round/>
+                      <a:headEnd type="none" w="med" len="med"/>
+                      <a:tailEnd type="none" w="med" len="med"/>
+                    </a:lnB>
+                  </a:tcPr>
+                </a:tc>
+                <a:tc>
+                  <a:txBody>
+                    <a:bodyPr/>
+                    <a:lstStyle/>
+                    <a:p>
+                      <a:pPr indent="0" marL="0">
+                        <a:buNone/>
+                      </a:pPr>
+                      <a:r>
+                        <a:rPr lang="en-US" sz="1050" dirty="0">
+                          <a:solidFill>
+                            <a:srgbClr val="1F2937"/>
+                          </a:solidFill>
+                          <a:latin typeface="Microsoft JhengHei" pitchFamily="34" charset="0"/>
+                          <a:ea typeface="Microsoft JhengHei" pitchFamily="34" charset="-122"/>
+                          <a:cs typeface="Microsoft JhengHei" pitchFamily="34" charset="-120"/>
+                        </a:rPr>
+                        <a:t>點開決策軌跡面板：完整工具呼叫與訂單生命週期</a:t>
+                      </a:r>
+                      <a:endParaRPr lang="en-US" sz="1050" dirty="0">
+                        <a:latin typeface="Microsoft JhengHei" charset="0"/>
+                        <a:ea typeface="Microsoft JhengHei" charset="0"/>
+                        <a:cs typeface="Microsoft JhengHei" charset="0"/>
+                      </a:endParaRPr>
+                    </a:p>
+                  </a:txBody>
+                  <a:tcPr marL="54864" marR="54864" marT="54864" marB="54864" anchor="ctr">
+                    <a:lnL w="9525" cap="flat" cmpd="sng" algn="ctr">
+                      <a:solidFill>
+                        <a:srgbClr val="D5DEF0"/>
+                      </a:solidFill>
+                      <a:prstDash val="solid"/>
+                      <a:round/>
+                      <a:headEnd type="none" w="med" len="med"/>
+                      <a:tailEnd type="none" w="med" len="med"/>
+                    </a:lnL>
+                    <a:lnR w="9525" cap="flat" cmpd="sng" algn="ctr">
+                      <a:solidFill>
+                        <a:srgbClr val="D5DEF0"/>
+                      </a:solidFill>
+                      <a:prstDash val="solid"/>
+                      <a:round/>
+                      <a:headEnd type="none" w="med" len="med"/>
+                      <a:tailEnd type="none" w="med" len="med"/>
+                    </a:lnR>
+                    <a:lnT w="9525" cap="flat" cmpd="sng" algn="ctr">
+                      <a:solidFill>
+                        <a:srgbClr val="D5DEF0"/>
+                      </a:solidFill>
+                      <a:prstDash val="solid"/>
+                      <a:round/>
+                      <a:headEnd type="none" w="med" len="med"/>
+                      <a:tailEnd type="none" w="med" len="med"/>
+                    </a:lnT>
+                    <a:lnB w="9525" cap="flat" cmpd="sng" algn="ctr">
+                      <a:solidFill>
+                        <a:srgbClr val="D5DEF0"/>
+                      </a:solidFill>
+                      <a:prstDash val="solid"/>
+                      <a:round/>
+                      <a:headEnd type="none" w="med" len="med"/>
+                      <a:tailEnd type="none" w="med" len="med"/>
+                    </a:lnB>
+                  </a:tcPr>
+                </a:tc>
+                <a:tc>
+                  <a:txBody>
+                    <a:bodyPr/>
+                    <a:lstStyle/>
+                    <a:p>
+                      <a:pPr indent="0" marL="0">
+                        <a:buNone/>
+                      </a:pPr>
+                      <a:r>
+                        <a:rPr lang="en-US" sz="1050" dirty="0">
+                          <a:solidFill>
+                            <a:srgbClr val="1F2937"/>
+                          </a:solidFill>
+                          <a:latin typeface="Microsoft JhengHei" pitchFamily="34" charset="0"/>
+                          <a:ea typeface="Microsoft JhengHei" pitchFamily="34" charset="-122"/>
+                          <a:cs typeface="Microsoft JhengHei" pitchFamily="34" charset="-120"/>
+                        </a:rPr>
+                        <a:t>「合規不是聲明，是系統設計」</a:t>
+                      </a:r>
+                      <a:endParaRPr lang="en-US" sz="1050" dirty="0">
+                        <a:latin typeface="Microsoft JhengHei" charset="0"/>
+                        <a:ea typeface="Microsoft JhengHei" charset="0"/>
+                        <a:cs typeface="Microsoft JhengHei" charset="0"/>
+                      </a:endParaRPr>
+                    </a:p>
+                  </a:txBody>
+                  <a:tcPr marL="54864" marR="54864" marT="54864" marB="54864" anchor="ctr">
+                    <a:lnL w="9525" cap="flat" cmpd="sng" algn="ctr">
+                      <a:solidFill>
+                        <a:srgbClr val="D5DEF0"/>
+                      </a:solidFill>
+                      <a:prstDash val="solid"/>
+                      <a:round/>
+                      <a:headEnd type="none" w="med" len="med"/>
+                      <a:tailEnd type="none" w="med" len="med"/>
+                    </a:lnL>
+                    <a:lnR w="9525" cap="flat" cmpd="sng" algn="ctr">
+                      <a:solidFill>
+                        <a:srgbClr val="D5DEF0"/>
+                      </a:solidFill>
+                      <a:prstDash val="solid"/>
+                      <a:round/>
+                      <a:headEnd type="none" w="med" len="med"/>
+                      <a:tailEnd type="none" w="med" len="med"/>
+                    </a:lnR>
+                    <a:lnT w="9525" cap="flat" cmpd="sng" algn="ctr">
+                      <a:solidFill>
+                        <a:srgbClr val="D5DEF0"/>
+                      </a:solidFill>
+                      <a:prstDash val="solid"/>
+                      <a:round/>
+                      <a:headEnd type="none" w="med" len="med"/>
+                      <a:tailEnd type="none" w="med" len="med"/>
+                    </a:lnT>
+                    <a:lnB w="9525" cap="flat" cmpd="sng" algn="ctr">
+                      <a:solidFill>
+                        <a:srgbClr val="D5DEF0"/>
+                      </a:solidFill>
+                      <a:prstDash val="solid"/>
+                      <a:round/>
+                      <a:headEnd type="none" w="med" len="med"/>
+                      <a:tailEnd type="none" w="med" len="med"/>
+                    </a:lnB>
+                  </a:tcPr>
+                </a:tc>
+                <a:tc>
+                  <a:txBody>
+                    <a:bodyPr/>
+                    <a:lstStyle/>
+                    <a:p>
+                      <a:pPr indent="0" marL="0">
+                        <a:buNone/>
+                      </a:pPr>
+                      <a:r>
+                        <a:rPr lang="en-US" sz="1050" b="1" dirty="0">
+                          <a:solidFill>
+                            <a:srgbClr val="E8A13A"/>
+                          </a:solidFill>
+                          <a:latin typeface="Microsoft JhengHei" pitchFamily="34" charset="0"/>
+                          <a:ea typeface="Microsoft JhengHei" pitchFamily="34" charset="-122"/>
+                          <a:cs typeface="Microsoft JhengHei" pitchFamily="34" charset="-120"/>
+                        </a:rPr>
+                        <a:t>AI設計/法遵</a:t>
+                      </a:r>
+                      <a:endParaRPr lang="en-US" sz="1050" dirty="0">
+                        <a:latin typeface="Microsoft JhengHei" charset="0"/>
+                        <a:ea typeface="Microsoft JhengHei" charset="0"/>
+                        <a:cs typeface="Microsoft JhengHei" charset="0"/>
+                      </a:endParaRPr>
+                    </a:p>
+                  </a:txBody>
+                  <a:tcPr marL="54864" marR="54864" marT="54864" marB="54864" anchor="ctr">
+                    <a:lnL w="9525" cap="flat" cmpd="sng" algn="ctr">
+                      <a:solidFill>
+                        <a:srgbClr val="D5DEF0"/>
+                      </a:solidFill>
+                      <a:prstDash val="solid"/>
+                      <a:round/>
+                      <a:headEnd type="none" w="med" len="med"/>
+                      <a:tailEnd type="none" w="med" len="med"/>
+                    </a:lnL>
+                    <a:lnR w="9525" cap="flat" cmpd="sng" algn="ctr">
+                      <a:solidFill>
+                        <a:srgbClr val="D5DEF0"/>
+                      </a:solidFill>
+                      <a:prstDash val="solid"/>
+                      <a:round/>
+                      <a:headEnd type="none" w="med" len="med"/>
+                      <a:tailEnd type="none" w="med" len="med"/>
+                    </a:lnR>
+                    <a:lnT w="9525" cap="flat" cmpd="sng" algn="ctr">
+                      <a:solidFill>
+                        <a:srgbClr val="D5DEF0"/>
+                      </a:solidFill>
+                      <a:prstDash val="solid"/>
+                      <a:round/>
+                      <a:headEnd type="none" w="med" len="med"/>
+                      <a:tailEnd type="none" w="med" len="med"/>
+                    </a:lnT>
+                    <a:lnB w="9525" cap="flat" cmpd="sng" algn="ctr">
+                      <a:solidFill>
+                        <a:srgbClr val="D5DEF0"/>
+                      </a:solidFill>
+                      <a:prstDash val="solid"/>
+                      <a:round/>
+                      <a:headEnd type="none" w="med" len="med"/>
+                      <a:tailEnd type="none" w="med" len="med"/>
+                    </a:lnB>
+                  </a:tcPr>
+                </a:tc>
+              </a:tr>
+            </a:tbl>
+          </a:graphicData>
+        </a:graphic>
+      </p:graphicFrame>
+      <p:sp>
+        <p:nvSpPr>
+          <p:cNvPr id="4" name="Text 1"/>
+          <p:cNvSpPr/>
+          <p:nvPr/>
+        </p:nvSpPr>
+        <p:spPr>
+          <a:xfrm>
+            <a:off x="548640" y="6035040"/>
+            <a:ext cx="11091672" cy="411480"/>
+          </a:xfrm>
+          <a:prstGeom prst="rect">
+            <a:avLst/>
+          </a:prstGeom>
+          <a:noFill/>
+          <a:ln/>
+        </p:spPr>
+        <p:txBody>
+          <a:bodyPr wrap="square" lIns="0" tIns="0" rIns="0" bIns="0" rtlCol="0" anchor="ctr"/>
+          <a:lstStyle/>
+          <a:p>
+            <a:pPr indent="0" marL="0">
+              <a:buNone/>
+            </a:pPr>
+            <a:r>
+              <a:rPr lang="en-US" sz="1200" dirty="0">
+                <a:solidFill>
+                  <a:srgbClr val="6B7280"/>
+                </a:solidFill>
+                <a:latin typeface="Microsoft JhengHei" pitchFamily="34" charset="0"/>
+                <a:ea typeface="Microsoft JhengHei" pitchFamily="34" charset="-122"/>
+                <a:cs typeface="Microsoft JhengHei" pitchFamily="34" charset="-120"/>
+              </a:rPr>
+              <a:t>備援：任一步掛掉 → 離線 mock 接手繼續演；全掛 → 切預錄影片。演練時每步都要練過備援切換。</a:t>
+            </a:r>
+            <a:endParaRPr lang="en-US" sz="1200" dirty="0"/>
+          </a:p>
+        </p:txBody>
+      </p:sp>
+    </p:spTree>
+  </p:cSld>
+  <p:clrMapOvr>
+    <a:masterClrMapping/>
+  </p:clrMapOvr>
+</p:sld>
+</file>
+
+<file path=ppt/slides/slide11.xml><?xml version="1.0" encoding="utf-8"?>
+<p:sld xmlns:a="http://schemas.openxmlformats.org/drawingml/2006/main" xmlns:r="http://schemas.openxmlformats.org/officeDocument/2006/relationships" xmlns:p="http://schemas.openxmlformats.org/presentationml/2006/main">
+  <p:cSld name="Slide 11">
+    <p:bg>
+      <p:bgPr>
+        <a:solidFill>
+          <a:srgbClr val="FFFFFF"/>
+        </a:solidFill>
+      </p:bgPr>
+    </p:bg>
+    <p:spTree>
+      <p:nvGrpSpPr>
+        <p:cNvPr id="1" name=""/>
+        <p:cNvGrpSpPr/>
+        <p:nvPr/>
+      </p:nvGrpSpPr>
+      <p:grpSpPr>
+        <a:xfrm>
+          <a:off x="0" y="0"/>
+          <a:ext cx="0" cy="0"/>
+          <a:chOff x="0" y="0"/>
+          <a:chExt cx="0" cy="0"/>
+        </a:xfrm>
+      </p:grpSpPr>
+      <p:sp>
+        <p:nvSpPr>
+          <p:cNvPr id="2" name="Text 0"/>
+          <p:cNvSpPr/>
+          <p:nvPr/>
+        </p:nvSpPr>
+        <p:spPr>
+          <a:xfrm>
+            <a:off x="548640" y="411480"/>
+            <a:ext cx="11091672" cy="640080"/>
+          </a:xfrm>
+          <a:prstGeom prst="rect">
+            <a:avLst/>
+          </a:prstGeom>
+          <a:noFill/>
+          <a:ln/>
+        </p:spPr>
+        <p:txBody>
+          <a:bodyPr wrap="square" lIns="0" tIns="0" rIns="0" bIns="0" rtlCol="0" anchor="ctr"/>
+          <a:lstStyle/>
+          <a:p>
+            <a:pPr indent="0" marL="0">
+              <a:buNone/>
+            </a:pPr>
+            <a:r>
+              <a:rPr lang="en-US" sz="2700" b="1" dirty="0">
+                <a:solidFill>
+                  <a:srgbClr val="16224D"/>
+                </a:solidFill>
+                <a:latin typeface="Microsoft JhengHei" pitchFamily="34" charset="0"/>
+                <a:ea typeface="Microsoft JhengHei" pitchFamily="34" charset="-122"/>
+                <a:cs typeface="Microsoft JhengHei" pitchFamily="34" charset="-120"/>
+              </a:rPr>
+              <a:t>Kiro 部署｜每人一次設定（約 15 分鐘）</a:t>
+            </a:r>
+            <a:endParaRPr lang="en-US" sz="2700" dirty="0"/>
+          </a:p>
+        </p:txBody>
+      </p:sp>
+      <p:sp>
+        <p:nvSpPr>
+          <p:cNvPr id="3" name="Text 1"/>
+          <p:cNvSpPr/>
+          <p:nvPr/>
+        </p:nvSpPr>
+        <p:spPr>
+          <a:xfrm>
+            <a:off x="548640" y="1024128"/>
+            <a:ext cx="11091672" cy="320040"/>
+          </a:xfrm>
+          <a:prstGeom prst="rect">
+            <a:avLst/>
+          </a:prstGeom>
+          <a:noFill/>
+          <a:ln/>
+        </p:spPr>
+        <p:txBody>
+          <a:bodyPr wrap="square" lIns="0" tIns="0" rIns="0" bIns="0" rtlCol="0" anchor="ctr"/>
+          <a:lstStyle/>
+          <a:p>
+            <a:pPr indent="0" marL="0">
+              <a:buNone/>
+            </a:pPr>
+            <a:r>
+              <a:rPr lang="en-US" sz="1250" dirty="0">
+                <a:solidFill>
+                  <a:srgbClr val="6B7280"/>
+                </a:solidFill>
+                <a:latin typeface="Microsoft JhengHei" pitchFamily="34" charset="0"/>
+                <a:ea typeface="Microsoft JhengHei" pitchFamily="34" charset="-122"/>
+                <a:cs typeface="Microsoft JhengHei" pitchFamily="34" charset="-120"/>
+              </a:rPr>
+              <a:t>認領工作包後，先把這頁做完才開工</a:t>
+            </a:r>
+            <a:endParaRPr lang="en-US" sz="1250" dirty="0"/>
+          </a:p>
+        </p:txBody>
+      </p:sp>
+      <p:sp>
+        <p:nvSpPr>
+          <p:cNvPr id="4" name="Shape 2"/>
+          <p:cNvSpPr/>
+          <p:nvPr/>
+        </p:nvSpPr>
+        <p:spPr>
+          <a:xfrm>
+            <a:off x="548640" y="1627632"/>
+            <a:ext cx="502920" cy="502920"/>
+          </a:xfrm>
+          <a:prstGeom prst="ellipse">
+            <a:avLst/>
+          </a:prstGeom>
+          <a:solidFill>
+            <a:srgbClr val="16224D"/>
+          </a:solidFill>
+          <a:ln/>
+        </p:spPr>
+      </p:sp>
+      <p:sp>
+        <p:nvSpPr>
+          <p:cNvPr id="5" name="Text 3"/>
+          <p:cNvSpPr/>
+          <p:nvPr/>
+        </p:nvSpPr>
+        <p:spPr>
+          <a:xfrm>
+            <a:off x="548640" y="1627632"/>
+            <a:ext cx="502920" cy="502920"/>
+          </a:xfrm>
+          <a:prstGeom prst="rect">
+            <a:avLst/>
+          </a:prstGeom>
+          <a:noFill/>
+          <a:ln/>
+        </p:spPr>
+        <p:txBody>
+          <a:bodyPr wrap="square" lIns="0" tIns="0" rIns="0" bIns="0" rtlCol="0" anchor="ctr"/>
+          <a:lstStyle/>
+          <a:p>
+            <a:pPr algn="ctr" indent="0" marL="0">
+              <a:buNone/>
+            </a:pPr>
+            <a:r>
+              <a:rPr lang="en-US" sz="1600" b="1" dirty="0">
+                <a:solidFill>
+                  <a:srgbClr val="FFFFFF"/>
+                </a:solidFill>
+                <a:latin typeface="Microsoft JhengHei" pitchFamily="34" charset="0"/>
+                <a:ea typeface="Microsoft JhengHei" pitchFamily="34" charset="-122"/>
+                <a:cs typeface="Microsoft JhengHei" pitchFamily="34" charset="-120"/>
+              </a:rPr>
+              <a:t>1</a:t>
+            </a:r>
+            <a:endParaRPr lang="en-US" sz="1600" dirty="0"/>
+          </a:p>
+        </p:txBody>
+      </p:sp>
+      <p:sp>
+        <p:nvSpPr>
+          <p:cNvPr id="6" name="Text 4"/>
+          <p:cNvSpPr/>
+          <p:nvPr/>
+        </p:nvSpPr>
+        <p:spPr>
+          <a:xfrm>
+            <a:off x="1280160" y="1554480"/>
+            <a:ext cx="1737360" cy="685800"/>
+          </a:xfrm>
+          <a:prstGeom prst="rect">
+            <a:avLst/>
+          </a:prstGeom>
+          <a:noFill/>
+          <a:ln/>
+        </p:spPr>
+        <p:txBody>
+          <a:bodyPr wrap="square" lIns="0" tIns="0" rIns="0" bIns="0" rtlCol="0" anchor="ctr"/>
+          <a:lstStyle/>
+          <a:p>
+            <a:pPr indent="0" marL="0">
+              <a:buNone/>
+            </a:pPr>
+            <a:r>
+              <a:rPr lang="en-US" sz="1500" b="1" dirty="0">
+                <a:solidFill>
+                  <a:srgbClr val="16224D"/>
+                </a:solidFill>
+                <a:latin typeface="Microsoft JhengHei" pitchFamily="34" charset="0"/>
+                <a:ea typeface="Microsoft JhengHei" pitchFamily="34" charset="-122"/>
+                <a:cs typeface="Microsoft JhengHei" pitchFamily="34" charset="-120"/>
+              </a:rPr>
+              <a:t>下載安裝</a:t>
+            </a:r>
+            <a:endParaRPr lang="en-US" sz="1500" dirty="0"/>
+          </a:p>
+        </p:txBody>
+      </p:sp>
+      <p:sp>
+        <p:nvSpPr>
+          <p:cNvPr id="7" name="Text 5"/>
+          <p:cNvSpPr/>
+          <p:nvPr/>
+        </p:nvSpPr>
+        <p:spPr>
+          <a:xfrm>
+            <a:off x="3108960" y="1554480"/>
+            <a:ext cx="8595360" cy="685800"/>
+          </a:xfrm>
+          <a:prstGeom prst="rect">
+            <a:avLst/>
+          </a:prstGeom>
+          <a:noFill/>
+          <a:ln/>
+        </p:spPr>
+        <p:txBody>
+          <a:bodyPr wrap="square" lIns="0" tIns="0" rIns="0" bIns="0" rtlCol="0" anchor="ctr"/>
+          <a:lstStyle/>
+          <a:p>
+            <a:pPr indent="0" marL="0">
+              <a:buNone/>
+            </a:pPr>
+            <a:r>
+              <a:rPr lang="en-US" sz="1300" dirty="0">
+                <a:solidFill>
+                  <a:srgbClr val="1F2937"/>
+                </a:solidFill>
+                <a:latin typeface="Microsoft JhengHei" pitchFamily="34" charset="0"/>
+                <a:ea typeface="Microsoft JhengHei" pitchFamily="34" charset="-122"/>
+                <a:cs typeface="Microsoft JhengHei" pitchFamily="34" charset="-120"/>
+              </a:rPr>
+              <a:t>kiro.dev 下載（Mac/Windows）。介面就是 VS Code，不用重學</a:t>
+            </a:r>
+            <a:endParaRPr lang="en-US" sz="1300" dirty="0"/>
+          </a:p>
+        </p:txBody>
+      </p:sp>
+      <p:sp>
+        <p:nvSpPr>
+          <p:cNvPr id="8" name="Shape 6"/>
+          <p:cNvSpPr/>
+          <p:nvPr/>
+        </p:nvSpPr>
+        <p:spPr>
+          <a:xfrm>
+            <a:off x="548640" y="2496312"/>
+            <a:ext cx="502920" cy="502920"/>
+          </a:xfrm>
+          <a:prstGeom prst="ellipse">
+            <a:avLst/>
+          </a:prstGeom>
+          <a:solidFill>
+            <a:srgbClr val="16224D"/>
+          </a:solidFill>
+          <a:ln/>
+        </p:spPr>
+      </p:sp>
+      <p:sp>
+        <p:nvSpPr>
+          <p:cNvPr id="9" name="Text 7"/>
+          <p:cNvSpPr/>
+          <p:nvPr/>
+        </p:nvSpPr>
+        <p:spPr>
+          <a:xfrm>
+            <a:off x="548640" y="2496312"/>
+            <a:ext cx="502920" cy="502920"/>
+          </a:xfrm>
+          <a:prstGeom prst="rect">
+            <a:avLst/>
+          </a:prstGeom>
+          <a:noFill/>
+          <a:ln/>
+        </p:spPr>
+        <p:txBody>
+          <a:bodyPr wrap="square" lIns="0" tIns="0" rIns="0" bIns="0" rtlCol="0" anchor="ctr"/>
+          <a:lstStyle/>
+          <a:p>
+            <a:pPr algn="ctr" indent="0" marL="0">
+              <a:buNone/>
+            </a:pPr>
+            <a:r>
+              <a:rPr lang="en-US" sz="1600" b="1" dirty="0">
+                <a:solidFill>
+                  <a:srgbClr val="FFFFFF"/>
+                </a:solidFill>
+                <a:latin typeface="Microsoft JhengHei" pitchFamily="34" charset="0"/>
+                <a:ea typeface="Microsoft JhengHei" pitchFamily="34" charset="-122"/>
+                <a:cs typeface="Microsoft JhengHei" pitchFamily="34" charset="-120"/>
+              </a:rPr>
+              <a:t>2</a:t>
+            </a:r>
+            <a:endParaRPr lang="en-US" sz="1600" dirty="0"/>
+          </a:p>
+        </p:txBody>
+      </p:sp>
+      <p:sp>
+        <p:nvSpPr>
+          <p:cNvPr id="10" name="Text 8"/>
+          <p:cNvSpPr/>
+          <p:nvPr/>
+        </p:nvSpPr>
+        <p:spPr>
+          <a:xfrm>
+            <a:off x="1280160" y="2423160"/>
+            <a:ext cx="1737360" cy="685800"/>
+          </a:xfrm>
+          <a:prstGeom prst="rect">
+            <a:avLst/>
+          </a:prstGeom>
+          <a:noFill/>
+          <a:ln/>
+        </p:spPr>
+        <p:txBody>
+          <a:bodyPr wrap="square" lIns="0" tIns="0" rIns="0" bIns="0" rtlCol="0" anchor="ctr"/>
+          <a:lstStyle/>
+          <a:p>
+            <a:pPr indent="0" marL="0">
+              <a:buNone/>
+            </a:pPr>
+            <a:r>
+              <a:rPr lang="en-US" sz="1500" b="1" dirty="0">
+                <a:solidFill>
+                  <a:srgbClr val="16224D"/>
+                </a:solidFill>
+                <a:latin typeface="Microsoft JhengHei" pitchFamily="34" charset="0"/>
+                <a:ea typeface="Microsoft JhengHei" pitchFamily="34" charset="-122"/>
+                <a:cs typeface="Microsoft JhengHei" pitchFamily="34" charset="-120"/>
+              </a:rPr>
+              <a:t>登入</a:t>
+            </a:r>
+            <a:endParaRPr lang="en-US" sz="1500" dirty="0"/>
+          </a:p>
+        </p:txBody>
+      </p:sp>
+      <p:sp>
+        <p:nvSpPr>
+          <p:cNvPr id="11" name="Text 9"/>
+          <p:cNvSpPr/>
+          <p:nvPr/>
+        </p:nvSpPr>
+        <p:spPr>
+          <a:xfrm>
+            <a:off x="3108960" y="2423160"/>
+            <a:ext cx="8595360" cy="685800"/>
+          </a:xfrm>
+          <a:prstGeom prst="rect">
+            <a:avLst/>
+          </a:prstGeom>
+          <a:noFill/>
+          <a:ln/>
+        </p:spPr>
+        <p:txBody>
+          <a:bodyPr wrap="square" lIns="0" tIns="0" rIns="0" bIns="0" rtlCol="0" anchor="ctr"/>
+          <a:lstStyle/>
+          <a:p>
+            <a:pPr indent="0" marL="0">
+              <a:buNone/>
+            </a:pPr>
+            <a:r>
+              <a:rPr lang="en-US" sz="1300" dirty="0">
+                <a:solidFill>
+                  <a:srgbClr val="1F2937"/>
+                </a:solidFill>
+                <a:latin typeface="Microsoft JhengHei" pitchFamily="34" charset="0"/>
+                <a:ea typeface="Microsoft JhengHei" pitchFamily="34" charset="-122"/>
+                <a:cs typeface="Microsoft JhengHei" pitchFamily="34" charset="-120"/>
+              </a:rPr>
+              <a:t>用自己的 Google 帳號。帳號與額度不能共用（主辦規定，違者取消資格）</a:t>
+            </a:r>
+            <a:endParaRPr lang="en-US" sz="1300" dirty="0"/>
+          </a:p>
+        </p:txBody>
+      </p:sp>
+      <p:sp>
+        <p:nvSpPr>
+          <p:cNvPr id="12" name="Shape 10"/>
+          <p:cNvSpPr/>
+          <p:nvPr/>
+        </p:nvSpPr>
+        <p:spPr>
+          <a:xfrm>
+            <a:off x="548640" y="3364992"/>
+            <a:ext cx="502920" cy="502920"/>
+          </a:xfrm>
+          <a:prstGeom prst="ellipse">
+            <a:avLst/>
+          </a:prstGeom>
+          <a:solidFill>
+            <a:srgbClr val="E8A13A"/>
+          </a:solidFill>
+          <a:ln/>
+        </p:spPr>
+      </p:sp>
+      <p:sp>
+        <p:nvSpPr>
+          <p:cNvPr id="13" name="Text 11"/>
+          <p:cNvSpPr/>
+          <p:nvPr/>
+        </p:nvSpPr>
+        <p:spPr>
+          <a:xfrm>
+            <a:off x="548640" y="3364992"/>
+            <a:ext cx="502920" cy="502920"/>
+          </a:xfrm>
+          <a:prstGeom prst="rect">
+            <a:avLst/>
+          </a:prstGeom>
+          <a:noFill/>
+          <a:ln/>
+        </p:spPr>
+        <p:txBody>
+          <a:bodyPr wrap="square" lIns="0" tIns="0" rIns="0" bIns="0" rtlCol="0" anchor="ctr"/>
+          <a:lstStyle/>
+          <a:p>
+            <a:pPr algn="ctr" indent="0" marL="0">
+              <a:buNone/>
+            </a:pPr>
+            <a:r>
+              <a:rPr lang="en-US" sz="1600" b="1" dirty="0">
+                <a:solidFill>
+                  <a:srgbClr val="FFFFFF"/>
+                </a:solidFill>
+                <a:latin typeface="Microsoft JhengHei" pitchFamily="34" charset="0"/>
+                <a:ea typeface="Microsoft JhengHei" pitchFamily="34" charset="-122"/>
+                <a:cs typeface="Microsoft JhengHei" pitchFamily="34" charset="-120"/>
+              </a:rPr>
+              <a:t>3</a:t>
+            </a:r>
+            <a:endParaRPr lang="en-US" sz="1600" dirty="0"/>
+          </a:p>
+        </p:txBody>
+      </p:sp>
+      <p:sp>
+        <p:nvSpPr>
+          <p:cNvPr id="14" name="Text 12"/>
+          <p:cNvSpPr/>
+          <p:nvPr/>
+        </p:nvSpPr>
+        <p:spPr>
+          <a:xfrm>
+            <a:off x="1280160" y="3291840"/>
+            <a:ext cx="1737360" cy="685800"/>
+          </a:xfrm>
+          <a:prstGeom prst="rect">
+            <a:avLst/>
+          </a:prstGeom>
+          <a:noFill/>
+          <a:ln/>
+        </p:spPr>
+        <p:txBody>
+          <a:bodyPr wrap="square" lIns="0" tIns="0" rIns="0" bIns="0" rtlCol="0" anchor="ctr"/>
+          <a:lstStyle/>
+          <a:p>
+            <a:pPr indent="0" marL="0">
+              <a:buNone/>
+            </a:pPr>
+            <a:r>
+              <a:rPr lang="en-US" sz="1500" b="1" dirty="0">
+                <a:solidFill>
+                  <a:srgbClr val="16224D"/>
+                </a:solidFill>
+                <a:latin typeface="Microsoft JhengHei" pitchFamily="34" charset="0"/>
+                <a:ea typeface="Microsoft JhengHei" pitchFamily="34" charset="-122"/>
+                <a:cs typeface="Microsoft JhengHei" pitchFamily="34" charset="-120"/>
+              </a:rPr>
+              <a:t>兌換額度</a:t>
+            </a:r>
+            <a:endParaRPr lang="en-US" sz="1500" dirty="0"/>
+          </a:p>
+        </p:txBody>
+      </p:sp>
+      <p:sp>
+        <p:nvSpPr>
+          <p:cNvPr id="15" name="Text 13"/>
+          <p:cNvSpPr/>
+          <p:nvPr/>
+        </p:nvSpPr>
+        <p:spPr>
+          <a:xfrm>
+            <a:off x="3108960" y="3291840"/>
+            <a:ext cx="8595360" cy="685800"/>
+          </a:xfrm>
+          <a:prstGeom prst="rect">
+            <a:avLst/>
+          </a:prstGeom>
+          <a:noFill/>
+          <a:ln/>
+        </p:spPr>
+        <p:txBody>
+          <a:bodyPr wrap="square" lIns="0" tIns="0" rIns="0" bIns="0" rtlCol="0" anchor="ctr"/>
+          <a:lstStyle/>
+          <a:p>
+            <a:pPr indent="0" marL="0">
+              <a:buNone/>
+            </a:pPr>
+            <a:r>
+              <a:rPr lang="en-US" sz="1300" dirty="0">
+                <a:solidFill>
+                  <a:srgbClr val="1F2937"/>
+                </a:solidFill>
+                <a:latin typeface="Microsoft JhengHei" pitchFamily="34" charset="0"/>
+                <a:ea typeface="Microsoft JhengHei" pitchFamily="34" charset="-122"/>
+                <a:cs typeface="Microsoft JhengHei" pitchFamily="34" charset="-120"/>
+              </a:rPr>
+              <a:t>輸入兌換碼 GenAIHack26 → 頭像選單看到 Bonus Credits 2000 即成功，截圖存證</a:t>
+            </a:r>
+            <a:endParaRPr lang="en-US" sz="1300" dirty="0"/>
+          </a:p>
+        </p:txBody>
+      </p:sp>
+      <p:sp>
+        <p:nvSpPr>
+          <p:cNvPr id="16" name="Shape 14"/>
+          <p:cNvSpPr/>
+          <p:nvPr/>
+        </p:nvSpPr>
+        <p:spPr>
+          <a:xfrm>
+            <a:off x="548640" y="4233672"/>
+            <a:ext cx="502920" cy="502920"/>
+          </a:xfrm>
+          <a:prstGeom prst="ellipse">
+            <a:avLst/>
+          </a:prstGeom>
+          <a:solidFill>
+            <a:srgbClr val="1F9D66"/>
+          </a:solidFill>
+          <a:ln/>
+        </p:spPr>
+      </p:sp>
+      <p:sp>
+        <p:nvSpPr>
+          <p:cNvPr id="17" name="Text 15"/>
+          <p:cNvSpPr/>
+          <p:nvPr/>
+        </p:nvSpPr>
+        <p:spPr>
+          <a:xfrm>
+            <a:off x="548640" y="4233672"/>
+            <a:ext cx="502920" cy="502920"/>
+          </a:xfrm>
+          <a:prstGeom prst="rect">
+            <a:avLst/>
+          </a:prstGeom>
+          <a:noFill/>
+          <a:ln/>
+        </p:spPr>
+        <p:txBody>
+          <a:bodyPr wrap="square" lIns="0" tIns="0" rIns="0" bIns="0" rtlCol="0" anchor="ctr"/>
+          <a:lstStyle/>
+          <a:p>
+            <a:pPr algn="ctr" indent="0" marL="0">
+              <a:buNone/>
+            </a:pPr>
+            <a:r>
+              <a:rPr lang="en-US" sz="1600" b="1" dirty="0">
+                <a:solidFill>
+                  <a:srgbClr val="FFFFFF"/>
+                </a:solidFill>
+                <a:latin typeface="Microsoft JhengHei" pitchFamily="34" charset="0"/>
+                <a:ea typeface="Microsoft JhengHei" pitchFamily="34" charset="-122"/>
+                <a:cs typeface="Microsoft JhengHei" pitchFamily="34" charset="-120"/>
+              </a:rPr>
+              <a:t>4</a:t>
+            </a:r>
+            <a:endParaRPr lang="en-US" sz="1600" dirty="0"/>
+          </a:p>
+        </p:txBody>
+      </p:sp>
+      <p:sp>
+        <p:nvSpPr>
+          <p:cNvPr id="18" name="Text 16"/>
+          <p:cNvSpPr/>
+          <p:nvPr/>
+        </p:nvSpPr>
+        <p:spPr>
+          <a:xfrm>
+            <a:off x="1280160" y="4160520"/>
+            <a:ext cx="1737360" cy="685800"/>
+          </a:xfrm>
+          <a:prstGeom prst="rect">
+            <a:avLst/>
+          </a:prstGeom>
+          <a:noFill/>
+          <a:ln/>
+        </p:spPr>
+        <p:txBody>
+          <a:bodyPr wrap="square" lIns="0" tIns="0" rIns="0" bIns="0" rtlCol="0" anchor="ctr"/>
+          <a:lstStyle/>
+          <a:p>
+            <a:pPr indent="0" marL="0">
+              <a:buNone/>
+            </a:pPr>
+            <a:r>
+              <a:rPr lang="en-US" sz="1500" b="1" dirty="0">
+                <a:solidFill>
+                  <a:srgbClr val="16224D"/>
+                </a:solidFill>
+                <a:latin typeface="Microsoft JhengHei" pitchFamily="34" charset="0"/>
+                <a:ea typeface="Microsoft JhengHei" pitchFamily="34" charset="-122"/>
+                <a:cs typeface="Microsoft JhengHei" pitchFamily="34" charset="-120"/>
+              </a:rPr>
+              <a:t>開啟專案</a:t>
+            </a:r>
+            <a:endParaRPr lang="en-US" sz="1500" dirty="0"/>
+          </a:p>
+        </p:txBody>
+      </p:sp>
+      <p:sp>
+        <p:nvSpPr>
+          <p:cNvPr id="19" name="Text 17"/>
+          <p:cNvSpPr/>
+          <p:nvPr/>
+        </p:nvSpPr>
+        <p:spPr>
+          <a:xfrm>
+            <a:off x="3108960" y="4160520"/>
+            <a:ext cx="8595360" cy="685800"/>
+          </a:xfrm>
+          <a:prstGeom prst="rect">
+            <a:avLst/>
+          </a:prstGeom>
+          <a:noFill/>
+          <a:ln/>
+        </p:spPr>
+        <p:txBody>
+          <a:bodyPr wrap="square" lIns="0" tIns="0" rIns="0" bIns="0" rtlCol="0" anchor="ctr"/>
+          <a:lstStyle/>
+          <a:p>
+            <a:pPr indent="0" marL="0">
+              <a:buNone/>
+            </a:pPr>
+            <a:r>
+              <a:rPr lang="en-US" sz="1300" dirty="0">
+                <a:solidFill>
+                  <a:srgbClr val="1F2937"/>
+                </a:solidFill>
+                <a:latin typeface="Microsoft JhengHei" pitchFamily="34" charset="0"/>
+                <a:ea typeface="Microsoft JhengHei" pitchFamily="34" charset="-122"/>
+                <a:cs typeface="Microsoft JhengHei" pitchFamily="34" charset="-120"/>
+              </a:rPr>
+              <a:t>git clone github.com/giont565/MaiMate → Kiro「Open Folder」選 MaiMate 資料夾</a:t>
+            </a:r>
+            <a:endParaRPr lang="en-US" sz="1300" dirty="0"/>
+          </a:p>
+        </p:txBody>
+      </p:sp>
+      <p:sp>
+        <p:nvSpPr>
+          <p:cNvPr id="20" name="Shape 18"/>
+          <p:cNvSpPr/>
+          <p:nvPr/>
+        </p:nvSpPr>
+        <p:spPr>
+          <a:xfrm>
+            <a:off x="548640" y="5102352"/>
+            <a:ext cx="502920" cy="502920"/>
+          </a:xfrm>
+          <a:prstGeom prst="ellipse">
+            <a:avLst/>
+          </a:prstGeom>
+          <a:solidFill>
+            <a:srgbClr val="1F9D66"/>
+          </a:solidFill>
+          <a:ln/>
+        </p:spPr>
+      </p:sp>
+      <p:sp>
+        <p:nvSpPr>
+          <p:cNvPr id="21" name="Text 19"/>
+          <p:cNvSpPr/>
+          <p:nvPr/>
+        </p:nvSpPr>
+        <p:spPr>
+          <a:xfrm>
+            <a:off x="548640" y="5102352"/>
+            <a:ext cx="502920" cy="502920"/>
+          </a:xfrm>
+          <a:prstGeom prst="rect">
+            <a:avLst/>
+          </a:prstGeom>
+          <a:noFill/>
+          <a:ln/>
+        </p:spPr>
+        <p:txBody>
+          <a:bodyPr wrap="square" lIns="0" tIns="0" rIns="0" bIns="0" rtlCol="0" anchor="ctr"/>
+          <a:lstStyle/>
+          <a:p>
+            <a:pPr algn="ctr" indent="0" marL="0">
+              <a:buNone/>
+            </a:pPr>
+            <a:r>
+              <a:rPr lang="en-US" sz="1600" b="1" dirty="0">
+                <a:solidFill>
+                  <a:srgbClr val="FFFFFF"/>
+                </a:solidFill>
+                <a:latin typeface="Microsoft JhengHei" pitchFamily="34" charset="0"/>
+                <a:ea typeface="Microsoft JhengHei" pitchFamily="34" charset="-122"/>
+                <a:cs typeface="Microsoft JhengHei" pitchFamily="34" charset="-120"/>
+              </a:rPr>
+              <a:t>5</a:t>
+            </a:r>
+            <a:endParaRPr lang="en-US" sz="1600" dirty="0"/>
+          </a:p>
+        </p:txBody>
+      </p:sp>
+      <p:sp>
+        <p:nvSpPr>
+          <p:cNvPr id="22" name="Text 20"/>
+          <p:cNvSpPr/>
+          <p:nvPr/>
+        </p:nvSpPr>
+        <p:spPr>
+          <a:xfrm>
+            <a:off x="1280160" y="5029200"/>
+            <a:ext cx="1737360" cy="685800"/>
+          </a:xfrm>
+          <a:prstGeom prst="rect">
+            <a:avLst/>
+          </a:prstGeom>
+          <a:noFill/>
+          <a:ln/>
+        </p:spPr>
+        <p:txBody>
+          <a:bodyPr wrap="square" lIns="0" tIns="0" rIns="0" bIns="0" rtlCol="0" anchor="ctr"/>
+          <a:lstStyle/>
+          <a:p>
+            <a:pPr indent="0" marL="0">
+              <a:buNone/>
+            </a:pPr>
+            <a:r>
+              <a:rPr lang="en-US" sz="1500" b="1" dirty="0">
+                <a:solidFill>
+                  <a:srgbClr val="16224D"/>
+                </a:solidFill>
+                <a:latin typeface="Microsoft JhengHei" pitchFamily="34" charset="0"/>
+                <a:ea typeface="Microsoft JhengHei" pitchFamily="34" charset="-122"/>
+                <a:cs typeface="Microsoft JhengHei" pitchFamily="34" charset="-120"/>
+              </a:rPr>
+              <a:t>確認載入</a:t>
+            </a:r>
+            <a:endParaRPr lang="en-US" sz="1500" dirty="0"/>
+          </a:p>
+        </p:txBody>
+      </p:sp>
+      <p:sp>
+        <p:nvSpPr>
+          <p:cNvPr id="23" name="Text 21"/>
+          <p:cNvSpPr/>
+          <p:nvPr/>
+        </p:nvSpPr>
+        <p:spPr>
+          <a:xfrm>
+            <a:off x="3108960" y="5029200"/>
+            <a:ext cx="8595360" cy="685800"/>
+          </a:xfrm>
+          <a:prstGeom prst="rect">
+            <a:avLst/>
+          </a:prstGeom>
+          <a:noFill/>
+          <a:ln/>
+        </p:spPr>
+        <p:txBody>
+          <a:bodyPr wrap="square" lIns="0" tIns="0" rIns="0" bIns="0" rtlCol="0" anchor="ctr"/>
+          <a:lstStyle/>
+          <a:p>
+            <a:pPr indent="0" marL="0">
+              <a:buNone/>
+            </a:pPr>
+            <a:r>
+              <a:rPr lang="en-US" sz="1300" dirty="0">
+                <a:solidFill>
+                  <a:srgbClr val="1F2937"/>
+                </a:solidFill>
+                <a:latin typeface="Microsoft JhengHei" pitchFamily="34" charset="0"/>
+                <a:ea typeface="Microsoft JhengHei" pitchFamily="34" charset="-122"/>
+                <a:cs typeface="Microsoft JhengHei" pitchFamily="34" charset="-120"/>
+              </a:rPr>
+              <a:t>左側出現 Specs 面板（5 個 spec）＝.kiro/ 讀取成功；跑 bash scripts/setup.sh 檢查環境</a:t>
+            </a:r>
+            <a:endParaRPr lang="en-US" sz="1300" dirty="0"/>
+          </a:p>
+        </p:txBody>
+      </p:sp>
+      <p:sp>
+        <p:nvSpPr>
+          <p:cNvPr id="24" name="Text 22"/>
+          <p:cNvSpPr/>
+          <p:nvPr/>
+        </p:nvSpPr>
+        <p:spPr>
+          <a:xfrm>
+            <a:off x="548640" y="5989320"/>
+            <a:ext cx="11091672" cy="411480"/>
+          </a:xfrm>
+          <a:prstGeom prst="rect">
+            <a:avLst/>
+          </a:prstGeom>
+          <a:noFill/>
+          <a:ln/>
+        </p:spPr>
+        <p:txBody>
+          <a:bodyPr wrap="square" lIns="0" tIns="0" rIns="0" bIns="0" rtlCol="0" anchor="ctr"/>
+          <a:lstStyle/>
+          <a:p>
+            <a:pPr indent="0" marL="0">
+              <a:buNone/>
+            </a:pPr>
+            <a:r>
+              <a:rPr lang="en-US" sz="1150" dirty="0">
+                <a:solidFill>
+                  <a:srgbClr val="6B7280"/>
+                </a:solidFill>
+                <a:latin typeface="Microsoft JhengHei" pitchFamily="34" charset="0"/>
+                <a:ea typeface="Microsoft JhengHei" pitchFamily="34" charset="-122"/>
+                <a:cs typeface="Microsoft JhengHei" pitchFamily="34" charset="-120"/>
+              </a:rPr>
+              <a:t>疑難：登入卡住→換瀏覽器完成 OAuth；Specs 面板沒出現→確認開的是 MaiMate 根目錄不是上層資料夾。</a:t>
+            </a:r>
+            <a:endParaRPr lang="en-US" sz="1150" dirty="0"/>
+          </a:p>
+        </p:txBody>
+      </p:sp>
+    </p:spTree>
+  </p:cSld>
+  <p:clrMapOvr>
+    <a:masterClrMapping/>
+  </p:clrMapOvr>
+</p:sld>
+</file>
+
+<file path=ppt/slides/slide12.xml><?xml version="1.0" encoding="utf-8"?>
+<p:sld xmlns:a="http://schemas.openxmlformats.org/drawingml/2006/main" xmlns:r="http://schemas.openxmlformats.org/officeDocument/2006/relationships" xmlns:p="http://schemas.openxmlformats.org/presentationml/2006/main">
+  <p:cSld name="Slide 12">
+    <p:bg>
+      <p:bgPr>
+        <a:solidFill>
+          <a:srgbClr val="FFFFFF"/>
+        </a:solidFill>
+      </p:bgPr>
+    </p:bg>
+    <p:spTree>
+      <p:nvGrpSpPr>
+        <p:cNvPr id="1" name=""/>
+        <p:cNvGrpSpPr/>
+        <p:nvPr/>
+      </p:nvGrpSpPr>
+      <p:grpSpPr>
+        <a:xfrm>
+          <a:off x="0" y="0"/>
+          <a:ext cx="0" cy="0"/>
+          <a:chOff x="0" y="0"/>
+          <a:chExt cx="0" cy="0"/>
+        </a:xfrm>
+      </p:grpSpPr>
+      <p:sp>
+        <p:nvSpPr>
+          <p:cNvPr id="2" name="Text 0"/>
+          <p:cNvSpPr/>
+          <p:nvPr/>
+        </p:nvSpPr>
+        <p:spPr>
+          <a:xfrm>
+            <a:off x="548640" y="411480"/>
+            <a:ext cx="11091672" cy="640080"/>
+          </a:xfrm>
+          <a:prstGeom prst="rect">
+            <a:avLst/>
+          </a:prstGeom>
+          <a:noFill/>
+          <a:ln/>
+        </p:spPr>
+        <p:txBody>
+          <a:bodyPr wrap="square" lIns="0" tIns="0" rIns="0" bIns="0" rtlCol="0" anchor="ctr"/>
+          <a:lstStyle/>
+          <a:p>
+            <a:pPr indent="0" marL="0">
+              <a:buNone/>
+            </a:pPr>
+            <a:r>
+              <a:rPr lang="en-US" sz="2700" b="1" dirty="0">
+                <a:solidFill>
+                  <a:srgbClr val="16224D"/>
+                </a:solidFill>
+                <a:latin typeface="Microsoft JhengHei" pitchFamily="34" charset="0"/>
+                <a:ea typeface="Microsoft JhengHei" pitchFamily="34" charset="-122"/>
+                <a:cs typeface="Microsoft JhengHei" pitchFamily="34" charset="-120"/>
+              </a:rPr>
+              <a:t>Kiro 開發｜.kiro 目錄就是團隊大腦</a:t>
+            </a:r>
+            <a:endParaRPr lang="en-US" sz="2700" dirty="0"/>
+          </a:p>
+        </p:txBody>
+      </p:sp>
+      <p:sp>
+        <p:nvSpPr>
+          <p:cNvPr id="3" name="Text 1"/>
+          <p:cNvSpPr/>
+          <p:nvPr/>
+        </p:nvSpPr>
+        <p:spPr>
+          <a:xfrm>
+            <a:off x="548640" y="1024128"/>
+            <a:ext cx="11091672" cy="320040"/>
+          </a:xfrm>
+          <a:prstGeom prst="rect">
+            <a:avLst/>
+          </a:prstGeom>
+          <a:noFill/>
+          <a:ln/>
+        </p:spPr>
+        <p:txBody>
+          <a:bodyPr wrap="square" lIns="0" tIns="0" rIns="0" bIns="0" rtlCol="0" anchor="ctr"/>
+          <a:lstStyle/>
+          <a:p>
+            <a:pPr indent="0" marL="0">
+              <a:buNone/>
+            </a:pPr>
+            <a:r>
+              <a:rPr lang="en-US" sz="1250" dirty="0">
+                <a:solidFill>
+                  <a:srgbClr val="6B7280"/>
+                </a:solidFill>
+                <a:latin typeface="Microsoft JhengHei" pitchFamily="34" charset="0"/>
+                <a:ea typeface="Microsoft JhengHei" pitchFamily="34" charset="-122"/>
+                <a:cs typeface="Microsoft JhengHei" pitchFamily="34" charset="-120"/>
+              </a:rPr>
+              <a:t>打開專案它就懂我們的規矩——不用自己記紅線</a:t>
+            </a:r>
+            <a:endParaRPr lang="en-US" sz="1250" dirty="0"/>
+          </a:p>
+        </p:txBody>
+      </p:sp>
+      <p:sp>
+        <p:nvSpPr>
+          <p:cNvPr id="4" name="Shape 2"/>
+          <p:cNvSpPr/>
+          <p:nvPr/>
+        </p:nvSpPr>
+        <p:spPr>
+          <a:xfrm>
+            <a:off x="548640" y="1554480"/>
+            <a:ext cx="11091672" cy="1280160"/>
+          </a:xfrm>
+          <a:prstGeom prst="roundRect">
+            <a:avLst>
+              <a:gd name="adj" fmla="val 6429"/>
+            </a:avLst>
+          </a:prstGeom>
+          <a:solidFill>
+            <a:srgbClr val="EAF0FB"/>
+          </a:solidFill>
+          <a:ln/>
+        </p:spPr>
+      </p:sp>
+      <p:sp>
+        <p:nvSpPr>
+          <p:cNvPr id="5" name="Text 3"/>
+          <p:cNvSpPr/>
+          <p:nvPr/>
+        </p:nvSpPr>
+        <p:spPr>
+          <a:xfrm>
+            <a:off x="868680" y="1691640"/>
+            <a:ext cx="3108960" cy="457200"/>
+          </a:xfrm>
+          <a:prstGeom prst="rect">
+            <a:avLst/>
+          </a:prstGeom>
+          <a:noFill/>
+          <a:ln/>
+        </p:spPr>
+        <p:txBody>
+          <a:bodyPr wrap="square" lIns="0" tIns="0" rIns="0" bIns="0" rtlCol="0" anchor="ctr"/>
+          <a:lstStyle/>
+          <a:p>
+            <a:pPr indent="0" marL="0">
+              <a:buNone/>
+            </a:pPr>
+            <a:r>
+              <a:rPr lang="en-US" sz="1400" b="1" dirty="0">
+                <a:solidFill>
+                  <a:srgbClr val="16224D"/>
+                </a:solidFill>
+                <a:latin typeface="Courier New" pitchFamily="34" charset="0"/>
+                <a:ea typeface="Courier New" pitchFamily="34" charset="-122"/>
+                <a:cs typeface="Courier New" pitchFamily="34" charset="-120"/>
+              </a:rPr>
+              <a:t>.kiro/steering/</a:t>
+            </a:r>
+            <a:endParaRPr lang="en-US" sz="1400" dirty="0"/>
+          </a:p>
+        </p:txBody>
+      </p:sp>
+      <p:sp>
+        <p:nvSpPr>
+          <p:cNvPr id="6" name="Text 4"/>
+          <p:cNvSpPr/>
+          <p:nvPr/>
+        </p:nvSpPr>
+        <p:spPr>
+          <a:xfrm>
+            <a:off x="868680" y="2176272"/>
+            <a:ext cx="3108960" cy="365760"/>
+          </a:xfrm>
+          <a:prstGeom prst="rect">
+            <a:avLst/>
+          </a:prstGeom>
+          <a:noFill/>
+          <a:ln/>
+        </p:spPr>
+        <p:txBody>
+          <a:bodyPr wrap="square" lIns="0" tIns="0" rIns="0" bIns="0" rtlCol="0" anchor="ctr"/>
+          <a:lstStyle/>
+          <a:p>
+            <a:pPr indent="0" marL="0">
+              <a:buNone/>
+            </a:pPr>
+            <a:r>
+              <a:rPr lang="en-US" sz="1100" b="1" dirty="0">
+                <a:solidFill>
+                  <a:srgbClr val="E8A13A"/>
+                </a:solidFill>
+                <a:latin typeface="Microsoft JhengHei" pitchFamily="34" charset="0"/>
+                <a:ea typeface="Microsoft JhengHei" pitchFamily="34" charset="-122"/>
+                <a:cs typeface="Microsoft JhengHei" pitchFamily="34" charset="-120"/>
+              </a:rPr>
+              <a:t>自動載入的團隊約定</a:t>
+            </a:r>
+            <a:endParaRPr lang="en-US" sz="1100" dirty="0"/>
+          </a:p>
+        </p:txBody>
+      </p:sp>
+      <p:sp>
+        <p:nvSpPr>
+          <p:cNvPr id="7" name="Text 5"/>
+          <p:cNvSpPr/>
+          <p:nvPr/>
+        </p:nvSpPr>
+        <p:spPr>
+          <a:xfrm>
+            <a:off x="4160520" y="1664208"/>
+            <a:ext cx="7498080" cy="1097280"/>
+          </a:xfrm>
+          <a:prstGeom prst="rect">
+            <a:avLst/>
+          </a:prstGeom>
+          <a:noFill/>
+          <a:ln/>
+        </p:spPr>
+        <p:txBody>
+          <a:bodyPr wrap="square" lIns="0" tIns="0" rIns="0" bIns="0" rtlCol="0" anchor="ctr"/>
+          <a:lstStyle/>
+          <a:p>
+            <a:pPr indent="0" marL="0">
+              <a:buNone/>
+            </a:pPr>
+            <a:r>
+              <a:rPr lang="en-US" sz="1200" dirty="0">
+                <a:solidFill>
+                  <a:srgbClr val="1F2937"/>
+                </a:solidFill>
+                <a:latin typeface="Microsoft JhengHei" pitchFamily="34" charset="0"/>
+                <a:ea typeface="Microsoft JhengHei" pitchFamily="34" charset="-122"/>
+                <a:cs typeface="Microsoft JhengHei" pitchFamily="34" charset="-120"/>
+              </a:rPr>
+              <a:t>product.md 紅線（不報明牌/下單必確認）、data-schema.md 欄位與 API 格式、tech.md 架構規範。Kiro 生成的每行程式都遵守</a:t>
+            </a:r>
+            <a:endParaRPr lang="en-US" sz="1200" dirty="0"/>
+          </a:p>
+        </p:txBody>
+      </p:sp>
+      <p:sp>
+        <p:nvSpPr>
+          <p:cNvPr id="8" name="Shape 6"/>
+          <p:cNvSpPr/>
+          <p:nvPr/>
+        </p:nvSpPr>
+        <p:spPr>
+          <a:xfrm>
+            <a:off x="548640" y="2971800"/>
+            <a:ext cx="11091672" cy="1280160"/>
+          </a:xfrm>
+          <a:prstGeom prst="roundRect">
+            <a:avLst>
+              <a:gd name="adj" fmla="val 6429"/>
+            </a:avLst>
+          </a:prstGeom>
+          <a:solidFill>
+            <a:srgbClr val="EAF0FB"/>
+          </a:solidFill>
+          <a:ln/>
+        </p:spPr>
+      </p:sp>
+      <p:sp>
+        <p:nvSpPr>
+          <p:cNvPr id="9" name="Text 7"/>
+          <p:cNvSpPr/>
+          <p:nvPr/>
+        </p:nvSpPr>
+        <p:spPr>
+          <a:xfrm>
+            <a:off x="868680" y="3108960"/>
+            <a:ext cx="3108960" cy="457200"/>
+          </a:xfrm>
+          <a:prstGeom prst="rect">
+            <a:avLst/>
+          </a:prstGeom>
+          <a:noFill/>
+          <a:ln/>
+        </p:spPr>
+        <p:txBody>
+          <a:bodyPr wrap="square" lIns="0" tIns="0" rIns="0" bIns="0" rtlCol="0" anchor="ctr"/>
+          <a:lstStyle/>
+          <a:p>
+            <a:pPr indent="0" marL="0">
+              <a:buNone/>
+            </a:pPr>
+            <a:r>
+              <a:rPr lang="en-US" sz="1400" b="1" dirty="0">
+                <a:solidFill>
+                  <a:srgbClr val="16224D"/>
+                </a:solidFill>
+                <a:latin typeface="Courier New" pitchFamily="34" charset="0"/>
+                <a:ea typeface="Courier New" pitchFamily="34" charset="-122"/>
+                <a:cs typeface="Courier New" pitchFamily="34" charset="-120"/>
+              </a:rPr>
+              <a:t>.kiro/specs/&lt;功能&gt;/</a:t>
+            </a:r>
+            <a:endParaRPr lang="en-US" sz="1400" dirty="0"/>
+          </a:p>
+        </p:txBody>
+      </p:sp>
+      <p:sp>
+        <p:nvSpPr>
+          <p:cNvPr id="10" name="Text 8"/>
+          <p:cNvSpPr/>
+          <p:nvPr/>
+        </p:nvSpPr>
+        <p:spPr>
+          <a:xfrm>
+            <a:off x="868680" y="3593592"/>
+            <a:ext cx="3108960" cy="365760"/>
+          </a:xfrm>
+          <a:prstGeom prst="rect">
+            <a:avLst/>
+          </a:prstGeom>
+          <a:noFill/>
+          <a:ln/>
+        </p:spPr>
+        <p:txBody>
+          <a:bodyPr wrap="square" lIns="0" tIns="0" rIns="0" bIns="0" rtlCol="0" anchor="ctr"/>
+          <a:lstStyle/>
+          <a:p>
+            <a:pPr indent="0" marL="0">
+              <a:buNone/>
+            </a:pPr>
+            <a:r>
+              <a:rPr lang="en-US" sz="1100" b="1" dirty="0">
+                <a:solidFill>
+                  <a:srgbClr val="E8A13A"/>
+                </a:solidFill>
+                <a:latin typeface="Microsoft JhengHei" pitchFamily="34" charset="0"/>
+                <a:ea typeface="Microsoft JhengHei" pitchFamily="34" charset="-122"/>
+                <a:cs typeface="Microsoft JhengHei" pitchFamily="34" charset="-120"/>
+              </a:rPr>
+              <a:t>五個功能規格（三件套）</a:t>
+            </a:r>
+            <a:endParaRPr lang="en-US" sz="1100" dirty="0"/>
+          </a:p>
+        </p:txBody>
+      </p:sp>
+      <p:sp>
+        <p:nvSpPr>
+          <p:cNvPr id="11" name="Text 9"/>
+          <p:cNvSpPr/>
+          <p:nvPr/>
+        </p:nvSpPr>
+        <p:spPr>
+          <a:xfrm>
+            <a:off x="4160520" y="3081528"/>
+            <a:ext cx="7498080" cy="1097280"/>
+          </a:xfrm>
+          <a:prstGeom prst="rect">
+            <a:avLst/>
+          </a:prstGeom>
+          <a:noFill/>
+          <a:ln/>
+        </p:spPr>
+        <p:txBody>
+          <a:bodyPr wrap="square" lIns="0" tIns="0" rIns="0" bIns="0" rtlCol="0" anchor="ctr"/>
+          <a:lstStyle/>
+          <a:p>
+            <a:pPr indent="0" marL="0">
+              <a:buNone/>
+            </a:pPr>
+            <a:r>
+              <a:rPr lang="en-US" sz="1200" dirty="0">
+                <a:solidFill>
+                  <a:srgbClr val="1F2937"/>
+                </a:solidFill>
+                <a:latin typeface="Microsoft JhengHei" pitchFamily="34" charset="0"/>
+                <a:ea typeface="Microsoft JhengHei" pitchFamily="34" charset="-122"/>
+                <a:cs typeface="Microsoft JhengHei" pitchFamily="34" charset="-120"/>
+              </a:rPr>
+              <a:t>requirements.md 驗收條件（EARS）→ design.md 設計 → tasks.md 任務清單。已備：chat-agent、behavior-engine、order-flow、profile-engine、trade-scenarios、audit-log</a:t>
+            </a:r>
+            <a:endParaRPr lang="en-US" sz="1200" dirty="0"/>
+          </a:p>
+        </p:txBody>
+      </p:sp>
+      <p:sp>
+        <p:nvSpPr>
+          <p:cNvPr id="12" name="Shape 10"/>
+          <p:cNvSpPr/>
+          <p:nvPr/>
+        </p:nvSpPr>
+        <p:spPr>
+          <a:xfrm>
+            <a:off x="548640" y="4389120"/>
+            <a:ext cx="11091672" cy="1280160"/>
+          </a:xfrm>
+          <a:prstGeom prst="roundRect">
+            <a:avLst>
+              <a:gd name="adj" fmla="val 6429"/>
+            </a:avLst>
+          </a:prstGeom>
+          <a:solidFill>
+            <a:srgbClr val="EAF0FB"/>
+          </a:solidFill>
+          <a:ln/>
+        </p:spPr>
+      </p:sp>
+      <p:sp>
+        <p:nvSpPr>
+          <p:cNvPr id="13" name="Text 11"/>
+          <p:cNvSpPr/>
+          <p:nvPr/>
+        </p:nvSpPr>
+        <p:spPr>
+          <a:xfrm>
+            <a:off x="868680" y="4526280"/>
+            <a:ext cx="3108960" cy="457200"/>
+          </a:xfrm>
+          <a:prstGeom prst="rect">
+            <a:avLst/>
+          </a:prstGeom>
+          <a:noFill/>
+          <a:ln/>
+        </p:spPr>
+        <p:txBody>
+          <a:bodyPr wrap="square" lIns="0" tIns="0" rIns="0" bIns="0" rtlCol="0" anchor="ctr"/>
+          <a:lstStyle/>
+          <a:p>
+            <a:pPr indent="0" marL="0">
+              <a:buNone/>
+            </a:pPr>
+            <a:r>
+              <a:rPr lang="en-US" sz="1400" b="1" dirty="0">
+                <a:solidFill>
+                  <a:srgbClr val="16224D"/>
+                </a:solidFill>
+                <a:latin typeface="Courier New" pitchFamily="34" charset="0"/>
+                <a:ea typeface="Courier New" pitchFamily="34" charset="-122"/>
+                <a:cs typeface="Courier New" pitchFamily="34" charset="-120"/>
+              </a:rPr>
+              <a:t>.kiro/settings/mcp.json</a:t>
+            </a:r>
+            <a:endParaRPr lang="en-US" sz="1400" dirty="0"/>
+          </a:p>
+        </p:txBody>
+      </p:sp>
+      <p:sp>
+        <p:nvSpPr>
+          <p:cNvPr id="14" name="Text 12"/>
+          <p:cNvSpPr/>
+          <p:nvPr/>
+        </p:nvSpPr>
+        <p:spPr>
+          <a:xfrm>
+            <a:off x="868680" y="5010912"/>
+            <a:ext cx="3108960" cy="365760"/>
+          </a:xfrm>
+          <a:prstGeom prst="rect">
+            <a:avLst/>
+          </a:prstGeom>
+          <a:noFill/>
+          <a:ln/>
+        </p:spPr>
+        <p:txBody>
+          <a:bodyPr wrap="square" lIns="0" tIns="0" rIns="0" bIns="0" rtlCol="0" anchor="ctr"/>
+          <a:lstStyle/>
+          <a:p>
+            <a:pPr indent="0" marL="0">
+              <a:buNone/>
+            </a:pPr>
+            <a:r>
+              <a:rPr lang="en-US" sz="1100" b="1" dirty="0">
+                <a:solidFill>
+                  <a:srgbClr val="E8A13A"/>
+                </a:solidFill>
+                <a:latin typeface="Microsoft JhengHei" pitchFamily="34" charset="0"/>
+                <a:ea typeface="Microsoft JhengHei" pitchFamily="34" charset="-122"/>
+                <a:cs typeface="Microsoft JhengHei" pitchFamily="34" charset="-120"/>
+              </a:rPr>
+              <a:t>MAX MCP 接入</a:t>
+            </a:r>
+            <a:endParaRPr lang="en-US" sz="1100" dirty="0"/>
+          </a:p>
+        </p:txBody>
+      </p:sp>
+      <p:sp>
+        <p:nvSpPr>
+          <p:cNvPr id="15" name="Text 13"/>
+          <p:cNvSpPr/>
+          <p:nvPr/>
+        </p:nvSpPr>
+        <p:spPr>
+          <a:xfrm>
+            <a:off x="4160520" y="4498848"/>
+            <a:ext cx="7498080" cy="1097280"/>
+          </a:xfrm>
+          <a:prstGeom prst="rect">
+            <a:avLst/>
+          </a:prstGeom>
+          <a:noFill/>
+          <a:ln/>
+        </p:spPr>
+        <p:txBody>
+          <a:bodyPr wrap="square" lIns="0" tIns="0" rIns="0" bIns="0" rtlCol="0" anchor="ctr"/>
+          <a:lstStyle/>
+          <a:p>
+            <a:pPr indent="0" marL="0">
+              <a:buNone/>
+            </a:pPr>
+            <a:r>
+              <a:rPr lang="en-US" sz="1200" dirty="0">
+                <a:solidFill>
+                  <a:srgbClr val="1F2937"/>
+                </a:solidFill>
+                <a:latin typeface="Microsoft JhengHei" pitchFamily="34" charset="0"/>
+                <a:ea typeface="Microsoft JhengHei" pitchFamily="34" charset="-122"/>
+                <a:cs typeface="Microsoft JhengHei" pitchFamily="34" charset="-120"/>
+              </a:rPr>
+              <a:t>把 REPLACE_WITH_LOCAL_PATH 改成本機 clone 的 max-mcp-server 路徑；金鑰走環境變數。之後對 Kiro 說「查 BTC 現價」它直接打 MAX API</a:t>
+            </a:r>
+            <a:endParaRPr lang="en-US" sz="1200" dirty="0"/>
+          </a:p>
+        </p:txBody>
+      </p:sp>
+      <p:sp>
+        <p:nvSpPr>
+          <p:cNvPr id="16" name="Text 14"/>
+          <p:cNvSpPr/>
+          <p:nvPr/>
+        </p:nvSpPr>
+        <p:spPr>
+          <a:xfrm>
+            <a:off x="548640" y="5989320"/>
+            <a:ext cx="11091672" cy="411480"/>
+          </a:xfrm>
+          <a:prstGeom prst="rect">
+            <a:avLst/>
+          </a:prstGeom>
+          <a:noFill/>
+          <a:ln/>
+        </p:spPr>
+        <p:txBody>
+          <a:bodyPr wrap="square" lIns="0" tIns="0" rIns="0" bIns="0" rtlCol="0" anchor="ctr"/>
+          <a:lstStyle/>
+          <a:p>
+            <a:pPr indent="0" marL="0">
+              <a:buNone/>
+            </a:pPr>
+            <a:r>
+              <a:rPr lang="en-US" sz="1300" b="1" dirty="0">
+                <a:solidFill>
+                  <a:srgbClr val="16224D"/>
+                </a:solidFill>
+                <a:latin typeface="Microsoft JhengHei" pitchFamily="34" charset="0"/>
+                <a:ea typeface="Microsoft JhengHei" pitchFamily="34" charset="-122"/>
+                <a:cs typeface="Microsoft JhengHei" pitchFamily="34" charset="-120"/>
+              </a:rPr>
+              <a:t>Steering 寫得越清楚，Kiro 來回修正越少——這就是我們省 credit 的主要手段。</a:t>
+            </a:r>
+            <a:endParaRPr lang="en-US" sz="1300" dirty="0"/>
+          </a:p>
+        </p:txBody>
+      </p:sp>
+    </p:spTree>
+  </p:cSld>
+  <p:clrMapOvr>
+    <a:masterClrMapping/>
+  </p:clrMapOvr>
+</p:sld>
+</file>
+
+<file path=ppt/slides/slide13.xml><?xml version="1.0" encoding="utf-8"?>
+<p:sld xmlns:a="http://schemas.openxmlformats.org/drawingml/2006/main" xmlns:r="http://schemas.openxmlformats.org/officeDocument/2006/relationships" xmlns:p="http://schemas.openxmlformats.org/presentationml/2006/main">
+  <p:cSld name="Slide 13">
+    <p:bg>
+      <p:bgPr>
+        <a:solidFill>
+          <a:srgbClr val="FFFFFF"/>
+        </a:solidFill>
+      </p:bgPr>
+    </p:bg>
+    <p:spTree>
+      <p:nvGrpSpPr>
+        <p:cNvPr id="1" name=""/>
+        <p:cNvGrpSpPr/>
+        <p:nvPr/>
+      </p:nvGrpSpPr>
+      <p:grpSpPr>
+        <a:xfrm>
+          <a:off x="0" y="0"/>
+          <a:ext cx="0" cy="0"/>
+          <a:chOff x="0" y="0"/>
+          <a:chExt cx="0" cy="0"/>
+        </a:xfrm>
+      </p:grpSpPr>
+      <p:sp>
+        <p:nvSpPr>
+          <p:cNvPr id="2" name="Text 0"/>
+          <p:cNvSpPr/>
+          <p:nvPr/>
+        </p:nvSpPr>
+        <p:spPr>
+          <a:xfrm>
+            <a:off x="548640" y="411480"/>
+            <a:ext cx="11091672" cy="640080"/>
+          </a:xfrm>
+          <a:prstGeom prst="rect">
+            <a:avLst/>
+          </a:prstGeom>
+          <a:noFill/>
+          <a:ln/>
+        </p:spPr>
+        <p:txBody>
+          <a:bodyPr wrap="square" lIns="0" tIns="0" rIns="0" bIns="0" rtlCol="0" anchor="ctr"/>
+          <a:lstStyle/>
+          <a:p>
+            <a:pPr indent="0" marL="0">
+              <a:buNone/>
+            </a:pPr>
+            <a:r>
+              <a:rPr lang="en-US" sz="2700" b="1" dirty="0">
+                <a:solidFill>
+                  <a:srgbClr val="16224D"/>
+                </a:solidFill>
+                <a:latin typeface="Microsoft JhengHei" pitchFamily="34" charset="0"/>
+                <a:ea typeface="Microsoft JhengHei" pitchFamily="34" charset="-122"/>
+                <a:cs typeface="Microsoft JhengHei" pitchFamily="34" charset="-120"/>
+              </a:rPr>
               <a:t>Kiro 開發｜日常循環：領任務 → 開分支 → Kiro 做 → 合回去</a:t>
             </a:r>
             <a:endParaRPr lang="en-US" sz="2700" dirty="0"/>
@@ -2869,9 +6786,9 @@
 </p:sld>
 </file>
 
-<file path=ppt/slides/slide11.xml><?xml version="1.0" encoding="utf-8"?>
+<file path=ppt/slides/slide14.xml><?xml version="1.0" encoding="utf-8"?>
 <p:sld xmlns:a="http://schemas.openxmlformats.org/drawingml/2006/main" xmlns:r="http://schemas.openxmlformats.org/officeDocument/2006/relationships" xmlns:p="http://schemas.openxmlformats.org/presentationml/2006/main">
-  <p:cSld name="Slide 11">
+  <p:cSld name="Slide 14">
     <p:bg>
       <p:bgPr>
         <a:solidFill>
@@ -3546,9 +7463,9 @@
 </p:sld>
 </file>
 
-<file path=ppt/slides/slide12.xml><?xml version="1.0" encoding="utf-8"?>
+<file path=ppt/slides/slide15.xml><?xml version="1.0" encoding="utf-8"?>
 <p:sld xmlns:a="http://schemas.openxmlformats.org/drawingml/2006/main" xmlns:r="http://schemas.openxmlformats.org/officeDocument/2006/relationships" xmlns:p="http://schemas.openxmlformats.org/presentationml/2006/main">
-  <p:cSld name="Slide 12">
+  <p:cSld name="Slide 15">
     <p:bg>
       <p:bgPr>
         <a:solidFill>
@@ -17964,7 +21881,7 @@
                 <a:ea typeface="Microsoft JhengHei" pitchFamily="34" charset="-122"/>
                 <a:cs typeface="Microsoft JhengHei" pitchFamily="34" charset="-120"/>
               </a:rPr>
-              <a:t>Kiro 部署｜每人一次設定（約 15 分鐘）</a:t>
+              <a:t>功能 × 評分對應：你做的東西扛哪幾分</a:t>
             </a:r>
             <a:endParaRPr lang="en-US" sz="2700" dirty="0"/>
           </a:p>
@@ -18003,736 +21920,2219 @@
                 <a:ea typeface="Microsoft JhengHei" pitchFamily="34" charset="-122"/>
                 <a:cs typeface="Microsoft JhengHei" pitchFamily="34" charset="-120"/>
               </a:rPr>
-              <a:t>認領工作包後，先把這頁做完才開工</a:t>
+              <a:t>每個工作項都有明確的得分理由——做的時候朝著驗收方向做</a:t>
             </a:r>
             <a:endParaRPr lang="en-US" sz="1250" dirty="0"/>
           </a:p>
         </p:txBody>
       </p:sp>
-      <p:sp>
-        <p:nvSpPr>
-          <p:cNvPr id="4" name="Shape 2"/>
-          <p:cNvSpPr/>
-          <p:nvPr/>
-        </p:nvSpPr>
-        <p:spPr>
-          <a:xfrm>
-            <a:off x="548640" y="1627632"/>
-            <a:ext cx="502920" cy="502920"/>
-          </a:xfrm>
-          <a:prstGeom prst="ellipse">
-            <a:avLst/>
-          </a:prstGeom>
-          <a:solidFill>
-            <a:srgbClr val="16224D"/>
-          </a:solidFill>
-          <a:ln/>
-        </p:spPr>
-      </p:sp>
-      <p:sp>
-        <p:nvSpPr>
-          <p:cNvPr id="5" name="Text 3"/>
-          <p:cNvSpPr/>
-          <p:nvPr/>
-        </p:nvSpPr>
-        <p:spPr>
-          <a:xfrm>
-            <a:off x="548640" y="1627632"/>
-            <a:ext cx="502920" cy="502920"/>
-          </a:xfrm>
-          <a:prstGeom prst="rect">
-            <a:avLst/>
-          </a:prstGeom>
-          <a:noFill/>
-          <a:ln/>
-        </p:spPr>
-        <p:txBody>
-          <a:bodyPr wrap="square" lIns="0" tIns="0" rIns="0" bIns="0" rtlCol="0" anchor="ctr"/>
-          <a:lstStyle/>
-          <a:p>
-            <a:pPr algn="ctr" indent="0" marL="0">
-              <a:buNone/>
-            </a:pPr>
-            <a:r>
-              <a:rPr lang="en-US" sz="1600" b="1" dirty="0">
-                <a:solidFill>
-                  <a:srgbClr val="FFFFFF"/>
-                </a:solidFill>
-                <a:latin typeface="Microsoft JhengHei" pitchFamily="34" charset="0"/>
-                <a:ea typeface="Microsoft JhengHei" pitchFamily="34" charset="-122"/>
-                <a:cs typeface="Microsoft JhengHei" pitchFamily="34" charset="-120"/>
-              </a:rPr>
-              <a:t>1</a:t>
-            </a:r>
-            <a:endParaRPr lang="en-US" sz="1600" dirty="0"/>
-          </a:p>
-        </p:txBody>
-      </p:sp>
-      <p:sp>
-        <p:nvSpPr>
-          <p:cNvPr id="6" name="Text 4"/>
-          <p:cNvSpPr/>
-          <p:nvPr/>
-        </p:nvSpPr>
-        <p:spPr>
-          <a:xfrm>
-            <a:off x="1280160" y="1554480"/>
-            <a:ext cx="1737360" cy="685800"/>
-          </a:xfrm>
-          <a:prstGeom prst="rect">
-            <a:avLst/>
-          </a:prstGeom>
-          <a:noFill/>
-          <a:ln/>
-        </p:spPr>
-        <p:txBody>
-          <a:bodyPr wrap="square" lIns="0" tIns="0" rIns="0" bIns="0" rtlCol="0" anchor="ctr"/>
-          <a:lstStyle/>
-          <a:p>
-            <a:pPr indent="0" marL="0">
-              <a:buNone/>
-            </a:pPr>
-            <a:r>
-              <a:rPr lang="en-US" sz="1500" b="1" dirty="0">
-                <a:solidFill>
-                  <a:srgbClr val="16224D"/>
-                </a:solidFill>
-                <a:latin typeface="Microsoft JhengHei" pitchFamily="34" charset="0"/>
-                <a:ea typeface="Microsoft JhengHei" pitchFamily="34" charset="-122"/>
-                <a:cs typeface="Microsoft JhengHei" pitchFamily="34" charset="-120"/>
-              </a:rPr>
-              <a:t>下載安裝</a:t>
-            </a:r>
-            <a:endParaRPr lang="en-US" sz="1500" dirty="0"/>
-          </a:p>
-        </p:txBody>
-      </p:sp>
-      <p:sp>
-        <p:nvSpPr>
-          <p:cNvPr id="7" name="Text 5"/>
-          <p:cNvSpPr/>
-          <p:nvPr/>
-        </p:nvSpPr>
-        <p:spPr>
-          <a:xfrm>
-            <a:off x="3108960" y="1554480"/>
-            <a:ext cx="8595360" cy="685800"/>
-          </a:xfrm>
-          <a:prstGeom prst="rect">
-            <a:avLst/>
-          </a:prstGeom>
-          <a:noFill/>
-          <a:ln/>
-        </p:spPr>
-        <p:txBody>
-          <a:bodyPr wrap="square" lIns="0" tIns="0" rIns="0" bIns="0" rtlCol="0" anchor="ctr"/>
-          <a:lstStyle/>
-          <a:p>
-            <a:pPr indent="0" marL="0">
-              <a:buNone/>
-            </a:pPr>
-            <a:r>
-              <a:rPr lang="en-US" sz="1300" dirty="0">
-                <a:solidFill>
-                  <a:srgbClr val="1F2937"/>
-                </a:solidFill>
-                <a:latin typeface="Microsoft JhengHei" pitchFamily="34" charset="0"/>
-                <a:ea typeface="Microsoft JhengHei" pitchFamily="34" charset="-122"/>
-                <a:cs typeface="Microsoft JhengHei" pitchFamily="34" charset="-120"/>
-              </a:rPr>
-              <a:t>kiro.dev 下載（Mac/Windows）。介面就是 VS Code，不用重學</a:t>
-            </a:r>
-            <a:endParaRPr lang="en-US" sz="1300" dirty="0"/>
-          </a:p>
-        </p:txBody>
-      </p:sp>
-      <p:sp>
-        <p:nvSpPr>
-          <p:cNvPr id="8" name="Shape 6"/>
-          <p:cNvSpPr/>
-          <p:nvPr/>
-        </p:nvSpPr>
-        <p:spPr>
-          <a:xfrm>
-            <a:off x="548640" y="2496312"/>
-            <a:ext cx="502920" cy="502920"/>
-          </a:xfrm>
-          <a:prstGeom prst="ellipse">
-            <a:avLst/>
-          </a:prstGeom>
-          <a:solidFill>
-            <a:srgbClr val="16224D"/>
-          </a:solidFill>
-          <a:ln/>
-        </p:spPr>
-      </p:sp>
-      <p:sp>
-        <p:nvSpPr>
-          <p:cNvPr id="9" name="Text 7"/>
-          <p:cNvSpPr/>
-          <p:nvPr/>
-        </p:nvSpPr>
-        <p:spPr>
-          <a:xfrm>
-            <a:off x="548640" y="2496312"/>
-            <a:ext cx="502920" cy="502920"/>
-          </a:xfrm>
-          <a:prstGeom prst="rect">
-            <a:avLst/>
-          </a:prstGeom>
-          <a:noFill/>
-          <a:ln/>
-        </p:spPr>
-        <p:txBody>
-          <a:bodyPr wrap="square" lIns="0" tIns="0" rIns="0" bIns="0" rtlCol="0" anchor="ctr"/>
-          <a:lstStyle/>
-          <a:p>
-            <a:pPr algn="ctr" indent="0" marL="0">
-              <a:buNone/>
-            </a:pPr>
-            <a:r>
-              <a:rPr lang="en-US" sz="1600" b="1" dirty="0">
-                <a:solidFill>
-                  <a:srgbClr val="FFFFFF"/>
-                </a:solidFill>
-                <a:latin typeface="Microsoft JhengHei" pitchFamily="34" charset="0"/>
-                <a:ea typeface="Microsoft JhengHei" pitchFamily="34" charset="-122"/>
-                <a:cs typeface="Microsoft JhengHei" pitchFamily="34" charset="-120"/>
-              </a:rPr>
-              <a:t>2</a:t>
-            </a:r>
-            <a:endParaRPr lang="en-US" sz="1600" dirty="0"/>
-          </a:p>
-        </p:txBody>
-      </p:sp>
-      <p:sp>
-        <p:nvSpPr>
-          <p:cNvPr id="10" name="Text 8"/>
-          <p:cNvSpPr/>
-          <p:nvPr/>
-        </p:nvSpPr>
-        <p:spPr>
-          <a:xfrm>
-            <a:off x="1280160" y="2423160"/>
-            <a:ext cx="1737360" cy="685800"/>
-          </a:xfrm>
-          <a:prstGeom prst="rect">
-            <a:avLst/>
-          </a:prstGeom>
-          <a:noFill/>
-          <a:ln/>
-        </p:spPr>
-        <p:txBody>
-          <a:bodyPr wrap="square" lIns="0" tIns="0" rIns="0" bIns="0" rtlCol="0" anchor="ctr"/>
-          <a:lstStyle/>
-          <a:p>
-            <a:pPr indent="0" marL="0">
-              <a:buNone/>
-            </a:pPr>
-            <a:r>
-              <a:rPr lang="en-US" sz="1500" b="1" dirty="0">
-                <a:solidFill>
-                  <a:srgbClr val="16224D"/>
-                </a:solidFill>
-                <a:latin typeface="Microsoft JhengHei" pitchFamily="34" charset="0"/>
-                <a:ea typeface="Microsoft JhengHei" pitchFamily="34" charset="-122"/>
-                <a:cs typeface="Microsoft JhengHei" pitchFamily="34" charset="-120"/>
-              </a:rPr>
-              <a:t>登入</a:t>
-            </a:r>
-            <a:endParaRPr lang="en-US" sz="1500" dirty="0"/>
-          </a:p>
-        </p:txBody>
-      </p:sp>
-      <p:sp>
-        <p:nvSpPr>
-          <p:cNvPr id="11" name="Text 9"/>
-          <p:cNvSpPr/>
-          <p:nvPr/>
-        </p:nvSpPr>
-        <p:spPr>
-          <a:xfrm>
-            <a:off x="3108960" y="2423160"/>
-            <a:ext cx="8595360" cy="685800"/>
-          </a:xfrm>
-          <a:prstGeom prst="rect">
-            <a:avLst/>
-          </a:prstGeom>
-          <a:noFill/>
-          <a:ln/>
-        </p:spPr>
-        <p:txBody>
-          <a:bodyPr wrap="square" lIns="0" tIns="0" rIns="0" bIns="0" rtlCol="0" anchor="ctr"/>
-          <a:lstStyle/>
-          <a:p>
-            <a:pPr indent="0" marL="0">
-              <a:buNone/>
-            </a:pPr>
-            <a:r>
-              <a:rPr lang="en-US" sz="1300" dirty="0">
-                <a:solidFill>
-                  <a:srgbClr val="1F2937"/>
-                </a:solidFill>
-                <a:latin typeface="Microsoft JhengHei" pitchFamily="34" charset="0"/>
-                <a:ea typeface="Microsoft JhengHei" pitchFamily="34" charset="-122"/>
-                <a:cs typeface="Microsoft JhengHei" pitchFamily="34" charset="-120"/>
-              </a:rPr>
-              <a:t>用自己的 Google 帳號。帳號與額度不能共用（主辦規定，違者取消資格）</a:t>
-            </a:r>
-            <a:endParaRPr lang="en-US" sz="1300" dirty="0"/>
-          </a:p>
-        </p:txBody>
-      </p:sp>
-      <p:sp>
-        <p:nvSpPr>
-          <p:cNvPr id="12" name="Shape 10"/>
-          <p:cNvSpPr/>
-          <p:nvPr/>
-        </p:nvSpPr>
-        <p:spPr>
-          <a:xfrm>
-            <a:off x="548640" y="3364992"/>
-            <a:ext cx="502920" cy="502920"/>
-          </a:xfrm>
-          <a:prstGeom prst="ellipse">
-            <a:avLst/>
-          </a:prstGeom>
-          <a:solidFill>
-            <a:srgbClr val="E8A13A"/>
-          </a:solidFill>
-          <a:ln/>
-        </p:spPr>
-      </p:sp>
-      <p:sp>
-        <p:nvSpPr>
-          <p:cNvPr id="13" name="Text 11"/>
-          <p:cNvSpPr/>
-          <p:nvPr/>
-        </p:nvSpPr>
-        <p:spPr>
-          <a:xfrm>
-            <a:off x="548640" y="3364992"/>
-            <a:ext cx="502920" cy="502920"/>
-          </a:xfrm>
-          <a:prstGeom prst="rect">
-            <a:avLst/>
-          </a:prstGeom>
-          <a:noFill/>
-          <a:ln/>
-        </p:spPr>
-        <p:txBody>
-          <a:bodyPr wrap="square" lIns="0" tIns="0" rIns="0" bIns="0" rtlCol="0" anchor="ctr"/>
-          <a:lstStyle/>
-          <a:p>
-            <a:pPr algn="ctr" indent="0" marL="0">
-              <a:buNone/>
-            </a:pPr>
-            <a:r>
-              <a:rPr lang="en-US" sz="1600" b="1" dirty="0">
-                <a:solidFill>
-                  <a:srgbClr val="FFFFFF"/>
-                </a:solidFill>
-                <a:latin typeface="Microsoft JhengHei" pitchFamily="34" charset="0"/>
-                <a:ea typeface="Microsoft JhengHei" pitchFamily="34" charset="-122"/>
-                <a:cs typeface="Microsoft JhengHei" pitchFamily="34" charset="-120"/>
-              </a:rPr>
-              <a:t>3</a:t>
-            </a:r>
-            <a:endParaRPr lang="en-US" sz="1600" dirty="0"/>
-          </a:p>
-        </p:txBody>
-      </p:sp>
-      <p:sp>
-        <p:nvSpPr>
-          <p:cNvPr id="14" name="Text 12"/>
-          <p:cNvSpPr/>
-          <p:nvPr/>
-        </p:nvSpPr>
-        <p:spPr>
-          <a:xfrm>
-            <a:off x="1280160" y="3291840"/>
-            <a:ext cx="1737360" cy="685800"/>
-          </a:xfrm>
-          <a:prstGeom prst="rect">
-            <a:avLst/>
-          </a:prstGeom>
-          <a:noFill/>
-          <a:ln/>
-        </p:spPr>
-        <p:txBody>
-          <a:bodyPr wrap="square" lIns="0" tIns="0" rIns="0" bIns="0" rtlCol="0" anchor="ctr"/>
-          <a:lstStyle/>
-          <a:p>
-            <a:pPr indent="0" marL="0">
-              <a:buNone/>
-            </a:pPr>
-            <a:r>
-              <a:rPr lang="en-US" sz="1500" b="1" dirty="0">
-                <a:solidFill>
-                  <a:srgbClr val="16224D"/>
-                </a:solidFill>
-                <a:latin typeface="Microsoft JhengHei" pitchFamily="34" charset="0"/>
-                <a:ea typeface="Microsoft JhengHei" pitchFamily="34" charset="-122"/>
-                <a:cs typeface="Microsoft JhengHei" pitchFamily="34" charset="-120"/>
-              </a:rPr>
-              <a:t>兌換額度</a:t>
-            </a:r>
-            <a:endParaRPr lang="en-US" sz="1500" dirty="0"/>
-          </a:p>
-        </p:txBody>
-      </p:sp>
-      <p:sp>
-        <p:nvSpPr>
-          <p:cNvPr id="15" name="Text 13"/>
-          <p:cNvSpPr/>
-          <p:nvPr/>
-        </p:nvSpPr>
-        <p:spPr>
-          <a:xfrm>
-            <a:off x="3108960" y="3291840"/>
-            <a:ext cx="8595360" cy="685800"/>
-          </a:xfrm>
-          <a:prstGeom prst="rect">
-            <a:avLst/>
-          </a:prstGeom>
-          <a:noFill/>
-          <a:ln/>
-        </p:spPr>
-        <p:txBody>
-          <a:bodyPr wrap="square" lIns="0" tIns="0" rIns="0" bIns="0" rtlCol="0" anchor="ctr"/>
-          <a:lstStyle/>
-          <a:p>
-            <a:pPr indent="0" marL="0">
-              <a:buNone/>
-            </a:pPr>
-            <a:r>
-              <a:rPr lang="en-US" sz="1300" dirty="0">
-                <a:solidFill>
-                  <a:srgbClr val="1F2937"/>
-                </a:solidFill>
-                <a:latin typeface="Microsoft JhengHei" pitchFamily="34" charset="0"/>
-                <a:ea typeface="Microsoft JhengHei" pitchFamily="34" charset="-122"/>
-                <a:cs typeface="Microsoft JhengHei" pitchFamily="34" charset="-120"/>
-              </a:rPr>
-              <a:t>輸入兌換碼 GenAIHack26 → 頭像選單看到 Bonus Credits 2000 即成功，截圖存證</a:t>
-            </a:r>
-            <a:endParaRPr lang="en-US" sz="1300" dirty="0"/>
-          </a:p>
-        </p:txBody>
-      </p:sp>
-      <p:sp>
-        <p:nvSpPr>
-          <p:cNvPr id="16" name="Shape 14"/>
-          <p:cNvSpPr/>
-          <p:nvPr/>
-        </p:nvSpPr>
-        <p:spPr>
-          <a:xfrm>
-            <a:off x="548640" y="4233672"/>
-            <a:ext cx="502920" cy="502920"/>
-          </a:xfrm>
-          <a:prstGeom prst="ellipse">
-            <a:avLst/>
-          </a:prstGeom>
-          <a:solidFill>
-            <a:srgbClr val="1F9D66"/>
-          </a:solidFill>
-          <a:ln/>
-        </p:spPr>
-      </p:sp>
-      <p:sp>
-        <p:nvSpPr>
-          <p:cNvPr id="17" name="Text 15"/>
-          <p:cNvSpPr/>
-          <p:nvPr/>
-        </p:nvSpPr>
-        <p:spPr>
-          <a:xfrm>
-            <a:off x="548640" y="4233672"/>
-            <a:ext cx="502920" cy="502920"/>
-          </a:xfrm>
-          <a:prstGeom prst="rect">
-            <a:avLst/>
-          </a:prstGeom>
-          <a:noFill/>
-          <a:ln/>
-        </p:spPr>
-        <p:txBody>
-          <a:bodyPr wrap="square" lIns="0" tIns="0" rIns="0" bIns="0" rtlCol="0" anchor="ctr"/>
-          <a:lstStyle/>
-          <a:p>
-            <a:pPr algn="ctr" indent="0" marL="0">
-              <a:buNone/>
-            </a:pPr>
-            <a:r>
-              <a:rPr lang="en-US" sz="1600" b="1" dirty="0">
-                <a:solidFill>
-                  <a:srgbClr val="FFFFFF"/>
-                </a:solidFill>
-                <a:latin typeface="Microsoft JhengHei" pitchFamily="34" charset="0"/>
-                <a:ea typeface="Microsoft JhengHei" pitchFamily="34" charset="-122"/>
-                <a:cs typeface="Microsoft JhengHei" pitchFamily="34" charset="-120"/>
-              </a:rPr>
-              <a:t>4</a:t>
-            </a:r>
-            <a:endParaRPr lang="en-US" sz="1600" dirty="0"/>
-          </a:p>
-        </p:txBody>
-      </p:sp>
-      <p:sp>
-        <p:nvSpPr>
-          <p:cNvPr id="18" name="Text 16"/>
-          <p:cNvSpPr/>
-          <p:nvPr/>
-        </p:nvSpPr>
-        <p:spPr>
-          <a:xfrm>
-            <a:off x="1280160" y="4160520"/>
-            <a:ext cx="1737360" cy="685800"/>
-          </a:xfrm>
-          <a:prstGeom prst="rect">
-            <a:avLst/>
-          </a:prstGeom>
-          <a:noFill/>
-          <a:ln/>
-        </p:spPr>
-        <p:txBody>
-          <a:bodyPr wrap="square" lIns="0" tIns="0" rIns="0" bIns="0" rtlCol="0" anchor="ctr"/>
-          <a:lstStyle/>
-          <a:p>
-            <a:pPr indent="0" marL="0">
-              <a:buNone/>
-            </a:pPr>
-            <a:r>
-              <a:rPr lang="en-US" sz="1500" b="1" dirty="0">
-                <a:solidFill>
-                  <a:srgbClr val="16224D"/>
-                </a:solidFill>
-                <a:latin typeface="Microsoft JhengHei" pitchFamily="34" charset="0"/>
-                <a:ea typeface="Microsoft JhengHei" pitchFamily="34" charset="-122"/>
-                <a:cs typeface="Microsoft JhengHei" pitchFamily="34" charset="-120"/>
-              </a:rPr>
-              <a:t>開啟專案</a:t>
-            </a:r>
-            <a:endParaRPr lang="en-US" sz="1500" dirty="0"/>
-          </a:p>
-        </p:txBody>
-      </p:sp>
-      <p:sp>
-        <p:nvSpPr>
-          <p:cNvPr id="19" name="Text 17"/>
-          <p:cNvSpPr/>
-          <p:nvPr/>
-        </p:nvSpPr>
-        <p:spPr>
-          <a:xfrm>
-            <a:off x="3108960" y="4160520"/>
-            <a:ext cx="8595360" cy="685800"/>
-          </a:xfrm>
-          <a:prstGeom prst="rect">
-            <a:avLst/>
-          </a:prstGeom>
-          <a:noFill/>
-          <a:ln/>
-        </p:spPr>
-        <p:txBody>
-          <a:bodyPr wrap="square" lIns="0" tIns="0" rIns="0" bIns="0" rtlCol="0" anchor="ctr"/>
-          <a:lstStyle/>
-          <a:p>
-            <a:pPr indent="0" marL="0">
-              <a:buNone/>
-            </a:pPr>
-            <a:r>
-              <a:rPr lang="en-US" sz="1300" dirty="0">
-                <a:solidFill>
-                  <a:srgbClr val="1F2937"/>
-                </a:solidFill>
-                <a:latin typeface="Microsoft JhengHei" pitchFamily="34" charset="0"/>
-                <a:ea typeface="Microsoft JhengHei" pitchFamily="34" charset="-122"/>
-                <a:cs typeface="Microsoft JhengHei" pitchFamily="34" charset="-120"/>
-              </a:rPr>
-              <a:t>git clone github.com/giont565/MaiMate → Kiro「Open Folder」選 MaiMate 資料夾</a:t>
-            </a:r>
-            <a:endParaRPr lang="en-US" sz="1300" dirty="0"/>
-          </a:p>
-        </p:txBody>
-      </p:sp>
-      <p:sp>
-        <p:nvSpPr>
-          <p:cNvPr id="20" name="Shape 18"/>
-          <p:cNvSpPr/>
-          <p:nvPr/>
-        </p:nvSpPr>
-        <p:spPr>
-          <a:xfrm>
-            <a:off x="548640" y="5102352"/>
-            <a:ext cx="502920" cy="502920"/>
-          </a:xfrm>
-          <a:prstGeom prst="ellipse">
-            <a:avLst/>
-          </a:prstGeom>
-          <a:solidFill>
-            <a:srgbClr val="1F9D66"/>
-          </a:solidFill>
-          <a:ln/>
-        </p:spPr>
-      </p:sp>
-      <p:sp>
-        <p:nvSpPr>
-          <p:cNvPr id="21" name="Text 19"/>
-          <p:cNvSpPr/>
-          <p:nvPr/>
-        </p:nvSpPr>
-        <p:spPr>
-          <a:xfrm>
-            <a:off x="548640" y="5102352"/>
-            <a:ext cx="502920" cy="502920"/>
-          </a:xfrm>
-          <a:prstGeom prst="rect">
-            <a:avLst/>
-          </a:prstGeom>
-          <a:noFill/>
-          <a:ln/>
-        </p:spPr>
-        <p:txBody>
-          <a:bodyPr wrap="square" lIns="0" tIns="0" rIns="0" bIns="0" rtlCol="0" anchor="ctr"/>
-          <a:lstStyle/>
-          <a:p>
-            <a:pPr algn="ctr" indent="0" marL="0">
-              <a:buNone/>
-            </a:pPr>
-            <a:r>
-              <a:rPr lang="en-US" sz="1600" b="1" dirty="0">
-                <a:solidFill>
-                  <a:srgbClr val="FFFFFF"/>
-                </a:solidFill>
-                <a:latin typeface="Microsoft JhengHei" pitchFamily="34" charset="0"/>
-                <a:ea typeface="Microsoft JhengHei" pitchFamily="34" charset="-122"/>
-                <a:cs typeface="Microsoft JhengHei" pitchFamily="34" charset="-120"/>
-              </a:rPr>
-              <a:t>5</a:t>
-            </a:r>
-            <a:endParaRPr lang="en-US" sz="1600" dirty="0"/>
-          </a:p>
-        </p:txBody>
-      </p:sp>
-      <p:sp>
-        <p:nvSpPr>
-          <p:cNvPr id="22" name="Text 20"/>
-          <p:cNvSpPr/>
-          <p:nvPr/>
-        </p:nvSpPr>
-        <p:spPr>
-          <a:xfrm>
-            <a:off x="1280160" y="5029200"/>
-            <a:ext cx="1737360" cy="685800"/>
-          </a:xfrm>
-          <a:prstGeom prst="rect">
-            <a:avLst/>
-          </a:prstGeom>
-          <a:noFill/>
-          <a:ln/>
-        </p:spPr>
-        <p:txBody>
-          <a:bodyPr wrap="square" lIns="0" tIns="0" rIns="0" bIns="0" rtlCol="0" anchor="ctr"/>
-          <a:lstStyle/>
-          <a:p>
-            <a:pPr indent="0" marL="0">
-              <a:buNone/>
-            </a:pPr>
-            <a:r>
-              <a:rPr lang="en-US" sz="1500" b="1" dirty="0">
-                <a:solidFill>
-                  <a:srgbClr val="16224D"/>
-                </a:solidFill>
-                <a:latin typeface="Microsoft JhengHei" pitchFamily="34" charset="0"/>
-                <a:ea typeface="Microsoft JhengHei" pitchFamily="34" charset="-122"/>
-                <a:cs typeface="Microsoft JhengHei" pitchFamily="34" charset="-120"/>
-              </a:rPr>
-              <a:t>確認載入</a:t>
-            </a:r>
-            <a:endParaRPr lang="en-US" sz="1500" dirty="0"/>
-          </a:p>
-        </p:txBody>
-      </p:sp>
-      <p:sp>
-        <p:nvSpPr>
-          <p:cNvPr id="23" name="Text 21"/>
-          <p:cNvSpPr/>
-          <p:nvPr/>
-        </p:nvSpPr>
-        <p:spPr>
-          <a:xfrm>
-            <a:off x="3108960" y="5029200"/>
-            <a:ext cx="8595360" cy="685800"/>
-          </a:xfrm>
-          <a:prstGeom prst="rect">
-            <a:avLst/>
-          </a:prstGeom>
-          <a:noFill/>
-          <a:ln/>
-        </p:spPr>
-        <p:txBody>
-          <a:bodyPr wrap="square" lIns="0" tIns="0" rIns="0" bIns="0" rtlCol="0" anchor="ctr"/>
-          <a:lstStyle/>
-          <a:p>
-            <a:pPr indent="0" marL="0">
-              <a:buNone/>
-            </a:pPr>
-            <a:r>
-              <a:rPr lang="en-US" sz="1300" dirty="0">
-                <a:solidFill>
-                  <a:srgbClr val="1F2937"/>
-                </a:solidFill>
-                <a:latin typeface="Microsoft JhengHei" pitchFamily="34" charset="0"/>
-                <a:ea typeface="Microsoft JhengHei" pitchFamily="34" charset="-122"/>
-                <a:cs typeface="Microsoft JhengHei" pitchFamily="34" charset="-120"/>
-              </a:rPr>
-              <a:t>左側出現 Specs 面板（5 個 spec）＝.kiro/ 讀取成功；跑 bash scripts/setup.sh 檢查環境</a:t>
-            </a:r>
-            <a:endParaRPr lang="en-US" sz="1300" dirty="0"/>
-          </a:p>
-        </p:txBody>
-      </p:sp>
-      <p:sp>
-        <p:nvSpPr>
-          <p:cNvPr id="24" name="Text 22"/>
-          <p:cNvSpPr/>
-          <p:nvPr/>
-        </p:nvSpPr>
-        <p:spPr>
-          <a:xfrm>
-            <a:off x="548640" y="5989320"/>
-            <a:ext cx="11091672" cy="411480"/>
-          </a:xfrm>
-          <a:prstGeom prst="rect">
-            <a:avLst/>
-          </a:prstGeom>
-          <a:noFill/>
-          <a:ln/>
-        </p:spPr>
-        <p:txBody>
-          <a:bodyPr wrap="square" lIns="0" tIns="0" rIns="0" bIns="0" rtlCol="0" anchor="ctr"/>
-          <a:lstStyle/>
-          <a:p>
-            <a:pPr indent="0" marL="0">
-              <a:buNone/>
-            </a:pPr>
-            <a:r>
-              <a:rPr lang="en-US" sz="1150" dirty="0">
-                <a:solidFill>
-                  <a:srgbClr val="6B7280"/>
-                </a:solidFill>
-                <a:latin typeface="Microsoft JhengHei" pitchFamily="34" charset="0"/>
-                <a:ea typeface="Microsoft JhengHei" pitchFamily="34" charset="-122"/>
-                <a:cs typeface="Microsoft JhengHei" pitchFamily="34" charset="-120"/>
-              </a:rPr>
-              <a:t>疑難：登入卡住→換瀏覽器完成 OAuth；Specs 面板沒出現→確認開的是 MaiMate 根目錄不是上層資料夾。</a:t>
-            </a:r>
-            <a:endParaRPr lang="en-US" sz="1150" dirty="0"/>
-          </a:p>
-        </p:txBody>
-      </p:sp>
+      <p:graphicFrame>
+        <p:nvGraphicFramePr>
+          <p:cNvPr id="9" name="Table 0"/>
+          <p:cNvGraphicFramePr>
+            <a:graphicFrameLocks noGrp="1"/>
+          </p:cNvGraphicFramePr>
+          <p:nvPr>
+            <p:extLst>
+              <p:ext uri="{D42A27DB-BD31-4B8C-83A1-F6EECF244321}">
+                <p14:modId xmlns:p14="http://schemas.microsoft.com/office/powerpoint/2010/main" val="1579011935"/>
+              </p:ext>
+            </p:extLst>
+          </p:nvPr>
+        </p:nvGraphicFramePr>
+        <p:xfrm>
+          <a:off x="548640" y="1463040"/>
+          <a:ext cx="11091672" cy="914400"/>
+        </p:xfrm>
+        <a:graphic>
+          <a:graphicData uri="http://schemas.openxmlformats.org/drawingml/2006/table">
+            <a:tbl>
+              <a:tblPr/>
+              <a:tblGrid>
+                <a:gridCol w="3200400"/>
+                <a:gridCol w="1920240"/>
+                <a:gridCol w="5971032"/>
+              </a:tblGrid>
+              <a:tr h="448056">
+                <a:tc>
+                  <a:txBody>
+                    <a:bodyPr/>
+                    <a:lstStyle/>
+                    <a:p>
+                      <a:pPr indent="0" marL="0">
+                        <a:buNone/>
+                      </a:pPr>
+                      <a:r>
+                        <a:rPr lang="en-US" sz="1050" b="1" dirty="0">
+                          <a:solidFill>
+                            <a:srgbClr val="FFFFFF"/>
+                          </a:solidFill>
+                          <a:latin typeface="Microsoft JhengHei" pitchFamily="34" charset="0"/>
+                          <a:ea typeface="Microsoft JhengHei" pitchFamily="34" charset="-122"/>
+                          <a:cs typeface="Microsoft JhengHei" pitchFamily="34" charset="-120"/>
+                        </a:rPr>
+                        <a:t>展示點（誰做的）</a:t>
+                      </a:r>
+                      <a:endParaRPr lang="en-US" sz="1050" dirty="0">
+                        <a:latin typeface="Microsoft JhengHei" charset="0"/>
+                        <a:ea typeface="Microsoft JhengHei" charset="0"/>
+                        <a:cs typeface="Microsoft JhengHei" charset="0"/>
+                      </a:endParaRPr>
+                    </a:p>
+                  </a:txBody>
+                  <a:tcPr marL="54864" marR="54864" marT="54864" marB="54864" anchor="ctr">
+                    <a:lnL w="9525" cap="flat" cmpd="sng" algn="ctr">
+                      <a:solidFill>
+                        <a:srgbClr val="D5DEF0"/>
+                      </a:solidFill>
+                      <a:prstDash val="solid"/>
+                      <a:round/>
+                      <a:headEnd type="none" w="med" len="med"/>
+                      <a:tailEnd type="none" w="med" len="med"/>
+                    </a:lnL>
+                    <a:lnR w="9525" cap="flat" cmpd="sng" algn="ctr">
+                      <a:solidFill>
+                        <a:srgbClr val="D5DEF0"/>
+                      </a:solidFill>
+                      <a:prstDash val="solid"/>
+                      <a:round/>
+                      <a:headEnd type="none" w="med" len="med"/>
+                      <a:tailEnd type="none" w="med" len="med"/>
+                    </a:lnR>
+                    <a:lnT w="9525" cap="flat" cmpd="sng" algn="ctr">
+                      <a:solidFill>
+                        <a:srgbClr val="D5DEF0"/>
+                      </a:solidFill>
+                      <a:prstDash val="solid"/>
+                      <a:round/>
+                      <a:headEnd type="none" w="med" len="med"/>
+                      <a:tailEnd type="none" w="med" len="med"/>
+                    </a:lnT>
+                    <a:lnB w="9525" cap="flat" cmpd="sng" algn="ctr">
+                      <a:solidFill>
+                        <a:srgbClr val="D5DEF0"/>
+                      </a:solidFill>
+                      <a:prstDash val="solid"/>
+                      <a:round/>
+                      <a:headEnd type="none" w="med" len="med"/>
+                      <a:tailEnd type="none" w="med" len="med"/>
+                    </a:lnB>
+                    <a:solidFill>
+                      <a:srgbClr val="16224D"/>
+                    </a:solidFill>
+                  </a:tcPr>
+                </a:tc>
+                <a:tc>
+                  <a:txBody>
+                    <a:bodyPr/>
+                    <a:lstStyle/>
+                    <a:p>
+                      <a:pPr indent="0" marL="0">
+                        <a:buNone/>
+                      </a:pPr>
+                      <a:r>
+                        <a:rPr lang="en-US" sz="1050" b="1" dirty="0">
+                          <a:solidFill>
+                            <a:srgbClr val="FFFFFF"/>
+                          </a:solidFill>
+                          <a:latin typeface="Microsoft JhengHei" pitchFamily="34" charset="0"/>
+                          <a:ea typeface="Microsoft JhengHei" pitchFamily="34" charset="-122"/>
+                          <a:cs typeface="Microsoft JhengHei" pitchFamily="34" charset="-120"/>
+                        </a:rPr>
+                        <a:t>對應評分</a:t>
+                      </a:r>
+                      <a:endParaRPr lang="en-US" sz="1050" dirty="0">
+                        <a:latin typeface="Microsoft JhengHei" charset="0"/>
+                        <a:ea typeface="Microsoft JhengHei" charset="0"/>
+                        <a:cs typeface="Microsoft JhengHei" charset="0"/>
+                      </a:endParaRPr>
+                    </a:p>
+                  </a:txBody>
+                  <a:tcPr marL="54864" marR="54864" marT="54864" marB="54864" anchor="ctr">
+                    <a:lnL w="9525" cap="flat" cmpd="sng" algn="ctr">
+                      <a:solidFill>
+                        <a:srgbClr val="D5DEF0"/>
+                      </a:solidFill>
+                      <a:prstDash val="solid"/>
+                      <a:round/>
+                      <a:headEnd type="none" w="med" len="med"/>
+                      <a:tailEnd type="none" w="med" len="med"/>
+                    </a:lnL>
+                    <a:lnR w="9525" cap="flat" cmpd="sng" algn="ctr">
+                      <a:solidFill>
+                        <a:srgbClr val="D5DEF0"/>
+                      </a:solidFill>
+                      <a:prstDash val="solid"/>
+                      <a:round/>
+                      <a:headEnd type="none" w="med" len="med"/>
+                      <a:tailEnd type="none" w="med" len="med"/>
+                    </a:lnR>
+                    <a:lnT w="9525" cap="flat" cmpd="sng" algn="ctr">
+                      <a:solidFill>
+                        <a:srgbClr val="D5DEF0"/>
+                      </a:solidFill>
+                      <a:prstDash val="solid"/>
+                      <a:round/>
+                      <a:headEnd type="none" w="med" len="med"/>
+                      <a:tailEnd type="none" w="med" len="med"/>
+                    </a:lnT>
+                    <a:lnB w="9525" cap="flat" cmpd="sng" algn="ctr">
+                      <a:solidFill>
+                        <a:srgbClr val="D5DEF0"/>
+                      </a:solidFill>
+                      <a:prstDash val="solid"/>
+                      <a:round/>
+                      <a:headEnd type="none" w="med" len="med"/>
+                      <a:tailEnd type="none" w="med" len="med"/>
+                    </a:lnB>
+                    <a:solidFill>
+                      <a:srgbClr val="16224D"/>
+                    </a:solidFill>
+                  </a:tcPr>
+                </a:tc>
+                <a:tc>
+                  <a:txBody>
+                    <a:bodyPr/>
+                    <a:lstStyle/>
+                    <a:p>
+                      <a:pPr indent="0" marL="0">
+                        <a:buNone/>
+                      </a:pPr>
+                      <a:r>
+                        <a:rPr lang="en-US" sz="1050" b="1" dirty="0">
+                          <a:solidFill>
+                            <a:srgbClr val="FFFFFF"/>
+                          </a:solidFill>
+                          <a:latin typeface="Microsoft JhengHei" pitchFamily="34" charset="0"/>
+                          <a:ea typeface="Microsoft JhengHei" pitchFamily="34" charset="-122"/>
+                          <a:cs typeface="Microsoft JhengHei" pitchFamily="34" charset="-120"/>
+                        </a:rPr>
+                        <a:t>分數怎麼拿</a:t>
+                      </a:r>
+                      <a:endParaRPr lang="en-US" sz="1050" dirty="0">
+                        <a:latin typeface="Microsoft JhengHei" charset="0"/>
+                        <a:ea typeface="Microsoft JhengHei" charset="0"/>
+                        <a:cs typeface="Microsoft JhengHei" charset="0"/>
+                      </a:endParaRPr>
+                    </a:p>
+                  </a:txBody>
+                  <a:tcPr marL="54864" marR="54864" marT="54864" marB="54864" anchor="ctr">
+                    <a:lnL w="9525" cap="flat" cmpd="sng" algn="ctr">
+                      <a:solidFill>
+                        <a:srgbClr val="D5DEF0"/>
+                      </a:solidFill>
+                      <a:prstDash val="solid"/>
+                      <a:round/>
+                      <a:headEnd type="none" w="med" len="med"/>
+                      <a:tailEnd type="none" w="med" len="med"/>
+                    </a:lnL>
+                    <a:lnR w="9525" cap="flat" cmpd="sng" algn="ctr">
+                      <a:solidFill>
+                        <a:srgbClr val="D5DEF0"/>
+                      </a:solidFill>
+                      <a:prstDash val="solid"/>
+                      <a:round/>
+                      <a:headEnd type="none" w="med" len="med"/>
+                      <a:tailEnd type="none" w="med" len="med"/>
+                    </a:lnR>
+                    <a:lnT w="9525" cap="flat" cmpd="sng" algn="ctr">
+                      <a:solidFill>
+                        <a:srgbClr val="D5DEF0"/>
+                      </a:solidFill>
+                      <a:prstDash val="solid"/>
+                      <a:round/>
+                      <a:headEnd type="none" w="med" len="med"/>
+                      <a:tailEnd type="none" w="med" len="med"/>
+                    </a:lnT>
+                    <a:lnB w="9525" cap="flat" cmpd="sng" algn="ctr">
+                      <a:solidFill>
+                        <a:srgbClr val="D5DEF0"/>
+                      </a:solidFill>
+                      <a:prstDash val="solid"/>
+                      <a:round/>
+                      <a:headEnd type="none" w="med" len="med"/>
+                      <a:tailEnd type="none" w="med" len="med"/>
+                    </a:lnB>
+                    <a:solidFill>
+                      <a:srgbClr val="16224D"/>
+                    </a:solidFill>
+                  </a:tcPr>
+                </a:tc>
+              </a:tr>
+              <a:tr h="448056">
+                <a:tc>
+                  <a:txBody>
+                    <a:bodyPr/>
+                    <a:lstStyle/>
+                    <a:p>
+                      <a:pPr indent="0" marL="0">
+                        <a:buNone/>
+                      </a:pPr>
+                      <a:r>
+                        <a:rPr lang="en-US" sz="1050" b="1" dirty="0">
+                          <a:solidFill>
+                            <a:srgbClr val="1F2937"/>
+                          </a:solidFill>
+                          <a:latin typeface="Microsoft JhengHei" pitchFamily="34" charset="0"/>
+                          <a:ea typeface="Microsoft JhengHei" pitchFamily="34" charset="-122"/>
+                          <a:cs typeface="Microsoft JhengHei" pitchFamily="34" charset="-120"/>
+                        </a:rPr>
+                        <a:t>行為健檢真數字（A/B包）</a:t>
+                      </a:r>
+                      <a:endParaRPr lang="en-US" sz="1050" dirty="0">
+                        <a:latin typeface="Microsoft JhengHei" charset="0"/>
+                        <a:ea typeface="Microsoft JhengHei" charset="0"/>
+                        <a:cs typeface="Microsoft JhengHei" charset="0"/>
+                      </a:endParaRPr>
+                    </a:p>
+                  </a:txBody>
+                  <a:tcPr marL="54864" marR="54864" marT="54864" marB="54864" anchor="ctr">
+                    <a:lnL w="9525" cap="flat" cmpd="sng" algn="ctr">
+                      <a:solidFill>
+                        <a:srgbClr val="D5DEF0"/>
+                      </a:solidFill>
+                      <a:prstDash val="solid"/>
+                      <a:round/>
+                      <a:headEnd type="none" w="med" len="med"/>
+                      <a:tailEnd type="none" w="med" len="med"/>
+                    </a:lnL>
+                    <a:lnR w="9525" cap="flat" cmpd="sng" algn="ctr">
+                      <a:solidFill>
+                        <a:srgbClr val="D5DEF0"/>
+                      </a:solidFill>
+                      <a:prstDash val="solid"/>
+                      <a:round/>
+                      <a:headEnd type="none" w="med" len="med"/>
+                      <a:tailEnd type="none" w="med" len="med"/>
+                    </a:lnR>
+                    <a:lnT w="9525" cap="flat" cmpd="sng" algn="ctr">
+                      <a:solidFill>
+                        <a:srgbClr val="D5DEF0"/>
+                      </a:solidFill>
+                      <a:prstDash val="solid"/>
+                      <a:round/>
+                      <a:headEnd type="none" w="med" len="med"/>
+                      <a:tailEnd type="none" w="med" len="med"/>
+                    </a:lnT>
+                    <a:lnB w="9525" cap="flat" cmpd="sng" algn="ctr">
+                      <a:solidFill>
+                        <a:srgbClr val="D5DEF0"/>
+                      </a:solidFill>
+                      <a:prstDash val="solid"/>
+                      <a:round/>
+                      <a:headEnd type="none" w="med" len="med"/>
+                      <a:tailEnd type="none" w="med" len="med"/>
+                    </a:lnB>
+                  </a:tcPr>
+                </a:tc>
+                <a:tc>
+                  <a:txBody>
+                    <a:bodyPr/>
+                    <a:lstStyle/>
+                    <a:p>
+                      <a:pPr indent="0" marL="0">
+                        <a:buNone/>
+                      </a:pPr>
+                      <a:r>
+                        <a:rPr lang="en-US" sz="1050" b="1" dirty="0">
+                          <a:solidFill>
+                            <a:srgbClr val="E8A13A"/>
+                          </a:solidFill>
+                          <a:latin typeface="Microsoft JhengHei" pitchFamily="34" charset="0"/>
+                          <a:ea typeface="Microsoft JhengHei" pitchFamily="34" charset="-122"/>
+                          <a:cs typeface="Microsoft JhengHei" pitchFamily="34" charset="-120"/>
+                        </a:rPr>
+                        <a:t>創意 25 + 商業 20</a:t>
+                      </a:r>
+                      <a:endParaRPr lang="en-US" sz="1050" dirty="0">
+                        <a:latin typeface="Microsoft JhengHei" charset="0"/>
+                        <a:ea typeface="Microsoft JhengHei" charset="0"/>
+                        <a:cs typeface="Microsoft JhengHei" charset="0"/>
+                      </a:endParaRPr>
+                    </a:p>
+                  </a:txBody>
+                  <a:tcPr marL="54864" marR="54864" marT="54864" marB="54864" anchor="ctr">
+                    <a:lnL w="9525" cap="flat" cmpd="sng" algn="ctr">
+                      <a:solidFill>
+                        <a:srgbClr val="D5DEF0"/>
+                      </a:solidFill>
+                      <a:prstDash val="solid"/>
+                      <a:round/>
+                      <a:headEnd type="none" w="med" len="med"/>
+                      <a:tailEnd type="none" w="med" len="med"/>
+                    </a:lnL>
+                    <a:lnR w="9525" cap="flat" cmpd="sng" algn="ctr">
+                      <a:solidFill>
+                        <a:srgbClr val="D5DEF0"/>
+                      </a:solidFill>
+                      <a:prstDash val="solid"/>
+                      <a:round/>
+                      <a:headEnd type="none" w="med" len="med"/>
+                      <a:tailEnd type="none" w="med" len="med"/>
+                    </a:lnR>
+                    <a:lnT w="9525" cap="flat" cmpd="sng" algn="ctr">
+                      <a:solidFill>
+                        <a:srgbClr val="D5DEF0"/>
+                      </a:solidFill>
+                      <a:prstDash val="solid"/>
+                      <a:round/>
+                      <a:headEnd type="none" w="med" len="med"/>
+                      <a:tailEnd type="none" w="med" len="med"/>
+                    </a:lnT>
+                    <a:lnB w="9525" cap="flat" cmpd="sng" algn="ctr">
+                      <a:solidFill>
+                        <a:srgbClr val="D5DEF0"/>
+                      </a:solidFill>
+                      <a:prstDash val="solid"/>
+                      <a:round/>
+                      <a:headEnd type="none" w="med" len="med"/>
+                      <a:tailEnd type="none" w="med" len="med"/>
+                    </a:lnB>
+                  </a:tcPr>
+                </a:tc>
+                <a:tc>
+                  <a:txBody>
+                    <a:bodyPr/>
+                    <a:lstStyle/>
+                    <a:p>
+                      <a:pPr indent="0" marL="0">
+                        <a:buNone/>
+                      </a:pPr>
+                      <a:r>
+                        <a:rPr lang="en-US" sz="1050" dirty="0">
+                          <a:solidFill>
+                            <a:srgbClr val="1F2937"/>
+                          </a:solidFill>
+                          <a:latin typeface="Microsoft JhengHei" pitchFamily="34" charset="0"/>
+                          <a:ea typeface="Microsoft JhengHei" pitchFamily="34" charset="-122"/>
+                          <a:cs typeface="Microsoft JhengHei" pitchFamily="34" charset="-120"/>
+                        </a:rPr>
+                        <a:t>評審給的資料挖出他們沒想到的洞察：追高65%、機會成本2,660萬——全場記憶點</a:t>
+                      </a:r>
+                      <a:endParaRPr lang="en-US" sz="1050" dirty="0">
+                        <a:latin typeface="Microsoft JhengHei" charset="0"/>
+                        <a:ea typeface="Microsoft JhengHei" charset="0"/>
+                        <a:cs typeface="Microsoft JhengHei" charset="0"/>
+                      </a:endParaRPr>
+                    </a:p>
+                  </a:txBody>
+                  <a:tcPr marL="54864" marR="54864" marT="54864" marB="54864" anchor="ctr">
+                    <a:lnL w="9525" cap="flat" cmpd="sng" algn="ctr">
+                      <a:solidFill>
+                        <a:srgbClr val="D5DEF0"/>
+                      </a:solidFill>
+                      <a:prstDash val="solid"/>
+                      <a:round/>
+                      <a:headEnd type="none" w="med" len="med"/>
+                      <a:tailEnd type="none" w="med" len="med"/>
+                    </a:lnL>
+                    <a:lnR w="9525" cap="flat" cmpd="sng" algn="ctr">
+                      <a:solidFill>
+                        <a:srgbClr val="D5DEF0"/>
+                      </a:solidFill>
+                      <a:prstDash val="solid"/>
+                      <a:round/>
+                      <a:headEnd type="none" w="med" len="med"/>
+                      <a:tailEnd type="none" w="med" len="med"/>
+                    </a:lnR>
+                    <a:lnT w="9525" cap="flat" cmpd="sng" algn="ctr">
+                      <a:solidFill>
+                        <a:srgbClr val="D5DEF0"/>
+                      </a:solidFill>
+                      <a:prstDash val="solid"/>
+                      <a:round/>
+                      <a:headEnd type="none" w="med" len="med"/>
+                      <a:tailEnd type="none" w="med" len="med"/>
+                    </a:lnT>
+                    <a:lnB w="9525" cap="flat" cmpd="sng" algn="ctr">
+                      <a:solidFill>
+                        <a:srgbClr val="D5DEF0"/>
+                      </a:solidFill>
+                      <a:prstDash val="solid"/>
+                      <a:round/>
+                      <a:headEnd type="none" w="med" len="med"/>
+                      <a:tailEnd type="none" w="med" len="med"/>
+                    </a:lnB>
+                  </a:tcPr>
+                </a:tc>
+              </a:tr>
+              <a:tr h="448056">
+                <a:tc>
+                  <a:txBody>
+                    <a:bodyPr/>
+                    <a:lstStyle/>
+                    <a:p>
+                      <a:pPr indent="0" marL="0">
+                        <a:buNone/>
+                      </a:pPr>
+                      <a:r>
+                        <a:rPr lang="en-US" sz="1050" b="1" dirty="0">
+                          <a:solidFill>
+                            <a:srgbClr val="1F2937"/>
+                          </a:solidFill>
+                          <a:latin typeface="Microsoft JhengHei" pitchFamily="34" charset="0"/>
+                          <a:ea typeface="Microsoft JhengHei" pitchFamily="34" charset="-122"/>
+                          <a:cs typeface="Microsoft JhengHei" pitchFamily="34" charset="-120"/>
+                        </a:rPr>
+                        <a:t>三方案生成＋恐慌攔截（A包）</a:t>
+                      </a:r>
+                      <a:endParaRPr lang="en-US" sz="1050" dirty="0">
+                        <a:latin typeface="Microsoft JhengHei" charset="0"/>
+                        <a:ea typeface="Microsoft JhengHei" charset="0"/>
+                        <a:cs typeface="Microsoft JhengHei" charset="0"/>
+                      </a:endParaRPr>
+                    </a:p>
+                  </a:txBody>
+                  <a:tcPr marL="54864" marR="54864" marT="54864" marB="54864" anchor="ctr">
+                    <a:lnL w="9525" cap="flat" cmpd="sng" algn="ctr">
+                      <a:solidFill>
+                        <a:srgbClr val="D5DEF0"/>
+                      </a:solidFill>
+                      <a:prstDash val="solid"/>
+                      <a:round/>
+                      <a:headEnd type="none" w="med" len="med"/>
+                      <a:tailEnd type="none" w="med" len="med"/>
+                    </a:lnL>
+                    <a:lnR w="9525" cap="flat" cmpd="sng" algn="ctr">
+                      <a:solidFill>
+                        <a:srgbClr val="D5DEF0"/>
+                      </a:solidFill>
+                      <a:prstDash val="solid"/>
+                      <a:round/>
+                      <a:headEnd type="none" w="med" len="med"/>
+                      <a:tailEnd type="none" w="med" len="med"/>
+                    </a:lnR>
+                    <a:lnT w="9525" cap="flat" cmpd="sng" algn="ctr">
+                      <a:solidFill>
+                        <a:srgbClr val="D5DEF0"/>
+                      </a:solidFill>
+                      <a:prstDash val="solid"/>
+                      <a:round/>
+                      <a:headEnd type="none" w="med" len="med"/>
+                      <a:tailEnd type="none" w="med" len="med"/>
+                    </a:lnT>
+                    <a:lnB w="9525" cap="flat" cmpd="sng" algn="ctr">
+                      <a:solidFill>
+                        <a:srgbClr val="D5DEF0"/>
+                      </a:solidFill>
+                      <a:prstDash val="solid"/>
+                      <a:round/>
+                      <a:headEnd type="none" w="med" len="med"/>
+                      <a:tailEnd type="none" w="med" len="med"/>
+                    </a:lnB>
+                  </a:tcPr>
+                </a:tc>
+                <a:tc>
+                  <a:txBody>
+                    <a:bodyPr/>
+                    <a:lstStyle/>
+                    <a:p>
+                      <a:pPr indent="0" marL="0">
+                        <a:buNone/>
+                      </a:pPr>
+                      <a:r>
+                        <a:rPr lang="en-US" sz="1050" b="1" dirty="0">
+                          <a:solidFill>
+                            <a:srgbClr val="E8A13A"/>
+                          </a:solidFill>
+                          <a:latin typeface="Microsoft JhengHei" pitchFamily="34" charset="0"/>
+                          <a:ea typeface="Microsoft JhengHei" pitchFamily="34" charset="-122"/>
+                          <a:cs typeface="Microsoft JhengHei" pitchFamily="34" charset="-120"/>
+                        </a:rPr>
+                        <a:t>創意 25 + AI設計 15</a:t>
+                      </a:r>
+                      <a:endParaRPr lang="en-US" sz="1050" dirty="0">
+                        <a:latin typeface="Microsoft JhengHei" charset="0"/>
+                        <a:ea typeface="Microsoft JhengHei" charset="0"/>
+                        <a:cs typeface="Microsoft JhengHei" charset="0"/>
+                      </a:endParaRPr>
+                    </a:p>
+                  </a:txBody>
+                  <a:tcPr marL="54864" marR="54864" marT="54864" marB="54864" anchor="ctr">
+                    <a:lnL w="9525" cap="flat" cmpd="sng" algn="ctr">
+                      <a:solidFill>
+                        <a:srgbClr val="D5DEF0"/>
+                      </a:solidFill>
+                      <a:prstDash val="solid"/>
+                      <a:round/>
+                      <a:headEnd type="none" w="med" len="med"/>
+                      <a:tailEnd type="none" w="med" len="med"/>
+                    </a:lnL>
+                    <a:lnR w="9525" cap="flat" cmpd="sng" algn="ctr">
+                      <a:solidFill>
+                        <a:srgbClr val="D5DEF0"/>
+                      </a:solidFill>
+                      <a:prstDash val="solid"/>
+                      <a:round/>
+                      <a:headEnd type="none" w="med" len="med"/>
+                      <a:tailEnd type="none" w="med" len="med"/>
+                    </a:lnR>
+                    <a:lnT w="9525" cap="flat" cmpd="sng" algn="ctr">
+                      <a:solidFill>
+                        <a:srgbClr val="D5DEF0"/>
+                      </a:solidFill>
+                      <a:prstDash val="solid"/>
+                      <a:round/>
+                      <a:headEnd type="none" w="med" len="med"/>
+                      <a:tailEnd type="none" w="med" len="med"/>
+                    </a:lnT>
+                    <a:lnB w="9525" cap="flat" cmpd="sng" algn="ctr">
+                      <a:solidFill>
+                        <a:srgbClr val="D5DEF0"/>
+                      </a:solidFill>
+                      <a:prstDash val="solid"/>
+                      <a:round/>
+                      <a:headEnd type="none" w="med" len="med"/>
+                      <a:tailEnd type="none" w="med" len="med"/>
+                    </a:lnB>
+                  </a:tcPr>
+                </a:tc>
+                <a:tc>
+                  <a:txBody>
+                    <a:bodyPr/>
+                    <a:lstStyle/>
+                    <a:p>
+                      <a:pPr indent="0" marL="0">
+                        <a:buNone/>
+                      </a:pPr>
+                      <a:r>
+                        <a:rPr lang="en-US" sz="1050" dirty="0">
+                          <a:solidFill>
+                            <a:srgbClr val="1F2937"/>
+                          </a:solidFill>
+                          <a:latin typeface="Microsoft JhengHei" pitchFamily="34" charset="0"/>
+                          <a:ea typeface="Microsoft JhengHei" pitchFamily="34" charset="-122"/>
+                          <a:cs typeface="Microsoft JhengHei" pitchFamily="34" charset="-120"/>
+                        </a:rPr>
+                        <a:t>「不只回答，還給可執行的選項」——別隊的 AI 是聊天，我們的是行動</a:t>
+                      </a:r>
+                      <a:endParaRPr lang="en-US" sz="1050" dirty="0">
+                        <a:latin typeface="Microsoft JhengHei" charset="0"/>
+                        <a:ea typeface="Microsoft JhengHei" charset="0"/>
+                        <a:cs typeface="Microsoft JhengHei" charset="0"/>
+                      </a:endParaRPr>
+                    </a:p>
+                  </a:txBody>
+                  <a:tcPr marL="54864" marR="54864" marT="54864" marB="54864" anchor="ctr">
+                    <a:lnL w="9525" cap="flat" cmpd="sng" algn="ctr">
+                      <a:solidFill>
+                        <a:srgbClr val="D5DEF0"/>
+                      </a:solidFill>
+                      <a:prstDash val="solid"/>
+                      <a:round/>
+                      <a:headEnd type="none" w="med" len="med"/>
+                      <a:tailEnd type="none" w="med" len="med"/>
+                    </a:lnL>
+                    <a:lnR w="9525" cap="flat" cmpd="sng" algn="ctr">
+                      <a:solidFill>
+                        <a:srgbClr val="D5DEF0"/>
+                      </a:solidFill>
+                      <a:prstDash val="solid"/>
+                      <a:round/>
+                      <a:headEnd type="none" w="med" len="med"/>
+                      <a:tailEnd type="none" w="med" len="med"/>
+                    </a:lnR>
+                    <a:lnT w="9525" cap="flat" cmpd="sng" algn="ctr">
+                      <a:solidFill>
+                        <a:srgbClr val="D5DEF0"/>
+                      </a:solidFill>
+                      <a:prstDash val="solid"/>
+                      <a:round/>
+                      <a:headEnd type="none" w="med" len="med"/>
+                      <a:tailEnd type="none" w="med" len="med"/>
+                    </a:lnT>
+                    <a:lnB w="9525" cap="flat" cmpd="sng" algn="ctr">
+                      <a:solidFill>
+                        <a:srgbClr val="D5DEF0"/>
+                      </a:solidFill>
+                      <a:prstDash val="solid"/>
+                      <a:round/>
+                      <a:headEnd type="none" w="med" len="med"/>
+                      <a:tailEnd type="none" w="med" len="med"/>
+                    </a:lnB>
+                  </a:tcPr>
+                </a:tc>
+              </a:tr>
+              <a:tr h="448056">
+                <a:tc>
+                  <a:txBody>
+                    <a:bodyPr/>
+                    <a:lstStyle/>
+                    <a:p>
+                      <a:pPr indent="0" marL="0">
+                        <a:buNone/>
+                      </a:pPr>
+                      <a:r>
+                        <a:rPr lang="en-US" sz="1050" b="1" dirty="0">
+                          <a:solidFill>
+                            <a:srgbClr val="1F2937"/>
+                          </a:solidFill>
+                          <a:latin typeface="Microsoft JhengHei" pitchFamily="34" charset="0"/>
+                          <a:ea typeface="Microsoft JhengHei" pitchFamily="34" charset="-122"/>
+                          <a:cs typeface="Microsoft JhengHei" pitchFamily="34" charset="-120"/>
+                        </a:rPr>
+                        <a:t>Agent 工具鏈＋決策軌跡面板（A/B包）</a:t>
+                      </a:r>
+                      <a:endParaRPr lang="en-US" sz="1050" dirty="0">
+                        <a:latin typeface="Microsoft JhengHei" charset="0"/>
+                        <a:ea typeface="Microsoft JhengHei" charset="0"/>
+                        <a:cs typeface="Microsoft JhengHei" charset="0"/>
+                      </a:endParaRPr>
+                    </a:p>
+                  </a:txBody>
+                  <a:tcPr marL="54864" marR="54864" marT="54864" marB="54864" anchor="ctr">
+                    <a:lnL w="9525" cap="flat" cmpd="sng" algn="ctr">
+                      <a:solidFill>
+                        <a:srgbClr val="D5DEF0"/>
+                      </a:solidFill>
+                      <a:prstDash val="solid"/>
+                      <a:round/>
+                      <a:headEnd type="none" w="med" len="med"/>
+                      <a:tailEnd type="none" w="med" len="med"/>
+                    </a:lnL>
+                    <a:lnR w="9525" cap="flat" cmpd="sng" algn="ctr">
+                      <a:solidFill>
+                        <a:srgbClr val="D5DEF0"/>
+                      </a:solidFill>
+                      <a:prstDash val="solid"/>
+                      <a:round/>
+                      <a:headEnd type="none" w="med" len="med"/>
+                      <a:tailEnd type="none" w="med" len="med"/>
+                    </a:lnR>
+                    <a:lnT w="9525" cap="flat" cmpd="sng" algn="ctr">
+                      <a:solidFill>
+                        <a:srgbClr val="D5DEF0"/>
+                      </a:solidFill>
+                      <a:prstDash val="solid"/>
+                      <a:round/>
+                      <a:headEnd type="none" w="med" len="med"/>
+                      <a:tailEnd type="none" w="med" len="med"/>
+                    </a:lnT>
+                    <a:lnB w="9525" cap="flat" cmpd="sng" algn="ctr">
+                      <a:solidFill>
+                        <a:srgbClr val="D5DEF0"/>
+                      </a:solidFill>
+                      <a:prstDash val="solid"/>
+                      <a:round/>
+                      <a:headEnd type="none" w="med" len="med"/>
+                      <a:tailEnd type="none" w="med" len="med"/>
+                    </a:lnB>
+                  </a:tcPr>
+                </a:tc>
+                <a:tc>
+                  <a:txBody>
+                    <a:bodyPr/>
+                    <a:lstStyle/>
+                    <a:p>
+                      <a:pPr indent="0" marL="0">
+                        <a:buNone/>
+                      </a:pPr>
+                      <a:r>
+                        <a:rPr lang="en-US" sz="1050" b="1" dirty="0">
+                          <a:solidFill>
+                            <a:srgbClr val="E8A13A"/>
+                          </a:solidFill>
+                          <a:latin typeface="Microsoft JhengHei" pitchFamily="34" charset="0"/>
+                          <a:ea typeface="Microsoft JhengHei" pitchFamily="34" charset="-122"/>
+                          <a:cs typeface="Microsoft JhengHei" pitchFamily="34" charset="-120"/>
+                        </a:rPr>
+                        <a:t>AI設計 15</a:t>
+                      </a:r>
+                      <a:endParaRPr lang="en-US" sz="1050" dirty="0">
+                        <a:latin typeface="Microsoft JhengHei" charset="0"/>
+                        <a:ea typeface="Microsoft JhengHei" charset="0"/>
+                        <a:cs typeface="Microsoft JhengHei" charset="0"/>
+                      </a:endParaRPr>
+                    </a:p>
+                  </a:txBody>
+                  <a:tcPr marL="54864" marR="54864" marT="54864" marB="54864" anchor="ctr">
+                    <a:lnL w="9525" cap="flat" cmpd="sng" algn="ctr">
+                      <a:solidFill>
+                        <a:srgbClr val="D5DEF0"/>
+                      </a:solidFill>
+                      <a:prstDash val="solid"/>
+                      <a:round/>
+                      <a:headEnd type="none" w="med" len="med"/>
+                      <a:tailEnd type="none" w="med" len="med"/>
+                    </a:lnL>
+                    <a:lnR w="9525" cap="flat" cmpd="sng" algn="ctr">
+                      <a:solidFill>
+                        <a:srgbClr val="D5DEF0"/>
+                      </a:solidFill>
+                      <a:prstDash val="solid"/>
+                      <a:round/>
+                      <a:headEnd type="none" w="med" len="med"/>
+                      <a:tailEnd type="none" w="med" len="med"/>
+                    </a:lnR>
+                    <a:lnT w="9525" cap="flat" cmpd="sng" algn="ctr">
+                      <a:solidFill>
+                        <a:srgbClr val="D5DEF0"/>
+                      </a:solidFill>
+                      <a:prstDash val="solid"/>
+                      <a:round/>
+                      <a:headEnd type="none" w="med" len="med"/>
+                      <a:tailEnd type="none" w="med" len="med"/>
+                    </a:lnT>
+                    <a:lnB w="9525" cap="flat" cmpd="sng" algn="ctr">
+                      <a:solidFill>
+                        <a:srgbClr val="D5DEF0"/>
+                      </a:solidFill>
+                      <a:prstDash val="solid"/>
+                      <a:round/>
+                      <a:headEnd type="none" w="med" len="med"/>
+                      <a:tailEnd type="none" w="med" len="med"/>
+                    </a:lnB>
+                  </a:tcPr>
+                </a:tc>
+                <a:tc>
+                  <a:txBody>
+                    <a:bodyPr/>
+                    <a:lstStyle/>
+                    <a:p>
+                      <a:pPr indent="0" marL="0">
+                        <a:buNone/>
+                      </a:pPr>
+                      <a:r>
+                        <a:rPr lang="en-US" sz="1050" dirty="0">
+                          <a:solidFill>
+                            <a:srgbClr val="1F2937"/>
+                          </a:solidFill>
+                          <a:latin typeface="Microsoft JhengHei" pitchFamily="34" charset="0"/>
+                          <a:ea typeface="Microsoft JhengHei" pitchFamily="34" charset="-122"/>
+                          <a:cs typeface="Microsoft JhengHei" pitchFamily="34" charset="-120"/>
+                        </a:rPr>
+                        <a:t>評分原文「上下文理解、主動分析數據、自動化執行交易決策」逐字對應，軌跡面板讓它看得見</a:t>
+                      </a:r>
+                      <a:endParaRPr lang="en-US" sz="1050" dirty="0">
+                        <a:latin typeface="Microsoft JhengHei" charset="0"/>
+                        <a:ea typeface="Microsoft JhengHei" charset="0"/>
+                        <a:cs typeface="Microsoft JhengHei" charset="0"/>
+                      </a:endParaRPr>
+                    </a:p>
+                  </a:txBody>
+                  <a:tcPr marL="54864" marR="54864" marT="54864" marB="54864" anchor="ctr">
+                    <a:lnL w="9525" cap="flat" cmpd="sng" algn="ctr">
+                      <a:solidFill>
+                        <a:srgbClr val="D5DEF0"/>
+                      </a:solidFill>
+                      <a:prstDash val="solid"/>
+                      <a:round/>
+                      <a:headEnd type="none" w="med" len="med"/>
+                      <a:tailEnd type="none" w="med" len="med"/>
+                    </a:lnL>
+                    <a:lnR w="9525" cap="flat" cmpd="sng" algn="ctr">
+                      <a:solidFill>
+                        <a:srgbClr val="D5DEF0"/>
+                      </a:solidFill>
+                      <a:prstDash val="solid"/>
+                      <a:round/>
+                      <a:headEnd type="none" w="med" len="med"/>
+                      <a:tailEnd type="none" w="med" len="med"/>
+                    </a:lnR>
+                    <a:lnT w="9525" cap="flat" cmpd="sng" algn="ctr">
+                      <a:solidFill>
+                        <a:srgbClr val="D5DEF0"/>
+                      </a:solidFill>
+                      <a:prstDash val="solid"/>
+                      <a:round/>
+                      <a:headEnd type="none" w="med" len="med"/>
+                      <a:tailEnd type="none" w="med" len="med"/>
+                    </a:lnT>
+                    <a:lnB w="9525" cap="flat" cmpd="sng" algn="ctr">
+                      <a:solidFill>
+                        <a:srgbClr val="D5DEF0"/>
+                      </a:solidFill>
+                      <a:prstDash val="solid"/>
+                      <a:round/>
+                      <a:headEnd type="none" w="med" len="med"/>
+                      <a:tailEnd type="none" w="med" len="med"/>
+                    </a:lnB>
+                  </a:tcPr>
+                </a:tc>
+              </a:tr>
+              <a:tr h="448056">
+                <a:tc>
+                  <a:txBody>
+                    <a:bodyPr/>
+                    <a:lstStyle/>
+                    <a:p>
+                      <a:pPr indent="0" marL="0">
+                        <a:buNone/>
+                      </a:pPr>
+                      <a:r>
+                        <a:rPr lang="en-US" sz="1050" b="1" dirty="0">
+                          <a:solidFill>
+                            <a:srgbClr val="1F2937"/>
+                          </a:solidFill>
+                          <a:latin typeface="Microsoft JhengHei" pitchFamily="34" charset="0"/>
+                          <a:ea typeface="Microsoft JhengHei" pitchFamily="34" charset="-122"/>
+                          <a:cs typeface="Microsoft JhengHei" pitchFamily="34" charset="-120"/>
+                        </a:rPr>
+                        <a:t>Profile 三模式提醒強度（A/C包）</a:t>
+                      </a:r>
+                      <a:endParaRPr lang="en-US" sz="1050" dirty="0">
+                        <a:latin typeface="Microsoft JhengHei" charset="0"/>
+                        <a:ea typeface="Microsoft JhengHei" charset="0"/>
+                        <a:cs typeface="Microsoft JhengHei" charset="0"/>
+                      </a:endParaRPr>
+                    </a:p>
+                  </a:txBody>
+                  <a:tcPr marL="54864" marR="54864" marT="54864" marB="54864" anchor="ctr">
+                    <a:lnL w="9525" cap="flat" cmpd="sng" algn="ctr">
+                      <a:solidFill>
+                        <a:srgbClr val="D5DEF0"/>
+                      </a:solidFill>
+                      <a:prstDash val="solid"/>
+                      <a:round/>
+                      <a:headEnd type="none" w="med" len="med"/>
+                      <a:tailEnd type="none" w="med" len="med"/>
+                    </a:lnL>
+                    <a:lnR w="9525" cap="flat" cmpd="sng" algn="ctr">
+                      <a:solidFill>
+                        <a:srgbClr val="D5DEF0"/>
+                      </a:solidFill>
+                      <a:prstDash val="solid"/>
+                      <a:round/>
+                      <a:headEnd type="none" w="med" len="med"/>
+                      <a:tailEnd type="none" w="med" len="med"/>
+                    </a:lnR>
+                    <a:lnT w="9525" cap="flat" cmpd="sng" algn="ctr">
+                      <a:solidFill>
+                        <a:srgbClr val="D5DEF0"/>
+                      </a:solidFill>
+                      <a:prstDash val="solid"/>
+                      <a:round/>
+                      <a:headEnd type="none" w="med" len="med"/>
+                      <a:tailEnd type="none" w="med" len="med"/>
+                    </a:lnT>
+                    <a:lnB w="9525" cap="flat" cmpd="sng" algn="ctr">
+                      <a:solidFill>
+                        <a:srgbClr val="D5DEF0"/>
+                      </a:solidFill>
+                      <a:prstDash val="solid"/>
+                      <a:round/>
+                      <a:headEnd type="none" w="med" len="med"/>
+                      <a:tailEnd type="none" w="med" len="med"/>
+                    </a:lnB>
+                  </a:tcPr>
+                </a:tc>
+                <a:tc>
+                  <a:txBody>
+                    <a:bodyPr/>
+                    <a:lstStyle/>
+                    <a:p>
+                      <a:pPr indent="0" marL="0">
+                        <a:buNone/>
+                      </a:pPr>
+                      <a:r>
+                        <a:rPr lang="en-US" sz="1050" b="1" dirty="0">
+                          <a:solidFill>
+                            <a:srgbClr val="E8A13A"/>
+                          </a:solidFill>
+                          <a:latin typeface="Microsoft JhengHei" pitchFamily="34" charset="0"/>
+                          <a:ea typeface="Microsoft JhengHei" pitchFamily="34" charset="-122"/>
+                          <a:cs typeface="Microsoft JhengHei" pitchFamily="34" charset="-120"/>
+                        </a:rPr>
+                        <a:t>創意 25 + 商業 20</a:t>
+                      </a:r>
+                      <a:endParaRPr lang="en-US" sz="1050" dirty="0">
+                        <a:latin typeface="Microsoft JhengHei" charset="0"/>
+                        <a:ea typeface="Microsoft JhengHei" charset="0"/>
+                        <a:cs typeface="Microsoft JhengHei" charset="0"/>
+                      </a:endParaRPr>
+                    </a:p>
+                  </a:txBody>
+                  <a:tcPr marL="54864" marR="54864" marT="54864" marB="54864" anchor="ctr">
+                    <a:lnL w="9525" cap="flat" cmpd="sng" algn="ctr">
+                      <a:solidFill>
+                        <a:srgbClr val="D5DEF0"/>
+                      </a:solidFill>
+                      <a:prstDash val="solid"/>
+                      <a:round/>
+                      <a:headEnd type="none" w="med" len="med"/>
+                      <a:tailEnd type="none" w="med" len="med"/>
+                    </a:lnL>
+                    <a:lnR w="9525" cap="flat" cmpd="sng" algn="ctr">
+                      <a:solidFill>
+                        <a:srgbClr val="D5DEF0"/>
+                      </a:solidFill>
+                      <a:prstDash val="solid"/>
+                      <a:round/>
+                      <a:headEnd type="none" w="med" len="med"/>
+                      <a:tailEnd type="none" w="med" len="med"/>
+                    </a:lnR>
+                    <a:lnT w="9525" cap="flat" cmpd="sng" algn="ctr">
+                      <a:solidFill>
+                        <a:srgbClr val="D5DEF0"/>
+                      </a:solidFill>
+                      <a:prstDash val="solid"/>
+                      <a:round/>
+                      <a:headEnd type="none" w="med" len="med"/>
+                      <a:tailEnd type="none" w="med" len="med"/>
+                    </a:lnT>
+                    <a:lnB w="9525" cap="flat" cmpd="sng" algn="ctr">
+                      <a:solidFill>
+                        <a:srgbClr val="D5DEF0"/>
+                      </a:solidFill>
+                      <a:prstDash val="solid"/>
+                      <a:round/>
+                      <a:headEnd type="none" w="med" len="med"/>
+                      <a:tailEnd type="none" w="med" len="med"/>
+                    </a:lnB>
+                  </a:tcPr>
+                </a:tc>
+                <a:tc>
+                  <a:txBody>
+                    <a:bodyPr/>
+                    <a:lstStyle/>
+                    <a:p>
+                      <a:pPr indent="0" marL="0">
+                        <a:buNone/>
+                      </a:pPr>
+                      <a:r>
+                        <a:rPr lang="en-US" sz="1050" dirty="0">
+                          <a:solidFill>
+                            <a:srgbClr val="1F2937"/>
+                          </a:solidFill>
+                          <a:latin typeface="Microsoft JhengHei" pitchFamily="34" charset="0"/>
+                          <a:ea typeface="Microsoft JhengHei" pitchFamily="34" charset="-122"/>
+                          <a:cs typeface="Microsoft JhengHei" pitchFamily="34" charset="-120"/>
+                        </a:rPr>
+                        <a:t>同一句話三種回應——個人化不是口號是 Demo</a:t>
+                      </a:r>
+                      <a:endParaRPr lang="en-US" sz="1050" dirty="0">
+                        <a:latin typeface="Microsoft JhengHei" charset="0"/>
+                        <a:ea typeface="Microsoft JhengHei" charset="0"/>
+                        <a:cs typeface="Microsoft JhengHei" charset="0"/>
+                      </a:endParaRPr>
+                    </a:p>
+                  </a:txBody>
+                  <a:tcPr marL="54864" marR="54864" marT="54864" marB="54864" anchor="ctr">
+                    <a:lnL w="9525" cap="flat" cmpd="sng" algn="ctr">
+                      <a:solidFill>
+                        <a:srgbClr val="D5DEF0"/>
+                      </a:solidFill>
+                      <a:prstDash val="solid"/>
+                      <a:round/>
+                      <a:headEnd type="none" w="med" len="med"/>
+                      <a:tailEnd type="none" w="med" len="med"/>
+                    </a:lnL>
+                    <a:lnR w="9525" cap="flat" cmpd="sng" algn="ctr">
+                      <a:solidFill>
+                        <a:srgbClr val="D5DEF0"/>
+                      </a:solidFill>
+                      <a:prstDash val="solid"/>
+                      <a:round/>
+                      <a:headEnd type="none" w="med" len="med"/>
+                      <a:tailEnd type="none" w="med" len="med"/>
+                    </a:lnR>
+                    <a:lnT w="9525" cap="flat" cmpd="sng" algn="ctr">
+                      <a:solidFill>
+                        <a:srgbClr val="D5DEF0"/>
+                      </a:solidFill>
+                      <a:prstDash val="solid"/>
+                      <a:round/>
+                      <a:headEnd type="none" w="med" len="med"/>
+                      <a:tailEnd type="none" w="med" len="med"/>
+                    </a:lnT>
+                    <a:lnB w="9525" cap="flat" cmpd="sng" algn="ctr">
+                      <a:solidFill>
+                        <a:srgbClr val="D5DEF0"/>
+                      </a:solidFill>
+                      <a:prstDash val="solid"/>
+                      <a:round/>
+                      <a:headEnd type="none" w="med" len="med"/>
+                      <a:tailEnd type="none" w="med" len="med"/>
+                    </a:lnB>
+                  </a:tcPr>
+                </a:tc>
+              </a:tr>
+              <a:tr h="448056">
+                <a:tc>
+                  <a:txBody>
+                    <a:bodyPr/>
+                    <a:lstStyle/>
+                    <a:p>
+                      <a:pPr indent="0" marL="0">
+                        <a:buNone/>
+                      </a:pPr>
+                      <a:r>
+                        <a:rPr lang="en-US" sz="1050" b="1" dirty="0">
+                          <a:solidFill>
+                            <a:srgbClr val="1F2937"/>
+                          </a:solidFill>
+                          <a:latin typeface="Microsoft JhengHei" pitchFamily="34" charset="0"/>
+                          <a:ea typeface="Microsoft JhengHei" pitchFamily="34" charset="-122"/>
+                          <a:cs typeface="Microsoft JhengHei" pitchFamily="34" charset="-120"/>
+                        </a:rPr>
+                        <a:t>RAG 防詐/教材問答（B包）</a:t>
+                      </a:r>
+                      <a:endParaRPr lang="en-US" sz="1050" dirty="0">
+                        <a:latin typeface="Microsoft JhengHei" charset="0"/>
+                        <a:ea typeface="Microsoft JhengHei" charset="0"/>
+                        <a:cs typeface="Microsoft JhengHei" charset="0"/>
+                      </a:endParaRPr>
+                    </a:p>
+                  </a:txBody>
+                  <a:tcPr marL="54864" marR="54864" marT="54864" marB="54864" anchor="ctr">
+                    <a:lnL w="9525" cap="flat" cmpd="sng" algn="ctr">
+                      <a:solidFill>
+                        <a:srgbClr val="D5DEF0"/>
+                      </a:solidFill>
+                      <a:prstDash val="solid"/>
+                      <a:round/>
+                      <a:headEnd type="none" w="med" len="med"/>
+                      <a:tailEnd type="none" w="med" len="med"/>
+                    </a:lnL>
+                    <a:lnR w="9525" cap="flat" cmpd="sng" algn="ctr">
+                      <a:solidFill>
+                        <a:srgbClr val="D5DEF0"/>
+                      </a:solidFill>
+                      <a:prstDash val="solid"/>
+                      <a:round/>
+                      <a:headEnd type="none" w="med" len="med"/>
+                      <a:tailEnd type="none" w="med" len="med"/>
+                    </a:lnR>
+                    <a:lnT w="9525" cap="flat" cmpd="sng" algn="ctr">
+                      <a:solidFill>
+                        <a:srgbClr val="D5DEF0"/>
+                      </a:solidFill>
+                      <a:prstDash val="solid"/>
+                      <a:round/>
+                      <a:headEnd type="none" w="med" len="med"/>
+                      <a:tailEnd type="none" w="med" len="med"/>
+                    </a:lnT>
+                    <a:lnB w="9525" cap="flat" cmpd="sng" algn="ctr">
+                      <a:solidFill>
+                        <a:srgbClr val="D5DEF0"/>
+                      </a:solidFill>
+                      <a:prstDash val="solid"/>
+                      <a:round/>
+                      <a:headEnd type="none" w="med" len="med"/>
+                      <a:tailEnd type="none" w="med" len="med"/>
+                    </a:lnB>
+                  </a:tcPr>
+                </a:tc>
+                <a:tc>
+                  <a:txBody>
+                    <a:bodyPr/>
+                    <a:lstStyle/>
+                    <a:p>
+                      <a:pPr indent="0" marL="0">
+                        <a:buNone/>
+                      </a:pPr>
+                      <a:r>
+                        <a:rPr lang="en-US" sz="1050" b="1" dirty="0">
+                          <a:solidFill>
+                            <a:srgbClr val="E8A13A"/>
+                          </a:solidFill>
+                          <a:latin typeface="Microsoft JhengHei" pitchFamily="34" charset="0"/>
+                          <a:ea typeface="Microsoft JhengHei" pitchFamily="34" charset="-122"/>
+                          <a:cs typeface="Microsoft JhengHei" pitchFamily="34" charset="-120"/>
+                        </a:rPr>
+                        <a:t>切合度 10</a:t>
+                      </a:r>
+                      <a:endParaRPr lang="en-US" sz="1050" dirty="0">
+                        <a:latin typeface="Microsoft JhengHei" charset="0"/>
+                        <a:ea typeface="Microsoft JhengHei" charset="0"/>
+                        <a:cs typeface="Microsoft JhengHei" charset="0"/>
+                      </a:endParaRPr>
+                    </a:p>
+                  </a:txBody>
+                  <a:tcPr marL="54864" marR="54864" marT="54864" marB="54864" anchor="ctr">
+                    <a:lnL w="9525" cap="flat" cmpd="sng" algn="ctr">
+                      <a:solidFill>
+                        <a:srgbClr val="D5DEF0"/>
+                      </a:solidFill>
+                      <a:prstDash val="solid"/>
+                      <a:round/>
+                      <a:headEnd type="none" w="med" len="med"/>
+                      <a:tailEnd type="none" w="med" len="med"/>
+                    </a:lnL>
+                    <a:lnR w="9525" cap="flat" cmpd="sng" algn="ctr">
+                      <a:solidFill>
+                        <a:srgbClr val="D5DEF0"/>
+                      </a:solidFill>
+                      <a:prstDash val="solid"/>
+                      <a:round/>
+                      <a:headEnd type="none" w="med" len="med"/>
+                      <a:tailEnd type="none" w="med" len="med"/>
+                    </a:lnR>
+                    <a:lnT w="9525" cap="flat" cmpd="sng" algn="ctr">
+                      <a:solidFill>
+                        <a:srgbClr val="D5DEF0"/>
+                      </a:solidFill>
+                      <a:prstDash val="solid"/>
+                      <a:round/>
+                      <a:headEnd type="none" w="med" len="med"/>
+                      <a:tailEnd type="none" w="med" len="med"/>
+                    </a:lnT>
+                    <a:lnB w="9525" cap="flat" cmpd="sng" algn="ctr">
+                      <a:solidFill>
+                        <a:srgbClr val="D5DEF0"/>
+                      </a:solidFill>
+                      <a:prstDash val="solid"/>
+                      <a:round/>
+                      <a:headEnd type="none" w="med" len="med"/>
+                      <a:tailEnd type="none" w="med" len="med"/>
+                    </a:lnB>
+                  </a:tcPr>
+                </a:tc>
+                <a:tc>
+                  <a:txBody>
+                    <a:bodyPr/>
+                    <a:lstStyle/>
+                    <a:p>
+                      <a:pPr indent="0" marL="0">
+                        <a:buNone/>
+                      </a:pPr>
+                      <a:r>
+                        <a:rPr lang="en-US" sz="1050" dirty="0">
+                          <a:solidFill>
+                            <a:srgbClr val="1F2937"/>
+                          </a:solidFill>
+                          <a:latin typeface="Microsoft JhengHei" pitchFamily="34" charset="0"/>
+                          <a:ea typeface="Microsoft JhengHei" pitchFamily="34" charset="-122"/>
+                          <a:cs typeface="Microsoft JhengHei" pitchFamily="34" charset="-120"/>
+                        </a:rPr>
+                        <a:t>官方資料源全用上：CSV+API+輿情+教材</a:t>
+                      </a:r>
+                      <a:endParaRPr lang="en-US" sz="1050" dirty="0">
+                        <a:latin typeface="Microsoft JhengHei" charset="0"/>
+                        <a:ea typeface="Microsoft JhengHei" charset="0"/>
+                        <a:cs typeface="Microsoft JhengHei" charset="0"/>
+                      </a:endParaRPr>
+                    </a:p>
+                  </a:txBody>
+                  <a:tcPr marL="54864" marR="54864" marT="54864" marB="54864" anchor="ctr">
+                    <a:lnL w="9525" cap="flat" cmpd="sng" algn="ctr">
+                      <a:solidFill>
+                        <a:srgbClr val="D5DEF0"/>
+                      </a:solidFill>
+                      <a:prstDash val="solid"/>
+                      <a:round/>
+                      <a:headEnd type="none" w="med" len="med"/>
+                      <a:tailEnd type="none" w="med" len="med"/>
+                    </a:lnL>
+                    <a:lnR w="9525" cap="flat" cmpd="sng" algn="ctr">
+                      <a:solidFill>
+                        <a:srgbClr val="D5DEF0"/>
+                      </a:solidFill>
+                      <a:prstDash val="solid"/>
+                      <a:round/>
+                      <a:headEnd type="none" w="med" len="med"/>
+                      <a:tailEnd type="none" w="med" len="med"/>
+                    </a:lnR>
+                    <a:lnT w="9525" cap="flat" cmpd="sng" algn="ctr">
+                      <a:solidFill>
+                        <a:srgbClr val="D5DEF0"/>
+                      </a:solidFill>
+                      <a:prstDash val="solid"/>
+                      <a:round/>
+                      <a:headEnd type="none" w="med" len="med"/>
+                      <a:tailEnd type="none" w="med" len="med"/>
+                    </a:lnT>
+                    <a:lnB w="9525" cap="flat" cmpd="sng" algn="ctr">
+                      <a:solidFill>
+                        <a:srgbClr val="D5DEF0"/>
+                      </a:solidFill>
+                      <a:prstDash val="solid"/>
+                      <a:round/>
+                      <a:headEnd type="none" w="med" len="med"/>
+                      <a:tailEnd type="none" w="med" len="med"/>
+                    </a:lnB>
+                  </a:tcPr>
+                </a:tc>
+              </a:tr>
+              <a:tr h="448056">
+                <a:tc>
+                  <a:txBody>
+                    <a:bodyPr/>
+                    <a:lstStyle/>
+                    <a:p>
+                      <a:pPr indent="0" marL="0">
+                        <a:buNone/>
+                      </a:pPr>
+                      <a:r>
+                        <a:rPr lang="en-US" sz="1050" b="1" dirty="0">
+                          <a:solidFill>
+                            <a:srgbClr val="1F2937"/>
+                          </a:solidFill>
+                          <a:latin typeface="Microsoft JhengHei" pitchFamily="34" charset="0"/>
+                          <a:ea typeface="Microsoft JhengHei" pitchFamily="34" charset="-122"/>
+                          <a:cs typeface="Microsoft JhengHei" pitchFamily="34" charset="-120"/>
+                        </a:rPr>
+                        <a:t>確認卡＋Audit Log（A/D包）</a:t>
+                      </a:r>
+                      <a:endParaRPr lang="en-US" sz="1050" dirty="0">
+                        <a:latin typeface="Microsoft JhengHei" charset="0"/>
+                        <a:ea typeface="Microsoft JhengHei" charset="0"/>
+                        <a:cs typeface="Microsoft JhengHei" charset="0"/>
+                      </a:endParaRPr>
+                    </a:p>
+                  </a:txBody>
+                  <a:tcPr marL="54864" marR="54864" marT="54864" marB="54864" anchor="ctr">
+                    <a:lnL w="9525" cap="flat" cmpd="sng" algn="ctr">
+                      <a:solidFill>
+                        <a:srgbClr val="D5DEF0"/>
+                      </a:solidFill>
+                      <a:prstDash val="solid"/>
+                      <a:round/>
+                      <a:headEnd type="none" w="med" len="med"/>
+                      <a:tailEnd type="none" w="med" len="med"/>
+                    </a:lnL>
+                    <a:lnR w="9525" cap="flat" cmpd="sng" algn="ctr">
+                      <a:solidFill>
+                        <a:srgbClr val="D5DEF0"/>
+                      </a:solidFill>
+                      <a:prstDash val="solid"/>
+                      <a:round/>
+                      <a:headEnd type="none" w="med" len="med"/>
+                      <a:tailEnd type="none" w="med" len="med"/>
+                    </a:lnR>
+                    <a:lnT w="9525" cap="flat" cmpd="sng" algn="ctr">
+                      <a:solidFill>
+                        <a:srgbClr val="D5DEF0"/>
+                      </a:solidFill>
+                      <a:prstDash val="solid"/>
+                      <a:round/>
+                      <a:headEnd type="none" w="med" len="med"/>
+                      <a:tailEnd type="none" w="med" len="med"/>
+                    </a:lnT>
+                    <a:lnB w="9525" cap="flat" cmpd="sng" algn="ctr">
+                      <a:solidFill>
+                        <a:srgbClr val="D5DEF0"/>
+                      </a:solidFill>
+                      <a:prstDash val="solid"/>
+                      <a:round/>
+                      <a:headEnd type="none" w="med" len="med"/>
+                      <a:tailEnd type="none" w="med" len="med"/>
+                    </a:lnB>
+                  </a:tcPr>
+                </a:tc>
+                <a:tc>
+                  <a:txBody>
+                    <a:bodyPr/>
+                    <a:lstStyle/>
+                    <a:p>
+                      <a:pPr indent="0" marL="0">
+                        <a:buNone/>
+                      </a:pPr>
+                      <a:r>
+                        <a:rPr lang="en-US" sz="1050" b="1" dirty="0">
+                          <a:solidFill>
+                            <a:srgbClr val="E8A13A"/>
+                          </a:solidFill>
+                          <a:latin typeface="Microsoft JhengHei" pitchFamily="34" charset="0"/>
+                          <a:ea typeface="Microsoft JhengHei" pitchFamily="34" charset="-122"/>
+                          <a:cs typeface="Microsoft JhengHei" pitchFamily="34" charset="-120"/>
+                        </a:rPr>
+                        <a:t>商業 20 + 法遵敘事</a:t>
+                      </a:r>
+                      <a:endParaRPr lang="en-US" sz="1050" dirty="0">
+                        <a:latin typeface="Microsoft JhengHei" charset="0"/>
+                        <a:ea typeface="Microsoft JhengHei" charset="0"/>
+                        <a:cs typeface="Microsoft JhengHei" charset="0"/>
+                      </a:endParaRPr>
+                    </a:p>
+                  </a:txBody>
+                  <a:tcPr marL="54864" marR="54864" marT="54864" marB="54864" anchor="ctr">
+                    <a:lnL w="9525" cap="flat" cmpd="sng" algn="ctr">
+                      <a:solidFill>
+                        <a:srgbClr val="D5DEF0"/>
+                      </a:solidFill>
+                      <a:prstDash val="solid"/>
+                      <a:round/>
+                      <a:headEnd type="none" w="med" len="med"/>
+                      <a:tailEnd type="none" w="med" len="med"/>
+                    </a:lnL>
+                    <a:lnR w="9525" cap="flat" cmpd="sng" algn="ctr">
+                      <a:solidFill>
+                        <a:srgbClr val="D5DEF0"/>
+                      </a:solidFill>
+                      <a:prstDash val="solid"/>
+                      <a:round/>
+                      <a:headEnd type="none" w="med" len="med"/>
+                      <a:tailEnd type="none" w="med" len="med"/>
+                    </a:lnR>
+                    <a:lnT w="9525" cap="flat" cmpd="sng" algn="ctr">
+                      <a:solidFill>
+                        <a:srgbClr val="D5DEF0"/>
+                      </a:solidFill>
+                      <a:prstDash val="solid"/>
+                      <a:round/>
+                      <a:headEnd type="none" w="med" len="med"/>
+                      <a:tailEnd type="none" w="med" len="med"/>
+                    </a:lnT>
+                    <a:lnB w="9525" cap="flat" cmpd="sng" algn="ctr">
+                      <a:solidFill>
+                        <a:srgbClr val="D5DEF0"/>
+                      </a:solidFill>
+                      <a:prstDash val="solid"/>
+                      <a:round/>
+                      <a:headEnd type="none" w="med" len="med"/>
+                      <a:tailEnd type="none" w="med" len="med"/>
+                    </a:lnB>
+                  </a:tcPr>
+                </a:tc>
+                <a:tc>
+                  <a:txBody>
+                    <a:bodyPr/>
+                    <a:lstStyle/>
+                    <a:p>
+                      <a:pPr indent="0" marL="0">
+                        <a:buNone/>
+                      </a:pPr>
+                      <a:r>
+                        <a:rPr lang="en-US" sz="1050" dirty="0">
+                          <a:solidFill>
+                            <a:srgbClr val="1F2937"/>
+                          </a:solidFill>
+                          <a:latin typeface="Microsoft JhengHei" pitchFamily="34" charset="0"/>
+                          <a:ea typeface="Microsoft JhengHei" pitchFamily="34" charset="-122"/>
+                          <a:cs typeface="Microsoft JhengHei" pitchFamily="34" charset="-120"/>
+                        </a:rPr>
+                        <a:t>「合規是系統設計」——對 MaiCoin 評審的信任牌</a:t>
+                      </a:r>
+                      <a:endParaRPr lang="en-US" sz="1050" dirty="0">
+                        <a:latin typeface="Microsoft JhengHei" charset="0"/>
+                        <a:ea typeface="Microsoft JhengHei" charset="0"/>
+                        <a:cs typeface="Microsoft JhengHei" charset="0"/>
+                      </a:endParaRPr>
+                    </a:p>
+                  </a:txBody>
+                  <a:tcPr marL="54864" marR="54864" marT="54864" marB="54864" anchor="ctr">
+                    <a:lnL w="9525" cap="flat" cmpd="sng" algn="ctr">
+                      <a:solidFill>
+                        <a:srgbClr val="D5DEF0"/>
+                      </a:solidFill>
+                      <a:prstDash val="solid"/>
+                      <a:round/>
+                      <a:headEnd type="none" w="med" len="med"/>
+                      <a:tailEnd type="none" w="med" len="med"/>
+                    </a:lnL>
+                    <a:lnR w="9525" cap="flat" cmpd="sng" algn="ctr">
+                      <a:solidFill>
+                        <a:srgbClr val="D5DEF0"/>
+                      </a:solidFill>
+                      <a:prstDash val="solid"/>
+                      <a:round/>
+                      <a:headEnd type="none" w="med" len="med"/>
+                      <a:tailEnd type="none" w="med" len="med"/>
+                    </a:lnR>
+                    <a:lnT w="9525" cap="flat" cmpd="sng" algn="ctr">
+                      <a:solidFill>
+                        <a:srgbClr val="D5DEF0"/>
+                      </a:solidFill>
+                      <a:prstDash val="solid"/>
+                      <a:round/>
+                      <a:headEnd type="none" w="med" len="med"/>
+                      <a:tailEnd type="none" w="med" len="med"/>
+                    </a:lnT>
+                    <a:lnB w="9525" cap="flat" cmpd="sng" algn="ctr">
+                      <a:solidFill>
+                        <a:srgbClr val="D5DEF0"/>
+                      </a:solidFill>
+                      <a:prstDash val="solid"/>
+                      <a:round/>
+                      <a:headEnd type="none" w="med" len="med"/>
+                      <a:tailEnd type="none" w="med" len="med"/>
+                    </a:lnB>
+                  </a:tcPr>
+                </a:tc>
+              </a:tr>
+              <a:tr h="448056">
+                <a:tc>
+                  <a:txBody>
+                    <a:bodyPr/>
+                    <a:lstStyle/>
+                    <a:p>
+                      <a:pPr indent="0" marL="0">
+                        <a:buNone/>
+                      </a:pPr>
+                      <a:r>
+                        <a:rPr lang="en-US" sz="1050" b="1" dirty="0">
+                          <a:solidFill>
+                            <a:srgbClr val="1F2937"/>
+                          </a:solidFill>
+                          <a:latin typeface="Microsoft JhengHei" pitchFamily="34" charset="0"/>
+                          <a:ea typeface="Microsoft JhengHei" pitchFamily="34" charset="-122"/>
+                          <a:cs typeface="Microsoft JhengHei" pitchFamily="34" charset="-120"/>
+                        </a:rPr>
+                        <a:t>Private API 真實下單（D包）</a:t>
+                      </a:r>
+                      <a:endParaRPr lang="en-US" sz="1050" dirty="0">
+                        <a:latin typeface="Microsoft JhengHei" charset="0"/>
+                        <a:ea typeface="Microsoft JhengHei" charset="0"/>
+                        <a:cs typeface="Microsoft JhengHei" charset="0"/>
+                      </a:endParaRPr>
+                    </a:p>
+                  </a:txBody>
+                  <a:tcPr marL="54864" marR="54864" marT="54864" marB="54864" anchor="ctr">
+                    <a:lnL w="9525" cap="flat" cmpd="sng" algn="ctr">
+                      <a:solidFill>
+                        <a:srgbClr val="D5DEF0"/>
+                      </a:solidFill>
+                      <a:prstDash val="solid"/>
+                      <a:round/>
+                      <a:headEnd type="none" w="med" len="med"/>
+                      <a:tailEnd type="none" w="med" len="med"/>
+                    </a:lnL>
+                    <a:lnR w="9525" cap="flat" cmpd="sng" algn="ctr">
+                      <a:solidFill>
+                        <a:srgbClr val="D5DEF0"/>
+                      </a:solidFill>
+                      <a:prstDash val="solid"/>
+                      <a:round/>
+                      <a:headEnd type="none" w="med" len="med"/>
+                      <a:tailEnd type="none" w="med" len="med"/>
+                    </a:lnR>
+                    <a:lnT w="9525" cap="flat" cmpd="sng" algn="ctr">
+                      <a:solidFill>
+                        <a:srgbClr val="D5DEF0"/>
+                      </a:solidFill>
+                      <a:prstDash val="solid"/>
+                      <a:round/>
+                      <a:headEnd type="none" w="med" len="med"/>
+                      <a:tailEnd type="none" w="med" len="med"/>
+                    </a:lnT>
+                    <a:lnB w="9525" cap="flat" cmpd="sng" algn="ctr">
+                      <a:solidFill>
+                        <a:srgbClr val="D5DEF0"/>
+                      </a:solidFill>
+                      <a:prstDash val="solid"/>
+                      <a:round/>
+                      <a:headEnd type="none" w="med" len="med"/>
+                      <a:tailEnd type="none" w="med" len="med"/>
+                    </a:lnB>
+                  </a:tcPr>
+                </a:tc>
+                <a:tc>
+                  <a:txBody>
+                    <a:bodyPr/>
+                    <a:lstStyle/>
+                    <a:p>
+                      <a:pPr indent="0" marL="0">
+                        <a:buNone/>
+                      </a:pPr>
+                      <a:r>
+                        <a:rPr lang="en-US" sz="1050" b="1" dirty="0">
+                          <a:solidFill>
+                            <a:srgbClr val="E8A13A"/>
+                          </a:solidFill>
+                          <a:latin typeface="Microsoft JhengHei" pitchFamily="34" charset="0"/>
+                          <a:ea typeface="Microsoft JhengHei" pitchFamily="34" charset="-122"/>
+                          <a:cs typeface="Microsoft JhengHei" pitchFamily="34" charset="-120"/>
+                        </a:rPr>
+                        <a:t>加分 +5</a:t>
+                      </a:r>
+                      <a:endParaRPr lang="en-US" sz="1050" dirty="0">
+                        <a:latin typeface="Microsoft JhengHei" charset="0"/>
+                        <a:ea typeface="Microsoft JhengHei" charset="0"/>
+                        <a:cs typeface="Microsoft JhengHei" charset="0"/>
+                      </a:endParaRPr>
+                    </a:p>
+                  </a:txBody>
+                  <a:tcPr marL="54864" marR="54864" marT="54864" marB="54864" anchor="ctr">
+                    <a:lnL w="9525" cap="flat" cmpd="sng" algn="ctr">
+                      <a:solidFill>
+                        <a:srgbClr val="D5DEF0"/>
+                      </a:solidFill>
+                      <a:prstDash val="solid"/>
+                      <a:round/>
+                      <a:headEnd type="none" w="med" len="med"/>
+                      <a:tailEnd type="none" w="med" len="med"/>
+                    </a:lnL>
+                    <a:lnR w="9525" cap="flat" cmpd="sng" algn="ctr">
+                      <a:solidFill>
+                        <a:srgbClr val="D5DEF0"/>
+                      </a:solidFill>
+                      <a:prstDash val="solid"/>
+                      <a:round/>
+                      <a:headEnd type="none" w="med" len="med"/>
+                      <a:tailEnd type="none" w="med" len="med"/>
+                    </a:lnR>
+                    <a:lnT w="9525" cap="flat" cmpd="sng" algn="ctr">
+                      <a:solidFill>
+                        <a:srgbClr val="D5DEF0"/>
+                      </a:solidFill>
+                      <a:prstDash val="solid"/>
+                      <a:round/>
+                      <a:headEnd type="none" w="med" len="med"/>
+                      <a:tailEnd type="none" w="med" len="med"/>
+                    </a:lnT>
+                    <a:lnB w="9525" cap="flat" cmpd="sng" algn="ctr">
+                      <a:solidFill>
+                        <a:srgbClr val="D5DEF0"/>
+                      </a:solidFill>
+                      <a:prstDash val="solid"/>
+                      <a:round/>
+                      <a:headEnd type="none" w="med" len="med"/>
+                      <a:tailEnd type="none" w="med" len="med"/>
+                    </a:lnB>
+                  </a:tcPr>
+                </a:tc>
+                <a:tc>
+                  <a:txBody>
+                    <a:bodyPr/>
+                    <a:lstStyle/>
+                    <a:p>
+                      <a:pPr indent="0" marL="0">
+                        <a:buNone/>
+                      </a:pPr>
+                      <a:r>
+                        <a:rPr lang="en-US" sz="1050" dirty="0">
+                          <a:solidFill>
+                            <a:srgbClr val="1F2937"/>
+                          </a:solidFill>
+                          <a:latin typeface="Microsoft JhengHei" pitchFamily="34" charset="0"/>
+                          <a:ea typeface="Microsoft JhengHei" pitchFamily="34" charset="-122"/>
+                          <a:cs typeface="Microsoft JhengHei" pitchFamily="34" charset="-120"/>
+                        </a:rPr>
+                        <a:t>Lv2 帳號＋最小額度真成交</a:t>
+                      </a:r>
+                      <a:endParaRPr lang="en-US" sz="1050" dirty="0">
+                        <a:latin typeface="Microsoft JhengHei" charset="0"/>
+                        <a:ea typeface="Microsoft JhengHei" charset="0"/>
+                        <a:cs typeface="Microsoft JhengHei" charset="0"/>
+                      </a:endParaRPr>
+                    </a:p>
+                  </a:txBody>
+                  <a:tcPr marL="54864" marR="54864" marT="54864" marB="54864" anchor="ctr">
+                    <a:lnL w="9525" cap="flat" cmpd="sng" algn="ctr">
+                      <a:solidFill>
+                        <a:srgbClr val="D5DEF0"/>
+                      </a:solidFill>
+                      <a:prstDash val="solid"/>
+                      <a:round/>
+                      <a:headEnd type="none" w="med" len="med"/>
+                      <a:tailEnd type="none" w="med" len="med"/>
+                    </a:lnL>
+                    <a:lnR w="9525" cap="flat" cmpd="sng" algn="ctr">
+                      <a:solidFill>
+                        <a:srgbClr val="D5DEF0"/>
+                      </a:solidFill>
+                      <a:prstDash val="solid"/>
+                      <a:round/>
+                      <a:headEnd type="none" w="med" len="med"/>
+                      <a:tailEnd type="none" w="med" len="med"/>
+                    </a:lnR>
+                    <a:lnT w="9525" cap="flat" cmpd="sng" algn="ctr">
+                      <a:solidFill>
+                        <a:srgbClr val="D5DEF0"/>
+                      </a:solidFill>
+                      <a:prstDash val="solid"/>
+                      <a:round/>
+                      <a:headEnd type="none" w="med" len="med"/>
+                      <a:tailEnd type="none" w="med" len="med"/>
+                    </a:lnT>
+                    <a:lnB w="9525" cap="flat" cmpd="sng" algn="ctr">
+                      <a:solidFill>
+                        <a:srgbClr val="D5DEF0"/>
+                      </a:solidFill>
+                      <a:prstDash val="solid"/>
+                      <a:round/>
+                      <a:headEnd type="none" w="med" len="med"/>
+                      <a:tailEnd type="none" w="med" len="med"/>
+                    </a:lnB>
+                  </a:tcPr>
+                </a:tc>
+              </a:tr>
+              <a:tr h="448056">
+                <a:tc>
+                  <a:txBody>
+                    <a:bodyPr/>
+                    <a:lstStyle/>
+                    <a:p>
+                      <a:pPr indent="0" marL="0">
+                        <a:buNone/>
+                      </a:pPr>
+                      <a:r>
+                        <a:rPr lang="en-US" sz="1050" b="1" dirty="0">
+                          <a:solidFill>
+                            <a:srgbClr val="1F2937"/>
+                          </a:solidFill>
+                          <a:latin typeface="Microsoft JhengHei" pitchFamily="34" charset="0"/>
+                          <a:ea typeface="Microsoft JhengHei" pitchFamily="34" charset="-122"/>
+                          <a:cs typeface="Microsoft JhengHei" pitchFamily="34" charset="-120"/>
+                        </a:rPr>
+                        <a:t>Kiro spec-driven 開發（全員）</a:t>
+                      </a:r>
+                      <a:endParaRPr lang="en-US" sz="1050" dirty="0">
+                        <a:latin typeface="Microsoft JhengHei" charset="0"/>
+                        <a:ea typeface="Microsoft JhengHei" charset="0"/>
+                        <a:cs typeface="Microsoft JhengHei" charset="0"/>
+                      </a:endParaRPr>
+                    </a:p>
+                  </a:txBody>
+                  <a:tcPr marL="54864" marR="54864" marT="54864" marB="54864" anchor="ctr">
+                    <a:lnL w="9525" cap="flat" cmpd="sng" algn="ctr">
+                      <a:solidFill>
+                        <a:srgbClr val="D5DEF0"/>
+                      </a:solidFill>
+                      <a:prstDash val="solid"/>
+                      <a:round/>
+                      <a:headEnd type="none" w="med" len="med"/>
+                      <a:tailEnd type="none" w="med" len="med"/>
+                    </a:lnL>
+                    <a:lnR w="9525" cap="flat" cmpd="sng" algn="ctr">
+                      <a:solidFill>
+                        <a:srgbClr val="D5DEF0"/>
+                      </a:solidFill>
+                      <a:prstDash val="solid"/>
+                      <a:round/>
+                      <a:headEnd type="none" w="med" len="med"/>
+                      <a:tailEnd type="none" w="med" len="med"/>
+                    </a:lnR>
+                    <a:lnT w="9525" cap="flat" cmpd="sng" algn="ctr">
+                      <a:solidFill>
+                        <a:srgbClr val="D5DEF0"/>
+                      </a:solidFill>
+                      <a:prstDash val="solid"/>
+                      <a:round/>
+                      <a:headEnd type="none" w="med" len="med"/>
+                      <a:tailEnd type="none" w="med" len="med"/>
+                    </a:lnT>
+                    <a:lnB w="9525" cap="flat" cmpd="sng" algn="ctr">
+                      <a:solidFill>
+                        <a:srgbClr val="D5DEF0"/>
+                      </a:solidFill>
+                      <a:prstDash val="solid"/>
+                      <a:round/>
+                      <a:headEnd type="none" w="med" len="med"/>
+                      <a:tailEnd type="none" w="med" len="med"/>
+                    </a:lnB>
+                  </a:tcPr>
+                </a:tc>
+                <a:tc>
+                  <a:txBody>
+                    <a:bodyPr/>
+                    <a:lstStyle/>
+                    <a:p>
+                      <a:pPr indent="0" marL="0">
+                        <a:buNone/>
+                      </a:pPr>
+                      <a:r>
+                        <a:rPr lang="en-US" sz="1050" b="1" dirty="0">
+                          <a:solidFill>
+                            <a:srgbClr val="E8A13A"/>
+                          </a:solidFill>
+                          <a:latin typeface="Microsoft JhengHei" pitchFamily="34" charset="0"/>
+                          <a:ea typeface="Microsoft JhengHei" pitchFamily="34" charset="-122"/>
+                          <a:cs typeface="Microsoft JhengHei" pitchFamily="34" charset="-120"/>
+                        </a:rPr>
+                        <a:t>加分 +5</a:t>
+                      </a:r>
+                      <a:endParaRPr lang="en-US" sz="1050" dirty="0">
+                        <a:latin typeface="Microsoft JhengHei" charset="0"/>
+                        <a:ea typeface="Microsoft JhengHei" charset="0"/>
+                        <a:cs typeface="Microsoft JhengHei" charset="0"/>
+                      </a:endParaRPr>
+                    </a:p>
+                  </a:txBody>
+                  <a:tcPr marL="54864" marR="54864" marT="54864" marB="54864" anchor="ctr">
+                    <a:lnL w="9525" cap="flat" cmpd="sng" algn="ctr">
+                      <a:solidFill>
+                        <a:srgbClr val="D5DEF0"/>
+                      </a:solidFill>
+                      <a:prstDash val="solid"/>
+                      <a:round/>
+                      <a:headEnd type="none" w="med" len="med"/>
+                      <a:tailEnd type="none" w="med" len="med"/>
+                    </a:lnL>
+                    <a:lnR w="9525" cap="flat" cmpd="sng" algn="ctr">
+                      <a:solidFill>
+                        <a:srgbClr val="D5DEF0"/>
+                      </a:solidFill>
+                      <a:prstDash val="solid"/>
+                      <a:round/>
+                      <a:headEnd type="none" w="med" len="med"/>
+                      <a:tailEnd type="none" w="med" len="med"/>
+                    </a:lnR>
+                    <a:lnT w="9525" cap="flat" cmpd="sng" algn="ctr">
+                      <a:solidFill>
+                        <a:srgbClr val="D5DEF0"/>
+                      </a:solidFill>
+                      <a:prstDash val="solid"/>
+                      <a:round/>
+                      <a:headEnd type="none" w="med" len="med"/>
+                      <a:tailEnd type="none" w="med" len="med"/>
+                    </a:lnT>
+                    <a:lnB w="9525" cap="flat" cmpd="sng" algn="ctr">
+                      <a:solidFill>
+                        <a:srgbClr val="D5DEF0"/>
+                      </a:solidFill>
+                      <a:prstDash val="solid"/>
+                      <a:round/>
+                      <a:headEnd type="none" w="med" len="med"/>
+                      <a:tailEnd type="none" w="med" len="med"/>
+                    </a:lnB>
+                  </a:tcPr>
+                </a:tc>
+                <a:tc>
+                  <a:txBody>
+                    <a:bodyPr/>
+                    <a:lstStyle/>
+                    <a:p>
+                      <a:pPr indent="0" marL="0">
+                        <a:buNone/>
+                      </a:pPr>
+                      <a:r>
+                        <a:rPr lang="en-US" sz="1050" dirty="0">
+                          <a:solidFill>
+                            <a:srgbClr val="1F2937"/>
+                          </a:solidFill>
+                          <a:latin typeface="Microsoft JhengHei" pitchFamily="34" charset="0"/>
+                          <a:ea typeface="Microsoft JhengHei" pitchFamily="34" charset="-122"/>
+                          <a:cs typeface="Microsoft JhengHei" pitchFamily="34" charset="-120"/>
+                        </a:rPr>
+                        <a:t>.kiro/ 目錄＋截圖證據集</a:t>
+                      </a:r>
+                      <a:endParaRPr lang="en-US" sz="1050" dirty="0">
+                        <a:latin typeface="Microsoft JhengHei" charset="0"/>
+                        <a:ea typeface="Microsoft JhengHei" charset="0"/>
+                        <a:cs typeface="Microsoft JhengHei" charset="0"/>
+                      </a:endParaRPr>
+                    </a:p>
+                  </a:txBody>
+                  <a:tcPr marL="54864" marR="54864" marT="54864" marB="54864" anchor="ctr">
+                    <a:lnL w="9525" cap="flat" cmpd="sng" algn="ctr">
+                      <a:solidFill>
+                        <a:srgbClr val="D5DEF0"/>
+                      </a:solidFill>
+                      <a:prstDash val="solid"/>
+                      <a:round/>
+                      <a:headEnd type="none" w="med" len="med"/>
+                      <a:tailEnd type="none" w="med" len="med"/>
+                    </a:lnL>
+                    <a:lnR w="9525" cap="flat" cmpd="sng" algn="ctr">
+                      <a:solidFill>
+                        <a:srgbClr val="D5DEF0"/>
+                      </a:solidFill>
+                      <a:prstDash val="solid"/>
+                      <a:round/>
+                      <a:headEnd type="none" w="med" len="med"/>
+                      <a:tailEnd type="none" w="med" len="med"/>
+                    </a:lnR>
+                    <a:lnT w="9525" cap="flat" cmpd="sng" algn="ctr">
+                      <a:solidFill>
+                        <a:srgbClr val="D5DEF0"/>
+                      </a:solidFill>
+                      <a:prstDash val="solid"/>
+                      <a:round/>
+                      <a:headEnd type="none" w="med" len="med"/>
+                      <a:tailEnd type="none" w="med" len="med"/>
+                    </a:lnT>
+                    <a:lnB w="9525" cap="flat" cmpd="sng" algn="ctr">
+                      <a:solidFill>
+                        <a:srgbClr val="D5DEF0"/>
+                      </a:solidFill>
+                      <a:prstDash val="solid"/>
+                      <a:round/>
+                      <a:headEnd type="none" w="med" len="med"/>
+                      <a:tailEnd type="none" w="med" len="med"/>
+                    </a:lnB>
+                  </a:tcPr>
+                </a:tc>
+              </a:tr>
+              <a:tr h="448056">
+                <a:tc>
+                  <a:txBody>
+                    <a:bodyPr/>
+                    <a:lstStyle/>
+                    <a:p>
+                      <a:pPr indent="0" marL="0">
+                        <a:buNone/>
+                      </a:pPr>
+                      <a:r>
+                        <a:rPr lang="en-US" sz="1050" b="1" dirty="0">
+                          <a:solidFill>
+                            <a:srgbClr val="1F2937"/>
+                          </a:solidFill>
+                          <a:latin typeface="Microsoft JhengHei" pitchFamily="34" charset="0"/>
+                          <a:ea typeface="Microsoft JhengHei" pitchFamily="34" charset="-122"/>
+                          <a:cs typeface="Microsoft JhengHei" pitchFamily="34" charset="-120"/>
+                        </a:rPr>
+                        <a:t>離線備援＋預錄影片（C/D包）</a:t>
+                      </a:r>
+                      <a:endParaRPr lang="en-US" sz="1050" dirty="0">
+                        <a:latin typeface="Microsoft JhengHei" charset="0"/>
+                        <a:ea typeface="Microsoft JhengHei" charset="0"/>
+                        <a:cs typeface="Microsoft JhengHei" charset="0"/>
+                      </a:endParaRPr>
+                    </a:p>
+                  </a:txBody>
+                  <a:tcPr marL="54864" marR="54864" marT="54864" marB="54864" anchor="ctr">
+                    <a:lnL w="9525" cap="flat" cmpd="sng" algn="ctr">
+                      <a:solidFill>
+                        <a:srgbClr val="D5DEF0"/>
+                      </a:solidFill>
+                      <a:prstDash val="solid"/>
+                      <a:round/>
+                      <a:headEnd type="none" w="med" len="med"/>
+                      <a:tailEnd type="none" w="med" len="med"/>
+                    </a:lnL>
+                    <a:lnR w="9525" cap="flat" cmpd="sng" algn="ctr">
+                      <a:solidFill>
+                        <a:srgbClr val="D5DEF0"/>
+                      </a:solidFill>
+                      <a:prstDash val="solid"/>
+                      <a:round/>
+                      <a:headEnd type="none" w="med" len="med"/>
+                      <a:tailEnd type="none" w="med" len="med"/>
+                    </a:lnR>
+                    <a:lnT w="9525" cap="flat" cmpd="sng" algn="ctr">
+                      <a:solidFill>
+                        <a:srgbClr val="D5DEF0"/>
+                      </a:solidFill>
+                      <a:prstDash val="solid"/>
+                      <a:round/>
+                      <a:headEnd type="none" w="med" len="med"/>
+                      <a:tailEnd type="none" w="med" len="med"/>
+                    </a:lnT>
+                    <a:lnB w="9525" cap="flat" cmpd="sng" algn="ctr">
+                      <a:solidFill>
+                        <a:srgbClr val="D5DEF0"/>
+                      </a:solidFill>
+                      <a:prstDash val="solid"/>
+                      <a:round/>
+                      <a:headEnd type="none" w="med" len="med"/>
+                      <a:tailEnd type="none" w="med" len="med"/>
+                    </a:lnB>
+                  </a:tcPr>
+                </a:tc>
+                <a:tc>
+                  <a:txBody>
+                    <a:bodyPr/>
+                    <a:lstStyle/>
+                    <a:p>
+                      <a:pPr indent="0" marL="0">
+                        <a:buNone/>
+                      </a:pPr>
+                      <a:r>
+                        <a:rPr lang="en-US" sz="1050" b="1" dirty="0">
+                          <a:solidFill>
+                            <a:srgbClr val="E8A13A"/>
+                          </a:solidFill>
+                          <a:latin typeface="Microsoft JhengHei" pitchFamily="34" charset="0"/>
+                          <a:ea typeface="Microsoft JhengHei" pitchFamily="34" charset="-122"/>
+                          <a:cs typeface="Microsoft JhengHei" pitchFamily="34" charset="-120"/>
+                        </a:rPr>
+                        <a:t>完成度 10</a:t>
+                      </a:r>
+                      <a:endParaRPr lang="en-US" sz="1050" dirty="0">
+                        <a:latin typeface="Microsoft JhengHei" charset="0"/>
+                        <a:ea typeface="Microsoft JhengHei" charset="0"/>
+                        <a:cs typeface="Microsoft JhengHei" charset="0"/>
+                      </a:endParaRPr>
+                    </a:p>
+                  </a:txBody>
+                  <a:tcPr marL="54864" marR="54864" marT="54864" marB="54864" anchor="ctr">
+                    <a:lnL w="9525" cap="flat" cmpd="sng" algn="ctr">
+                      <a:solidFill>
+                        <a:srgbClr val="D5DEF0"/>
+                      </a:solidFill>
+                      <a:prstDash val="solid"/>
+                      <a:round/>
+                      <a:headEnd type="none" w="med" len="med"/>
+                      <a:tailEnd type="none" w="med" len="med"/>
+                    </a:lnL>
+                    <a:lnR w="9525" cap="flat" cmpd="sng" algn="ctr">
+                      <a:solidFill>
+                        <a:srgbClr val="D5DEF0"/>
+                      </a:solidFill>
+                      <a:prstDash val="solid"/>
+                      <a:round/>
+                      <a:headEnd type="none" w="med" len="med"/>
+                      <a:tailEnd type="none" w="med" len="med"/>
+                    </a:lnR>
+                    <a:lnT w="9525" cap="flat" cmpd="sng" algn="ctr">
+                      <a:solidFill>
+                        <a:srgbClr val="D5DEF0"/>
+                      </a:solidFill>
+                      <a:prstDash val="solid"/>
+                      <a:round/>
+                      <a:headEnd type="none" w="med" len="med"/>
+                      <a:tailEnd type="none" w="med" len="med"/>
+                    </a:lnT>
+                    <a:lnB w="9525" cap="flat" cmpd="sng" algn="ctr">
+                      <a:solidFill>
+                        <a:srgbClr val="D5DEF0"/>
+                      </a:solidFill>
+                      <a:prstDash val="solid"/>
+                      <a:round/>
+                      <a:headEnd type="none" w="med" len="med"/>
+                      <a:tailEnd type="none" w="med" len="med"/>
+                    </a:lnB>
+                  </a:tcPr>
+                </a:tc>
+                <a:tc>
+                  <a:txBody>
+                    <a:bodyPr/>
+                    <a:lstStyle/>
+                    <a:p>
+                      <a:pPr indent="0" marL="0">
+                        <a:buNone/>
+                      </a:pPr>
+                      <a:r>
+                        <a:rPr lang="en-US" sz="1050" dirty="0">
+                          <a:solidFill>
+                            <a:srgbClr val="1F2937"/>
+                          </a:solidFill>
+                          <a:latin typeface="Microsoft JhengHei" pitchFamily="34" charset="0"/>
+                          <a:ea typeface="Microsoft JhengHei" pitchFamily="34" charset="-122"/>
+                          <a:cs typeface="Microsoft JhengHei" pitchFamily="34" charset="-120"/>
+                        </a:rPr>
+                        <a:t>現場網路掛掉照樣演完</a:t>
+                      </a:r>
+                      <a:endParaRPr lang="en-US" sz="1050" dirty="0">
+                        <a:latin typeface="Microsoft JhengHei" charset="0"/>
+                        <a:ea typeface="Microsoft JhengHei" charset="0"/>
+                        <a:cs typeface="Microsoft JhengHei" charset="0"/>
+                      </a:endParaRPr>
+                    </a:p>
+                  </a:txBody>
+                  <a:tcPr marL="54864" marR="54864" marT="54864" marB="54864" anchor="ctr">
+                    <a:lnL w="9525" cap="flat" cmpd="sng" algn="ctr">
+                      <a:solidFill>
+                        <a:srgbClr val="D5DEF0"/>
+                      </a:solidFill>
+                      <a:prstDash val="solid"/>
+                      <a:round/>
+                      <a:headEnd type="none" w="med" len="med"/>
+                      <a:tailEnd type="none" w="med" len="med"/>
+                    </a:lnL>
+                    <a:lnR w="9525" cap="flat" cmpd="sng" algn="ctr">
+                      <a:solidFill>
+                        <a:srgbClr val="D5DEF0"/>
+                      </a:solidFill>
+                      <a:prstDash val="solid"/>
+                      <a:round/>
+                      <a:headEnd type="none" w="med" len="med"/>
+                      <a:tailEnd type="none" w="med" len="med"/>
+                    </a:lnR>
+                    <a:lnT w="9525" cap="flat" cmpd="sng" algn="ctr">
+                      <a:solidFill>
+                        <a:srgbClr val="D5DEF0"/>
+                      </a:solidFill>
+                      <a:prstDash val="solid"/>
+                      <a:round/>
+                      <a:headEnd type="none" w="med" len="med"/>
+                      <a:tailEnd type="none" w="med" len="med"/>
+                    </a:lnT>
+                    <a:lnB w="9525" cap="flat" cmpd="sng" algn="ctr">
+                      <a:solidFill>
+                        <a:srgbClr val="D5DEF0"/>
+                      </a:solidFill>
+                      <a:prstDash val="solid"/>
+                      <a:round/>
+                      <a:headEnd type="none" w="med" len="med"/>
+                      <a:tailEnd type="none" w="med" len="med"/>
+                    </a:lnB>
+                  </a:tcPr>
+                </a:tc>
+              </a:tr>
+              <a:tr h="448056">
+                <a:tc>
+                  <a:txBody>
+                    <a:bodyPr/>
+                    <a:lstStyle/>
+                    <a:p>
+                      <a:pPr indent="0" marL="0">
+                        <a:buNone/>
+                      </a:pPr>
+                      <a:r>
+                        <a:rPr lang="en-US" sz="1050" b="1" dirty="0">
+                          <a:solidFill>
+                            <a:srgbClr val="1F2937"/>
+                          </a:solidFill>
+                          <a:latin typeface="Microsoft JhengHei" pitchFamily="34" charset="0"/>
+                          <a:ea typeface="Microsoft JhengHei" pitchFamily="34" charset="-122"/>
+                          <a:cs typeface="Microsoft JhengHei" pitchFamily="34" charset="-120"/>
+                        </a:rPr>
+                        <a:t>成本效益＋限制揭露（簡報）</a:t>
+                      </a:r>
+                      <a:endParaRPr lang="en-US" sz="1050" dirty="0">
+                        <a:latin typeface="Microsoft JhengHei" charset="0"/>
+                        <a:ea typeface="Microsoft JhengHei" charset="0"/>
+                        <a:cs typeface="Microsoft JhengHei" charset="0"/>
+                      </a:endParaRPr>
+                    </a:p>
+                  </a:txBody>
+                  <a:tcPr marL="54864" marR="54864" marT="54864" marB="54864" anchor="ctr">
+                    <a:lnL w="9525" cap="flat" cmpd="sng" algn="ctr">
+                      <a:solidFill>
+                        <a:srgbClr val="D5DEF0"/>
+                      </a:solidFill>
+                      <a:prstDash val="solid"/>
+                      <a:round/>
+                      <a:headEnd type="none" w="med" len="med"/>
+                      <a:tailEnd type="none" w="med" len="med"/>
+                    </a:lnL>
+                    <a:lnR w="9525" cap="flat" cmpd="sng" algn="ctr">
+                      <a:solidFill>
+                        <a:srgbClr val="D5DEF0"/>
+                      </a:solidFill>
+                      <a:prstDash val="solid"/>
+                      <a:round/>
+                      <a:headEnd type="none" w="med" len="med"/>
+                      <a:tailEnd type="none" w="med" len="med"/>
+                    </a:lnR>
+                    <a:lnT w="9525" cap="flat" cmpd="sng" algn="ctr">
+                      <a:solidFill>
+                        <a:srgbClr val="D5DEF0"/>
+                      </a:solidFill>
+                      <a:prstDash val="solid"/>
+                      <a:round/>
+                      <a:headEnd type="none" w="med" len="med"/>
+                      <a:tailEnd type="none" w="med" len="med"/>
+                    </a:lnT>
+                    <a:lnB w="9525" cap="flat" cmpd="sng" algn="ctr">
+                      <a:solidFill>
+                        <a:srgbClr val="D5DEF0"/>
+                      </a:solidFill>
+                      <a:prstDash val="solid"/>
+                      <a:round/>
+                      <a:headEnd type="none" w="med" len="med"/>
+                      <a:tailEnd type="none" w="med" len="med"/>
+                    </a:lnB>
+                  </a:tcPr>
+                </a:tc>
+                <a:tc>
+                  <a:txBody>
+                    <a:bodyPr/>
+                    <a:lstStyle/>
+                    <a:p>
+                      <a:pPr indent="0" marL="0">
+                        <a:buNone/>
+                      </a:pPr>
+                      <a:r>
+                        <a:rPr lang="en-US" sz="1050" b="1" dirty="0">
+                          <a:solidFill>
+                            <a:srgbClr val="E8A13A"/>
+                          </a:solidFill>
+                          <a:latin typeface="Microsoft JhengHei" pitchFamily="34" charset="0"/>
+                          <a:ea typeface="Microsoft JhengHei" pitchFamily="34" charset="-122"/>
+                          <a:cs typeface="Microsoft JhengHei" pitchFamily="34" charset="-120"/>
+                        </a:rPr>
+                        <a:t>可行性 20</a:t>
+                      </a:r>
+                      <a:endParaRPr lang="en-US" sz="1050" dirty="0">
+                        <a:latin typeface="Microsoft JhengHei" charset="0"/>
+                        <a:ea typeface="Microsoft JhengHei" charset="0"/>
+                        <a:cs typeface="Microsoft JhengHei" charset="0"/>
+                      </a:endParaRPr>
+                    </a:p>
+                  </a:txBody>
+                  <a:tcPr marL="54864" marR="54864" marT="54864" marB="54864" anchor="ctr">
+                    <a:lnL w="9525" cap="flat" cmpd="sng" algn="ctr">
+                      <a:solidFill>
+                        <a:srgbClr val="D5DEF0"/>
+                      </a:solidFill>
+                      <a:prstDash val="solid"/>
+                      <a:round/>
+                      <a:headEnd type="none" w="med" len="med"/>
+                      <a:tailEnd type="none" w="med" len="med"/>
+                    </a:lnL>
+                    <a:lnR w="9525" cap="flat" cmpd="sng" algn="ctr">
+                      <a:solidFill>
+                        <a:srgbClr val="D5DEF0"/>
+                      </a:solidFill>
+                      <a:prstDash val="solid"/>
+                      <a:round/>
+                      <a:headEnd type="none" w="med" len="med"/>
+                      <a:tailEnd type="none" w="med" len="med"/>
+                    </a:lnR>
+                    <a:lnT w="9525" cap="flat" cmpd="sng" algn="ctr">
+                      <a:solidFill>
+                        <a:srgbClr val="D5DEF0"/>
+                      </a:solidFill>
+                      <a:prstDash val="solid"/>
+                      <a:round/>
+                      <a:headEnd type="none" w="med" len="med"/>
+                      <a:tailEnd type="none" w="med" len="med"/>
+                    </a:lnT>
+                    <a:lnB w="9525" cap="flat" cmpd="sng" algn="ctr">
+                      <a:solidFill>
+                        <a:srgbClr val="D5DEF0"/>
+                      </a:solidFill>
+                      <a:prstDash val="solid"/>
+                      <a:round/>
+                      <a:headEnd type="none" w="med" len="med"/>
+                      <a:tailEnd type="none" w="med" len="med"/>
+                    </a:lnB>
+                  </a:tcPr>
+                </a:tc>
+                <a:tc>
+                  <a:txBody>
+                    <a:bodyPr/>
+                    <a:lstStyle/>
+                    <a:p>
+                      <a:pPr indent="0" marL="0">
+                        <a:buNone/>
+                      </a:pPr>
+                      <a:r>
+                        <a:rPr lang="en-US" sz="1050" dirty="0">
+                          <a:solidFill>
+                            <a:srgbClr val="1F2937"/>
+                          </a:solidFill>
+                          <a:latin typeface="Microsoft JhengHei" pitchFamily="34" charset="0"/>
+                          <a:ea typeface="Microsoft JhengHei" pitchFamily="34" charset="-122"/>
+                          <a:cs typeface="Microsoft JhengHei" pitchFamily="34" charset="-120"/>
+                        </a:rPr>
+                        <a:t>模型分工、rate limit 因應、金鑰權限——主動揭露</a:t>
+                      </a:r>
+                      <a:endParaRPr lang="en-US" sz="1050" dirty="0">
+                        <a:latin typeface="Microsoft JhengHei" charset="0"/>
+                        <a:ea typeface="Microsoft JhengHei" charset="0"/>
+                        <a:cs typeface="Microsoft JhengHei" charset="0"/>
+                      </a:endParaRPr>
+                    </a:p>
+                  </a:txBody>
+                  <a:tcPr marL="54864" marR="54864" marT="54864" marB="54864" anchor="ctr">
+                    <a:lnL w="9525" cap="flat" cmpd="sng" algn="ctr">
+                      <a:solidFill>
+                        <a:srgbClr val="D5DEF0"/>
+                      </a:solidFill>
+                      <a:prstDash val="solid"/>
+                      <a:round/>
+                      <a:headEnd type="none" w="med" len="med"/>
+                      <a:tailEnd type="none" w="med" len="med"/>
+                    </a:lnL>
+                    <a:lnR w="9525" cap="flat" cmpd="sng" algn="ctr">
+                      <a:solidFill>
+                        <a:srgbClr val="D5DEF0"/>
+                      </a:solidFill>
+                      <a:prstDash val="solid"/>
+                      <a:round/>
+                      <a:headEnd type="none" w="med" len="med"/>
+                      <a:tailEnd type="none" w="med" len="med"/>
+                    </a:lnR>
+                    <a:lnT w="9525" cap="flat" cmpd="sng" algn="ctr">
+                      <a:solidFill>
+                        <a:srgbClr val="D5DEF0"/>
+                      </a:solidFill>
+                      <a:prstDash val="solid"/>
+                      <a:round/>
+                      <a:headEnd type="none" w="med" len="med"/>
+                      <a:tailEnd type="none" w="med" len="med"/>
+                    </a:lnT>
+                    <a:lnB w="9525" cap="flat" cmpd="sng" algn="ctr">
+                      <a:solidFill>
+                        <a:srgbClr val="D5DEF0"/>
+                      </a:solidFill>
+                      <a:prstDash val="solid"/>
+                      <a:round/>
+                      <a:headEnd type="none" w="med" len="med"/>
+                      <a:tailEnd type="none" w="med" len="med"/>
+                    </a:lnB>
+                  </a:tcPr>
+                </a:tc>
+              </a:tr>
+            </a:tbl>
+          </a:graphicData>
+        </a:graphic>
+      </p:graphicFrame>
     </p:spTree>
   </p:cSld>
   <p:clrMapOvr>
@@ -18798,7 +24198,7 @@
                 <a:ea typeface="Microsoft JhengHei" pitchFamily="34" charset="-122"/>
                 <a:cs typeface="Microsoft JhengHei" pitchFamily="34" charset="-120"/>
               </a:rPr>
-              <a:t>Kiro 開發｜.kiro 目錄就是團隊大腦</a:t>
+              <a:t>Demo 畫面對應：每個區塊是誰的作品、扛哪些分</a:t>
             </a:r>
             <a:endParaRPr lang="en-US" sz="2700" dirty="0"/>
           </a:p>
@@ -18806,14 +24206,36 @@
       </p:sp>
       <p:sp>
         <p:nvSpPr>
-          <p:cNvPr id="3" name="Text 1"/>
+          <p:cNvPr id="3" name="Shape 1"/>
           <p:cNvSpPr/>
           <p:nvPr/>
         </p:nvSpPr>
         <p:spPr>
           <a:xfrm>
-            <a:off x="548640" y="1024128"/>
-            <a:ext cx="11091672" cy="320040"/>
+            <a:off x="548640" y="1554480"/>
+            <a:ext cx="3291840" cy="4663440"/>
+          </a:xfrm>
+          <a:prstGeom prst="roundRect">
+            <a:avLst>
+              <a:gd name="adj" fmla="val 2500"/>
+            </a:avLst>
+          </a:prstGeom>
+          <a:solidFill>
+            <a:srgbClr val="F4F7FD"/>
+          </a:solidFill>
+          <a:ln/>
+        </p:spPr>
+      </p:sp>
+      <p:sp>
+        <p:nvSpPr>
+          <p:cNvPr id="4" name="Text 2"/>
+          <p:cNvSpPr/>
+          <p:nvPr/>
+        </p:nvSpPr>
+        <p:spPr>
+          <a:xfrm>
+            <a:off x="777240" y="1691640"/>
+            <a:ext cx="2834640" cy="320040"/>
           </a:xfrm>
           <a:prstGeom prst="rect">
             <a:avLst/>
@@ -18829,7 +24251,7 @@
               <a:buNone/>
             </a:pPr>
             <a:r>
-              <a:rPr lang="en-US" sz="1250" dirty="0">
+              <a:rPr lang="en-US" sz="1150" b="1" dirty="0">
                 <a:solidFill>
                   <a:srgbClr val="6B7280"/>
                 </a:solidFill>
@@ -18837,44 +24259,49 @@
                 <a:ea typeface="Microsoft JhengHei" pitchFamily="34" charset="-122"/>
                 <a:cs typeface="Microsoft JhengHei" pitchFamily="34" charset="-120"/>
               </a:rPr>
-              <a:t>打開專案它就懂我們的規矩——不用自己記紅線</a:t>
+              <a:t>手機版畫面（#13 改版後）</a:t>
             </a:r>
-            <a:endParaRPr lang="en-US" sz="1250" dirty="0"/>
+            <a:endParaRPr lang="en-US" sz="1150" dirty="0"/>
           </a:p>
         </p:txBody>
       </p:sp>
       <p:sp>
         <p:nvSpPr>
-          <p:cNvPr id="4" name="Shape 2"/>
+          <p:cNvPr id="5" name="Shape 3"/>
           <p:cNvSpPr/>
           <p:nvPr/>
         </p:nvSpPr>
         <p:spPr>
           <a:xfrm>
-            <a:off x="548640" y="1554480"/>
-            <a:ext cx="11091672" cy="1280160"/>
+            <a:off x="777240" y="2057400"/>
+            <a:ext cx="2834640" cy="457200"/>
           </a:xfrm>
           <a:prstGeom prst="roundRect">
             <a:avLst>
-              <a:gd name="adj" fmla="val 6429"/>
+              <a:gd name="adj" fmla="val 12000"/>
             </a:avLst>
           </a:prstGeom>
           <a:solidFill>
-            <a:srgbClr val="EAF0FB"/>
+            <a:srgbClr val="FFFFFF"/>
           </a:solidFill>
-          <a:ln/>
+          <a:ln w="19050">
+            <a:solidFill>
+              <a:srgbClr val="16224D"/>
+            </a:solidFill>
+            <a:prstDash val="solid"/>
+          </a:ln>
         </p:spPr>
       </p:sp>
       <p:sp>
         <p:nvSpPr>
-          <p:cNvPr id="5" name="Text 3"/>
+          <p:cNvPr id="6" name="Text 4"/>
           <p:cNvSpPr/>
           <p:nvPr/>
         </p:nvSpPr>
         <p:spPr>
           <a:xfrm>
-            <a:off x="868680" y="1691640"/>
-            <a:ext cx="3108960" cy="457200"/>
+            <a:off x="914400" y="2057400"/>
+            <a:ext cx="2606040" cy="457200"/>
           </a:xfrm>
           <a:prstGeom prst="rect">
             <a:avLst/>
@@ -18890,30 +24317,57 @@
               <a:buNone/>
             </a:pPr>
             <a:r>
-              <a:rPr lang="en-US" sz="1400" b="1" dirty="0">
+              <a:rPr lang="en-US" sz="1100" b="1" dirty="0">
                 <a:solidFill>
                   <a:srgbClr val="16224D"/>
                 </a:solidFill>
-                <a:latin typeface="Courier New" pitchFamily="34" charset="0"/>
-                <a:ea typeface="Courier New" pitchFamily="34" charset="-122"/>
-                <a:cs typeface="Courier New" pitchFamily="34" charset="-120"/>
+                <a:latin typeface="Microsoft JhengHei" pitchFamily="34" charset="0"/>
+                <a:ea typeface="Microsoft JhengHei" pitchFamily="34" charset="-122"/>
+                <a:cs typeface="Microsoft JhengHei" pitchFamily="34" charset="-120"/>
               </a:rPr>
-              <a:t>.kiro/steering/</a:t>
+              <a:t>① 頂欄：麥麥＋模式徽章</a:t>
             </a:r>
-            <a:endParaRPr lang="en-US" sz="1400" dirty="0"/>
+            <a:endParaRPr lang="en-US" sz="1100" dirty="0"/>
           </a:p>
         </p:txBody>
       </p:sp>
       <p:sp>
         <p:nvSpPr>
-          <p:cNvPr id="6" name="Text 4"/>
+          <p:cNvPr id="7" name="Shape 5"/>
           <p:cNvSpPr/>
           <p:nvPr/>
         </p:nvSpPr>
         <p:spPr>
           <a:xfrm>
-            <a:off x="868680" y="2176272"/>
-            <a:ext cx="3108960" cy="365760"/>
+            <a:off x="777240" y="2624328"/>
+            <a:ext cx="2834640" cy="685800"/>
+          </a:xfrm>
+          <a:prstGeom prst="roundRect">
+            <a:avLst>
+              <a:gd name="adj" fmla="val 8000"/>
+            </a:avLst>
+          </a:prstGeom>
+          <a:solidFill>
+            <a:srgbClr val="FFFFFF"/>
+          </a:solidFill>
+          <a:ln w="19050">
+            <a:solidFill>
+              <a:srgbClr val="E8A13A"/>
+            </a:solidFill>
+            <a:prstDash val="solid"/>
+          </a:ln>
+        </p:spPr>
+      </p:sp>
+      <p:sp>
+        <p:nvSpPr>
+          <p:cNvPr id="8" name="Text 6"/>
+          <p:cNvSpPr/>
+          <p:nvPr/>
+        </p:nvSpPr>
+        <p:spPr>
+          <a:xfrm>
+            <a:off x="914400" y="2624328"/>
+            <a:ext cx="2606040" cy="685800"/>
           </a:xfrm>
           <a:prstGeom prst="rect">
             <a:avLst/>
@@ -18937,7 +24391,7 @@
                 <a:ea typeface="Microsoft JhengHei" pitchFamily="34" charset="-122"/>
                 <a:cs typeface="Microsoft JhengHei" pitchFamily="34" charset="-120"/>
               </a:rPr>
-              <a:t>自動載入的團隊約定</a:t>
+              <a:t>② 健檢卡（橫向滑動）</a:t>
             </a:r>
             <a:endParaRPr lang="en-US" sz="1100" dirty="0"/>
           </a:p>
@@ -18945,103 +24399,30 @@
       </p:sp>
       <p:sp>
         <p:nvSpPr>
-          <p:cNvPr id="7" name="Text 5"/>
+          <p:cNvPr id="9" name="Shape 7"/>
           <p:cNvSpPr/>
           <p:nvPr/>
         </p:nvSpPr>
         <p:spPr>
           <a:xfrm>
-            <a:off x="4160520" y="1664208"/>
-            <a:ext cx="7498080" cy="1097280"/>
-          </a:xfrm>
-          <a:prstGeom prst="rect">
-            <a:avLst/>
-          </a:prstGeom>
-          <a:noFill/>
-          <a:ln/>
-        </p:spPr>
-        <p:txBody>
-          <a:bodyPr wrap="square" lIns="0" tIns="0" rIns="0" bIns="0" rtlCol="0" anchor="ctr"/>
-          <a:lstStyle/>
-          <a:p>
-            <a:pPr indent="0" marL="0">
-              <a:buNone/>
-            </a:pPr>
-            <a:r>
-              <a:rPr lang="en-US" sz="1200" dirty="0">
-                <a:solidFill>
-                  <a:srgbClr val="1F2937"/>
-                </a:solidFill>
-                <a:latin typeface="Microsoft JhengHei" pitchFamily="34" charset="0"/>
-                <a:ea typeface="Microsoft JhengHei" pitchFamily="34" charset="-122"/>
-                <a:cs typeface="Microsoft JhengHei" pitchFamily="34" charset="-120"/>
-              </a:rPr>
-              <a:t>product.md 紅線（不報明牌/下單必確認）、data-schema.md 欄位與 API 格式、tech.md 架構規範。Kiro 生成的每行程式都遵守</a:t>
-            </a:r>
-            <a:endParaRPr lang="en-US" sz="1200" dirty="0"/>
-          </a:p>
-        </p:txBody>
-      </p:sp>
-      <p:sp>
-        <p:nvSpPr>
-          <p:cNvPr id="8" name="Shape 6"/>
-          <p:cNvSpPr/>
-          <p:nvPr/>
-        </p:nvSpPr>
-        <p:spPr>
-          <a:xfrm>
-            <a:off x="548640" y="2971800"/>
-            <a:ext cx="11091672" cy="1280160"/>
+            <a:off x="777240" y="3419856"/>
+            <a:ext cx="2834640" cy="1371600"/>
           </a:xfrm>
           <a:prstGeom prst="roundRect">
             <a:avLst>
-              <a:gd name="adj" fmla="val 6429"/>
+              <a:gd name="adj" fmla="val 4000"/>
             </a:avLst>
           </a:prstGeom>
           <a:solidFill>
-            <a:srgbClr val="EAF0FB"/>
+            <a:srgbClr val="FFFFFF"/>
           </a:solidFill>
-          <a:ln/>
+          <a:ln w="19050">
+            <a:solidFill>
+              <a:srgbClr val="1F9D66"/>
+            </a:solidFill>
+            <a:prstDash val="solid"/>
+          </a:ln>
         </p:spPr>
-      </p:sp>
-      <p:sp>
-        <p:nvSpPr>
-          <p:cNvPr id="9" name="Text 7"/>
-          <p:cNvSpPr/>
-          <p:nvPr/>
-        </p:nvSpPr>
-        <p:spPr>
-          <a:xfrm>
-            <a:off x="868680" y="3108960"/>
-            <a:ext cx="3108960" cy="457200"/>
-          </a:xfrm>
-          <a:prstGeom prst="rect">
-            <a:avLst/>
-          </a:prstGeom>
-          <a:noFill/>
-          <a:ln/>
-        </p:spPr>
-        <p:txBody>
-          <a:bodyPr wrap="square" lIns="0" tIns="0" rIns="0" bIns="0" rtlCol="0" anchor="ctr"/>
-          <a:lstStyle/>
-          <a:p>
-            <a:pPr indent="0" marL="0">
-              <a:buNone/>
-            </a:pPr>
-            <a:r>
-              <a:rPr lang="en-US" sz="1400" b="1" dirty="0">
-                <a:solidFill>
-                  <a:srgbClr val="16224D"/>
-                </a:solidFill>
-                <a:latin typeface="Courier New" pitchFamily="34" charset="0"/>
-                <a:ea typeface="Courier New" pitchFamily="34" charset="-122"/>
-                <a:cs typeface="Courier New" pitchFamily="34" charset="-120"/>
-              </a:rPr>
-              <a:t>.kiro/specs/&lt;功能&gt;/</a:t>
-            </a:r>
-            <a:endParaRPr lang="en-US" sz="1400" dirty="0"/>
-          </a:p>
-        </p:txBody>
       </p:sp>
       <p:sp>
         <p:nvSpPr>
@@ -19051,8 +24432,8 @@
         </p:nvSpPr>
         <p:spPr>
           <a:xfrm>
-            <a:off x="868680" y="3593592"/>
-            <a:ext cx="3108960" cy="365760"/>
+            <a:off x="914400" y="3419856"/>
+            <a:ext cx="2606040" cy="1371600"/>
           </a:xfrm>
           <a:prstGeom prst="rect">
             <a:avLst/>
@@ -19070,13 +24451,13 @@
             <a:r>
               <a:rPr lang="en-US" sz="1100" b="1" dirty="0">
                 <a:solidFill>
-                  <a:srgbClr val="E8A13A"/>
+                  <a:srgbClr val="1F9D66"/>
                 </a:solidFill>
                 <a:latin typeface="Microsoft JhengHei" pitchFamily="34" charset="0"/>
                 <a:ea typeface="Microsoft JhengHei" pitchFamily="34" charset="-122"/>
                 <a:cs typeface="Microsoft JhengHei" pitchFamily="34" charset="-120"/>
               </a:rPr>
-              <a:t>五個功能規格（三件套）</a:t>
+              <a:t>③ 對話區（主畫面）</a:t>
             </a:r>
             <a:endParaRPr lang="en-US" sz="1100" dirty="0"/>
           </a:p>
@@ -19084,114 +24465,41 @@
       </p:sp>
       <p:sp>
         <p:nvSpPr>
-          <p:cNvPr id="11" name="Text 9"/>
+          <p:cNvPr id="11" name="Shape 9"/>
           <p:cNvSpPr/>
           <p:nvPr/>
         </p:nvSpPr>
         <p:spPr>
           <a:xfrm>
-            <a:off x="4160520" y="3081528"/>
-            <a:ext cx="7498080" cy="1097280"/>
+            <a:off x="777240" y="4901184"/>
+            <a:ext cx="2834640" cy="822960"/>
           </a:xfrm>
-          <a:prstGeom prst="rect">
-            <a:avLst/>
+          <a:prstGeom prst="roundRect">
+            <a:avLst>
+              <a:gd name="adj" fmla="val 6667"/>
+            </a:avLst>
           </a:prstGeom>
-          <a:noFill/>
-          <a:ln/>
+          <a:solidFill>
+            <a:srgbClr val="FFFFFF"/>
+          </a:solidFill>
+          <a:ln w="19050">
+            <a:solidFill>
+              <a:srgbClr val="D64550"/>
+            </a:solidFill>
+            <a:prstDash val="solid"/>
+          </a:ln>
         </p:spPr>
-        <p:txBody>
-          <a:bodyPr wrap="square" lIns="0" tIns="0" rIns="0" bIns="0" rtlCol="0" anchor="ctr"/>
-          <a:lstStyle/>
-          <a:p>
-            <a:pPr indent="0" marL="0">
-              <a:buNone/>
-            </a:pPr>
-            <a:r>
-              <a:rPr lang="en-US" sz="1200" dirty="0">
-                <a:solidFill>
-                  <a:srgbClr val="1F2937"/>
-                </a:solidFill>
-                <a:latin typeface="Microsoft JhengHei" pitchFamily="34" charset="0"/>
-                <a:ea typeface="Microsoft JhengHei" pitchFamily="34" charset="-122"/>
-                <a:cs typeface="Microsoft JhengHei" pitchFamily="34" charset="-120"/>
-              </a:rPr>
-              <a:t>requirements.md 驗收條件（EARS）→ design.md 設計 → tasks.md 任務清單。已備：chat-agent、behavior-engine、order-flow、profile-engine、trade-scenarios、audit-log</a:t>
-            </a:r>
-            <a:endParaRPr lang="en-US" sz="1200" dirty="0"/>
-          </a:p>
-        </p:txBody>
       </p:sp>
       <p:sp>
         <p:nvSpPr>
-          <p:cNvPr id="12" name="Shape 10"/>
+          <p:cNvPr id="12" name="Text 10"/>
           <p:cNvSpPr/>
           <p:nvPr/>
         </p:nvSpPr>
         <p:spPr>
           <a:xfrm>
-            <a:off x="548640" y="4389120"/>
-            <a:ext cx="11091672" cy="1280160"/>
-          </a:xfrm>
-          <a:prstGeom prst="roundRect">
-            <a:avLst>
-              <a:gd name="adj" fmla="val 6429"/>
-            </a:avLst>
-          </a:prstGeom>
-          <a:solidFill>
-            <a:srgbClr val="EAF0FB"/>
-          </a:solidFill>
-          <a:ln/>
-        </p:spPr>
-      </p:sp>
-      <p:sp>
-        <p:nvSpPr>
-          <p:cNvPr id="13" name="Text 11"/>
-          <p:cNvSpPr/>
-          <p:nvPr/>
-        </p:nvSpPr>
-        <p:spPr>
-          <a:xfrm>
-            <a:off x="868680" y="4526280"/>
-            <a:ext cx="3108960" cy="457200"/>
-          </a:xfrm>
-          <a:prstGeom prst="rect">
-            <a:avLst/>
-          </a:prstGeom>
-          <a:noFill/>
-          <a:ln/>
-        </p:spPr>
-        <p:txBody>
-          <a:bodyPr wrap="square" lIns="0" tIns="0" rIns="0" bIns="0" rtlCol="0" anchor="ctr"/>
-          <a:lstStyle/>
-          <a:p>
-            <a:pPr indent="0" marL="0">
-              <a:buNone/>
-            </a:pPr>
-            <a:r>
-              <a:rPr lang="en-US" sz="1400" b="1" dirty="0">
-                <a:solidFill>
-                  <a:srgbClr val="16224D"/>
-                </a:solidFill>
-                <a:latin typeface="Courier New" pitchFamily="34" charset="0"/>
-                <a:ea typeface="Courier New" pitchFamily="34" charset="-122"/>
-                <a:cs typeface="Courier New" pitchFamily="34" charset="-120"/>
-              </a:rPr>
-              <a:t>.kiro/settings/mcp.json</a:t>
-            </a:r>
-            <a:endParaRPr lang="en-US" sz="1400" dirty="0"/>
-          </a:p>
-        </p:txBody>
-      </p:sp>
-      <p:sp>
-        <p:nvSpPr>
-          <p:cNvPr id="14" name="Text 12"/>
-          <p:cNvSpPr/>
-          <p:nvPr/>
-        </p:nvSpPr>
-        <p:spPr>
-          <a:xfrm>
-            <a:off x="868680" y="5010912"/>
-            <a:ext cx="3108960" cy="365760"/>
+            <a:off x="914400" y="4901184"/>
+            <a:ext cx="2606040" cy="822960"/>
           </a:xfrm>
           <a:prstGeom prst="rect">
             <a:avLst/>
@@ -19209,13 +24517,13 @@
             <a:r>
               <a:rPr lang="en-US" sz="1100" b="1" dirty="0">
                 <a:solidFill>
-                  <a:srgbClr val="E8A13A"/>
+                  <a:srgbClr val="D64550"/>
                 </a:solidFill>
                 <a:latin typeface="Microsoft JhengHei" pitchFamily="34" charset="0"/>
                 <a:ea typeface="Microsoft JhengHei" pitchFamily="34" charset="-122"/>
                 <a:cs typeface="Microsoft JhengHei" pitchFamily="34" charset="-120"/>
               </a:rPr>
-              <a:t>MAX MCP 接入</a:t>
+              <a:t>④ 三方案卡 / 確認卡</a:t>
             </a:r>
             <a:endParaRPr lang="en-US" sz="1100" dirty="0"/>
           </a:p>
@@ -19223,14 +24531,41 @@
       </p:sp>
       <p:sp>
         <p:nvSpPr>
-          <p:cNvPr id="15" name="Text 13"/>
+          <p:cNvPr id="13" name="Shape 11"/>
           <p:cNvSpPr/>
           <p:nvPr/>
         </p:nvSpPr>
         <p:spPr>
           <a:xfrm>
-            <a:off x="4160520" y="4498848"/>
-            <a:ext cx="7498080" cy="1097280"/>
+            <a:off x="777240" y="5833872"/>
+            <a:ext cx="2834640" cy="457200"/>
+          </a:xfrm>
+          <a:prstGeom prst="roundRect">
+            <a:avLst>
+              <a:gd name="adj" fmla="val 12000"/>
+            </a:avLst>
+          </a:prstGeom>
+          <a:solidFill>
+            <a:srgbClr val="FFFFFF"/>
+          </a:solidFill>
+          <a:ln w="19050">
+            <a:solidFill>
+              <a:srgbClr val="2B6CB0"/>
+            </a:solidFill>
+            <a:prstDash val="solid"/>
+          </a:ln>
+        </p:spPr>
+      </p:sp>
+      <p:sp>
+        <p:nvSpPr>
+          <p:cNvPr id="14" name="Text 12"/>
+          <p:cNvSpPr/>
+          <p:nvPr/>
+        </p:nvSpPr>
+        <p:spPr>
+          <a:xfrm>
+            <a:off x="914400" y="5833872"/>
+            <a:ext cx="2606040" cy="457200"/>
           </a:xfrm>
           <a:prstGeom prst="rect">
             <a:avLst/>
@@ -19246,30 +24581,1843 @@
               <a:buNone/>
             </a:pPr>
             <a:r>
-              <a:rPr lang="en-US" sz="1200" dirty="0">
+              <a:rPr lang="en-US" sz="1100" b="1" dirty="0">
                 <a:solidFill>
-                  <a:srgbClr val="1F2937"/>
+                  <a:srgbClr val="2B6CB0"/>
                 </a:solidFill>
                 <a:latin typeface="Microsoft JhengHei" pitchFamily="34" charset="0"/>
                 <a:ea typeface="Microsoft JhengHei" pitchFamily="34" charset="-122"/>
                 <a:cs typeface="Microsoft JhengHei" pitchFamily="34" charset="-120"/>
               </a:rPr>
-              <a:t>把 REPLACE_WITH_LOCAL_PATH 改成本機 clone 的 max-mcp-server 路徑；金鑰走環境變數。之後對 Kiro 說「查 BTC 現價」它直接打 MAX API</a:t>
+              <a:t>⑤ 決策軌跡（摺疊）</a:t>
             </a:r>
-            <a:endParaRPr lang="en-US" sz="1200" dirty="0"/>
+            <a:endParaRPr lang="en-US" sz="1100" dirty="0"/>
           </a:p>
         </p:txBody>
       </p:sp>
+      <p:graphicFrame>
+        <p:nvGraphicFramePr>
+          <p:cNvPr id="10" name="Table 0"/>
+          <p:cNvGraphicFramePr>
+            <a:graphicFrameLocks noGrp="1"/>
+          </p:cNvGraphicFramePr>
+          <p:nvPr>
+            <p:extLst>
+              <p:ext uri="{D42A27DB-BD31-4B8C-83A1-F6EECF244321}">
+                <p14:modId xmlns:p14="http://schemas.microsoft.com/office/powerpoint/2010/main" val="1579011935"/>
+              </p:ext>
+            </p:extLst>
+          </p:nvPr>
+        </p:nvGraphicFramePr>
+        <p:xfrm>
+          <a:off x="4114800" y="1554480"/>
+          <a:ext cx="7525512" cy="914400"/>
+        </p:xfrm>
+        <a:graphic>
+          <a:graphicData uri="http://schemas.openxmlformats.org/drawingml/2006/table">
+            <a:tbl>
+              <a:tblPr/>
+              <a:tblGrid>
+                <a:gridCol w="1828800"/>
+                <a:gridCol w="3776472"/>
+                <a:gridCol w="1920240"/>
+              </a:tblGrid>
+              <a:tr h="512064">
+                <a:tc>
+                  <a:txBody>
+                    <a:bodyPr/>
+                    <a:lstStyle/>
+                    <a:p>
+                      <a:pPr indent="0" marL="0">
+                        <a:buNone/>
+                      </a:pPr>
+                      <a:r>
+                        <a:rPr lang="en-US" sz="1100" b="1" dirty="0">
+                          <a:solidFill>
+                            <a:srgbClr val="FFFFFF"/>
+                          </a:solidFill>
+                          <a:latin typeface="Microsoft JhengHei" pitchFamily="34" charset="0"/>
+                          <a:ea typeface="Microsoft JhengHei" pitchFamily="34" charset="-122"/>
+                          <a:cs typeface="Microsoft JhengHei" pitchFamily="34" charset="-120"/>
+                        </a:rPr>
+                        <a:t>畫面區塊</a:t>
+                      </a:r>
+                      <a:endParaRPr lang="en-US" sz="1100" dirty="0">
+                        <a:latin typeface="Microsoft JhengHei" charset="0"/>
+                        <a:ea typeface="Microsoft JhengHei" charset="0"/>
+                        <a:cs typeface="Microsoft JhengHei" charset="0"/>
+                      </a:endParaRPr>
+                    </a:p>
+                  </a:txBody>
+                  <a:tcPr marL="54864" marR="54864" marT="54864" marB="54864" anchor="ctr">
+                    <a:lnL w="9525" cap="flat" cmpd="sng" algn="ctr">
+                      <a:solidFill>
+                        <a:srgbClr val="D5DEF0"/>
+                      </a:solidFill>
+                      <a:prstDash val="solid"/>
+                      <a:round/>
+                      <a:headEnd type="none" w="med" len="med"/>
+                      <a:tailEnd type="none" w="med" len="med"/>
+                    </a:lnL>
+                    <a:lnR w="9525" cap="flat" cmpd="sng" algn="ctr">
+                      <a:solidFill>
+                        <a:srgbClr val="D5DEF0"/>
+                      </a:solidFill>
+                      <a:prstDash val="solid"/>
+                      <a:round/>
+                      <a:headEnd type="none" w="med" len="med"/>
+                      <a:tailEnd type="none" w="med" len="med"/>
+                    </a:lnR>
+                    <a:lnT w="9525" cap="flat" cmpd="sng" algn="ctr">
+                      <a:solidFill>
+                        <a:srgbClr val="D5DEF0"/>
+                      </a:solidFill>
+                      <a:prstDash val="solid"/>
+                      <a:round/>
+                      <a:headEnd type="none" w="med" len="med"/>
+                      <a:tailEnd type="none" w="med" len="med"/>
+                    </a:lnT>
+                    <a:lnB w="9525" cap="flat" cmpd="sng" algn="ctr">
+                      <a:solidFill>
+                        <a:srgbClr val="D5DEF0"/>
+                      </a:solidFill>
+                      <a:prstDash val="solid"/>
+                      <a:round/>
+                      <a:headEnd type="none" w="med" len="med"/>
+                      <a:tailEnd type="none" w="med" len="med"/>
+                    </a:lnB>
+                    <a:solidFill>
+                      <a:srgbClr val="16224D"/>
+                    </a:solidFill>
+                  </a:tcPr>
+                </a:tc>
+                <a:tc>
+                  <a:txBody>
+                    <a:bodyPr/>
+                    <a:lstStyle/>
+                    <a:p>
+                      <a:pPr indent="0" marL="0">
+                        <a:buNone/>
+                      </a:pPr>
+                      <a:r>
+                        <a:rPr lang="en-US" sz="1100" b="1" dirty="0">
+                          <a:solidFill>
+                            <a:srgbClr val="FFFFFF"/>
+                          </a:solidFill>
+                          <a:latin typeface="Microsoft JhengHei" pitchFamily="34" charset="0"/>
+                          <a:ea typeface="Microsoft JhengHei" pitchFamily="34" charset="-122"/>
+                          <a:cs typeface="Microsoft JhengHei" pitchFamily="34" charset="-120"/>
+                        </a:rPr>
+                        <a:t>背後功能（工作包）</a:t>
+                      </a:r>
+                      <a:endParaRPr lang="en-US" sz="1100" dirty="0">
+                        <a:latin typeface="Microsoft JhengHei" charset="0"/>
+                        <a:ea typeface="Microsoft JhengHei" charset="0"/>
+                        <a:cs typeface="Microsoft JhengHei" charset="0"/>
+                      </a:endParaRPr>
+                    </a:p>
+                  </a:txBody>
+                  <a:tcPr marL="54864" marR="54864" marT="54864" marB="54864" anchor="ctr">
+                    <a:lnL w="9525" cap="flat" cmpd="sng" algn="ctr">
+                      <a:solidFill>
+                        <a:srgbClr val="D5DEF0"/>
+                      </a:solidFill>
+                      <a:prstDash val="solid"/>
+                      <a:round/>
+                      <a:headEnd type="none" w="med" len="med"/>
+                      <a:tailEnd type="none" w="med" len="med"/>
+                    </a:lnL>
+                    <a:lnR w="9525" cap="flat" cmpd="sng" algn="ctr">
+                      <a:solidFill>
+                        <a:srgbClr val="D5DEF0"/>
+                      </a:solidFill>
+                      <a:prstDash val="solid"/>
+                      <a:round/>
+                      <a:headEnd type="none" w="med" len="med"/>
+                      <a:tailEnd type="none" w="med" len="med"/>
+                    </a:lnR>
+                    <a:lnT w="9525" cap="flat" cmpd="sng" algn="ctr">
+                      <a:solidFill>
+                        <a:srgbClr val="D5DEF0"/>
+                      </a:solidFill>
+                      <a:prstDash val="solid"/>
+                      <a:round/>
+                      <a:headEnd type="none" w="med" len="med"/>
+                      <a:tailEnd type="none" w="med" len="med"/>
+                    </a:lnT>
+                    <a:lnB w="9525" cap="flat" cmpd="sng" algn="ctr">
+                      <a:solidFill>
+                        <a:srgbClr val="D5DEF0"/>
+                      </a:solidFill>
+                      <a:prstDash val="solid"/>
+                      <a:round/>
+                      <a:headEnd type="none" w="med" len="med"/>
+                      <a:tailEnd type="none" w="med" len="med"/>
+                    </a:lnB>
+                    <a:solidFill>
+                      <a:srgbClr val="16224D"/>
+                    </a:solidFill>
+                  </a:tcPr>
+                </a:tc>
+                <a:tc>
+                  <a:txBody>
+                    <a:bodyPr/>
+                    <a:lstStyle/>
+                    <a:p>
+                      <a:pPr indent="0" marL="0">
+                        <a:buNone/>
+                      </a:pPr>
+                      <a:r>
+                        <a:rPr lang="en-US" sz="1100" b="1" dirty="0">
+                          <a:solidFill>
+                            <a:srgbClr val="FFFFFF"/>
+                          </a:solidFill>
+                          <a:latin typeface="Microsoft JhengHei" pitchFamily="34" charset="0"/>
+                          <a:ea typeface="Microsoft JhengHei" pitchFamily="34" charset="-122"/>
+                          <a:cs typeface="Microsoft JhengHei" pitchFamily="34" charset="-120"/>
+                        </a:rPr>
+                        <a:t>扛的分數</a:t>
+                      </a:r>
+                      <a:endParaRPr lang="en-US" sz="1100" dirty="0">
+                        <a:latin typeface="Microsoft JhengHei" charset="0"/>
+                        <a:ea typeface="Microsoft JhengHei" charset="0"/>
+                        <a:cs typeface="Microsoft JhengHei" charset="0"/>
+                      </a:endParaRPr>
+                    </a:p>
+                  </a:txBody>
+                  <a:tcPr marL="54864" marR="54864" marT="54864" marB="54864" anchor="ctr">
+                    <a:lnL w="9525" cap="flat" cmpd="sng" algn="ctr">
+                      <a:solidFill>
+                        <a:srgbClr val="D5DEF0"/>
+                      </a:solidFill>
+                      <a:prstDash val="solid"/>
+                      <a:round/>
+                      <a:headEnd type="none" w="med" len="med"/>
+                      <a:tailEnd type="none" w="med" len="med"/>
+                    </a:lnL>
+                    <a:lnR w="9525" cap="flat" cmpd="sng" algn="ctr">
+                      <a:solidFill>
+                        <a:srgbClr val="D5DEF0"/>
+                      </a:solidFill>
+                      <a:prstDash val="solid"/>
+                      <a:round/>
+                      <a:headEnd type="none" w="med" len="med"/>
+                      <a:tailEnd type="none" w="med" len="med"/>
+                    </a:lnR>
+                    <a:lnT w="9525" cap="flat" cmpd="sng" algn="ctr">
+                      <a:solidFill>
+                        <a:srgbClr val="D5DEF0"/>
+                      </a:solidFill>
+                      <a:prstDash val="solid"/>
+                      <a:round/>
+                      <a:headEnd type="none" w="med" len="med"/>
+                      <a:tailEnd type="none" w="med" len="med"/>
+                    </a:lnT>
+                    <a:lnB w="9525" cap="flat" cmpd="sng" algn="ctr">
+                      <a:solidFill>
+                        <a:srgbClr val="D5DEF0"/>
+                      </a:solidFill>
+                      <a:prstDash val="solid"/>
+                      <a:round/>
+                      <a:headEnd type="none" w="med" len="med"/>
+                      <a:tailEnd type="none" w="med" len="med"/>
+                    </a:lnB>
+                    <a:solidFill>
+                      <a:srgbClr val="16224D"/>
+                    </a:solidFill>
+                  </a:tcPr>
+                </a:tc>
+              </a:tr>
+              <a:tr h="512064">
+                <a:tc>
+                  <a:txBody>
+                    <a:bodyPr/>
+                    <a:lstStyle/>
+                    <a:p>
+                      <a:pPr indent="0" marL="0">
+                        <a:buNone/>
+                      </a:pPr>
+                      <a:r>
+                        <a:rPr lang="en-US" sz="1100" b="1" dirty="0">
+                          <a:solidFill>
+                            <a:srgbClr val="1F2937"/>
+                          </a:solidFill>
+                          <a:latin typeface="Microsoft JhengHei" pitchFamily="34" charset="0"/>
+                          <a:ea typeface="Microsoft JhengHei" pitchFamily="34" charset="-122"/>
+                          <a:cs typeface="Microsoft JhengHei" pitchFamily="34" charset="-120"/>
+                        </a:rPr>
+                        <a:t>① 模式徽章</a:t>
+                      </a:r>
+                      <a:endParaRPr lang="en-US" sz="1100" dirty="0">
+                        <a:latin typeface="Microsoft JhengHei" charset="0"/>
+                        <a:ea typeface="Microsoft JhengHei" charset="0"/>
+                        <a:cs typeface="Microsoft JhengHei" charset="0"/>
+                      </a:endParaRPr>
+                    </a:p>
+                  </a:txBody>
+                  <a:tcPr marL="54864" marR="54864" marT="54864" marB="54864" anchor="ctr">
+                    <a:lnL w="9525" cap="flat" cmpd="sng" algn="ctr">
+                      <a:solidFill>
+                        <a:srgbClr val="D5DEF0"/>
+                      </a:solidFill>
+                      <a:prstDash val="solid"/>
+                      <a:round/>
+                      <a:headEnd type="none" w="med" len="med"/>
+                      <a:tailEnd type="none" w="med" len="med"/>
+                    </a:lnL>
+                    <a:lnR w="9525" cap="flat" cmpd="sng" algn="ctr">
+                      <a:solidFill>
+                        <a:srgbClr val="D5DEF0"/>
+                      </a:solidFill>
+                      <a:prstDash val="solid"/>
+                      <a:round/>
+                      <a:headEnd type="none" w="med" len="med"/>
+                      <a:tailEnd type="none" w="med" len="med"/>
+                    </a:lnR>
+                    <a:lnT w="9525" cap="flat" cmpd="sng" algn="ctr">
+                      <a:solidFill>
+                        <a:srgbClr val="D5DEF0"/>
+                      </a:solidFill>
+                      <a:prstDash val="solid"/>
+                      <a:round/>
+                      <a:headEnd type="none" w="med" len="med"/>
+                      <a:tailEnd type="none" w="med" len="med"/>
+                    </a:lnT>
+                    <a:lnB w="9525" cap="flat" cmpd="sng" algn="ctr">
+                      <a:solidFill>
+                        <a:srgbClr val="D5DEF0"/>
+                      </a:solidFill>
+                      <a:prstDash val="solid"/>
+                      <a:round/>
+                      <a:headEnd type="none" w="med" len="med"/>
+                      <a:tailEnd type="none" w="med" len="med"/>
+                    </a:lnB>
+                  </a:tcPr>
+                </a:tc>
+                <a:tc>
+                  <a:txBody>
+                    <a:bodyPr/>
+                    <a:lstStyle/>
+                    <a:p>
+                      <a:pPr indent="0" marL="0">
+                        <a:buNone/>
+                      </a:pPr>
+                      <a:r>
+                        <a:rPr lang="en-US" sz="1100" dirty="0">
+                          <a:solidFill>
+                            <a:srgbClr val="1F2937"/>
+                          </a:solidFill>
+                          <a:latin typeface="Microsoft JhengHei" pitchFamily="34" charset="0"/>
+                          <a:ea typeface="Microsoft JhengHei" pitchFamily="34" charset="-122"/>
+                          <a:cs typeface="Microsoft JhengHei" pitchFamily="34" charset="-120"/>
+                        </a:rPr>
+                        <a:t>profile-engine（A）＋前端（C）</a:t>
+                      </a:r>
+                      <a:endParaRPr lang="en-US" sz="1100" dirty="0">
+                        <a:latin typeface="Microsoft JhengHei" charset="0"/>
+                        <a:ea typeface="Microsoft JhengHei" charset="0"/>
+                        <a:cs typeface="Microsoft JhengHei" charset="0"/>
+                      </a:endParaRPr>
+                    </a:p>
+                  </a:txBody>
+                  <a:tcPr marL="54864" marR="54864" marT="54864" marB="54864" anchor="ctr">
+                    <a:lnL w="9525" cap="flat" cmpd="sng" algn="ctr">
+                      <a:solidFill>
+                        <a:srgbClr val="D5DEF0"/>
+                      </a:solidFill>
+                      <a:prstDash val="solid"/>
+                      <a:round/>
+                      <a:headEnd type="none" w="med" len="med"/>
+                      <a:tailEnd type="none" w="med" len="med"/>
+                    </a:lnL>
+                    <a:lnR w="9525" cap="flat" cmpd="sng" algn="ctr">
+                      <a:solidFill>
+                        <a:srgbClr val="D5DEF0"/>
+                      </a:solidFill>
+                      <a:prstDash val="solid"/>
+                      <a:round/>
+                      <a:headEnd type="none" w="med" len="med"/>
+                      <a:tailEnd type="none" w="med" len="med"/>
+                    </a:lnR>
+                    <a:lnT w="9525" cap="flat" cmpd="sng" algn="ctr">
+                      <a:solidFill>
+                        <a:srgbClr val="D5DEF0"/>
+                      </a:solidFill>
+                      <a:prstDash val="solid"/>
+                      <a:round/>
+                      <a:headEnd type="none" w="med" len="med"/>
+                      <a:tailEnd type="none" w="med" len="med"/>
+                    </a:lnT>
+                    <a:lnB w="9525" cap="flat" cmpd="sng" algn="ctr">
+                      <a:solidFill>
+                        <a:srgbClr val="D5DEF0"/>
+                      </a:solidFill>
+                      <a:prstDash val="solid"/>
+                      <a:round/>
+                      <a:headEnd type="none" w="med" len="med"/>
+                      <a:tailEnd type="none" w="med" len="med"/>
+                    </a:lnB>
+                  </a:tcPr>
+                </a:tc>
+                <a:tc>
+                  <a:txBody>
+                    <a:bodyPr/>
+                    <a:lstStyle/>
+                    <a:p>
+                      <a:pPr indent="0" marL="0">
+                        <a:buNone/>
+                      </a:pPr>
+                      <a:r>
+                        <a:rPr lang="en-US" sz="1100" b="1" dirty="0">
+                          <a:solidFill>
+                            <a:srgbClr val="E8A13A"/>
+                          </a:solidFill>
+                          <a:latin typeface="Microsoft JhengHei" pitchFamily="34" charset="0"/>
+                          <a:ea typeface="Microsoft JhengHei" pitchFamily="34" charset="-122"/>
+                          <a:cs typeface="Microsoft JhengHei" pitchFamily="34" charset="-120"/>
+                        </a:rPr>
+                        <a:t>創意/商業</a:t>
+                      </a:r>
+                      <a:endParaRPr lang="en-US" sz="1100" dirty="0">
+                        <a:latin typeface="Microsoft JhengHei" charset="0"/>
+                        <a:ea typeface="Microsoft JhengHei" charset="0"/>
+                        <a:cs typeface="Microsoft JhengHei" charset="0"/>
+                      </a:endParaRPr>
+                    </a:p>
+                  </a:txBody>
+                  <a:tcPr marL="54864" marR="54864" marT="54864" marB="54864" anchor="ctr">
+                    <a:lnL w="9525" cap="flat" cmpd="sng" algn="ctr">
+                      <a:solidFill>
+                        <a:srgbClr val="D5DEF0"/>
+                      </a:solidFill>
+                      <a:prstDash val="solid"/>
+                      <a:round/>
+                      <a:headEnd type="none" w="med" len="med"/>
+                      <a:tailEnd type="none" w="med" len="med"/>
+                    </a:lnL>
+                    <a:lnR w="9525" cap="flat" cmpd="sng" algn="ctr">
+                      <a:solidFill>
+                        <a:srgbClr val="D5DEF0"/>
+                      </a:solidFill>
+                      <a:prstDash val="solid"/>
+                      <a:round/>
+                      <a:headEnd type="none" w="med" len="med"/>
+                      <a:tailEnd type="none" w="med" len="med"/>
+                    </a:lnR>
+                    <a:lnT w="9525" cap="flat" cmpd="sng" algn="ctr">
+                      <a:solidFill>
+                        <a:srgbClr val="D5DEF0"/>
+                      </a:solidFill>
+                      <a:prstDash val="solid"/>
+                      <a:round/>
+                      <a:headEnd type="none" w="med" len="med"/>
+                      <a:tailEnd type="none" w="med" len="med"/>
+                    </a:lnT>
+                    <a:lnB w="9525" cap="flat" cmpd="sng" algn="ctr">
+                      <a:solidFill>
+                        <a:srgbClr val="D5DEF0"/>
+                      </a:solidFill>
+                      <a:prstDash val="solid"/>
+                      <a:round/>
+                      <a:headEnd type="none" w="med" len="med"/>
+                      <a:tailEnd type="none" w="med" len="med"/>
+                    </a:lnB>
+                  </a:tcPr>
+                </a:tc>
+              </a:tr>
+              <a:tr h="512064">
+                <a:tc>
+                  <a:txBody>
+                    <a:bodyPr/>
+                    <a:lstStyle/>
+                    <a:p>
+                      <a:pPr indent="0" marL="0">
+                        <a:buNone/>
+                      </a:pPr>
+                      <a:r>
+                        <a:rPr lang="en-US" sz="1100" b="1" dirty="0">
+                          <a:solidFill>
+                            <a:srgbClr val="1F2937"/>
+                          </a:solidFill>
+                          <a:latin typeface="Microsoft JhengHei" pitchFamily="34" charset="0"/>
+                          <a:ea typeface="Microsoft JhengHei" pitchFamily="34" charset="-122"/>
+                          <a:cs typeface="Microsoft JhengHei" pitchFamily="34" charset="-120"/>
+                        </a:rPr>
+                        <a:t>② 健檢卡</a:t>
+                      </a:r>
+                      <a:endParaRPr lang="en-US" sz="1100" dirty="0">
+                        <a:latin typeface="Microsoft JhengHei" charset="0"/>
+                        <a:ea typeface="Microsoft JhengHei" charset="0"/>
+                        <a:cs typeface="Microsoft JhengHei" charset="0"/>
+                      </a:endParaRPr>
+                    </a:p>
+                  </a:txBody>
+                  <a:tcPr marL="54864" marR="54864" marT="54864" marB="54864" anchor="ctr">
+                    <a:lnL w="9525" cap="flat" cmpd="sng" algn="ctr">
+                      <a:solidFill>
+                        <a:srgbClr val="D5DEF0"/>
+                      </a:solidFill>
+                      <a:prstDash val="solid"/>
+                      <a:round/>
+                      <a:headEnd type="none" w="med" len="med"/>
+                      <a:tailEnd type="none" w="med" len="med"/>
+                    </a:lnL>
+                    <a:lnR w="9525" cap="flat" cmpd="sng" algn="ctr">
+                      <a:solidFill>
+                        <a:srgbClr val="D5DEF0"/>
+                      </a:solidFill>
+                      <a:prstDash val="solid"/>
+                      <a:round/>
+                      <a:headEnd type="none" w="med" len="med"/>
+                      <a:tailEnd type="none" w="med" len="med"/>
+                    </a:lnR>
+                    <a:lnT w="9525" cap="flat" cmpd="sng" algn="ctr">
+                      <a:solidFill>
+                        <a:srgbClr val="D5DEF0"/>
+                      </a:solidFill>
+                      <a:prstDash val="solid"/>
+                      <a:round/>
+                      <a:headEnd type="none" w="med" len="med"/>
+                      <a:tailEnd type="none" w="med" len="med"/>
+                    </a:lnT>
+                    <a:lnB w="9525" cap="flat" cmpd="sng" algn="ctr">
+                      <a:solidFill>
+                        <a:srgbClr val="D5DEF0"/>
+                      </a:solidFill>
+                      <a:prstDash val="solid"/>
+                      <a:round/>
+                      <a:headEnd type="none" w="med" len="med"/>
+                      <a:tailEnd type="none" w="med" len="med"/>
+                    </a:lnB>
+                  </a:tcPr>
+                </a:tc>
+                <a:tc>
+                  <a:txBody>
+                    <a:bodyPr/>
+                    <a:lstStyle/>
+                    <a:p>
+                      <a:pPr indent="0" marL="0">
+                        <a:buNone/>
+                      </a:pPr>
+                      <a:r>
+                        <a:rPr lang="en-US" sz="1100" dirty="0">
+                          <a:solidFill>
+                            <a:srgbClr val="1F2937"/>
+                          </a:solidFill>
+                          <a:latin typeface="Microsoft JhengHei" pitchFamily="34" charset="0"/>
+                          <a:ea typeface="Microsoft JhengHei" pitchFamily="34" charset="-122"/>
+                          <a:cs typeface="Microsoft JhengHei" pitchFamily="34" charset="-120"/>
+                        </a:rPr>
+                        <a:t>行為分析（✅）＋前端（C）</a:t>
+                      </a:r>
+                      <a:endParaRPr lang="en-US" sz="1100" dirty="0">
+                        <a:latin typeface="Microsoft JhengHei" charset="0"/>
+                        <a:ea typeface="Microsoft JhengHei" charset="0"/>
+                        <a:cs typeface="Microsoft JhengHei" charset="0"/>
+                      </a:endParaRPr>
+                    </a:p>
+                  </a:txBody>
+                  <a:tcPr marL="54864" marR="54864" marT="54864" marB="54864" anchor="ctr">
+                    <a:lnL w="9525" cap="flat" cmpd="sng" algn="ctr">
+                      <a:solidFill>
+                        <a:srgbClr val="D5DEF0"/>
+                      </a:solidFill>
+                      <a:prstDash val="solid"/>
+                      <a:round/>
+                      <a:headEnd type="none" w="med" len="med"/>
+                      <a:tailEnd type="none" w="med" len="med"/>
+                    </a:lnL>
+                    <a:lnR w="9525" cap="flat" cmpd="sng" algn="ctr">
+                      <a:solidFill>
+                        <a:srgbClr val="D5DEF0"/>
+                      </a:solidFill>
+                      <a:prstDash val="solid"/>
+                      <a:round/>
+                      <a:headEnd type="none" w="med" len="med"/>
+                      <a:tailEnd type="none" w="med" len="med"/>
+                    </a:lnR>
+                    <a:lnT w="9525" cap="flat" cmpd="sng" algn="ctr">
+                      <a:solidFill>
+                        <a:srgbClr val="D5DEF0"/>
+                      </a:solidFill>
+                      <a:prstDash val="solid"/>
+                      <a:round/>
+                      <a:headEnd type="none" w="med" len="med"/>
+                      <a:tailEnd type="none" w="med" len="med"/>
+                    </a:lnT>
+                    <a:lnB w="9525" cap="flat" cmpd="sng" algn="ctr">
+                      <a:solidFill>
+                        <a:srgbClr val="D5DEF0"/>
+                      </a:solidFill>
+                      <a:prstDash val="solid"/>
+                      <a:round/>
+                      <a:headEnd type="none" w="med" len="med"/>
+                      <a:tailEnd type="none" w="med" len="med"/>
+                    </a:lnB>
+                  </a:tcPr>
+                </a:tc>
+                <a:tc>
+                  <a:txBody>
+                    <a:bodyPr/>
+                    <a:lstStyle/>
+                    <a:p>
+                      <a:pPr indent="0" marL="0">
+                        <a:buNone/>
+                      </a:pPr>
+                      <a:r>
+                        <a:rPr lang="en-US" sz="1100" b="1" dirty="0">
+                          <a:solidFill>
+                            <a:srgbClr val="E8A13A"/>
+                          </a:solidFill>
+                          <a:latin typeface="Microsoft JhengHei" pitchFamily="34" charset="0"/>
+                          <a:ea typeface="Microsoft JhengHei" pitchFamily="34" charset="-122"/>
+                          <a:cs typeface="Microsoft JhengHei" pitchFamily="34" charset="-120"/>
+                        </a:rPr>
+                        <a:t>創意/商業</a:t>
+                      </a:r>
+                      <a:endParaRPr lang="en-US" sz="1100" dirty="0">
+                        <a:latin typeface="Microsoft JhengHei" charset="0"/>
+                        <a:ea typeface="Microsoft JhengHei" charset="0"/>
+                        <a:cs typeface="Microsoft JhengHei" charset="0"/>
+                      </a:endParaRPr>
+                    </a:p>
+                  </a:txBody>
+                  <a:tcPr marL="54864" marR="54864" marT="54864" marB="54864" anchor="ctr">
+                    <a:lnL w="9525" cap="flat" cmpd="sng" algn="ctr">
+                      <a:solidFill>
+                        <a:srgbClr val="D5DEF0"/>
+                      </a:solidFill>
+                      <a:prstDash val="solid"/>
+                      <a:round/>
+                      <a:headEnd type="none" w="med" len="med"/>
+                      <a:tailEnd type="none" w="med" len="med"/>
+                    </a:lnL>
+                    <a:lnR w="9525" cap="flat" cmpd="sng" algn="ctr">
+                      <a:solidFill>
+                        <a:srgbClr val="D5DEF0"/>
+                      </a:solidFill>
+                      <a:prstDash val="solid"/>
+                      <a:round/>
+                      <a:headEnd type="none" w="med" len="med"/>
+                      <a:tailEnd type="none" w="med" len="med"/>
+                    </a:lnR>
+                    <a:lnT w="9525" cap="flat" cmpd="sng" algn="ctr">
+                      <a:solidFill>
+                        <a:srgbClr val="D5DEF0"/>
+                      </a:solidFill>
+                      <a:prstDash val="solid"/>
+                      <a:round/>
+                      <a:headEnd type="none" w="med" len="med"/>
+                      <a:tailEnd type="none" w="med" len="med"/>
+                    </a:lnT>
+                    <a:lnB w="9525" cap="flat" cmpd="sng" algn="ctr">
+                      <a:solidFill>
+                        <a:srgbClr val="D5DEF0"/>
+                      </a:solidFill>
+                      <a:prstDash val="solid"/>
+                      <a:round/>
+                      <a:headEnd type="none" w="med" len="med"/>
+                      <a:tailEnd type="none" w="med" len="med"/>
+                    </a:lnB>
+                  </a:tcPr>
+                </a:tc>
+              </a:tr>
+              <a:tr h="512064">
+                <a:tc>
+                  <a:txBody>
+                    <a:bodyPr/>
+                    <a:lstStyle/>
+                    <a:p>
+                      <a:pPr indent="0" marL="0">
+                        <a:buNone/>
+                      </a:pPr>
+                      <a:r>
+                        <a:rPr lang="en-US" sz="1100" b="1" dirty="0">
+                          <a:solidFill>
+                            <a:srgbClr val="1F2937"/>
+                          </a:solidFill>
+                          <a:latin typeface="Microsoft JhengHei" pitchFamily="34" charset="0"/>
+                          <a:ea typeface="Microsoft JhengHei" pitchFamily="34" charset="-122"/>
+                          <a:cs typeface="Microsoft JhengHei" pitchFamily="34" charset="-120"/>
+                        </a:rPr>
+                        <a:t>③ 對話回應</a:t>
+                      </a:r>
+                      <a:endParaRPr lang="en-US" sz="1100" dirty="0">
+                        <a:latin typeface="Microsoft JhengHei" charset="0"/>
+                        <a:ea typeface="Microsoft JhengHei" charset="0"/>
+                        <a:cs typeface="Microsoft JhengHei" charset="0"/>
+                      </a:endParaRPr>
+                    </a:p>
+                  </a:txBody>
+                  <a:tcPr marL="54864" marR="54864" marT="54864" marB="54864" anchor="ctr">
+                    <a:lnL w="9525" cap="flat" cmpd="sng" algn="ctr">
+                      <a:solidFill>
+                        <a:srgbClr val="D5DEF0"/>
+                      </a:solidFill>
+                      <a:prstDash val="solid"/>
+                      <a:round/>
+                      <a:headEnd type="none" w="med" len="med"/>
+                      <a:tailEnd type="none" w="med" len="med"/>
+                    </a:lnL>
+                    <a:lnR w="9525" cap="flat" cmpd="sng" algn="ctr">
+                      <a:solidFill>
+                        <a:srgbClr val="D5DEF0"/>
+                      </a:solidFill>
+                      <a:prstDash val="solid"/>
+                      <a:round/>
+                      <a:headEnd type="none" w="med" len="med"/>
+                      <a:tailEnd type="none" w="med" len="med"/>
+                    </a:lnR>
+                    <a:lnT w="9525" cap="flat" cmpd="sng" algn="ctr">
+                      <a:solidFill>
+                        <a:srgbClr val="D5DEF0"/>
+                      </a:solidFill>
+                      <a:prstDash val="solid"/>
+                      <a:round/>
+                      <a:headEnd type="none" w="med" len="med"/>
+                      <a:tailEnd type="none" w="med" len="med"/>
+                    </a:lnT>
+                    <a:lnB w="9525" cap="flat" cmpd="sng" algn="ctr">
+                      <a:solidFill>
+                        <a:srgbClr val="D5DEF0"/>
+                      </a:solidFill>
+                      <a:prstDash val="solid"/>
+                      <a:round/>
+                      <a:headEnd type="none" w="med" len="med"/>
+                      <a:tailEnd type="none" w="med" len="med"/>
+                    </a:lnB>
+                  </a:tcPr>
+                </a:tc>
+                <a:tc>
+                  <a:txBody>
+                    <a:bodyPr/>
+                    <a:lstStyle/>
+                    <a:p>
+                      <a:pPr indent="0" marL="0">
+                        <a:buNone/>
+                      </a:pPr>
+                      <a:r>
+                        <a:rPr lang="en-US" sz="1100" dirty="0">
+                          <a:solidFill>
+                            <a:srgbClr val="1F2937"/>
+                          </a:solidFill>
+                          <a:latin typeface="Microsoft JhengHei" pitchFamily="34" charset="0"/>
+                          <a:ea typeface="Microsoft JhengHei" pitchFamily="34" charset="-122"/>
+                          <a:cs typeface="Microsoft JhengHei" pitchFamily="34" charset="-120"/>
+                        </a:rPr>
+                        <a:t>Agent 迴圈＋模型路由（A）</a:t>
+                      </a:r>
+                      <a:endParaRPr lang="en-US" sz="1100" dirty="0">
+                        <a:latin typeface="Microsoft JhengHei" charset="0"/>
+                        <a:ea typeface="Microsoft JhengHei" charset="0"/>
+                        <a:cs typeface="Microsoft JhengHei" charset="0"/>
+                      </a:endParaRPr>
+                    </a:p>
+                  </a:txBody>
+                  <a:tcPr marL="54864" marR="54864" marT="54864" marB="54864" anchor="ctr">
+                    <a:lnL w="9525" cap="flat" cmpd="sng" algn="ctr">
+                      <a:solidFill>
+                        <a:srgbClr val="D5DEF0"/>
+                      </a:solidFill>
+                      <a:prstDash val="solid"/>
+                      <a:round/>
+                      <a:headEnd type="none" w="med" len="med"/>
+                      <a:tailEnd type="none" w="med" len="med"/>
+                    </a:lnL>
+                    <a:lnR w="9525" cap="flat" cmpd="sng" algn="ctr">
+                      <a:solidFill>
+                        <a:srgbClr val="D5DEF0"/>
+                      </a:solidFill>
+                      <a:prstDash val="solid"/>
+                      <a:round/>
+                      <a:headEnd type="none" w="med" len="med"/>
+                      <a:tailEnd type="none" w="med" len="med"/>
+                    </a:lnR>
+                    <a:lnT w="9525" cap="flat" cmpd="sng" algn="ctr">
+                      <a:solidFill>
+                        <a:srgbClr val="D5DEF0"/>
+                      </a:solidFill>
+                      <a:prstDash val="solid"/>
+                      <a:round/>
+                      <a:headEnd type="none" w="med" len="med"/>
+                      <a:tailEnd type="none" w="med" len="med"/>
+                    </a:lnT>
+                    <a:lnB w="9525" cap="flat" cmpd="sng" algn="ctr">
+                      <a:solidFill>
+                        <a:srgbClr val="D5DEF0"/>
+                      </a:solidFill>
+                      <a:prstDash val="solid"/>
+                      <a:round/>
+                      <a:headEnd type="none" w="med" len="med"/>
+                      <a:tailEnd type="none" w="med" len="med"/>
+                    </a:lnB>
+                  </a:tcPr>
+                </a:tc>
+                <a:tc>
+                  <a:txBody>
+                    <a:bodyPr/>
+                    <a:lstStyle/>
+                    <a:p>
+                      <a:pPr indent="0" marL="0">
+                        <a:buNone/>
+                      </a:pPr>
+                      <a:r>
+                        <a:rPr lang="en-US" sz="1100" b="1" dirty="0">
+                          <a:solidFill>
+                            <a:srgbClr val="E8A13A"/>
+                          </a:solidFill>
+                          <a:latin typeface="Microsoft JhengHei" pitchFamily="34" charset="0"/>
+                          <a:ea typeface="Microsoft JhengHei" pitchFamily="34" charset="-122"/>
+                          <a:cs typeface="Microsoft JhengHei" pitchFamily="34" charset="-120"/>
+                        </a:rPr>
+                        <a:t>AI設計</a:t>
+                      </a:r>
+                      <a:endParaRPr lang="en-US" sz="1100" dirty="0">
+                        <a:latin typeface="Microsoft JhengHei" charset="0"/>
+                        <a:ea typeface="Microsoft JhengHei" charset="0"/>
+                        <a:cs typeface="Microsoft JhengHei" charset="0"/>
+                      </a:endParaRPr>
+                    </a:p>
+                  </a:txBody>
+                  <a:tcPr marL="54864" marR="54864" marT="54864" marB="54864" anchor="ctr">
+                    <a:lnL w="9525" cap="flat" cmpd="sng" algn="ctr">
+                      <a:solidFill>
+                        <a:srgbClr val="D5DEF0"/>
+                      </a:solidFill>
+                      <a:prstDash val="solid"/>
+                      <a:round/>
+                      <a:headEnd type="none" w="med" len="med"/>
+                      <a:tailEnd type="none" w="med" len="med"/>
+                    </a:lnL>
+                    <a:lnR w="9525" cap="flat" cmpd="sng" algn="ctr">
+                      <a:solidFill>
+                        <a:srgbClr val="D5DEF0"/>
+                      </a:solidFill>
+                      <a:prstDash val="solid"/>
+                      <a:round/>
+                      <a:headEnd type="none" w="med" len="med"/>
+                      <a:tailEnd type="none" w="med" len="med"/>
+                    </a:lnR>
+                    <a:lnT w="9525" cap="flat" cmpd="sng" algn="ctr">
+                      <a:solidFill>
+                        <a:srgbClr val="D5DEF0"/>
+                      </a:solidFill>
+                      <a:prstDash val="solid"/>
+                      <a:round/>
+                      <a:headEnd type="none" w="med" len="med"/>
+                      <a:tailEnd type="none" w="med" len="med"/>
+                    </a:lnT>
+                    <a:lnB w="9525" cap="flat" cmpd="sng" algn="ctr">
+                      <a:solidFill>
+                        <a:srgbClr val="D5DEF0"/>
+                      </a:solidFill>
+                      <a:prstDash val="solid"/>
+                      <a:round/>
+                      <a:headEnd type="none" w="med" len="med"/>
+                      <a:tailEnd type="none" w="med" len="med"/>
+                    </a:lnB>
+                  </a:tcPr>
+                </a:tc>
+              </a:tr>
+              <a:tr h="512064">
+                <a:tc>
+                  <a:txBody>
+                    <a:bodyPr/>
+                    <a:lstStyle/>
+                    <a:p>
+                      <a:pPr indent="0" marL="0">
+                        <a:buNone/>
+                      </a:pPr>
+                      <a:r>
+                        <a:rPr lang="en-US" sz="1100" b="1" dirty="0">
+                          <a:solidFill>
+                            <a:srgbClr val="1F2937"/>
+                          </a:solidFill>
+                          <a:latin typeface="Microsoft JhengHei" pitchFamily="34" charset="0"/>
+                          <a:ea typeface="Microsoft JhengHei" pitchFamily="34" charset="-122"/>
+                          <a:cs typeface="Microsoft JhengHei" pitchFamily="34" charset="-120"/>
+                        </a:rPr>
+                        <a:t>④ 三方案卡</a:t>
+                      </a:r>
+                      <a:endParaRPr lang="en-US" sz="1100" dirty="0">
+                        <a:latin typeface="Microsoft JhengHei" charset="0"/>
+                        <a:ea typeface="Microsoft JhengHei" charset="0"/>
+                        <a:cs typeface="Microsoft JhengHei" charset="0"/>
+                      </a:endParaRPr>
+                    </a:p>
+                  </a:txBody>
+                  <a:tcPr marL="54864" marR="54864" marT="54864" marB="54864" anchor="ctr">
+                    <a:lnL w="9525" cap="flat" cmpd="sng" algn="ctr">
+                      <a:solidFill>
+                        <a:srgbClr val="D5DEF0"/>
+                      </a:solidFill>
+                      <a:prstDash val="solid"/>
+                      <a:round/>
+                      <a:headEnd type="none" w="med" len="med"/>
+                      <a:tailEnd type="none" w="med" len="med"/>
+                    </a:lnL>
+                    <a:lnR w="9525" cap="flat" cmpd="sng" algn="ctr">
+                      <a:solidFill>
+                        <a:srgbClr val="D5DEF0"/>
+                      </a:solidFill>
+                      <a:prstDash val="solid"/>
+                      <a:round/>
+                      <a:headEnd type="none" w="med" len="med"/>
+                      <a:tailEnd type="none" w="med" len="med"/>
+                    </a:lnR>
+                    <a:lnT w="9525" cap="flat" cmpd="sng" algn="ctr">
+                      <a:solidFill>
+                        <a:srgbClr val="D5DEF0"/>
+                      </a:solidFill>
+                      <a:prstDash val="solid"/>
+                      <a:round/>
+                      <a:headEnd type="none" w="med" len="med"/>
+                      <a:tailEnd type="none" w="med" len="med"/>
+                    </a:lnT>
+                    <a:lnB w="9525" cap="flat" cmpd="sng" algn="ctr">
+                      <a:solidFill>
+                        <a:srgbClr val="D5DEF0"/>
+                      </a:solidFill>
+                      <a:prstDash val="solid"/>
+                      <a:round/>
+                      <a:headEnd type="none" w="med" len="med"/>
+                      <a:tailEnd type="none" w="med" len="med"/>
+                    </a:lnB>
+                  </a:tcPr>
+                </a:tc>
+                <a:tc>
+                  <a:txBody>
+                    <a:bodyPr/>
+                    <a:lstStyle/>
+                    <a:p>
+                      <a:pPr indent="0" marL="0">
+                        <a:buNone/>
+                      </a:pPr>
+                      <a:r>
+                        <a:rPr lang="en-US" sz="1100" dirty="0">
+                          <a:solidFill>
+                            <a:srgbClr val="1F2937"/>
+                          </a:solidFill>
+                          <a:latin typeface="Microsoft JhengHei" pitchFamily="34" charset="0"/>
+                          <a:ea typeface="Microsoft JhengHei" pitchFamily="34" charset="-122"/>
+                          <a:cs typeface="Microsoft JhengHei" pitchFamily="34" charset="-120"/>
+                        </a:rPr>
+                        <a:t>trade-scenarios（A）＋前端（C）</a:t>
+                      </a:r>
+                      <a:endParaRPr lang="en-US" sz="1100" dirty="0">
+                        <a:latin typeface="Microsoft JhengHei" charset="0"/>
+                        <a:ea typeface="Microsoft JhengHei" charset="0"/>
+                        <a:cs typeface="Microsoft JhengHei" charset="0"/>
+                      </a:endParaRPr>
+                    </a:p>
+                  </a:txBody>
+                  <a:tcPr marL="54864" marR="54864" marT="54864" marB="54864" anchor="ctr">
+                    <a:lnL w="9525" cap="flat" cmpd="sng" algn="ctr">
+                      <a:solidFill>
+                        <a:srgbClr val="D5DEF0"/>
+                      </a:solidFill>
+                      <a:prstDash val="solid"/>
+                      <a:round/>
+                      <a:headEnd type="none" w="med" len="med"/>
+                      <a:tailEnd type="none" w="med" len="med"/>
+                    </a:lnL>
+                    <a:lnR w="9525" cap="flat" cmpd="sng" algn="ctr">
+                      <a:solidFill>
+                        <a:srgbClr val="D5DEF0"/>
+                      </a:solidFill>
+                      <a:prstDash val="solid"/>
+                      <a:round/>
+                      <a:headEnd type="none" w="med" len="med"/>
+                      <a:tailEnd type="none" w="med" len="med"/>
+                    </a:lnR>
+                    <a:lnT w="9525" cap="flat" cmpd="sng" algn="ctr">
+                      <a:solidFill>
+                        <a:srgbClr val="D5DEF0"/>
+                      </a:solidFill>
+                      <a:prstDash val="solid"/>
+                      <a:round/>
+                      <a:headEnd type="none" w="med" len="med"/>
+                      <a:tailEnd type="none" w="med" len="med"/>
+                    </a:lnT>
+                    <a:lnB w="9525" cap="flat" cmpd="sng" algn="ctr">
+                      <a:solidFill>
+                        <a:srgbClr val="D5DEF0"/>
+                      </a:solidFill>
+                      <a:prstDash val="solid"/>
+                      <a:round/>
+                      <a:headEnd type="none" w="med" len="med"/>
+                      <a:tailEnd type="none" w="med" len="med"/>
+                    </a:lnB>
+                  </a:tcPr>
+                </a:tc>
+                <a:tc>
+                  <a:txBody>
+                    <a:bodyPr/>
+                    <a:lstStyle/>
+                    <a:p>
+                      <a:pPr indent="0" marL="0">
+                        <a:buNone/>
+                      </a:pPr>
+                      <a:r>
+                        <a:rPr lang="en-US" sz="1100" b="1" dirty="0">
+                          <a:solidFill>
+                            <a:srgbClr val="E8A13A"/>
+                          </a:solidFill>
+                          <a:latin typeface="Microsoft JhengHei" pitchFamily="34" charset="0"/>
+                          <a:ea typeface="Microsoft JhengHei" pitchFamily="34" charset="-122"/>
+                          <a:cs typeface="Microsoft JhengHei" pitchFamily="34" charset="-120"/>
+                        </a:rPr>
+                        <a:t>創意/AI設計</a:t>
+                      </a:r>
+                      <a:endParaRPr lang="en-US" sz="1100" dirty="0">
+                        <a:latin typeface="Microsoft JhengHei" charset="0"/>
+                        <a:ea typeface="Microsoft JhengHei" charset="0"/>
+                        <a:cs typeface="Microsoft JhengHei" charset="0"/>
+                      </a:endParaRPr>
+                    </a:p>
+                  </a:txBody>
+                  <a:tcPr marL="54864" marR="54864" marT="54864" marB="54864" anchor="ctr">
+                    <a:lnL w="9525" cap="flat" cmpd="sng" algn="ctr">
+                      <a:solidFill>
+                        <a:srgbClr val="D5DEF0"/>
+                      </a:solidFill>
+                      <a:prstDash val="solid"/>
+                      <a:round/>
+                      <a:headEnd type="none" w="med" len="med"/>
+                      <a:tailEnd type="none" w="med" len="med"/>
+                    </a:lnL>
+                    <a:lnR w="9525" cap="flat" cmpd="sng" algn="ctr">
+                      <a:solidFill>
+                        <a:srgbClr val="D5DEF0"/>
+                      </a:solidFill>
+                      <a:prstDash val="solid"/>
+                      <a:round/>
+                      <a:headEnd type="none" w="med" len="med"/>
+                      <a:tailEnd type="none" w="med" len="med"/>
+                    </a:lnR>
+                    <a:lnT w="9525" cap="flat" cmpd="sng" algn="ctr">
+                      <a:solidFill>
+                        <a:srgbClr val="D5DEF0"/>
+                      </a:solidFill>
+                      <a:prstDash val="solid"/>
+                      <a:round/>
+                      <a:headEnd type="none" w="med" len="med"/>
+                      <a:tailEnd type="none" w="med" len="med"/>
+                    </a:lnT>
+                    <a:lnB w="9525" cap="flat" cmpd="sng" algn="ctr">
+                      <a:solidFill>
+                        <a:srgbClr val="D5DEF0"/>
+                      </a:solidFill>
+                      <a:prstDash val="solid"/>
+                      <a:round/>
+                      <a:headEnd type="none" w="med" len="med"/>
+                      <a:tailEnd type="none" w="med" len="med"/>
+                    </a:lnB>
+                  </a:tcPr>
+                </a:tc>
+              </a:tr>
+              <a:tr h="512064">
+                <a:tc>
+                  <a:txBody>
+                    <a:bodyPr/>
+                    <a:lstStyle/>
+                    <a:p>
+                      <a:pPr indent="0" marL="0">
+                        <a:buNone/>
+                      </a:pPr>
+                      <a:r>
+                        <a:rPr lang="en-US" sz="1100" b="1" dirty="0">
+                          <a:solidFill>
+                            <a:srgbClr val="1F2937"/>
+                          </a:solidFill>
+                          <a:latin typeface="Microsoft JhengHei" pitchFamily="34" charset="0"/>
+                          <a:ea typeface="Microsoft JhengHei" pitchFamily="34" charset="-122"/>
+                          <a:cs typeface="Microsoft JhengHei" pitchFamily="34" charset="-120"/>
+                        </a:rPr>
+                        <a:t>④ 確認卡→成交</a:t>
+                      </a:r>
+                      <a:endParaRPr lang="en-US" sz="1100" dirty="0">
+                        <a:latin typeface="Microsoft JhengHei" charset="0"/>
+                        <a:ea typeface="Microsoft JhengHei" charset="0"/>
+                        <a:cs typeface="Microsoft JhengHei" charset="0"/>
+                      </a:endParaRPr>
+                    </a:p>
+                  </a:txBody>
+                  <a:tcPr marL="54864" marR="54864" marT="54864" marB="54864" anchor="ctr">
+                    <a:lnL w="9525" cap="flat" cmpd="sng" algn="ctr">
+                      <a:solidFill>
+                        <a:srgbClr val="D5DEF0"/>
+                      </a:solidFill>
+                      <a:prstDash val="solid"/>
+                      <a:round/>
+                      <a:headEnd type="none" w="med" len="med"/>
+                      <a:tailEnd type="none" w="med" len="med"/>
+                    </a:lnL>
+                    <a:lnR w="9525" cap="flat" cmpd="sng" algn="ctr">
+                      <a:solidFill>
+                        <a:srgbClr val="D5DEF0"/>
+                      </a:solidFill>
+                      <a:prstDash val="solid"/>
+                      <a:round/>
+                      <a:headEnd type="none" w="med" len="med"/>
+                      <a:tailEnd type="none" w="med" len="med"/>
+                    </a:lnR>
+                    <a:lnT w="9525" cap="flat" cmpd="sng" algn="ctr">
+                      <a:solidFill>
+                        <a:srgbClr val="D5DEF0"/>
+                      </a:solidFill>
+                      <a:prstDash val="solid"/>
+                      <a:round/>
+                      <a:headEnd type="none" w="med" len="med"/>
+                      <a:tailEnd type="none" w="med" len="med"/>
+                    </a:lnT>
+                    <a:lnB w="9525" cap="flat" cmpd="sng" algn="ctr">
+                      <a:solidFill>
+                        <a:srgbClr val="D5DEF0"/>
+                      </a:solidFill>
+                      <a:prstDash val="solid"/>
+                      <a:round/>
+                      <a:headEnd type="none" w="med" len="med"/>
+                      <a:tailEnd type="none" w="med" len="med"/>
+                    </a:lnB>
+                  </a:tcPr>
+                </a:tc>
+                <a:tc>
+                  <a:txBody>
+                    <a:bodyPr/>
+                    <a:lstStyle/>
+                    <a:p>
+                      <a:pPr indent="0" marL="0">
+                        <a:buNone/>
+                      </a:pPr>
+                      <a:r>
+                        <a:rPr lang="en-US" sz="1100" dirty="0">
+                          <a:solidFill>
+                            <a:srgbClr val="1F2937"/>
+                          </a:solidFill>
+                          <a:latin typeface="Microsoft JhengHei" pitchFamily="34" charset="0"/>
+                          <a:ea typeface="Microsoft JhengHei" pitchFamily="34" charset="-122"/>
+                          <a:cs typeface="Microsoft JhengHei" pitchFamily="34" charset="-120"/>
+                        </a:rPr>
+                        <a:t>order 流＋Private API（D）</a:t>
+                      </a:r>
+                      <a:endParaRPr lang="en-US" sz="1100" dirty="0">
+                        <a:latin typeface="Microsoft JhengHei" charset="0"/>
+                        <a:ea typeface="Microsoft JhengHei" charset="0"/>
+                        <a:cs typeface="Microsoft JhengHei" charset="0"/>
+                      </a:endParaRPr>
+                    </a:p>
+                  </a:txBody>
+                  <a:tcPr marL="54864" marR="54864" marT="54864" marB="54864" anchor="ctr">
+                    <a:lnL w="9525" cap="flat" cmpd="sng" algn="ctr">
+                      <a:solidFill>
+                        <a:srgbClr val="D5DEF0"/>
+                      </a:solidFill>
+                      <a:prstDash val="solid"/>
+                      <a:round/>
+                      <a:headEnd type="none" w="med" len="med"/>
+                      <a:tailEnd type="none" w="med" len="med"/>
+                    </a:lnL>
+                    <a:lnR w="9525" cap="flat" cmpd="sng" algn="ctr">
+                      <a:solidFill>
+                        <a:srgbClr val="D5DEF0"/>
+                      </a:solidFill>
+                      <a:prstDash val="solid"/>
+                      <a:round/>
+                      <a:headEnd type="none" w="med" len="med"/>
+                      <a:tailEnd type="none" w="med" len="med"/>
+                    </a:lnR>
+                    <a:lnT w="9525" cap="flat" cmpd="sng" algn="ctr">
+                      <a:solidFill>
+                        <a:srgbClr val="D5DEF0"/>
+                      </a:solidFill>
+                      <a:prstDash val="solid"/>
+                      <a:round/>
+                      <a:headEnd type="none" w="med" len="med"/>
+                      <a:tailEnd type="none" w="med" len="med"/>
+                    </a:lnT>
+                    <a:lnB w="9525" cap="flat" cmpd="sng" algn="ctr">
+                      <a:solidFill>
+                        <a:srgbClr val="D5DEF0"/>
+                      </a:solidFill>
+                      <a:prstDash val="solid"/>
+                      <a:round/>
+                      <a:headEnd type="none" w="med" len="med"/>
+                      <a:tailEnd type="none" w="med" len="med"/>
+                    </a:lnB>
+                  </a:tcPr>
+                </a:tc>
+                <a:tc>
+                  <a:txBody>
+                    <a:bodyPr/>
+                    <a:lstStyle/>
+                    <a:p>
+                      <a:pPr indent="0" marL="0">
+                        <a:buNone/>
+                      </a:pPr>
+                      <a:r>
+                        <a:rPr lang="en-US" sz="1100" b="1" dirty="0">
+                          <a:solidFill>
+                            <a:srgbClr val="E8A13A"/>
+                          </a:solidFill>
+                          <a:latin typeface="Microsoft JhengHei" pitchFamily="34" charset="0"/>
+                          <a:ea typeface="Microsoft JhengHei" pitchFamily="34" charset="-122"/>
+                          <a:cs typeface="Microsoft JhengHei" pitchFamily="34" charset="-120"/>
+                        </a:rPr>
+                        <a:t>加分+5/商業</a:t>
+                      </a:r>
+                      <a:endParaRPr lang="en-US" sz="1100" dirty="0">
+                        <a:latin typeface="Microsoft JhengHei" charset="0"/>
+                        <a:ea typeface="Microsoft JhengHei" charset="0"/>
+                        <a:cs typeface="Microsoft JhengHei" charset="0"/>
+                      </a:endParaRPr>
+                    </a:p>
+                  </a:txBody>
+                  <a:tcPr marL="54864" marR="54864" marT="54864" marB="54864" anchor="ctr">
+                    <a:lnL w="9525" cap="flat" cmpd="sng" algn="ctr">
+                      <a:solidFill>
+                        <a:srgbClr val="D5DEF0"/>
+                      </a:solidFill>
+                      <a:prstDash val="solid"/>
+                      <a:round/>
+                      <a:headEnd type="none" w="med" len="med"/>
+                      <a:tailEnd type="none" w="med" len="med"/>
+                    </a:lnL>
+                    <a:lnR w="9525" cap="flat" cmpd="sng" algn="ctr">
+                      <a:solidFill>
+                        <a:srgbClr val="D5DEF0"/>
+                      </a:solidFill>
+                      <a:prstDash val="solid"/>
+                      <a:round/>
+                      <a:headEnd type="none" w="med" len="med"/>
+                      <a:tailEnd type="none" w="med" len="med"/>
+                    </a:lnR>
+                    <a:lnT w="9525" cap="flat" cmpd="sng" algn="ctr">
+                      <a:solidFill>
+                        <a:srgbClr val="D5DEF0"/>
+                      </a:solidFill>
+                      <a:prstDash val="solid"/>
+                      <a:round/>
+                      <a:headEnd type="none" w="med" len="med"/>
+                      <a:tailEnd type="none" w="med" len="med"/>
+                    </a:lnT>
+                    <a:lnB w="9525" cap="flat" cmpd="sng" algn="ctr">
+                      <a:solidFill>
+                        <a:srgbClr val="D5DEF0"/>
+                      </a:solidFill>
+                      <a:prstDash val="solid"/>
+                      <a:round/>
+                      <a:headEnd type="none" w="med" len="med"/>
+                      <a:tailEnd type="none" w="med" len="med"/>
+                    </a:lnB>
+                  </a:tcPr>
+                </a:tc>
+              </a:tr>
+              <a:tr h="512064">
+                <a:tc>
+                  <a:txBody>
+                    <a:bodyPr/>
+                    <a:lstStyle/>
+                    <a:p>
+                      <a:pPr indent="0" marL="0">
+                        <a:buNone/>
+                      </a:pPr>
+                      <a:r>
+                        <a:rPr lang="en-US" sz="1100" b="1" dirty="0">
+                          <a:solidFill>
+                            <a:srgbClr val="1F2937"/>
+                          </a:solidFill>
+                          <a:latin typeface="Microsoft JhengHei" pitchFamily="34" charset="0"/>
+                          <a:ea typeface="Microsoft JhengHei" pitchFamily="34" charset="-122"/>
+                          <a:cs typeface="Microsoft JhengHei" pitchFamily="34" charset="-120"/>
+                        </a:rPr>
+                        <a:t>⑤ 軌跡面板</a:t>
+                      </a:r>
+                      <a:endParaRPr lang="en-US" sz="1100" dirty="0">
+                        <a:latin typeface="Microsoft JhengHei" charset="0"/>
+                        <a:ea typeface="Microsoft JhengHei" charset="0"/>
+                        <a:cs typeface="Microsoft JhengHei" charset="0"/>
+                      </a:endParaRPr>
+                    </a:p>
+                  </a:txBody>
+                  <a:tcPr marL="54864" marR="54864" marT="54864" marB="54864" anchor="ctr">
+                    <a:lnL w="9525" cap="flat" cmpd="sng" algn="ctr">
+                      <a:solidFill>
+                        <a:srgbClr val="D5DEF0"/>
+                      </a:solidFill>
+                      <a:prstDash val="solid"/>
+                      <a:round/>
+                      <a:headEnd type="none" w="med" len="med"/>
+                      <a:tailEnd type="none" w="med" len="med"/>
+                    </a:lnL>
+                    <a:lnR w="9525" cap="flat" cmpd="sng" algn="ctr">
+                      <a:solidFill>
+                        <a:srgbClr val="D5DEF0"/>
+                      </a:solidFill>
+                      <a:prstDash val="solid"/>
+                      <a:round/>
+                      <a:headEnd type="none" w="med" len="med"/>
+                      <a:tailEnd type="none" w="med" len="med"/>
+                    </a:lnR>
+                    <a:lnT w="9525" cap="flat" cmpd="sng" algn="ctr">
+                      <a:solidFill>
+                        <a:srgbClr val="D5DEF0"/>
+                      </a:solidFill>
+                      <a:prstDash val="solid"/>
+                      <a:round/>
+                      <a:headEnd type="none" w="med" len="med"/>
+                      <a:tailEnd type="none" w="med" len="med"/>
+                    </a:lnT>
+                    <a:lnB w="9525" cap="flat" cmpd="sng" algn="ctr">
+                      <a:solidFill>
+                        <a:srgbClr val="D5DEF0"/>
+                      </a:solidFill>
+                      <a:prstDash val="solid"/>
+                      <a:round/>
+                      <a:headEnd type="none" w="med" len="med"/>
+                      <a:tailEnd type="none" w="med" len="med"/>
+                    </a:lnB>
+                  </a:tcPr>
+                </a:tc>
+                <a:tc>
+                  <a:txBody>
+                    <a:bodyPr/>
+                    <a:lstStyle/>
+                    <a:p>
+                      <a:pPr indent="0" marL="0">
+                        <a:buNone/>
+                      </a:pPr>
+                      <a:r>
+                        <a:rPr lang="en-US" sz="1100" dirty="0">
+                          <a:solidFill>
+                            <a:srgbClr val="1F2937"/>
+                          </a:solidFill>
+                          <a:latin typeface="Microsoft JhengHei" pitchFamily="34" charset="0"/>
+                          <a:ea typeface="Microsoft JhengHei" pitchFamily="34" charset="-122"/>
+                          <a:cs typeface="Microsoft JhengHei" pitchFamily="34" charset="-120"/>
+                        </a:rPr>
+                        <a:t>audit-log（B）＋前端（C）</a:t>
+                      </a:r>
+                      <a:endParaRPr lang="en-US" sz="1100" dirty="0">
+                        <a:latin typeface="Microsoft JhengHei" charset="0"/>
+                        <a:ea typeface="Microsoft JhengHei" charset="0"/>
+                        <a:cs typeface="Microsoft JhengHei" charset="0"/>
+                      </a:endParaRPr>
+                    </a:p>
+                  </a:txBody>
+                  <a:tcPr marL="54864" marR="54864" marT="54864" marB="54864" anchor="ctr">
+                    <a:lnL w="9525" cap="flat" cmpd="sng" algn="ctr">
+                      <a:solidFill>
+                        <a:srgbClr val="D5DEF0"/>
+                      </a:solidFill>
+                      <a:prstDash val="solid"/>
+                      <a:round/>
+                      <a:headEnd type="none" w="med" len="med"/>
+                      <a:tailEnd type="none" w="med" len="med"/>
+                    </a:lnL>
+                    <a:lnR w="9525" cap="flat" cmpd="sng" algn="ctr">
+                      <a:solidFill>
+                        <a:srgbClr val="D5DEF0"/>
+                      </a:solidFill>
+                      <a:prstDash val="solid"/>
+                      <a:round/>
+                      <a:headEnd type="none" w="med" len="med"/>
+                      <a:tailEnd type="none" w="med" len="med"/>
+                    </a:lnR>
+                    <a:lnT w="9525" cap="flat" cmpd="sng" algn="ctr">
+                      <a:solidFill>
+                        <a:srgbClr val="D5DEF0"/>
+                      </a:solidFill>
+                      <a:prstDash val="solid"/>
+                      <a:round/>
+                      <a:headEnd type="none" w="med" len="med"/>
+                      <a:tailEnd type="none" w="med" len="med"/>
+                    </a:lnT>
+                    <a:lnB w="9525" cap="flat" cmpd="sng" algn="ctr">
+                      <a:solidFill>
+                        <a:srgbClr val="D5DEF0"/>
+                      </a:solidFill>
+                      <a:prstDash val="solid"/>
+                      <a:round/>
+                      <a:headEnd type="none" w="med" len="med"/>
+                      <a:tailEnd type="none" w="med" len="med"/>
+                    </a:lnB>
+                  </a:tcPr>
+                </a:tc>
+                <a:tc>
+                  <a:txBody>
+                    <a:bodyPr/>
+                    <a:lstStyle/>
+                    <a:p>
+                      <a:pPr indent="0" marL="0">
+                        <a:buNone/>
+                      </a:pPr>
+                      <a:r>
+                        <a:rPr lang="en-US" sz="1100" b="1" dirty="0">
+                          <a:solidFill>
+                            <a:srgbClr val="E8A13A"/>
+                          </a:solidFill>
+                          <a:latin typeface="Microsoft JhengHei" pitchFamily="34" charset="0"/>
+                          <a:ea typeface="Microsoft JhengHei" pitchFamily="34" charset="-122"/>
+                          <a:cs typeface="Microsoft JhengHei" pitchFamily="34" charset="-120"/>
+                        </a:rPr>
+                        <a:t>AI設計/法遵</a:t>
+                      </a:r>
+                      <a:endParaRPr lang="en-US" sz="1100" dirty="0">
+                        <a:latin typeface="Microsoft JhengHei" charset="0"/>
+                        <a:ea typeface="Microsoft JhengHei" charset="0"/>
+                        <a:cs typeface="Microsoft JhengHei" charset="0"/>
+                      </a:endParaRPr>
+                    </a:p>
+                  </a:txBody>
+                  <a:tcPr marL="54864" marR="54864" marT="54864" marB="54864" anchor="ctr">
+                    <a:lnL w="9525" cap="flat" cmpd="sng" algn="ctr">
+                      <a:solidFill>
+                        <a:srgbClr val="D5DEF0"/>
+                      </a:solidFill>
+                      <a:prstDash val="solid"/>
+                      <a:round/>
+                      <a:headEnd type="none" w="med" len="med"/>
+                      <a:tailEnd type="none" w="med" len="med"/>
+                    </a:lnL>
+                    <a:lnR w="9525" cap="flat" cmpd="sng" algn="ctr">
+                      <a:solidFill>
+                        <a:srgbClr val="D5DEF0"/>
+                      </a:solidFill>
+                      <a:prstDash val="solid"/>
+                      <a:round/>
+                      <a:headEnd type="none" w="med" len="med"/>
+                      <a:tailEnd type="none" w="med" len="med"/>
+                    </a:lnR>
+                    <a:lnT w="9525" cap="flat" cmpd="sng" algn="ctr">
+                      <a:solidFill>
+                        <a:srgbClr val="D5DEF0"/>
+                      </a:solidFill>
+                      <a:prstDash val="solid"/>
+                      <a:round/>
+                      <a:headEnd type="none" w="med" len="med"/>
+                      <a:tailEnd type="none" w="med" len="med"/>
+                    </a:lnT>
+                    <a:lnB w="9525" cap="flat" cmpd="sng" algn="ctr">
+                      <a:solidFill>
+                        <a:srgbClr val="D5DEF0"/>
+                      </a:solidFill>
+                      <a:prstDash val="solid"/>
+                      <a:round/>
+                      <a:headEnd type="none" w="med" len="med"/>
+                      <a:tailEnd type="none" w="med" len="med"/>
+                    </a:lnB>
+                  </a:tcPr>
+                </a:tc>
+              </a:tr>
+              <a:tr h="512064">
+                <a:tc>
+                  <a:txBody>
+                    <a:bodyPr/>
+                    <a:lstStyle/>
+                    <a:p>
+                      <a:pPr indent="0" marL="0">
+                        <a:buNone/>
+                      </a:pPr>
+                      <a:r>
+                        <a:rPr lang="en-US" sz="1100" b="1" dirty="0">
+                          <a:solidFill>
+                            <a:srgbClr val="1F2937"/>
+                          </a:solidFill>
+                          <a:latin typeface="Microsoft JhengHei" pitchFamily="34" charset="0"/>
+                          <a:ea typeface="Microsoft JhengHei" pitchFamily="34" charset="-122"/>
+                          <a:cs typeface="Microsoft JhengHei" pitchFamily="34" charset="-120"/>
+                        </a:rPr>
+                        <a:t>（隱形）離線切換</a:t>
+                      </a:r>
+                      <a:endParaRPr lang="en-US" sz="1100" dirty="0">
+                        <a:latin typeface="Microsoft JhengHei" charset="0"/>
+                        <a:ea typeface="Microsoft JhengHei" charset="0"/>
+                        <a:cs typeface="Microsoft JhengHei" charset="0"/>
+                      </a:endParaRPr>
+                    </a:p>
+                  </a:txBody>
+                  <a:tcPr marL="54864" marR="54864" marT="54864" marB="54864" anchor="ctr">
+                    <a:lnL w="9525" cap="flat" cmpd="sng" algn="ctr">
+                      <a:solidFill>
+                        <a:srgbClr val="D5DEF0"/>
+                      </a:solidFill>
+                      <a:prstDash val="solid"/>
+                      <a:round/>
+                      <a:headEnd type="none" w="med" len="med"/>
+                      <a:tailEnd type="none" w="med" len="med"/>
+                    </a:lnL>
+                    <a:lnR w="9525" cap="flat" cmpd="sng" algn="ctr">
+                      <a:solidFill>
+                        <a:srgbClr val="D5DEF0"/>
+                      </a:solidFill>
+                      <a:prstDash val="solid"/>
+                      <a:round/>
+                      <a:headEnd type="none" w="med" len="med"/>
+                      <a:tailEnd type="none" w="med" len="med"/>
+                    </a:lnR>
+                    <a:lnT w="9525" cap="flat" cmpd="sng" algn="ctr">
+                      <a:solidFill>
+                        <a:srgbClr val="D5DEF0"/>
+                      </a:solidFill>
+                      <a:prstDash val="solid"/>
+                      <a:round/>
+                      <a:headEnd type="none" w="med" len="med"/>
+                      <a:tailEnd type="none" w="med" len="med"/>
+                    </a:lnT>
+                    <a:lnB w="9525" cap="flat" cmpd="sng" algn="ctr">
+                      <a:solidFill>
+                        <a:srgbClr val="D5DEF0"/>
+                      </a:solidFill>
+                      <a:prstDash val="solid"/>
+                      <a:round/>
+                      <a:headEnd type="none" w="med" len="med"/>
+                      <a:tailEnd type="none" w="med" len="med"/>
+                    </a:lnB>
+                  </a:tcPr>
+                </a:tc>
+                <a:tc>
+                  <a:txBody>
+                    <a:bodyPr/>
+                    <a:lstStyle/>
+                    <a:p>
+                      <a:pPr indent="0" marL="0">
+                        <a:buNone/>
+                      </a:pPr>
+                      <a:r>
+                        <a:rPr lang="en-US" sz="1100" dirty="0">
+                          <a:solidFill>
+                            <a:srgbClr val="1F2937"/>
+                          </a:solidFill>
+                          <a:latin typeface="Microsoft JhengHei" pitchFamily="34" charset="0"/>
+                          <a:ea typeface="Microsoft JhengHei" pitchFamily="34" charset="-122"/>
+                          <a:cs typeface="Microsoft JhengHei" pitchFamily="34" charset="-120"/>
+                        </a:rPr>
+                        <a:t>mock 備援（C 驗證）</a:t>
+                      </a:r>
+                      <a:endParaRPr lang="en-US" sz="1100" dirty="0">
+                        <a:latin typeface="Microsoft JhengHei" charset="0"/>
+                        <a:ea typeface="Microsoft JhengHei" charset="0"/>
+                        <a:cs typeface="Microsoft JhengHei" charset="0"/>
+                      </a:endParaRPr>
+                    </a:p>
+                  </a:txBody>
+                  <a:tcPr marL="54864" marR="54864" marT="54864" marB="54864" anchor="ctr">
+                    <a:lnL w="9525" cap="flat" cmpd="sng" algn="ctr">
+                      <a:solidFill>
+                        <a:srgbClr val="D5DEF0"/>
+                      </a:solidFill>
+                      <a:prstDash val="solid"/>
+                      <a:round/>
+                      <a:headEnd type="none" w="med" len="med"/>
+                      <a:tailEnd type="none" w="med" len="med"/>
+                    </a:lnL>
+                    <a:lnR w="9525" cap="flat" cmpd="sng" algn="ctr">
+                      <a:solidFill>
+                        <a:srgbClr val="D5DEF0"/>
+                      </a:solidFill>
+                      <a:prstDash val="solid"/>
+                      <a:round/>
+                      <a:headEnd type="none" w="med" len="med"/>
+                      <a:tailEnd type="none" w="med" len="med"/>
+                    </a:lnR>
+                    <a:lnT w="9525" cap="flat" cmpd="sng" algn="ctr">
+                      <a:solidFill>
+                        <a:srgbClr val="D5DEF0"/>
+                      </a:solidFill>
+                      <a:prstDash val="solid"/>
+                      <a:round/>
+                      <a:headEnd type="none" w="med" len="med"/>
+                      <a:tailEnd type="none" w="med" len="med"/>
+                    </a:lnT>
+                    <a:lnB w="9525" cap="flat" cmpd="sng" algn="ctr">
+                      <a:solidFill>
+                        <a:srgbClr val="D5DEF0"/>
+                      </a:solidFill>
+                      <a:prstDash val="solid"/>
+                      <a:round/>
+                      <a:headEnd type="none" w="med" len="med"/>
+                      <a:tailEnd type="none" w="med" len="med"/>
+                    </a:lnB>
+                  </a:tcPr>
+                </a:tc>
+                <a:tc>
+                  <a:txBody>
+                    <a:bodyPr/>
+                    <a:lstStyle/>
+                    <a:p>
+                      <a:pPr indent="0" marL="0">
+                        <a:buNone/>
+                      </a:pPr>
+                      <a:r>
+                        <a:rPr lang="en-US" sz="1100" b="1" dirty="0">
+                          <a:solidFill>
+                            <a:srgbClr val="E8A13A"/>
+                          </a:solidFill>
+                          <a:latin typeface="Microsoft JhengHei" pitchFamily="34" charset="0"/>
+                          <a:ea typeface="Microsoft JhengHei" pitchFamily="34" charset="-122"/>
+                          <a:cs typeface="Microsoft JhengHei" pitchFamily="34" charset="-120"/>
+                        </a:rPr>
+                        <a:t>完成度</a:t>
+                      </a:r>
+                      <a:endParaRPr lang="en-US" sz="1100" dirty="0">
+                        <a:latin typeface="Microsoft JhengHei" charset="0"/>
+                        <a:ea typeface="Microsoft JhengHei" charset="0"/>
+                        <a:cs typeface="Microsoft JhengHei" charset="0"/>
+                      </a:endParaRPr>
+                    </a:p>
+                  </a:txBody>
+                  <a:tcPr marL="54864" marR="54864" marT="54864" marB="54864" anchor="ctr">
+                    <a:lnL w="9525" cap="flat" cmpd="sng" algn="ctr">
+                      <a:solidFill>
+                        <a:srgbClr val="D5DEF0"/>
+                      </a:solidFill>
+                      <a:prstDash val="solid"/>
+                      <a:round/>
+                      <a:headEnd type="none" w="med" len="med"/>
+                      <a:tailEnd type="none" w="med" len="med"/>
+                    </a:lnL>
+                    <a:lnR w="9525" cap="flat" cmpd="sng" algn="ctr">
+                      <a:solidFill>
+                        <a:srgbClr val="D5DEF0"/>
+                      </a:solidFill>
+                      <a:prstDash val="solid"/>
+                      <a:round/>
+                      <a:headEnd type="none" w="med" len="med"/>
+                      <a:tailEnd type="none" w="med" len="med"/>
+                    </a:lnR>
+                    <a:lnT w="9525" cap="flat" cmpd="sng" algn="ctr">
+                      <a:solidFill>
+                        <a:srgbClr val="D5DEF0"/>
+                      </a:solidFill>
+                      <a:prstDash val="solid"/>
+                      <a:round/>
+                      <a:headEnd type="none" w="med" len="med"/>
+                      <a:tailEnd type="none" w="med" len="med"/>
+                    </a:lnT>
+                    <a:lnB w="9525" cap="flat" cmpd="sng" algn="ctr">
+                      <a:solidFill>
+                        <a:srgbClr val="D5DEF0"/>
+                      </a:solidFill>
+                      <a:prstDash val="solid"/>
+                      <a:round/>
+                      <a:headEnd type="none" w="med" len="med"/>
+                      <a:tailEnd type="none" w="med" len="med"/>
+                    </a:lnB>
+                  </a:tcPr>
+                </a:tc>
+              </a:tr>
+              <a:tr h="512064">
+                <a:tc>
+                  <a:txBody>
+                    <a:bodyPr/>
+                    <a:lstStyle/>
+                    <a:p>
+                      <a:pPr indent="0" marL="0">
+                        <a:buNone/>
+                      </a:pPr>
+                      <a:r>
+                        <a:rPr lang="en-US" sz="1100" b="1" dirty="0">
+                          <a:solidFill>
+                            <a:srgbClr val="1F2937"/>
+                          </a:solidFill>
+                          <a:latin typeface="Microsoft JhengHei" pitchFamily="34" charset="0"/>
+                          <a:ea typeface="Microsoft JhengHei" pitchFamily="34" charset="-122"/>
+                          <a:cs typeface="Microsoft JhengHei" pitchFamily="34" charset="-120"/>
+                        </a:rPr>
+                        <a:t>（隱形）RAG 問答</a:t>
+                      </a:r>
+                      <a:endParaRPr lang="en-US" sz="1100" dirty="0">
+                        <a:latin typeface="Microsoft JhengHei" charset="0"/>
+                        <a:ea typeface="Microsoft JhengHei" charset="0"/>
+                        <a:cs typeface="Microsoft JhengHei" charset="0"/>
+                      </a:endParaRPr>
+                    </a:p>
+                  </a:txBody>
+                  <a:tcPr marL="54864" marR="54864" marT="54864" marB="54864" anchor="ctr">
+                    <a:lnL w="9525" cap="flat" cmpd="sng" algn="ctr">
+                      <a:solidFill>
+                        <a:srgbClr val="D5DEF0"/>
+                      </a:solidFill>
+                      <a:prstDash val="solid"/>
+                      <a:round/>
+                      <a:headEnd type="none" w="med" len="med"/>
+                      <a:tailEnd type="none" w="med" len="med"/>
+                    </a:lnL>
+                    <a:lnR w="9525" cap="flat" cmpd="sng" algn="ctr">
+                      <a:solidFill>
+                        <a:srgbClr val="D5DEF0"/>
+                      </a:solidFill>
+                      <a:prstDash val="solid"/>
+                      <a:round/>
+                      <a:headEnd type="none" w="med" len="med"/>
+                      <a:tailEnd type="none" w="med" len="med"/>
+                    </a:lnR>
+                    <a:lnT w="9525" cap="flat" cmpd="sng" algn="ctr">
+                      <a:solidFill>
+                        <a:srgbClr val="D5DEF0"/>
+                      </a:solidFill>
+                      <a:prstDash val="solid"/>
+                      <a:round/>
+                      <a:headEnd type="none" w="med" len="med"/>
+                      <a:tailEnd type="none" w="med" len="med"/>
+                    </a:lnT>
+                    <a:lnB w="9525" cap="flat" cmpd="sng" algn="ctr">
+                      <a:solidFill>
+                        <a:srgbClr val="D5DEF0"/>
+                      </a:solidFill>
+                      <a:prstDash val="solid"/>
+                      <a:round/>
+                      <a:headEnd type="none" w="med" len="med"/>
+                      <a:tailEnd type="none" w="med" len="med"/>
+                    </a:lnB>
+                  </a:tcPr>
+                </a:tc>
+                <a:tc>
+                  <a:txBody>
+                    <a:bodyPr/>
+                    <a:lstStyle/>
+                    <a:p>
+                      <a:pPr indent="0" marL="0">
+                        <a:buNone/>
+                      </a:pPr>
+                      <a:r>
+                        <a:rPr lang="en-US" sz="1100" dirty="0">
+                          <a:solidFill>
+                            <a:srgbClr val="1F2937"/>
+                          </a:solidFill>
+                          <a:latin typeface="Microsoft JhengHei" pitchFamily="34" charset="0"/>
+                          <a:ea typeface="Microsoft JhengHei" pitchFamily="34" charset="-122"/>
+                          <a:cs typeface="Microsoft JhengHei" pitchFamily="34" charset="-120"/>
+                        </a:rPr>
+                        <a:t>Knowledge Base（B）</a:t>
+                      </a:r>
+                      <a:endParaRPr lang="en-US" sz="1100" dirty="0">
+                        <a:latin typeface="Microsoft JhengHei" charset="0"/>
+                        <a:ea typeface="Microsoft JhengHei" charset="0"/>
+                        <a:cs typeface="Microsoft JhengHei" charset="0"/>
+                      </a:endParaRPr>
+                    </a:p>
+                  </a:txBody>
+                  <a:tcPr marL="54864" marR="54864" marT="54864" marB="54864" anchor="ctr">
+                    <a:lnL w="9525" cap="flat" cmpd="sng" algn="ctr">
+                      <a:solidFill>
+                        <a:srgbClr val="D5DEF0"/>
+                      </a:solidFill>
+                      <a:prstDash val="solid"/>
+                      <a:round/>
+                      <a:headEnd type="none" w="med" len="med"/>
+                      <a:tailEnd type="none" w="med" len="med"/>
+                    </a:lnL>
+                    <a:lnR w="9525" cap="flat" cmpd="sng" algn="ctr">
+                      <a:solidFill>
+                        <a:srgbClr val="D5DEF0"/>
+                      </a:solidFill>
+                      <a:prstDash val="solid"/>
+                      <a:round/>
+                      <a:headEnd type="none" w="med" len="med"/>
+                      <a:tailEnd type="none" w="med" len="med"/>
+                    </a:lnR>
+                    <a:lnT w="9525" cap="flat" cmpd="sng" algn="ctr">
+                      <a:solidFill>
+                        <a:srgbClr val="D5DEF0"/>
+                      </a:solidFill>
+                      <a:prstDash val="solid"/>
+                      <a:round/>
+                      <a:headEnd type="none" w="med" len="med"/>
+                      <a:tailEnd type="none" w="med" len="med"/>
+                    </a:lnT>
+                    <a:lnB w="9525" cap="flat" cmpd="sng" algn="ctr">
+                      <a:solidFill>
+                        <a:srgbClr val="D5DEF0"/>
+                      </a:solidFill>
+                      <a:prstDash val="solid"/>
+                      <a:round/>
+                      <a:headEnd type="none" w="med" len="med"/>
+                      <a:tailEnd type="none" w="med" len="med"/>
+                    </a:lnB>
+                  </a:tcPr>
+                </a:tc>
+                <a:tc>
+                  <a:txBody>
+                    <a:bodyPr/>
+                    <a:lstStyle/>
+                    <a:p>
+                      <a:pPr indent="0" marL="0">
+                        <a:buNone/>
+                      </a:pPr>
+                      <a:r>
+                        <a:rPr lang="en-US" sz="1100" b="1" dirty="0">
+                          <a:solidFill>
+                            <a:srgbClr val="E8A13A"/>
+                          </a:solidFill>
+                          <a:latin typeface="Microsoft JhengHei" pitchFamily="34" charset="0"/>
+                          <a:ea typeface="Microsoft JhengHei" pitchFamily="34" charset="-122"/>
+                          <a:cs typeface="Microsoft JhengHei" pitchFamily="34" charset="-120"/>
+                        </a:rPr>
+                        <a:t>切合度</a:t>
+                      </a:r>
+                      <a:endParaRPr lang="en-US" sz="1100" dirty="0">
+                        <a:latin typeface="Microsoft JhengHei" charset="0"/>
+                        <a:ea typeface="Microsoft JhengHei" charset="0"/>
+                        <a:cs typeface="Microsoft JhengHei" charset="0"/>
+                      </a:endParaRPr>
+                    </a:p>
+                  </a:txBody>
+                  <a:tcPr marL="54864" marR="54864" marT="54864" marB="54864" anchor="ctr">
+                    <a:lnL w="9525" cap="flat" cmpd="sng" algn="ctr">
+                      <a:solidFill>
+                        <a:srgbClr val="D5DEF0"/>
+                      </a:solidFill>
+                      <a:prstDash val="solid"/>
+                      <a:round/>
+                      <a:headEnd type="none" w="med" len="med"/>
+                      <a:tailEnd type="none" w="med" len="med"/>
+                    </a:lnL>
+                    <a:lnR w="9525" cap="flat" cmpd="sng" algn="ctr">
+                      <a:solidFill>
+                        <a:srgbClr val="D5DEF0"/>
+                      </a:solidFill>
+                      <a:prstDash val="solid"/>
+                      <a:round/>
+                      <a:headEnd type="none" w="med" len="med"/>
+                      <a:tailEnd type="none" w="med" len="med"/>
+                    </a:lnR>
+                    <a:lnT w="9525" cap="flat" cmpd="sng" algn="ctr">
+                      <a:solidFill>
+                        <a:srgbClr val="D5DEF0"/>
+                      </a:solidFill>
+                      <a:prstDash val="solid"/>
+                      <a:round/>
+                      <a:headEnd type="none" w="med" len="med"/>
+                      <a:tailEnd type="none" w="med" len="med"/>
+                    </a:lnT>
+                    <a:lnB w="9525" cap="flat" cmpd="sng" algn="ctr">
+                      <a:solidFill>
+                        <a:srgbClr val="D5DEF0"/>
+                      </a:solidFill>
+                      <a:prstDash val="solid"/>
+                      <a:round/>
+                      <a:headEnd type="none" w="med" len="med"/>
+                      <a:tailEnd type="none" w="med" len="med"/>
+                    </a:lnB>
+                  </a:tcPr>
+                </a:tc>
+              </a:tr>
+            </a:tbl>
+          </a:graphicData>
+        </a:graphic>
+      </p:graphicFrame>
       <p:sp>
         <p:nvSpPr>
-          <p:cNvPr id="16" name="Text 14"/>
+          <p:cNvPr id="16" name="Text 13"/>
           <p:cNvSpPr/>
           <p:nvPr/>
         </p:nvSpPr>
         <p:spPr>
           <a:xfrm>
-            <a:off x="548640" y="5989320"/>
-            <a:ext cx="11091672" cy="411480"/>
+            <a:off x="548640" y="6355080"/>
+            <a:ext cx="11091672" cy="365760"/>
           </a:xfrm>
           <a:prstGeom prst="rect">
             <a:avLst/>
@@ -19285,7 +26433,7 @@
               <a:buNone/>
             </a:pPr>
             <a:r>
-              <a:rPr lang="en-US" sz="1300" b="1" dirty="0">
+              <a:rPr lang="en-US" sz="1250" b="1" dirty="0">
                 <a:solidFill>
                   <a:srgbClr val="16224D"/>
                 </a:solidFill>
@@ -19293,9 +26441,9 @@
                 <a:ea typeface="Microsoft JhengHei" pitchFamily="34" charset="-122"/>
                 <a:cs typeface="Microsoft JhengHei" pitchFamily="34" charset="-120"/>
               </a:rPr>
-              <a:t>Steering 寫得越清楚，Kiro 來回修正越少——這就是我們省 credit 的主要手段。</a:t>
+              <a:t>原則：畫面上沒有任何一塊是裝飾——每個區塊都對應一個功能與至少一個評分項。</a:t>
             </a:r>
-            <a:endParaRPr lang="en-US" sz="1300" dirty="0"/>
+            <a:endParaRPr lang="en-US" sz="1250" dirty="0"/>
           </a:p>
         </p:txBody>
       </p:sp>

--- a/docs/工作項目狀態.pptx
+++ b/docs/工作項目狀態.pptx
@@ -20,9 +20,11 @@
     <p:sldId id="268" r:id="rId14"/>
     <p:sldId id="269" r:id="rId15"/>
     <p:sldId id="270" r:id="rId16"/>
+    <p:sldId id="271" r:id="rId17"/>
+    <p:sldId id="272" r:id="rId18"/>
   </p:sldIdLst>
   <p:notesMasterIdLst>
-    <p:notesMasterId r:id="rId17"/>
+    <p:notesMasterId r:id="rId19"/>
   </p:notesMasterIdLst>
   <p:sldSz cx="12192000" cy="6858000"/>
   <p:notesSz cx="6858000" cy="12192000"/>
@@ -1068,6 +1070,182 @@
             <a:fld id="{F7021451-1387-4CA6-816F-3879F97B5CBC}" type="slidenum">
               <a:rPr lang="en-US"/>
               <a:t>15</a:t>
+            </a:fld>
+            <a:endParaRPr lang="en-US"/>
+          </a:p>
+        </p:txBody>
+      </p:sp>
+    </p:spTree>
+    <p:extLst>
+      <p:ext uri="{BB962C8B-B14F-4D97-AF65-F5344CB8AC3E}">
+        <p14:creationId xmlns:p14="http://schemas.microsoft.com/office/powerpoint/2010/main" val="1024086991"/>
+      </p:ext>
+    </p:extLst>
+  </p:cSld>
+  <p:clrMapOvr>
+    <a:masterClrMapping/>
+  </p:clrMapOvr>
+</p:notes>
+</file>
+
+<file path=ppt/notesSlides/notesSlide16.xml><?xml version="1.0" encoding="utf-8"?>
+<p:notes xmlns:a="http://schemas.openxmlformats.org/drawingml/2006/main" xmlns:r="http://schemas.openxmlformats.org/officeDocument/2006/relationships" xmlns:p="http://schemas.openxmlformats.org/presentationml/2006/main">
+  <p:cSld>
+    <p:spTree>
+      <p:nvGrpSpPr>
+        <p:cNvPr id="1" name=""/>
+        <p:cNvGrpSpPr/>
+        <p:nvPr/>
+      </p:nvGrpSpPr>
+      <p:grpSpPr>
+        <a:xfrm>
+          <a:off x="0" y="0"/>
+          <a:ext cx="0" cy="0"/>
+          <a:chOff x="0" y="0"/>
+          <a:chExt cx="0" cy="0"/>
+        </a:xfrm>
+      </p:grpSpPr>
+      <p:sp>
+        <p:nvSpPr>
+          <p:cNvPr id="2" name="Slide Image Placeholder 1"/>
+          <p:cNvSpPr>
+            <a:spLocks noGrp="1" noRot="1" noChangeAspect="1"/>
+          </p:cNvSpPr>
+          <p:nvPr>
+            <p:ph type="sldImg"/>
+          </p:nvPr>
+        </p:nvSpPr>
+        <p:spPr/>
+      </p:sp>
+      <p:sp>
+        <p:nvSpPr>
+          <p:cNvPr id="3" name="Notes Placeholder 2"/>
+          <p:cNvSpPr>
+            <a:spLocks noGrp="1"/>
+          </p:cNvSpPr>
+          <p:nvPr>
+            <p:ph type="body" idx="1"/>
+          </p:nvPr>
+        </p:nvSpPr>
+        <p:spPr/>
+        <p:txBody>
+          <a:bodyPr/>
+          <a:lstStyle/>
+          <a:p>
+            <a:r>
+              <a:rPr lang="en-US" dirty="0"/>
+              <a:t/>
+            </a:r>
+            <a:endParaRPr lang="en-US" dirty="0"/>
+          </a:p>
+        </p:txBody>
+      </p:sp>
+      <p:sp>
+        <p:nvSpPr>
+          <p:cNvPr id="4" name="Slide Number Placeholder 3"/>
+          <p:cNvSpPr>
+            <a:spLocks noGrp="1"/>
+          </p:cNvSpPr>
+          <p:nvPr>
+            <p:ph type="sldNum" sz="quarter" idx="10"/>
+          </p:nvPr>
+        </p:nvSpPr>
+        <p:spPr/>
+        <p:txBody>
+          <a:bodyPr/>
+          <a:lstStyle/>
+          <a:p>
+            <a:fld id="{F7021451-1387-4CA6-816F-3879F97B5CBC}" type="slidenum">
+              <a:rPr lang="en-US"/>
+              <a:t>16</a:t>
+            </a:fld>
+            <a:endParaRPr lang="en-US"/>
+          </a:p>
+        </p:txBody>
+      </p:sp>
+    </p:spTree>
+    <p:extLst>
+      <p:ext uri="{BB962C8B-B14F-4D97-AF65-F5344CB8AC3E}">
+        <p14:creationId xmlns:p14="http://schemas.microsoft.com/office/powerpoint/2010/main" val="1024086991"/>
+      </p:ext>
+    </p:extLst>
+  </p:cSld>
+  <p:clrMapOvr>
+    <a:masterClrMapping/>
+  </p:clrMapOvr>
+</p:notes>
+</file>
+
+<file path=ppt/notesSlides/notesSlide17.xml><?xml version="1.0" encoding="utf-8"?>
+<p:notes xmlns:a="http://schemas.openxmlformats.org/drawingml/2006/main" xmlns:r="http://schemas.openxmlformats.org/officeDocument/2006/relationships" xmlns:p="http://schemas.openxmlformats.org/presentationml/2006/main">
+  <p:cSld>
+    <p:spTree>
+      <p:nvGrpSpPr>
+        <p:cNvPr id="1" name=""/>
+        <p:cNvGrpSpPr/>
+        <p:nvPr/>
+      </p:nvGrpSpPr>
+      <p:grpSpPr>
+        <a:xfrm>
+          <a:off x="0" y="0"/>
+          <a:ext cx="0" cy="0"/>
+          <a:chOff x="0" y="0"/>
+          <a:chExt cx="0" cy="0"/>
+        </a:xfrm>
+      </p:grpSpPr>
+      <p:sp>
+        <p:nvSpPr>
+          <p:cNvPr id="2" name="Slide Image Placeholder 1"/>
+          <p:cNvSpPr>
+            <a:spLocks noGrp="1" noRot="1" noChangeAspect="1"/>
+          </p:cNvSpPr>
+          <p:nvPr>
+            <p:ph type="sldImg"/>
+          </p:nvPr>
+        </p:nvSpPr>
+        <p:spPr/>
+      </p:sp>
+      <p:sp>
+        <p:nvSpPr>
+          <p:cNvPr id="3" name="Notes Placeholder 2"/>
+          <p:cNvSpPr>
+            <a:spLocks noGrp="1"/>
+          </p:cNvSpPr>
+          <p:nvPr>
+            <p:ph type="body" idx="1"/>
+          </p:nvPr>
+        </p:nvSpPr>
+        <p:spPr/>
+        <p:txBody>
+          <a:bodyPr/>
+          <a:lstStyle/>
+          <a:p>
+            <a:r>
+              <a:rPr lang="en-US" dirty="0"/>
+              <a:t/>
+            </a:r>
+            <a:endParaRPr lang="en-US" dirty="0"/>
+          </a:p>
+        </p:txBody>
+      </p:sp>
+      <p:sp>
+        <p:nvSpPr>
+          <p:cNvPr id="4" name="Slide Number Placeholder 3"/>
+          <p:cNvSpPr>
+            <a:spLocks noGrp="1"/>
+          </p:cNvSpPr>
+          <p:nvPr>
+            <p:ph type="sldNum" sz="quarter" idx="10"/>
+          </p:nvPr>
+        </p:nvSpPr>
+        <p:spPr/>
+        <p:txBody>
+          <a:bodyPr/>
+          <a:lstStyle/>
+          <a:p>
+            <a:fld id="{F7021451-1387-4CA6-816F-3879F97B5CBC}" type="slidenum">
+              <a:rPr lang="en-US"/>
+              <a:t>17</a:t>
             </a:fld>
             <a:endParaRPr lang="en-US"/>
           </a:p>
@@ -4612,6 +4790,3412 @@
                 <a:ea typeface="Microsoft JhengHei" pitchFamily="34" charset="-122"/>
                 <a:cs typeface="Microsoft JhengHei" pitchFamily="34" charset="-120"/>
               </a:rPr>
+              <a:t>系統架構成本明細：這套東西到底花多少錢</a:t>
+            </a:r>
+            <a:endParaRPr lang="en-US" sz="2700" dirty="0"/>
+          </a:p>
+        </p:txBody>
+      </p:sp>
+      <p:sp>
+        <p:nvSpPr>
+          <p:cNvPr id="3" name="Text 1"/>
+          <p:cNvSpPr/>
+          <p:nvPr/>
+        </p:nvSpPr>
+        <p:spPr>
+          <a:xfrm>
+            <a:off x="548640" y="1024128"/>
+            <a:ext cx="11091672" cy="320040"/>
+          </a:xfrm>
+          <a:prstGeom prst="rect">
+            <a:avLst/>
+          </a:prstGeom>
+          <a:noFill/>
+          <a:ln/>
+        </p:spPr>
+        <p:txBody>
+          <a:bodyPr wrap="square" lIns="0" tIns="0" rIns="0" bIns="0" rtlCol="0" anchor="ctr"/>
+          <a:lstStyle/>
+          <a:p>
+            <a:pPr indent="0" marL="0">
+              <a:buNone/>
+            </a:pPr>
+            <a:r>
+              <a:rPr lang="en-US" sz="1250" dirty="0">
+                <a:solidFill>
+                  <a:srgbClr val="6B7280"/>
+                </a:solidFill>
+                <a:latin typeface="Microsoft JhengHei" pitchFamily="34" charset="0"/>
+                <a:ea typeface="Microsoft JhengHei" pitchFamily="34" charset="-122"/>
+                <a:cs typeface="Microsoft JhengHei" pitchFamily="34" charset="-120"/>
+              </a:rPr>
+              <a:t>單價以 AWS 主控台現價估算；serverless＝用多少付多少，不用先繳月費</a:t>
+            </a:r>
+            <a:endParaRPr lang="en-US" sz="1250" dirty="0"/>
+          </a:p>
+        </p:txBody>
+      </p:sp>
+      <p:graphicFrame>
+        <p:nvGraphicFramePr>
+          <p:cNvPr id="12" name="Table 0"/>
+          <p:cNvGraphicFramePr>
+            <a:graphicFrameLocks noGrp="1"/>
+          </p:cNvGraphicFramePr>
+          <p:nvPr>
+            <p:extLst>
+              <p:ext uri="{D42A27DB-BD31-4B8C-83A1-F6EECF244321}">
+                <p14:modId xmlns:p14="http://schemas.microsoft.com/office/powerpoint/2010/main" val="1579011935"/>
+              </p:ext>
+            </p:extLst>
+          </p:nvPr>
+        </p:nvGraphicFramePr>
+        <p:xfrm>
+          <a:off x="548640" y="1508760"/>
+          <a:ext cx="11091672" cy="914400"/>
+        </p:xfrm>
+        <a:graphic>
+          <a:graphicData uri="http://schemas.openxmlformats.org/drawingml/2006/table">
+            <a:tbl>
+              <a:tblPr/>
+              <a:tblGrid>
+                <a:gridCol w="2743200"/>
+                <a:gridCol w="2651760"/>
+                <a:gridCol w="2286000"/>
+                <a:gridCol w="1737360"/>
+                <a:gridCol w="1673352"/>
+              </a:tblGrid>
+              <a:tr h="530352">
+                <a:tc>
+                  <a:txBody>
+                    <a:bodyPr/>
+                    <a:lstStyle/>
+                    <a:p>
+                      <a:pPr indent="0" marL="0">
+                        <a:buNone/>
+                      </a:pPr>
+                      <a:r>
+                        <a:rPr lang="en-US" sz="1200" b="1" dirty="0">
+                          <a:solidFill>
+                            <a:srgbClr val="FFFFFF"/>
+                          </a:solidFill>
+                          <a:latin typeface="Microsoft JhengHei" pitchFamily="34" charset="0"/>
+                          <a:ea typeface="Microsoft JhengHei" pitchFamily="34" charset="-122"/>
+                          <a:cs typeface="Microsoft JhengHei" pitchFamily="34" charset="-120"/>
+                        </a:rPr>
+                        <a:t>元件</a:t>
+                      </a:r>
+                      <a:endParaRPr lang="en-US" sz="1200" dirty="0">
+                        <a:latin typeface="Microsoft JhengHei" charset="0"/>
+                        <a:ea typeface="Microsoft JhengHei" charset="0"/>
+                        <a:cs typeface="Microsoft JhengHei" charset="0"/>
+                      </a:endParaRPr>
+                    </a:p>
+                  </a:txBody>
+                  <a:tcPr marL="54864" marR="54864" marT="54864" marB="54864" anchor="ctr">
+                    <a:lnL w="9525" cap="flat" cmpd="sng" algn="ctr">
+                      <a:solidFill>
+                        <a:srgbClr val="D5DEF0"/>
+                      </a:solidFill>
+                      <a:prstDash val="solid"/>
+                      <a:round/>
+                      <a:headEnd type="none" w="med" len="med"/>
+                      <a:tailEnd type="none" w="med" len="med"/>
+                    </a:lnL>
+                    <a:lnR w="9525" cap="flat" cmpd="sng" algn="ctr">
+                      <a:solidFill>
+                        <a:srgbClr val="D5DEF0"/>
+                      </a:solidFill>
+                      <a:prstDash val="solid"/>
+                      <a:round/>
+                      <a:headEnd type="none" w="med" len="med"/>
+                      <a:tailEnd type="none" w="med" len="med"/>
+                    </a:lnR>
+                    <a:lnT w="9525" cap="flat" cmpd="sng" algn="ctr">
+                      <a:solidFill>
+                        <a:srgbClr val="D5DEF0"/>
+                      </a:solidFill>
+                      <a:prstDash val="solid"/>
+                      <a:round/>
+                      <a:headEnd type="none" w="med" len="med"/>
+                      <a:tailEnd type="none" w="med" len="med"/>
+                    </a:lnT>
+                    <a:lnB w="9525" cap="flat" cmpd="sng" algn="ctr">
+                      <a:solidFill>
+                        <a:srgbClr val="D5DEF0"/>
+                      </a:solidFill>
+                      <a:prstDash val="solid"/>
+                      <a:round/>
+                      <a:headEnd type="none" w="med" len="med"/>
+                      <a:tailEnd type="none" w="med" len="med"/>
+                    </a:lnB>
+                    <a:solidFill>
+                      <a:srgbClr val="16224D"/>
+                    </a:solidFill>
+                  </a:tcPr>
+                </a:tc>
+                <a:tc>
+                  <a:txBody>
+                    <a:bodyPr/>
+                    <a:lstStyle/>
+                    <a:p>
+                      <a:pPr indent="0" marL="0">
+                        <a:buNone/>
+                      </a:pPr>
+                      <a:r>
+                        <a:rPr lang="en-US" sz="1200" b="1" dirty="0">
+                          <a:solidFill>
+                            <a:srgbClr val="FFFFFF"/>
+                          </a:solidFill>
+                          <a:latin typeface="Microsoft JhengHei" pitchFamily="34" charset="0"/>
+                          <a:ea typeface="Microsoft JhengHei" pitchFamily="34" charset="-122"/>
+                          <a:cs typeface="Microsoft JhengHei" pitchFamily="34" charset="-120"/>
+                        </a:rPr>
+                        <a:t>計費方式</a:t>
+                      </a:r>
+                      <a:endParaRPr lang="en-US" sz="1200" dirty="0">
+                        <a:latin typeface="Microsoft JhengHei" charset="0"/>
+                        <a:ea typeface="Microsoft JhengHei" charset="0"/>
+                        <a:cs typeface="Microsoft JhengHei" charset="0"/>
+                      </a:endParaRPr>
+                    </a:p>
+                  </a:txBody>
+                  <a:tcPr marL="54864" marR="54864" marT="54864" marB="54864" anchor="ctr">
+                    <a:lnL w="9525" cap="flat" cmpd="sng" algn="ctr">
+                      <a:solidFill>
+                        <a:srgbClr val="D5DEF0"/>
+                      </a:solidFill>
+                      <a:prstDash val="solid"/>
+                      <a:round/>
+                      <a:headEnd type="none" w="med" len="med"/>
+                      <a:tailEnd type="none" w="med" len="med"/>
+                    </a:lnL>
+                    <a:lnR w="9525" cap="flat" cmpd="sng" algn="ctr">
+                      <a:solidFill>
+                        <a:srgbClr val="D5DEF0"/>
+                      </a:solidFill>
+                      <a:prstDash val="solid"/>
+                      <a:round/>
+                      <a:headEnd type="none" w="med" len="med"/>
+                      <a:tailEnd type="none" w="med" len="med"/>
+                    </a:lnR>
+                    <a:lnT w="9525" cap="flat" cmpd="sng" algn="ctr">
+                      <a:solidFill>
+                        <a:srgbClr val="D5DEF0"/>
+                      </a:solidFill>
+                      <a:prstDash val="solid"/>
+                      <a:round/>
+                      <a:headEnd type="none" w="med" len="med"/>
+                      <a:tailEnd type="none" w="med" len="med"/>
+                    </a:lnT>
+                    <a:lnB w="9525" cap="flat" cmpd="sng" algn="ctr">
+                      <a:solidFill>
+                        <a:srgbClr val="D5DEF0"/>
+                      </a:solidFill>
+                      <a:prstDash val="solid"/>
+                      <a:round/>
+                      <a:headEnd type="none" w="med" len="med"/>
+                      <a:tailEnd type="none" w="med" len="med"/>
+                    </a:lnB>
+                    <a:solidFill>
+                      <a:srgbClr val="16224D"/>
+                    </a:solidFill>
+                  </a:tcPr>
+                </a:tc>
+                <a:tc>
+                  <a:txBody>
+                    <a:bodyPr/>
+                    <a:lstStyle/>
+                    <a:p>
+                      <a:pPr indent="0" marL="0">
+                        <a:buNone/>
+                      </a:pPr>
+                      <a:r>
+                        <a:rPr lang="en-US" sz="1200" b="1" dirty="0">
+                          <a:solidFill>
+                            <a:srgbClr val="FFFFFF"/>
+                          </a:solidFill>
+                          <a:latin typeface="Microsoft JhengHei" pitchFamily="34" charset="0"/>
+                          <a:ea typeface="Microsoft JhengHei" pitchFamily="34" charset="-122"/>
+                          <a:cs typeface="Microsoft JhengHei" pitchFamily="34" charset="-120"/>
+                        </a:rPr>
+                        <a:t>賽前開發期</a:t>
+                      </a:r>
+                      <a:endParaRPr lang="en-US" sz="1200" dirty="0">
+                        <a:latin typeface="Microsoft JhengHei" charset="0"/>
+                        <a:ea typeface="Microsoft JhengHei" charset="0"/>
+                        <a:cs typeface="Microsoft JhengHei" charset="0"/>
+                      </a:endParaRPr>
+                    </a:p>
+                  </a:txBody>
+                  <a:tcPr marL="54864" marR="54864" marT="54864" marB="54864" anchor="ctr">
+                    <a:lnL w="9525" cap="flat" cmpd="sng" algn="ctr">
+                      <a:solidFill>
+                        <a:srgbClr val="D5DEF0"/>
+                      </a:solidFill>
+                      <a:prstDash val="solid"/>
+                      <a:round/>
+                      <a:headEnd type="none" w="med" len="med"/>
+                      <a:tailEnd type="none" w="med" len="med"/>
+                    </a:lnL>
+                    <a:lnR w="9525" cap="flat" cmpd="sng" algn="ctr">
+                      <a:solidFill>
+                        <a:srgbClr val="D5DEF0"/>
+                      </a:solidFill>
+                      <a:prstDash val="solid"/>
+                      <a:round/>
+                      <a:headEnd type="none" w="med" len="med"/>
+                      <a:tailEnd type="none" w="med" len="med"/>
+                    </a:lnR>
+                    <a:lnT w="9525" cap="flat" cmpd="sng" algn="ctr">
+                      <a:solidFill>
+                        <a:srgbClr val="D5DEF0"/>
+                      </a:solidFill>
+                      <a:prstDash val="solid"/>
+                      <a:round/>
+                      <a:headEnd type="none" w="med" len="med"/>
+                      <a:tailEnd type="none" w="med" len="med"/>
+                    </a:lnT>
+                    <a:lnB w="9525" cap="flat" cmpd="sng" algn="ctr">
+                      <a:solidFill>
+                        <a:srgbClr val="D5DEF0"/>
+                      </a:solidFill>
+                      <a:prstDash val="solid"/>
+                      <a:round/>
+                      <a:headEnd type="none" w="med" len="med"/>
+                      <a:tailEnd type="none" w="med" len="med"/>
+                    </a:lnB>
+                    <a:solidFill>
+                      <a:srgbClr val="16224D"/>
+                    </a:solidFill>
+                  </a:tcPr>
+                </a:tc>
+                <a:tc>
+                  <a:txBody>
+                    <a:bodyPr/>
+                    <a:lstStyle/>
+                    <a:p>
+                      <a:pPr indent="0" marL="0">
+                        <a:buNone/>
+                      </a:pPr>
+                      <a:r>
+                        <a:rPr lang="en-US" sz="1200" b="1" dirty="0">
+                          <a:solidFill>
+                            <a:srgbClr val="FFFFFF"/>
+                          </a:solidFill>
+                          <a:latin typeface="Microsoft JhengHei" pitchFamily="34" charset="0"/>
+                          <a:ea typeface="Microsoft JhengHei" pitchFamily="34" charset="-122"/>
+                          <a:cs typeface="Microsoft JhengHei" pitchFamily="34" charset="-120"/>
+                        </a:rPr>
+                        <a:t>決賽 Demo</a:t>
+                      </a:r>
+                      <a:endParaRPr lang="en-US" sz="1200" dirty="0">
+                        <a:latin typeface="Microsoft JhengHei" charset="0"/>
+                        <a:ea typeface="Microsoft JhengHei" charset="0"/>
+                        <a:cs typeface="Microsoft JhengHei" charset="0"/>
+                      </a:endParaRPr>
+                    </a:p>
+                  </a:txBody>
+                  <a:tcPr marL="54864" marR="54864" marT="54864" marB="54864" anchor="ctr">
+                    <a:lnL w="9525" cap="flat" cmpd="sng" algn="ctr">
+                      <a:solidFill>
+                        <a:srgbClr val="D5DEF0"/>
+                      </a:solidFill>
+                      <a:prstDash val="solid"/>
+                      <a:round/>
+                      <a:headEnd type="none" w="med" len="med"/>
+                      <a:tailEnd type="none" w="med" len="med"/>
+                    </a:lnL>
+                    <a:lnR w="9525" cap="flat" cmpd="sng" algn="ctr">
+                      <a:solidFill>
+                        <a:srgbClr val="D5DEF0"/>
+                      </a:solidFill>
+                      <a:prstDash val="solid"/>
+                      <a:round/>
+                      <a:headEnd type="none" w="med" len="med"/>
+                      <a:tailEnd type="none" w="med" len="med"/>
+                    </a:lnR>
+                    <a:lnT w="9525" cap="flat" cmpd="sng" algn="ctr">
+                      <a:solidFill>
+                        <a:srgbClr val="D5DEF0"/>
+                      </a:solidFill>
+                      <a:prstDash val="solid"/>
+                      <a:round/>
+                      <a:headEnd type="none" w="med" len="med"/>
+                      <a:tailEnd type="none" w="med" len="med"/>
+                    </a:lnT>
+                    <a:lnB w="9525" cap="flat" cmpd="sng" algn="ctr">
+                      <a:solidFill>
+                        <a:srgbClr val="D5DEF0"/>
+                      </a:solidFill>
+                      <a:prstDash val="solid"/>
+                      <a:round/>
+                      <a:headEnd type="none" w="med" len="med"/>
+                      <a:tailEnd type="none" w="med" len="med"/>
+                    </a:lnB>
+                    <a:solidFill>
+                      <a:srgbClr val="16224D"/>
+                    </a:solidFill>
+                  </a:tcPr>
+                </a:tc>
+                <a:tc>
+                  <a:txBody>
+                    <a:bodyPr/>
+                    <a:lstStyle/>
+                    <a:p>
+                      <a:pPr indent="0" marL="0">
+                        <a:buNone/>
+                      </a:pPr>
+                      <a:r>
+                        <a:rPr lang="en-US" sz="1200" b="1" dirty="0">
+                          <a:solidFill>
+                            <a:srgbClr val="FFFFFF"/>
+                          </a:solidFill>
+                          <a:latin typeface="Microsoft JhengHei" pitchFamily="34" charset="0"/>
+                          <a:ea typeface="Microsoft JhengHei" pitchFamily="34" charset="-122"/>
+                          <a:cs typeface="Microsoft JhengHei" pitchFamily="34" charset="-120"/>
+                        </a:rPr>
+                        <a:t>千人規模/月</a:t>
+                      </a:r>
+                      <a:endParaRPr lang="en-US" sz="1200" dirty="0">
+                        <a:latin typeface="Microsoft JhengHei" charset="0"/>
+                        <a:ea typeface="Microsoft JhengHei" charset="0"/>
+                        <a:cs typeface="Microsoft JhengHei" charset="0"/>
+                      </a:endParaRPr>
+                    </a:p>
+                  </a:txBody>
+                  <a:tcPr marL="54864" marR="54864" marT="54864" marB="54864" anchor="ctr">
+                    <a:lnL w="9525" cap="flat" cmpd="sng" algn="ctr">
+                      <a:solidFill>
+                        <a:srgbClr val="D5DEF0"/>
+                      </a:solidFill>
+                      <a:prstDash val="solid"/>
+                      <a:round/>
+                      <a:headEnd type="none" w="med" len="med"/>
+                      <a:tailEnd type="none" w="med" len="med"/>
+                    </a:lnL>
+                    <a:lnR w="9525" cap="flat" cmpd="sng" algn="ctr">
+                      <a:solidFill>
+                        <a:srgbClr val="D5DEF0"/>
+                      </a:solidFill>
+                      <a:prstDash val="solid"/>
+                      <a:round/>
+                      <a:headEnd type="none" w="med" len="med"/>
+                      <a:tailEnd type="none" w="med" len="med"/>
+                    </a:lnR>
+                    <a:lnT w="9525" cap="flat" cmpd="sng" algn="ctr">
+                      <a:solidFill>
+                        <a:srgbClr val="D5DEF0"/>
+                      </a:solidFill>
+                      <a:prstDash val="solid"/>
+                      <a:round/>
+                      <a:headEnd type="none" w="med" len="med"/>
+                      <a:tailEnd type="none" w="med" len="med"/>
+                    </a:lnT>
+                    <a:lnB w="9525" cap="flat" cmpd="sng" algn="ctr">
+                      <a:solidFill>
+                        <a:srgbClr val="D5DEF0"/>
+                      </a:solidFill>
+                      <a:prstDash val="solid"/>
+                      <a:round/>
+                      <a:headEnd type="none" w="med" len="med"/>
+                      <a:tailEnd type="none" w="med" len="med"/>
+                    </a:lnB>
+                    <a:solidFill>
+                      <a:srgbClr val="16224D"/>
+                    </a:solidFill>
+                  </a:tcPr>
+                </a:tc>
+              </a:tr>
+              <a:tr h="530352">
+                <a:tc>
+                  <a:txBody>
+                    <a:bodyPr/>
+                    <a:lstStyle/>
+                    <a:p>
+                      <a:pPr indent="0" marL="0">
+                        <a:buNone/>
+                      </a:pPr>
+                      <a:r>
+                        <a:rPr lang="en-US" sz="1050" b="1" dirty="0">
+                          <a:solidFill>
+                            <a:srgbClr val="1F2937"/>
+                          </a:solidFill>
+                          <a:latin typeface="Microsoft JhengHei" pitchFamily="34" charset="0"/>
+                          <a:ea typeface="Microsoft JhengHei" pitchFamily="34" charset="-122"/>
+                          <a:cs typeface="Microsoft JhengHei" pitchFamily="34" charset="-120"/>
+                        </a:rPr>
+                        <a:t>Bedrock 模型（Haiku/Sonnet）</a:t>
+                      </a:r>
+                      <a:endParaRPr lang="en-US" sz="1050" dirty="0">
+                        <a:latin typeface="Microsoft JhengHei" charset="0"/>
+                        <a:ea typeface="Microsoft JhengHei" charset="0"/>
+                        <a:cs typeface="Microsoft JhengHei" charset="0"/>
+                      </a:endParaRPr>
+                    </a:p>
+                  </a:txBody>
+                  <a:tcPr marL="54864" marR="54864" marT="54864" marB="54864" anchor="ctr">
+                    <a:lnL w="9525" cap="flat" cmpd="sng" algn="ctr">
+                      <a:solidFill>
+                        <a:srgbClr val="D5DEF0"/>
+                      </a:solidFill>
+                      <a:prstDash val="solid"/>
+                      <a:round/>
+                      <a:headEnd type="none" w="med" len="med"/>
+                      <a:tailEnd type="none" w="med" len="med"/>
+                    </a:lnL>
+                    <a:lnR w="9525" cap="flat" cmpd="sng" algn="ctr">
+                      <a:solidFill>
+                        <a:srgbClr val="D5DEF0"/>
+                      </a:solidFill>
+                      <a:prstDash val="solid"/>
+                      <a:round/>
+                      <a:headEnd type="none" w="med" len="med"/>
+                      <a:tailEnd type="none" w="med" len="med"/>
+                    </a:lnR>
+                    <a:lnT w="9525" cap="flat" cmpd="sng" algn="ctr">
+                      <a:solidFill>
+                        <a:srgbClr val="D5DEF0"/>
+                      </a:solidFill>
+                      <a:prstDash val="solid"/>
+                      <a:round/>
+                      <a:headEnd type="none" w="med" len="med"/>
+                      <a:tailEnd type="none" w="med" len="med"/>
+                    </a:lnT>
+                    <a:lnB w="9525" cap="flat" cmpd="sng" algn="ctr">
+                      <a:solidFill>
+                        <a:srgbClr val="D5DEF0"/>
+                      </a:solidFill>
+                      <a:prstDash val="solid"/>
+                      <a:round/>
+                      <a:headEnd type="none" w="med" len="med"/>
+                      <a:tailEnd type="none" w="med" len="med"/>
+                    </a:lnB>
+                  </a:tcPr>
+                </a:tc>
+                <a:tc>
+                  <a:txBody>
+                    <a:bodyPr/>
+                    <a:lstStyle/>
+                    <a:p>
+                      <a:pPr indent="0" marL="0">
+                        <a:buNone/>
+                      </a:pPr>
+                      <a:r>
+                        <a:rPr lang="en-US" sz="1050" dirty="0">
+                          <a:solidFill>
+                            <a:srgbClr val="6B7280"/>
+                          </a:solidFill>
+                          <a:latin typeface="Microsoft JhengHei" pitchFamily="34" charset="0"/>
+                          <a:ea typeface="Microsoft JhengHei" pitchFamily="34" charset="-122"/>
+                          <a:cs typeface="Microsoft JhengHei" pitchFamily="34" charset="-120"/>
+                        </a:rPr>
+                        <a:t>依 token 計價＋prompt caching 一折</a:t>
+                      </a:r>
+                      <a:endParaRPr lang="en-US" sz="1050" dirty="0">
+                        <a:latin typeface="Microsoft JhengHei" charset="0"/>
+                        <a:ea typeface="Microsoft JhengHei" charset="0"/>
+                        <a:cs typeface="Microsoft JhengHei" charset="0"/>
+                      </a:endParaRPr>
+                    </a:p>
+                  </a:txBody>
+                  <a:tcPr marL="54864" marR="54864" marT="54864" marB="54864" anchor="ctr">
+                    <a:lnL w="9525" cap="flat" cmpd="sng" algn="ctr">
+                      <a:solidFill>
+                        <a:srgbClr val="D5DEF0"/>
+                      </a:solidFill>
+                      <a:prstDash val="solid"/>
+                      <a:round/>
+                      <a:headEnd type="none" w="med" len="med"/>
+                      <a:tailEnd type="none" w="med" len="med"/>
+                    </a:lnL>
+                    <a:lnR w="9525" cap="flat" cmpd="sng" algn="ctr">
+                      <a:solidFill>
+                        <a:srgbClr val="D5DEF0"/>
+                      </a:solidFill>
+                      <a:prstDash val="solid"/>
+                      <a:round/>
+                      <a:headEnd type="none" w="med" len="med"/>
+                      <a:tailEnd type="none" w="med" len="med"/>
+                    </a:lnR>
+                    <a:lnT w="9525" cap="flat" cmpd="sng" algn="ctr">
+                      <a:solidFill>
+                        <a:srgbClr val="D5DEF0"/>
+                      </a:solidFill>
+                      <a:prstDash val="solid"/>
+                      <a:round/>
+                      <a:headEnd type="none" w="med" len="med"/>
+                      <a:tailEnd type="none" w="med" len="med"/>
+                    </a:lnT>
+                    <a:lnB w="9525" cap="flat" cmpd="sng" algn="ctr">
+                      <a:solidFill>
+                        <a:srgbClr val="D5DEF0"/>
+                      </a:solidFill>
+                      <a:prstDash val="solid"/>
+                      <a:round/>
+                      <a:headEnd type="none" w="med" len="med"/>
+                      <a:tailEnd type="none" w="med" len="med"/>
+                    </a:lnB>
+                  </a:tcPr>
+                </a:tc>
+                <a:tc>
+                  <a:txBody>
+                    <a:bodyPr/>
+                    <a:lstStyle/>
+                    <a:p>
+                      <a:pPr indent="0" marL="0">
+                        <a:buNone/>
+                      </a:pPr>
+                      <a:r>
+                        <a:rPr lang="en-US" sz="1050" dirty="0">
+                          <a:solidFill>
+                            <a:srgbClr val="16224D"/>
+                          </a:solidFill>
+                          <a:latin typeface="Microsoft JhengHei" pitchFamily="34" charset="0"/>
+                          <a:ea typeface="Microsoft JhengHei" pitchFamily="34" charset="-122"/>
+                          <a:cs typeface="Microsoft JhengHei" pitchFamily="34" charset="-120"/>
+                        </a:rPr>
+                        <a:t>≈NT$300（約500次測試對話）</a:t>
+                      </a:r>
+                      <a:endParaRPr lang="en-US" sz="1050" dirty="0">
+                        <a:latin typeface="Microsoft JhengHei" charset="0"/>
+                        <a:ea typeface="Microsoft JhengHei" charset="0"/>
+                        <a:cs typeface="Microsoft JhengHei" charset="0"/>
+                      </a:endParaRPr>
+                    </a:p>
+                  </a:txBody>
+                  <a:tcPr marL="54864" marR="54864" marT="54864" marB="54864" anchor="ctr">
+                    <a:lnL w="9525" cap="flat" cmpd="sng" algn="ctr">
+                      <a:solidFill>
+                        <a:srgbClr val="D5DEF0"/>
+                      </a:solidFill>
+                      <a:prstDash val="solid"/>
+                      <a:round/>
+                      <a:headEnd type="none" w="med" len="med"/>
+                      <a:tailEnd type="none" w="med" len="med"/>
+                    </a:lnL>
+                    <a:lnR w="9525" cap="flat" cmpd="sng" algn="ctr">
+                      <a:solidFill>
+                        <a:srgbClr val="D5DEF0"/>
+                      </a:solidFill>
+                      <a:prstDash val="solid"/>
+                      <a:round/>
+                      <a:headEnd type="none" w="med" len="med"/>
+                      <a:tailEnd type="none" w="med" len="med"/>
+                    </a:lnR>
+                    <a:lnT w="9525" cap="flat" cmpd="sng" algn="ctr">
+                      <a:solidFill>
+                        <a:srgbClr val="D5DEF0"/>
+                      </a:solidFill>
+                      <a:prstDash val="solid"/>
+                      <a:round/>
+                      <a:headEnd type="none" w="med" len="med"/>
+                      <a:tailEnd type="none" w="med" len="med"/>
+                    </a:lnT>
+                    <a:lnB w="9525" cap="flat" cmpd="sng" algn="ctr">
+                      <a:solidFill>
+                        <a:srgbClr val="D5DEF0"/>
+                      </a:solidFill>
+                      <a:prstDash val="solid"/>
+                      <a:round/>
+                      <a:headEnd type="none" w="med" len="med"/>
+                      <a:tailEnd type="none" w="med" len="med"/>
+                    </a:lnB>
+                  </a:tcPr>
+                </a:tc>
+                <a:tc>
+                  <a:txBody>
+                    <a:bodyPr/>
+                    <a:lstStyle/>
+                    <a:p>
+                      <a:pPr indent="0" marL="0">
+                        <a:buNone/>
+                      </a:pPr>
+                      <a:r>
+                        <a:rPr lang="en-US" sz="1050" dirty="0">
+                          <a:solidFill>
+                            <a:srgbClr val="16224D"/>
+                          </a:solidFill>
+                          <a:latin typeface="Microsoft JhengHei" pitchFamily="34" charset="0"/>
+                          <a:ea typeface="Microsoft JhengHei" pitchFamily="34" charset="-122"/>
+                          <a:cs typeface="Microsoft JhengHei" pitchFamily="34" charset="-120"/>
+                        </a:rPr>
+                        <a:t>&lt;NT$100</a:t>
+                      </a:r>
+                      <a:endParaRPr lang="en-US" sz="1050" dirty="0">
+                        <a:latin typeface="Microsoft JhengHei" charset="0"/>
+                        <a:ea typeface="Microsoft JhengHei" charset="0"/>
+                        <a:cs typeface="Microsoft JhengHei" charset="0"/>
+                      </a:endParaRPr>
+                    </a:p>
+                  </a:txBody>
+                  <a:tcPr marL="54864" marR="54864" marT="54864" marB="54864" anchor="ctr">
+                    <a:lnL w="9525" cap="flat" cmpd="sng" algn="ctr">
+                      <a:solidFill>
+                        <a:srgbClr val="D5DEF0"/>
+                      </a:solidFill>
+                      <a:prstDash val="solid"/>
+                      <a:round/>
+                      <a:headEnd type="none" w="med" len="med"/>
+                      <a:tailEnd type="none" w="med" len="med"/>
+                    </a:lnL>
+                    <a:lnR w="9525" cap="flat" cmpd="sng" algn="ctr">
+                      <a:solidFill>
+                        <a:srgbClr val="D5DEF0"/>
+                      </a:solidFill>
+                      <a:prstDash val="solid"/>
+                      <a:round/>
+                      <a:headEnd type="none" w="med" len="med"/>
+                      <a:tailEnd type="none" w="med" len="med"/>
+                    </a:lnR>
+                    <a:lnT w="9525" cap="flat" cmpd="sng" algn="ctr">
+                      <a:solidFill>
+                        <a:srgbClr val="D5DEF0"/>
+                      </a:solidFill>
+                      <a:prstDash val="solid"/>
+                      <a:round/>
+                      <a:headEnd type="none" w="med" len="med"/>
+                      <a:tailEnd type="none" w="med" len="med"/>
+                    </a:lnT>
+                    <a:lnB w="9525" cap="flat" cmpd="sng" algn="ctr">
+                      <a:solidFill>
+                        <a:srgbClr val="D5DEF0"/>
+                      </a:solidFill>
+                      <a:prstDash val="solid"/>
+                      <a:round/>
+                      <a:headEnd type="none" w="med" len="med"/>
+                      <a:tailEnd type="none" w="med" len="med"/>
+                    </a:lnB>
+                  </a:tcPr>
+                </a:tc>
+                <a:tc>
+                  <a:txBody>
+                    <a:bodyPr/>
+                    <a:lstStyle/>
+                    <a:p>
+                      <a:pPr indent="0" marL="0">
+                        <a:buNone/>
+                      </a:pPr>
+                      <a:r>
+                        <a:rPr lang="en-US" sz="1050" dirty="0">
+                          <a:solidFill>
+                            <a:srgbClr val="16224D"/>
+                          </a:solidFill>
+                          <a:latin typeface="Microsoft JhengHei" pitchFamily="34" charset="0"/>
+                          <a:ea typeface="Microsoft JhengHei" pitchFamily="34" charset="-122"/>
+                          <a:cs typeface="Microsoft JhengHei" pitchFamily="34" charset="-120"/>
+                        </a:rPr>
+                        <a:t>依用量：重度用戶≈NT$60/人</a:t>
+                      </a:r>
+                      <a:endParaRPr lang="en-US" sz="1050" dirty="0">
+                        <a:latin typeface="Microsoft JhengHei" charset="0"/>
+                        <a:ea typeface="Microsoft JhengHei" charset="0"/>
+                        <a:cs typeface="Microsoft JhengHei" charset="0"/>
+                      </a:endParaRPr>
+                    </a:p>
+                  </a:txBody>
+                  <a:tcPr marL="54864" marR="54864" marT="54864" marB="54864" anchor="ctr">
+                    <a:lnL w="9525" cap="flat" cmpd="sng" algn="ctr">
+                      <a:solidFill>
+                        <a:srgbClr val="D5DEF0"/>
+                      </a:solidFill>
+                      <a:prstDash val="solid"/>
+                      <a:round/>
+                      <a:headEnd type="none" w="med" len="med"/>
+                      <a:tailEnd type="none" w="med" len="med"/>
+                    </a:lnL>
+                    <a:lnR w="9525" cap="flat" cmpd="sng" algn="ctr">
+                      <a:solidFill>
+                        <a:srgbClr val="D5DEF0"/>
+                      </a:solidFill>
+                      <a:prstDash val="solid"/>
+                      <a:round/>
+                      <a:headEnd type="none" w="med" len="med"/>
+                      <a:tailEnd type="none" w="med" len="med"/>
+                    </a:lnR>
+                    <a:lnT w="9525" cap="flat" cmpd="sng" algn="ctr">
+                      <a:solidFill>
+                        <a:srgbClr val="D5DEF0"/>
+                      </a:solidFill>
+                      <a:prstDash val="solid"/>
+                      <a:round/>
+                      <a:headEnd type="none" w="med" len="med"/>
+                      <a:tailEnd type="none" w="med" len="med"/>
+                    </a:lnT>
+                    <a:lnB w="9525" cap="flat" cmpd="sng" algn="ctr">
+                      <a:solidFill>
+                        <a:srgbClr val="D5DEF0"/>
+                      </a:solidFill>
+                      <a:prstDash val="solid"/>
+                      <a:round/>
+                      <a:headEnd type="none" w="med" len="med"/>
+                      <a:tailEnd type="none" w="med" len="med"/>
+                    </a:lnB>
+                  </a:tcPr>
+                </a:tc>
+              </a:tr>
+              <a:tr h="530352">
+                <a:tc>
+                  <a:txBody>
+                    <a:bodyPr/>
+                    <a:lstStyle/>
+                    <a:p>
+                      <a:pPr indent="0" marL="0">
+                        <a:buNone/>
+                      </a:pPr>
+                      <a:r>
+                        <a:rPr lang="en-US" sz="1050" b="1" dirty="0">
+                          <a:solidFill>
+                            <a:srgbClr val="1F2937"/>
+                          </a:solidFill>
+                          <a:latin typeface="Microsoft JhengHei" pitchFamily="34" charset="0"/>
+                          <a:ea typeface="Microsoft JhengHei" pitchFamily="34" charset="-122"/>
+                          <a:cs typeface="Microsoft JhengHei" pitchFamily="34" charset="-120"/>
+                        </a:rPr>
+                        <a:t>Lambda ×4＋API Gateway</a:t>
+                      </a:r>
+                      <a:endParaRPr lang="en-US" sz="1050" dirty="0">
+                        <a:latin typeface="Microsoft JhengHei" charset="0"/>
+                        <a:ea typeface="Microsoft JhengHei" charset="0"/>
+                        <a:cs typeface="Microsoft JhengHei" charset="0"/>
+                      </a:endParaRPr>
+                    </a:p>
+                  </a:txBody>
+                  <a:tcPr marL="54864" marR="54864" marT="54864" marB="54864" anchor="ctr">
+                    <a:lnL w="9525" cap="flat" cmpd="sng" algn="ctr">
+                      <a:solidFill>
+                        <a:srgbClr val="D5DEF0"/>
+                      </a:solidFill>
+                      <a:prstDash val="solid"/>
+                      <a:round/>
+                      <a:headEnd type="none" w="med" len="med"/>
+                      <a:tailEnd type="none" w="med" len="med"/>
+                    </a:lnL>
+                    <a:lnR w="9525" cap="flat" cmpd="sng" algn="ctr">
+                      <a:solidFill>
+                        <a:srgbClr val="D5DEF0"/>
+                      </a:solidFill>
+                      <a:prstDash val="solid"/>
+                      <a:round/>
+                      <a:headEnd type="none" w="med" len="med"/>
+                      <a:tailEnd type="none" w="med" len="med"/>
+                    </a:lnR>
+                    <a:lnT w="9525" cap="flat" cmpd="sng" algn="ctr">
+                      <a:solidFill>
+                        <a:srgbClr val="D5DEF0"/>
+                      </a:solidFill>
+                      <a:prstDash val="solid"/>
+                      <a:round/>
+                      <a:headEnd type="none" w="med" len="med"/>
+                      <a:tailEnd type="none" w="med" len="med"/>
+                    </a:lnT>
+                    <a:lnB w="9525" cap="flat" cmpd="sng" algn="ctr">
+                      <a:solidFill>
+                        <a:srgbClr val="D5DEF0"/>
+                      </a:solidFill>
+                      <a:prstDash val="solid"/>
+                      <a:round/>
+                      <a:headEnd type="none" w="med" len="med"/>
+                      <a:tailEnd type="none" w="med" len="med"/>
+                    </a:lnB>
+                  </a:tcPr>
+                </a:tc>
+                <a:tc>
+                  <a:txBody>
+                    <a:bodyPr/>
+                    <a:lstStyle/>
+                    <a:p>
+                      <a:pPr indent="0" marL="0">
+                        <a:buNone/>
+                      </a:pPr>
+                      <a:r>
+                        <a:rPr lang="en-US" sz="1050" dirty="0">
+                          <a:solidFill>
+                            <a:srgbClr val="6B7280"/>
+                          </a:solidFill>
+                          <a:latin typeface="Microsoft JhengHei" pitchFamily="34" charset="0"/>
+                          <a:ea typeface="Microsoft JhengHei" pitchFamily="34" charset="-122"/>
+                          <a:cs typeface="Microsoft JhengHei" pitchFamily="34" charset="-120"/>
+                        </a:rPr>
+                        <a:t>依請求數；免費額度 100 萬次/月</a:t>
+                      </a:r>
+                      <a:endParaRPr lang="en-US" sz="1050" dirty="0">
+                        <a:latin typeface="Microsoft JhengHei" charset="0"/>
+                        <a:ea typeface="Microsoft JhengHei" charset="0"/>
+                        <a:cs typeface="Microsoft JhengHei" charset="0"/>
+                      </a:endParaRPr>
+                    </a:p>
+                  </a:txBody>
+                  <a:tcPr marL="54864" marR="54864" marT="54864" marB="54864" anchor="ctr">
+                    <a:lnL w="9525" cap="flat" cmpd="sng" algn="ctr">
+                      <a:solidFill>
+                        <a:srgbClr val="D5DEF0"/>
+                      </a:solidFill>
+                      <a:prstDash val="solid"/>
+                      <a:round/>
+                      <a:headEnd type="none" w="med" len="med"/>
+                      <a:tailEnd type="none" w="med" len="med"/>
+                    </a:lnL>
+                    <a:lnR w="9525" cap="flat" cmpd="sng" algn="ctr">
+                      <a:solidFill>
+                        <a:srgbClr val="D5DEF0"/>
+                      </a:solidFill>
+                      <a:prstDash val="solid"/>
+                      <a:round/>
+                      <a:headEnd type="none" w="med" len="med"/>
+                      <a:tailEnd type="none" w="med" len="med"/>
+                    </a:lnR>
+                    <a:lnT w="9525" cap="flat" cmpd="sng" algn="ctr">
+                      <a:solidFill>
+                        <a:srgbClr val="D5DEF0"/>
+                      </a:solidFill>
+                      <a:prstDash val="solid"/>
+                      <a:round/>
+                      <a:headEnd type="none" w="med" len="med"/>
+                      <a:tailEnd type="none" w="med" len="med"/>
+                    </a:lnT>
+                    <a:lnB w="9525" cap="flat" cmpd="sng" algn="ctr">
+                      <a:solidFill>
+                        <a:srgbClr val="D5DEF0"/>
+                      </a:solidFill>
+                      <a:prstDash val="solid"/>
+                      <a:round/>
+                      <a:headEnd type="none" w="med" len="med"/>
+                      <a:tailEnd type="none" w="med" len="med"/>
+                    </a:lnB>
+                  </a:tcPr>
+                </a:tc>
+                <a:tc>
+                  <a:txBody>
+                    <a:bodyPr/>
+                    <a:lstStyle/>
+                    <a:p>
+                      <a:pPr indent="0" marL="0">
+                        <a:buNone/>
+                      </a:pPr>
+                      <a:r>
+                        <a:rPr lang="en-US" sz="1050" dirty="0">
+                          <a:solidFill>
+                            <a:srgbClr val="16224D"/>
+                          </a:solidFill>
+                          <a:latin typeface="Microsoft JhengHei" pitchFamily="34" charset="0"/>
+                          <a:ea typeface="Microsoft JhengHei" pitchFamily="34" charset="-122"/>
+                          <a:cs typeface="Microsoft JhengHei" pitchFamily="34" charset="-120"/>
+                        </a:rPr>
+                        <a:t>≈NT$0（免費額度內）</a:t>
+                      </a:r>
+                      <a:endParaRPr lang="en-US" sz="1050" dirty="0">
+                        <a:latin typeface="Microsoft JhengHei" charset="0"/>
+                        <a:ea typeface="Microsoft JhengHei" charset="0"/>
+                        <a:cs typeface="Microsoft JhengHei" charset="0"/>
+                      </a:endParaRPr>
+                    </a:p>
+                  </a:txBody>
+                  <a:tcPr marL="54864" marR="54864" marT="54864" marB="54864" anchor="ctr">
+                    <a:lnL w="9525" cap="flat" cmpd="sng" algn="ctr">
+                      <a:solidFill>
+                        <a:srgbClr val="D5DEF0"/>
+                      </a:solidFill>
+                      <a:prstDash val="solid"/>
+                      <a:round/>
+                      <a:headEnd type="none" w="med" len="med"/>
+                      <a:tailEnd type="none" w="med" len="med"/>
+                    </a:lnL>
+                    <a:lnR w="9525" cap="flat" cmpd="sng" algn="ctr">
+                      <a:solidFill>
+                        <a:srgbClr val="D5DEF0"/>
+                      </a:solidFill>
+                      <a:prstDash val="solid"/>
+                      <a:round/>
+                      <a:headEnd type="none" w="med" len="med"/>
+                      <a:tailEnd type="none" w="med" len="med"/>
+                    </a:lnR>
+                    <a:lnT w="9525" cap="flat" cmpd="sng" algn="ctr">
+                      <a:solidFill>
+                        <a:srgbClr val="D5DEF0"/>
+                      </a:solidFill>
+                      <a:prstDash val="solid"/>
+                      <a:round/>
+                      <a:headEnd type="none" w="med" len="med"/>
+                      <a:tailEnd type="none" w="med" len="med"/>
+                    </a:lnT>
+                    <a:lnB w="9525" cap="flat" cmpd="sng" algn="ctr">
+                      <a:solidFill>
+                        <a:srgbClr val="D5DEF0"/>
+                      </a:solidFill>
+                      <a:prstDash val="solid"/>
+                      <a:round/>
+                      <a:headEnd type="none" w="med" len="med"/>
+                      <a:tailEnd type="none" w="med" len="med"/>
+                    </a:lnB>
+                  </a:tcPr>
+                </a:tc>
+                <a:tc>
+                  <a:txBody>
+                    <a:bodyPr/>
+                    <a:lstStyle/>
+                    <a:p>
+                      <a:pPr indent="0" marL="0">
+                        <a:buNone/>
+                      </a:pPr>
+                      <a:r>
+                        <a:rPr lang="en-US" sz="1050" dirty="0">
+                          <a:solidFill>
+                            <a:srgbClr val="16224D"/>
+                          </a:solidFill>
+                          <a:latin typeface="Microsoft JhengHei" pitchFamily="34" charset="0"/>
+                          <a:ea typeface="Microsoft JhengHei" pitchFamily="34" charset="-122"/>
+                          <a:cs typeface="Microsoft JhengHei" pitchFamily="34" charset="-120"/>
+                        </a:rPr>
+                        <a:t>≈NT$0</a:t>
+                      </a:r>
+                      <a:endParaRPr lang="en-US" sz="1050" dirty="0">
+                        <a:latin typeface="Microsoft JhengHei" charset="0"/>
+                        <a:ea typeface="Microsoft JhengHei" charset="0"/>
+                        <a:cs typeface="Microsoft JhengHei" charset="0"/>
+                      </a:endParaRPr>
+                    </a:p>
+                  </a:txBody>
+                  <a:tcPr marL="54864" marR="54864" marT="54864" marB="54864" anchor="ctr">
+                    <a:lnL w="9525" cap="flat" cmpd="sng" algn="ctr">
+                      <a:solidFill>
+                        <a:srgbClr val="D5DEF0"/>
+                      </a:solidFill>
+                      <a:prstDash val="solid"/>
+                      <a:round/>
+                      <a:headEnd type="none" w="med" len="med"/>
+                      <a:tailEnd type="none" w="med" len="med"/>
+                    </a:lnL>
+                    <a:lnR w="9525" cap="flat" cmpd="sng" algn="ctr">
+                      <a:solidFill>
+                        <a:srgbClr val="D5DEF0"/>
+                      </a:solidFill>
+                      <a:prstDash val="solid"/>
+                      <a:round/>
+                      <a:headEnd type="none" w="med" len="med"/>
+                      <a:tailEnd type="none" w="med" len="med"/>
+                    </a:lnR>
+                    <a:lnT w="9525" cap="flat" cmpd="sng" algn="ctr">
+                      <a:solidFill>
+                        <a:srgbClr val="D5DEF0"/>
+                      </a:solidFill>
+                      <a:prstDash val="solid"/>
+                      <a:round/>
+                      <a:headEnd type="none" w="med" len="med"/>
+                      <a:tailEnd type="none" w="med" len="med"/>
+                    </a:lnT>
+                    <a:lnB w="9525" cap="flat" cmpd="sng" algn="ctr">
+                      <a:solidFill>
+                        <a:srgbClr val="D5DEF0"/>
+                      </a:solidFill>
+                      <a:prstDash val="solid"/>
+                      <a:round/>
+                      <a:headEnd type="none" w="med" len="med"/>
+                      <a:tailEnd type="none" w="med" len="med"/>
+                    </a:lnB>
+                  </a:tcPr>
+                </a:tc>
+                <a:tc>
+                  <a:txBody>
+                    <a:bodyPr/>
+                    <a:lstStyle/>
+                    <a:p>
+                      <a:pPr indent="0" marL="0">
+                        <a:buNone/>
+                      </a:pPr>
+                      <a:r>
+                        <a:rPr lang="en-US" sz="1050" dirty="0">
+                          <a:solidFill>
+                            <a:srgbClr val="16224D"/>
+                          </a:solidFill>
+                          <a:latin typeface="Microsoft JhengHei" pitchFamily="34" charset="0"/>
+                          <a:ea typeface="Microsoft JhengHei" pitchFamily="34" charset="-122"/>
+                          <a:cs typeface="Microsoft JhengHei" pitchFamily="34" charset="-120"/>
+                        </a:rPr>
+                        <a:t>&lt;NT$500</a:t>
+                      </a:r>
+                      <a:endParaRPr lang="en-US" sz="1050" dirty="0">
+                        <a:latin typeface="Microsoft JhengHei" charset="0"/>
+                        <a:ea typeface="Microsoft JhengHei" charset="0"/>
+                        <a:cs typeface="Microsoft JhengHei" charset="0"/>
+                      </a:endParaRPr>
+                    </a:p>
+                  </a:txBody>
+                  <a:tcPr marL="54864" marR="54864" marT="54864" marB="54864" anchor="ctr">
+                    <a:lnL w="9525" cap="flat" cmpd="sng" algn="ctr">
+                      <a:solidFill>
+                        <a:srgbClr val="D5DEF0"/>
+                      </a:solidFill>
+                      <a:prstDash val="solid"/>
+                      <a:round/>
+                      <a:headEnd type="none" w="med" len="med"/>
+                      <a:tailEnd type="none" w="med" len="med"/>
+                    </a:lnL>
+                    <a:lnR w="9525" cap="flat" cmpd="sng" algn="ctr">
+                      <a:solidFill>
+                        <a:srgbClr val="D5DEF0"/>
+                      </a:solidFill>
+                      <a:prstDash val="solid"/>
+                      <a:round/>
+                      <a:headEnd type="none" w="med" len="med"/>
+                      <a:tailEnd type="none" w="med" len="med"/>
+                    </a:lnR>
+                    <a:lnT w="9525" cap="flat" cmpd="sng" algn="ctr">
+                      <a:solidFill>
+                        <a:srgbClr val="D5DEF0"/>
+                      </a:solidFill>
+                      <a:prstDash val="solid"/>
+                      <a:round/>
+                      <a:headEnd type="none" w="med" len="med"/>
+                      <a:tailEnd type="none" w="med" len="med"/>
+                    </a:lnT>
+                    <a:lnB w="9525" cap="flat" cmpd="sng" algn="ctr">
+                      <a:solidFill>
+                        <a:srgbClr val="D5DEF0"/>
+                      </a:solidFill>
+                      <a:prstDash val="solid"/>
+                      <a:round/>
+                      <a:headEnd type="none" w="med" len="med"/>
+                      <a:tailEnd type="none" w="med" len="med"/>
+                    </a:lnB>
+                  </a:tcPr>
+                </a:tc>
+              </a:tr>
+              <a:tr h="530352">
+                <a:tc>
+                  <a:txBody>
+                    <a:bodyPr/>
+                    <a:lstStyle/>
+                    <a:p>
+                      <a:pPr indent="0" marL="0">
+                        <a:buNone/>
+                      </a:pPr>
+                      <a:r>
+                        <a:rPr lang="en-US" sz="1050" b="1" dirty="0">
+                          <a:solidFill>
+                            <a:srgbClr val="1F2937"/>
+                          </a:solidFill>
+                          <a:latin typeface="Microsoft JhengHei" pitchFamily="34" charset="0"/>
+                          <a:ea typeface="Microsoft JhengHei" pitchFamily="34" charset="-122"/>
+                          <a:cs typeface="Microsoft JhengHei" pitchFamily="34" charset="-120"/>
+                        </a:rPr>
+                        <a:t>DynamoDB（憑證/審計/session）</a:t>
+                      </a:r>
+                      <a:endParaRPr lang="en-US" sz="1050" dirty="0">
+                        <a:latin typeface="Microsoft JhengHei" charset="0"/>
+                        <a:ea typeface="Microsoft JhengHei" charset="0"/>
+                        <a:cs typeface="Microsoft JhengHei" charset="0"/>
+                      </a:endParaRPr>
+                    </a:p>
+                  </a:txBody>
+                  <a:tcPr marL="54864" marR="54864" marT="54864" marB="54864" anchor="ctr">
+                    <a:lnL w="9525" cap="flat" cmpd="sng" algn="ctr">
+                      <a:solidFill>
+                        <a:srgbClr val="D5DEF0"/>
+                      </a:solidFill>
+                      <a:prstDash val="solid"/>
+                      <a:round/>
+                      <a:headEnd type="none" w="med" len="med"/>
+                      <a:tailEnd type="none" w="med" len="med"/>
+                    </a:lnL>
+                    <a:lnR w="9525" cap="flat" cmpd="sng" algn="ctr">
+                      <a:solidFill>
+                        <a:srgbClr val="D5DEF0"/>
+                      </a:solidFill>
+                      <a:prstDash val="solid"/>
+                      <a:round/>
+                      <a:headEnd type="none" w="med" len="med"/>
+                      <a:tailEnd type="none" w="med" len="med"/>
+                    </a:lnR>
+                    <a:lnT w="9525" cap="flat" cmpd="sng" algn="ctr">
+                      <a:solidFill>
+                        <a:srgbClr val="D5DEF0"/>
+                      </a:solidFill>
+                      <a:prstDash val="solid"/>
+                      <a:round/>
+                      <a:headEnd type="none" w="med" len="med"/>
+                      <a:tailEnd type="none" w="med" len="med"/>
+                    </a:lnT>
+                    <a:lnB w="9525" cap="flat" cmpd="sng" algn="ctr">
+                      <a:solidFill>
+                        <a:srgbClr val="D5DEF0"/>
+                      </a:solidFill>
+                      <a:prstDash val="solid"/>
+                      <a:round/>
+                      <a:headEnd type="none" w="med" len="med"/>
+                      <a:tailEnd type="none" w="med" len="med"/>
+                    </a:lnB>
+                  </a:tcPr>
+                </a:tc>
+                <a:tc>
+                  <a:txBody>
+                    <a:bodyPr/>
+                    <a:lstStyle/>
+                    <a:p>
+                      <a:pPr indent="0" marL="0">
+                        <a:buNone/>
+                      </a:pPr>
+                      <a:r>
+                        <a:rPr lang="en-US" sz="1050" dirty="0">
+                          <a:solidFill>
+                            <a:srgbClr val="6B7280"/>
+                          </a:solidFill>
+                          <a:latin typeface="Microsoft JhengHei" pitchFamily="34" charset="0"/>
+                          <a:ea typeface="Microsoft JhengHei" pitchFamily="34" charset="-122"/>
+                          <a:cs typeface="Microsoft JhengHei" pitchFamily="34" charset="-120"/>
+                        </a:rPr>
+                        <a:t>on-demand 依讀寫</a:t>
+                      </a:r>
+                      <a:endParaRPr lang="en-US" sz="1050" dirty="0">
+                        <a:latin typeface="Microsoft JhengHei" charset="0"/>
+                        <a:ea typeface="Microsoft JhengHei" charset="0"/>
+                        <a:cs typeface="Microsoft JhengHei" charset="0"/>
+                      </a:endParaRPr>
+                    </a:p>
+                  </a:txBody>
+                  <a:tcPr marL="54864" marR="54864" marT="54864" marB="54864" anchor="ctr">
+                    <a:lnL w="9525" cap="flat" cmpd="sng" algn="ctr">
+                      <a:solidFill>
+                        <a:srgbClr val="D5DEF0"/>
+                      </a:solidFill>
+                      <a:prstDash val="solid"/>
+                      <a:round/>
+                      <a:headEnd type="none" w="med" len="med"/>
+                      <a:tailEnd type="none" w="med" len="med"/>
+                    </a:lnL>
+                    <a:lnR w="9525" cap="flat" cmpd="sng" algn="ctr">
+                      <a:solidFill>
+                        <a:srgbClr val="D5DEF0"/>
+                      </a:solidFill>
+                      <a:prstDash val="solid"/>
+                      <a:round/>
+                      <a:headEnd type="none" w="med" len="med"/>
+                      <a:tailEnd type="none" w="med" len="med"/>
+                    </a:lnR>
+                    <a:lnT w="9525" cap="flat" cmpd="sng" algn="ctr">
+                      <a:solidFill>
+                        <a:srgbClr val="D5DEF0"/>
+                      </a:solidFill>
+                      <a:prstDash val="solid"/>
+                      <a:round/>
+                      <a:headEnd type="none" w="med" len="med"/>
+                      <a:tailEnd type="none" w="med" len="med"/>
+                    </a:lnT>
+                    <a:lnB w="9525" cap="flat" cmpd="sng" algn="ctr">
+                      <a:solidFill>
+                        <a:srgbClr val="D5DEF0"/>
+                      </a:solidFill>
+                      <a:prstDash val="solid"/>
+                      <a:round/>
+                      <a:headEnd type="none" w="med" len="med"/>
+                      <a:tailEnd type="none" w="med" len="med"/>
+                    </a:lnB>
+                  </a:tcPr>
+                </a:tc>
+                <a:tc>
+                  <a:txBody>
+                    <a:bodyPr/>
+                    <a:lstStyle/>
+                    <a:p>
+                      <a:pPr indent="0" marL="0">
+                        <a:buNone/>
+                      </a:pPr>
+                      <a:r>
+                        <a:rPr lang="en-US" sz="1050" dirty="0">
+                          <a:solidFill>
+                            <a:srgbClr val="16224D"/>
+                          </a:solidFill>
+                          <a:latin typeface="Microsoft JhengHei" pitchFamily="34" charset="0"/>
+                          <a:ea typeface="Microsoft JhengHei" pitchFamily="34" charset="-122"/>
+                          <a:cs typeface="Microsoft JhengHei" pitchFamily="34" charset="-120"/>
+                        </a:rPr>
+                        <a:t>≈NT$0</a:t>
+                      </a:r>
+                      <a:endParaRPr lang="en-US" sz="1050" dirty="0">
+                        <a:latin typeface="Microsoft JhengHei" charset="0"/>
+                        <a:ea typeface="Microsoft JhengHei" charset="0"/>
+                        <a:cs typeface="Microsoft JhengHei" charset="0"/>
+                      </a:endParaRPr>
+                    </a:p>
+                  </a:txBody>
+                  <a:tcPr marL="54864" marR="54864" marT="54864" marB="54864" anchor="ctr">
+                    <a:lnL w="9525" cap="flat" cmpd="sng" algn="ctr">
+                      <a:solidFill>
+                        <a:srgbClr val="D5DEF0"/>
+                      </a:solidFill>
+                      <a:prstDash val="solid"/>
+                      <a:round/>
+                      <a:headEnd type="none" w="med" len="med"/>
+                      <a:tailEnd type="none" w="med" len="med"/>
+                    </a:lnL>
+                    <a:lnR w="9525" cap="flat" cmpd="sng" algn="ctr">
+                      <a:solidFill>
+                        <a:srgbClr val="D5DEF0"/>
+                      </a:solidFill>
+                      <a:prstDash val="solid"/>
+                      <a:round/>
+                      <a:headEnd type="none" w="med" len="med"/>
+                      <a:tailEnd type="none" w="med" len="med"/>
+                    </a:lnR>
+                    <a:lnT w="9525" cap="flat" cmpd="sng" algn="ctr">
+                      <a:solidFill>
+                        <a:srgbClr val="D5DEF0"/>
+                      </a:solidFill>
+                      <a:prstDash val="solid"/>
+                      <a:round/>
+                      <a:headEnd type="none" w="med" len="med"/>
+                      <a:tailEnd type="none" w="med" len="med"/>
+                    </a:lnT>
+                    <a:lnB w="9525" cap="flat" cmpd="sng" algn="ctr">
+                      <a:solidFill>
+                        <a:srgbClr val="D5DEF0"/>
+                      </a:solidFill>
+                      <a:prstDash val="solid"/>
+                      <a:round/>
+                      <a:headEnd type="none" w="med" len="med"/>
+                      <a:tailEnd type="none" w="med" len="med"/>
+                    </a:lnB>
+                  </a:tcPr>
+                </a:tc>
+                <a:tc>
+                  <a:txBody>
+                    <a:bodyPr/>
+                    <a:lstStyle/>
+                    <a:p>
+                      <a:pPr indent="0" marL="0">
+                        <a:buNone/>
+                      </a:pPr>
+                      <a:r>
+                        <a:rPr lang="en-US" sz="1050" dirty="0">
+                          <a:solidFill>
+                            <a:srgbClr val="16224D"/>
+                          </a:solidFill>
+                          <a:latin typeface="Microsoft JhengHei" pitchFamily="34" charset="0"/>
+                          <a:ea typeface="Microsoft JhengHei" pitchFamily="34" charset="-122"/>
+                          <a:cs typeface="Microsoft JhengHei" pitchFamily="34" charset="-120"/>
+                        </a:rPr>
+                        <a:t>≈NT$0</a:t>
+                      </a:r>
+                      <a:endParaRPr lang="en-US" sz="1050" dirty="0">
+                        <a:latin typeface="Microsoft JhengHei" charset="0"/>
+                        <a:ea typeface="Microsoft JhengHei" charset="0"/>
+                        <a:cs typeface="Microsoft JhengHei" charset="0"/>
+                      </a:endParaRPr>
+                    </a:p>
+                  </a:txBody>
+                  <a:tcPr marL="54864" marR="54864" marT="54864" marB="54864" anchor="ctr">
+                    <a:lnL w="9525" cap="flat" cmpd="sng" algn="ctr">
+                      <a:solidFill>
+                        <a:srgbClr val="D5DEF0"/>
+                      </a:solidFill>
+                      <a:prstDash val="solid"/>
+                      <a:round/>
+                      <a:headEnd type="none" w="med" len="med"/>
+                      <a:tailEnd type="none" w="med" len="med"/>
+                    </a:lnL>
+                    <a:lnR w="9525" cap="flat" cmpd="sng" algn="ctr">
+                      <a:solidFill>
+                        <a:srgbClr val="D5DEF0"/>
+                      </a:solidFill>
+                      <a:prstDash val="solid"/>
+                      <a:round/>
+                      <a:headEnd type="none" w="med" len="med"/>
+                      <a:tailEnd type="none" w="med" len="med"/>
+                    </a:lnR>
+                    <a:lnT w="9525" cap="flat" cmpd="sng" algn="ctr">
+                      <a:solidFill>
+                        <a:srgbClr val="D5DEF0"/>
+                      </a:solidFill>
+                      <a:prstDash val="solid"/>
+                      <a:round/>
+                      <a:headEnd type="none" w="med" len="med"/>
+                      <a:tailEnd type="none" w="med" len="med"/>
+                    </a:lnT>
+                    <a:lnB w="9525" cap="flat" cmpd="sng" algn="ctr">
+                      <a:solidFill>
+                        <a:srgbClr val="D5DEF0"/>
+                      </a:solidFill>
+                      <a:prstDash val="solid"/>
+                      <a:round/>
+                      <a:headEnd type="none" w="med" len="med"/>
+                      <a:tailEnd type="none" w="med" len="med"/>
+                    </a:lnB>
+                  </a:tcPr>
+                </a:tc>
+                <a:tc>
+                  <a:txBody>
+                    <a:bodyPr/>
+                    <a:lstStyle/>
+                    <a:p>
+                      <a:pPr indent="0" marL="0">
+                        <a:buNone/>
+                      </a:pPr>
+                      <a:r>
+                        <a:rPr lang="en-US" sz="1050" dirty="0">
+                          <a:solidFill>
+                            <a:srgbClr val="16224D"/>
+                          </a:solidFill>
+                          <a:latin typeface="Microsoft JhengHei" pitchFamily="34" charset="0"/>
+                          <a:ea typeface="Microsoft JhengHei" pitchFamily="34" charset="-122"/>
+                          <a:cs typeface="Microsoft JhengHei" pitchFamily="34" charset="-120"/>
+                        </a:rPr>
+                        <a:t>&lt;NT$300</a:t>
+                      </a:r>
+                      <a:endParaRPr lang="en-US" sz="1050" dirty="0">
+                        <a:latin typeface="Microsoft JhengHei" charset="0"/>
+                        <a:ea typeface="Microsoft JhengHei" charset="0"/>
+                        <a:cs typeface="Microsoft JhengHei" charset="0"/>
+                      </a:endParaRPr>
+                    </a:p>
+                  </a:txBody>
+                  <a:tcPr marL="54864" marR="54864" marT="54864" marB="54864" anchor="ctr">
+                    <a:lnL w="9525" cap="flat" cmpd="sng" algn="ctr">
+                      <a:solidFill>
+                        <a:srgbClr val="D5DEF0"/>
+                      </a:solidFill>
+                      <a:prstDash val="solid"/>
+                      <a:round/>
+                      <a:headEnd type="none" w="med" len="med"/>
+                      <a:tailEnd type="none" w="med" len="med"/>
+                    </a:lnL>
+                    <a:lnR w="9525" cap="flat" cmpd="sng" algn="ctr">
+                      <a:solidFill>
+                        <a:srgbClr val="D5DEF0"/>
+                      </a:solidFill>
+                      <a:prstDash val="solid"/>
+                      <a:round/>
+                      <a:headEnd type="none" w="med" len="med"/>
+                      <a:tailEnd type="none" w="med" len="med"/>
+                    </a:lnR>
+                    <a:lnT w="9525" cap="flat" cmpd="sng" algn="ctr">
+                      <a:solidFill>
+                        <a:srgbClr val="D5DEF0"/>
+                      </a:solidFill>
+                      <a:prstDash val="solid"/>
+                      <a:round/>
+                      <a:headEnd type="none" w="med" len="med"/>
+                      <a:tailEnd type="none" w="med" len="med"/>
+                    </a:lnT>
+                    <a:lnB w="9525" cap="flat" cmpd="sng" algn="ctr">
+                      <a:solidFill>
+                        <a:srgbClr val="D5DEF0"/>
+                      </a:solidFill>
+                      <a:prstDash val="solid"/>
+                      <a:round/>
+                      <a:headEnd type="none" w="med" len="med"/>
+                      <a:tailEnd type="none" w="med" len="med"/>
+                    </a:lnB>
+                  </a:tcPr>
+                </a:tc>
+              </a:tr>
+              <a:tr h="530352">
+                <a:tc>
+                  <a:txBody>
+                    <a:bodyPr/>
+                    <a:lstStyle/>
+                    <a:p>
+                      <a:pPr indent="0" marL="0">
+                        <a:buNone/>
+                      </a:pPr>
+                      <a:r>
+                        <a:rPr lang="en-US" sz="1050" b="1" dirty="0">
+                          <a:solidFill>
+                            <a:srgbClr val="1F2937"/>
+                          </a:solidFill>
+                          <a:latin typeface="Microsoft JhengHei" pitchFamily="34" charset="0"/>
+                          <a:ea typeface="Microsoft JhengHei" pitchFamily="34" charset="-122"/>
+                          <a:cs typeface="Microsoft JhengHei" pitchFamily="34" charset="-120"/>
+                        </a:rPr>
+                        <a:t>S3＋CloudFront（前端/資料）</a:t>
+                      </a:r>
+                      <a:endParaRPr lang="en-US" sz="1050" dirty="0">
+                        <a:latin typeface="Microsoft JhengHei" charset="0"/>
+                        <a:ea typeface="Microsoft JhengHei" charset="0"/>
+                        <a:cs typeface="Microsoft JhengHei" charset="0"/>
+                      </a:endParaRPr>
+                    </a:p>
+                  </a:txBody>
+                  <a:tcPr marL="54864" marR="54864" marT="54864" marB="54864" anchor="ctr">
+                    <a:lnL w="9525" cap="flat" cmpd="sng" algn="ctr">
+                      <a:solidFill>
+                        <a:srgbClr val="D5DEF0"/>
+                      </a:solidFill>
+                      <a:prstDash val="solid"/>
+                      <a:round/>
+                      <a:headEnd type="none" w="med" len="med"/>
+                      <a:tailEnd type="none" w="med" len="med"/>
+                    </a:lnL>
+                    <a:lnR w="9525" cap="flat" cmpd="sng" algn="ctr">
+                      <a:solidFill>
+                        <a:srgbClr val="D5DEF0"/>
+                      </a:solidFill>
+                      <a:prstDash val="solid"/>
+                      <a:round/>
+                      <a:headEnd type="none" w="med" len="med"/>
+                      <a:tailEnd type="none" w="med" len="med"/>
+                    </a:lnR>
+                    <a:lnT w="9525" cap="flat" cmpd="sng" algn="ctr">
+                      <a:solidFill>
+                        <a:srgbClr val="D5DEF0"/>
+                      </a:solidFill>
+                      <a:prstDash val="solid"/>
+                      <a:round/>
+                      <a:headEnd type="none" w="med" len="med"/>
+                      <a:tailEnd type="none" w="med" len="med"/>
+                    </a:lnT>
+                    <a:lnB w="9525" cap="flat" cmpd="sng" algn="ctr">
+                      <a:solidFill>
+                        <a:srgbClr val="D5DEF0"/>
+                      </a:solidFill>
+                      <a:prstDash val="solid"/>
+                      <a:round/>
+                      <a:headEnd type="none" w="med" len="med"/>
+                      <a:tailEnd type="none" w="med" len="med"/>
+                    </a:lnB>
+                  </a:tcPr>
+                </a:tc>
+                <a:tc>
+                  <a:txBody>
+                    <a:bodyPr/>
+                    <a:lstStyle/>
+                    <a:p>
+                      <a:pPr indent="0" marL="0">
+                        <a:buNone/>
+                      </a:pPr>
+                      <a:r>
+                        <a:rPr lang="en-US" sz="1050" dirty="0">
+                          <a:solidFill>
+                            <a:srgbClr val="6B7280"/>
+                          </a:solidFill>
+                          <a:latin typeface="Microsoft JhengHei" pitchFamily="34" charset="0"/>
+                          <a:ea typeface="Microsoft JhengHei" pitchFamily="34" charset="-122"/>
+                          <a:cs typeface="Microsoft JhengHei" pitchFamily="34" charset="-120"/>
+                        </a:rPr>
+                        <a:t>儲存＋流量</a:t>
+                      </a:r>
+                      <a:endParaRPr lang="en-US" sz="1050" dirty="0">
+                        <a:latin typeface="Microsoft JhengHei" charset="0"/>
+                        <a:ea typeface="Microsoft JhengHei" charset="0"/>
+                        <a:cs typeface="Microsoft JhengHei" charset="0"/>
+                      </a:endParaRPr>
+                    </a:p>
+                  </a:txBody>
+                  <a:tcPr marL="54864" marR="54864" marT="54864" marB="54864" anchor="ctr">
+                    <a:lnL w="9525" cap="flat" cmpd="sng" algn="ctr">
+                      <a:solidFill>
+                        <a:srgbClr val="D5DEF0"/>
+                      </a:solidFill>
+                      <a:prstDash val="solid"/>
+                      <a:round/>
+                      <a:headEnd type="none" w="med" len="med"/>
+                      <a:tailEnd type="none" w="med" len="med"/>
+                    </a:lnL>
+                    <a:lnR w="9525" cap="flat" cmpd="sng" algn="ctr">
+                      <a:solidFill>
+                        <a:srgbClr val="D5DEF0"/>
+                      </a:solidFill>
+                      <a:prstDash val="solid"/>
+                      <a:round/>
+                      <a:headEnd type="none" w="med" len="med"/>
+                      <a:tailEnd type="none" w="med" len="med"/>
+                    </a:lnR>
+                    <a:lnT w="9525" cap="flat" cmpd="sng" algn="ctr">
+                      <a:solidFill>
+                        <a:srgbClr val="D5DEF0"/>
+                      </a:solidFill>
+                      <a:prstDash val="solid"/>
+                      <a:round/>
+                      <a:headEnd type="none" w="med" len="med"/>
+                      <a:tailEnd type="none" w="med" len="med"/>
+                    </a:lnT>
+                    <a:lnB w="9525" cap="flat" cmpd="sng" algn="ctr">
+                      <a:solidFill>
+                        <a:srgbClr val="D5DEF0"/>
+                      </a:solidFill>
+                      <a:prstDash val="solid"/>
+                      <a:round/>
+                      <a:headEnd type="none" w="med" len="med"/>
+                      <a:tailEnd type="none" w="med" len="med"/>
+                    </a:lnB>
+                  </a:tcPr>
+                </a:tc>
+                <a:tc>
+                  <a:txBody>
+                    <a:bodyPr/>
+                    <a:lstStyle/>
+                    <a:p>
+                      <a:pPr indent="0" marL="0">
+                        <a:buNone/>
+                      </a:pPr>
+                      <a:r>
+                        <a:rPr lang="en-US" sz="1050" dirty="0">
+                          <a:solidFill>
+                            <a:srgbClr val="16224D"/>
+                          </a:solidFill>
+                          <a:latin typeface="Microsoft JhengHei" pitchFamily="34" charset="0"/>
+                          <a:ea typeface="Microsoft JhengHei" pitchFamily="34" charset="-122"/>
+                          <a:cs typeface="Microsoft JhengHei" pitchFamily="34" charset="-120"/>
+                        </a:rPr>
+                        <a:t>&lt;NT$30</a:t>
+                      </a:r>
+                      <a:endParaRPr lang="en-US" sz="1050" dirty="0">
+                        <a:latin typeface="Microsoft JhengHei" charset="0"/>
+                        <a:ea typeface="Microsoft JhengHei" charset="0"/>
+                        <a:cs typeface="Microsoft JhengHei" charset="0"/>
+                      </a:endParaRPr>
+                    </a:p>
+                  </a:txBody>
+                  <a:tcPr marL="54864" marR="54864" marT="54864" marB="54864" anchor="ctr">
+                    <a:lnL w="9525" cap="flat" cmpd="sng" algn="ctr">
+                      <a:solidFill>
+                        <a:srgbClr val="D5DEF0"/>
+                      </a:solidFill>
+                      <a:prstDash val="solid"/>
+                      <a:round/>
+                      <a:headEnd type="none" w="med" len="med"/>
+                      <a:tailEnd type="none" w="med" len="med"/>
+                    </a:lnL>
+                    <a:lnR w="9525" cap="flat" cmpd="sng" algn="ctr">
+                      <a:solidFill>
+                        <a:srgbClr val="D5DEF0"/>
+                      </a:solidFill>
+                      <a:prstDash val="solid"/>
+                      <a:round/>
+                      <a:headEnd type="none" w="med" len="med"/>
+                      <a:tailEnd type="none" w="med" len="med"/>
+                    </a:lnR>
+                    <a:lnT w="9525" cap="flat" cmpd="sng" algn="ctr">
+                      <a:solidFill>
+                        <a:srgbClr val="D5DEF0"/>
+                      </a:solidFill>
+                      <a:prstDash val="solid"/>
+                      <a:round/>
+                      <a:headEnd type="none" w="med" len="med"/>
+                      <a:tailEnd type="none" w="med" len="med"/>
+                    </a:lnT>
+                    <a:lnB w="9525" cap="flat" cmpd="sng" algn="ctr">
+                      <a:solidFill>
+                        <a:srgbClr val="D5DEF0"/>
+                      </a:solidFill>
+                      <a:prstDash val="solid"/>
+                      <a:round/>
+                      <a:headEnd type="none" w="med" len="med"/>
+                      <a:tailEnd type="none" w="med" len="med"/>
+                    </a:lnB>
+                  </a:tcPr>
+                </a:tc>
+                <a:tc>
+                  <a:txBody>
+                    <a:bodyPr/>
+                    <a:lstStyle/>
+                    <a:p>
+                      <a:pPr indent="0" marL="0">
+                        <a:buNone/>
+                      </a:pPr>
+                      <a:r>
+                        <a:rPr lang="en-US" sz="1050" dirty="0">
+                          <a:solidFill>
+                            <a:srgbClr val="16224D"/>
+                          </a:solidFill>
+                          <a:latin typeface="Microsoft JhengHei" pitchFamily="34" charset="0"/>
+                          <a:ea typeface="Microsoft JhengHei" pitchFamily="34" charset="-122"/>
+                          <a:cs typeface="Microsoft JhengHei" pitchFamily="34" charset="-120"/>
+                        </a:rPr>
+                        <a:t>&lt;NT$30</a:t>
+                      </a:r>
+                      <a:endParaRPr lang="en-US" sz="1050" dirty="0">
+                        <a:latin typeface="Microsoft JhengHei" charset="0"/>
+                        <a:ea typeface="Microsoft JhengHei" charset="0"/>
+                        <a:cs typeface="Microsoft JhengHei" charset="0"/>
+                      </a:endParaRPr>
+                    </a:p>
+                  </a:txBody>
+                  <a:tcPr marL="54864" marR="54864" marT="54864" marB="54864" anchor="ctr">
+                    <a:lnL w="9525" cap="flat" cmpd="sng" algn="ctr">
+                      <a:solidFill>
+                        <a:srgbClr val="D5DEF0"/>
+                      </a:solidFill>
+                      <a:prstDash val="solid"/>
+                      <a:round/>
+                      <a:headEnd type="none" w="med" len="med"/>
+                      <a:tailEnd type="none" w="med" len="med"/>
+                    </a:lnL>
+                    <a:lnR w="9525" cap="flat" cmpd="sng" algn="ctr">
+                      <a:solidFill>
+                        <a:srgbClr val="D5DEF0"/>
+                      </a:solidFill>
+                      <a:prstDash val="solid"/>
+                      <a:round/>
+                      <a:headEnd type="none" w="med" len="med"/>
+                      <a:tailEnd type="none" w="med" len="med"/>
+                    </a:lnR>
+                    <a:lnT w="9525" cap="flat" cmpd="sng" algn="ctr">
+                      <a:solidFill>
+                        <a:srgbClr val="D5DEF0"/>
+                      </a:solidFill>
+                      <a:prstDash val="solid"/>
+                      <a:round/>
+                      <a:headEnd type="none" w="med" len="med"/>
+                      <a:tailEnd type="none" w="med" len="med"/>
+                    </a:lnT>
+                    <a:lnB w="9525" cap="flat" cmpd="sng" algn="ctr">
+                      <a:solidFill>
+                        <a:srgbClr val="D5DEF0"/>
+                      </a:solidFill>
+                      <a:prstDash val="solid"/>
+                      <a:round/>
+                      <a:headEnd type="none" w="med" len="med"/>
+                      <a:tailEnd type="none" w="med" len="med"/>
+                    </a:lnB>
+                  </a:tcPr>
+                </a:tc>
+                <a:tc>
+                  <a:txBody>
+                    <a:bodyPr/>
+                    <a:lstStyle/>
+                    <a:p>
+                      <a:pPr indent="0" marL="0">
+                        <a:buNone/>
+                      </a:pPr>
+                      <a:r>
+                        <a:rPr lang="en-US" sz="1050" dirty="0">
+                          <a:solidFill>
+                            <a:srgbClr val="16224D"/>
+                          </a:solidFill>
+                          <a:latin typeface="Microsoft JhengHei" pitchFamily="34" charset="0"/>
+                          <a:ea typeface="Microsoft JhengHei" pitchFamily="34" charset="-122"/>
+                          <a:cs typeface="Microsoft JhengHei" pitchFamily="34" charset="-120"/>
+                        </a:rPr>
+                        <a:t>&lt;NT$500</a:t>
+                      </a:r>
+                      <a:endParaRPr lang="en-US" sz="1050" dirty="0">
+                        <a:latin typeface="Microsoft JhengHei" charset="0"/>
+                        <a:ea typeface="Microsoft JhengHei" charset="0"/>
+                        <a:cs typeface="Microsoft JhengHei" charset="0"/>
+                      </a:endParaRPr>
+                    </a:p>
+                  </a:txBody>
+                  <a:tcPr marL="54864" marR="54864" marT="54864" marB="54864" anchor="ctr">
+                    <a:lnL w="9525" cap="flat" cmpd="sng" algn="ctr">
+                      <a:solidFill>
+                        <a:srgbClr val="D5DEF0"/>
+                      </a:solidFill>
+                      <a:prstDash val="solid"/>
+                      <a:round/>
+                      <a:headEnd type="none" w="med" len="med"/>
+                      <a:tailEnd type="none" w="med" len="med"/>
+                    </a:lnL>
+                    <a:lnR w="9525" cap="flat" cmpd="sng" algn="ctr">
+                      <a:solidFill>
+                        <a:srgbClr val="D5DEF0"/>
+                      </a:solidFill>
+                      <a:prstDash val="solid"/>
+                      <a:round/>
+                      <a:headEnd type="none" w="med" len="med"/>
+                      <a:tailEnd type="none" w="med" len="med"/>
+                    </a:lnR>
+                    <a:lnT w="9525" cap="flat" cmpd="sng" algn="ctr">
+                      <a:solidFill>
+                        <a:srgbClr val="D5DEF0"/>
+                      </a:solidFill>
+                      <a:prstDash val="solid"/>
+                      <a:round/>
+                      <a:headEnd type="none" w="med" len="med"/>
+                      <a:tailEnd type="none" w="med" len="med"/>
+                    </a:lnT>
+                    <a:lnB w="9525" cap="flat" cmpd="sng" algn="ctr">
+                      <a:solidFill>
+                        <a:srgbClr val="D5DEF0"/>
+                      </a:solidFill>
+                      <a:prstDash val="solid"/>
+                      <a:round/>
+                      <a:headEnd type="none" w="med" len="med"/>
+                      <a:tailEnd type="none" w="med" len="med"/>
+                    </a:lnB>
+                  </a:tcPr>
+                </a:tc>
+              </a:tr>
+              <a:tr h="530352">
+                <a:tc>
+                  <a:txBody>
+                    <a:bodyPr/>
+                    <a:lstStyle/>
+                    <a:p>
+                      <a:pPr indent="0" marL="0">
+                        <a:buNone/>
+                      </a:pPr>
+                      <a:r>
+                        <a:rPr lang="en-US" sz="1050" b="1" dirty="0">
+                          <a:solidFill>
+                            <a:srgbClr val="1F2937"/>
+                          </a:solidFill>
+                          <a:latin typeface="Microsoft JhengHei" pitchFamily="34" charset="0"/>
+                          <a:ea typeface="Microsoft JhengHei" pitchFamily="34" charset="-122"/>
+                          <a:cs typeface="Microsoft JhengHei" pitchFamily="34" charset="-120"/>
+                        </a:rPr>
+                        <a:t>Knowledge Base＋S3 Vectors</a:t>
+                      </a:r>
+                      <a:endParaRPr lang="en-US" sz="1050" dirty="0">
+                        <a:latin typeface="Microsoft JhengHei" charset="0"/>
+                        <a:ea typeface="Microsoft JhengHei" charset="0"/>
+                        <a:cs typeface="Microsoft JhengHei" charset="0"/>
+                      </a:endParaRPr>
+                    </a:p>
+                  </a:txBody>
+                  <a:tcPr marL="54864" marR="54864" marT="54864" marB="54864" anchor="ctr">
+                    <a:lnL w="9525" cap="flat" cmpd="sng" algn="ctr">
+                      <a:solidFill>
+                        <a:srgbClr val="D5DEF0"/>
+                      </a:solidFill>
+                      <a:prstDash val="solid"/>
+                      <a:round/>
+                      <a:headEnd type="none" w="med" len="med"/>
+                      <a:tailEnd type="none" w="med" len="med"/>
+                    </a:lnL>
+                    <a:lnR w="9525" cap="flat" cmpd="sng" algn="ctr">
+                      <a:solidFill>
+                        <a:srgbClr val="D5DEF0"/>
+                      </a:solidFill>
+                      <a:prstDash val="solid"/>
+                      <a:round/>
+                      <a:headEnd type="none" w="med" len="med"/>
+                      <a:tailEnd type="none" w="med" len="med"/>
+                    </a:lnR>
+                    <a:lnT w="9525" cap="flat" cmpd="sng" algn="ctr">
+                      <a:solidFill>
+                        <a:srgbClr val="D5DEF0"/>
+                      </a:solidFill>
+                      <a:prstDash val="solid"/>
+                      <a:round/>
+                      <a:headEnd type="none" w="med" len="med"/>
+                      <a:tailEnd type="none" w="med" len="med"/>
+                    </a:lnT>
+                    <a:lnB w="9525" cap="flat" cmpd="sng" algn="ctr">
+                      <a:solidFill>
+                        <a:srgbClr val="D5DEF0"/>
+                      </a:solidFill>
+                      <a:prstDash val="solid"/>
+                      <a:round/>
+                      <a:headEnd type="none" w="med" len="med"/>
+                      <a:tailEnd type="none" w="med" len="med"/>
+                    </a:lnB>
+                  </a:tcPr>
+                </a:tc>
+                <a:tc>
+                  <a:txBody>
+                    <a:bodyPr/>
+                    <a:lstStyle/>
+                    <a:p>
+                      <a:pPr indent="0" marL="0">
+                        <a:buNone/>
+                      </a:pPr>
+                      <a:r>
+                        <a:rPr lang="en-US" sz="1050" dirty="0">
+                          <a:solidFill>
+                            <a:srgbClr val="6B7280"/>
+                          </a:solidFill>
+                          <a:latin typeface="Microsoft JhengHei" pitchFamily="34" charset="0"/>
+                          <a:ea typeface="Microsoft JhengHei" pitchFamily="34" charset="-122"/>
+                          <a:cs typeface="Microsoft JhengHei" pitchFamily="34" charset="-120"/>
+                        </a:rPr>
+                        <a:t>embedding 一次性＋向量儲存</a:t>
+                      </a:r>
+                      <a:endParaRPr lang="en-US" sz="1050" dirty="0">
+                        <a:latin typeface="Microsoft JhengHei" charset="0"/>
+                        <a:ea typeface="Microsoft JhengHei" charset="0"/>
+                        <a:cs typeface="Microsoft JhengHei" charset="0"/>
+                      </a:endParaRPr>
+                    </a:p>
+                  </a:txBody>
+                  <a:tcPr marL="54864" marR="54864" marT="54864" marB="54864" anchor="ctr">
+                    <a:lnL w="9525" cap="flat" cmpd="sng" algn="ctr">
+                      <a:solidFill>
+                        <a:srgbClr val="D5DEF0"/>
+                      </a:solidFill>
+                      <a:prstDash val="solid"/>
+                      <a:round/>
+                      <a:headEnd type="none" w="med" len="med"/>
+                      <a:tailEnd type="none" w="med" len="med"/>
+                    </a:lnL>
+                    <a:lnR w="9525" cap="flat" cmpd="sng" algn="ctr">
+                      <a:solidFill>
+                        <a:srgbClr val="D5DEF0"/>
+                      </a:solidFill>
+                      <a:prstDash val="solid"/>
+                      <a:round/>
+                      <a:headEnd type="none" w="med" len="med"/>
+                      <a:tailEnd type="none" w="med" len="med"/>
+                    </a:lnR>
+                    <a:lnT w="9525" cap="flat" cmpd="sng" algn="ctr">
+                      <a:solidFill>
+                        <a:srgbClr val="D5DEF0"/>
+                      </a:solidFill>
+                      <a:prstDash val="solid"/>
+                      <a:round/>
+                      <a:headEnd type="none" w="med" len="med"/>
+                      <a:tailEnd type="none" w="med" len="med"/>
+                    </a:lnT>
+                    <a:lnB w="9525" cap="flat" cmpd="sng" algn="ctr">
+                      <a:solidFill>
+                        <a:srgbClr val="D5DEF0"/>
+                      </a:solidFill>
+                      <a:prstDash val="solid"/>
+                      <a:round/>
+                      <a:headEnd type="none" w="med" len="med"/>
+                      <a:tailEnd type="none" w="med" len="med"/>
+                    </a:lnB>
+                  </a:tcPr>
+                </a:tc>
+                <a:tc>
+                  <a:txBody>
+                    <a:bodyPr/>
+                    <a:lstStyle/>
+                    <a:p>
+                      <a:pPr indent="0" marL="0">
+                        <a:buNone/>
+                      </a:pPr>
+                      <a:r>
+                        <a:rPr lang="en-US" sz="1050" dirty="0">
+                          <a:solidFill>
+                            <a:srgbClr val="16224D"/>
+                          </a:solidFill>
+                          <a:latin typeface="Microsoft JhengHei" pitchFamily="34" charset="0"/>
+                          <a:ea typeface="Microsoft JhengHei" pitchFamily="34" charset="-122"/>
+                          <a:cs typeface="Microsoft JhengHei" pitchFamily="34" charset="-120"/>
+                        </a:rPr>
+                        <a:t>&lt;NT$50（語料小）</a:t>
+                      </a:r>
+                      <a:endParaRPr lang="en-US" sz="1050" dirty="0">
+                        <a:latin typeface="Microsoft JhengHei" charset="0"/>
+                        <a:ea typeface="Microsoft JhengHei" charset="0"/>
+                        <a:cs typeface="Microsoft JhengHei" charset="0"/>
+                      </a:endParaRPr>
+                    </a:p>
+                  </a:txBody>
+                  <a:tcPr marL="54864" marR="54864" marT="54864" marB="54864" anchor="ctr">
+                    <a:lnL w="9525" cap="flat" cmpd="sng" algn="ctr">
+                      <a:solidFill>
+                        <a:srgbClr val="D5DEF0"/>
+                      </a:solidFill>
+                      <a:prstDash val="solid"/>
+                      <a:round/>
+                      <a:headEnd type="none" w="med" len="med"/>
+                      <a:tailEnd type="none" w="med" len="med"/>
+                    </a:lnL>
+                    <a:lnR w="9525" cap="flat" cmpd="sng" algn="ctr">
+                      <a:solidFill>
+                        <a:srgbClr val="D5DEF0"/>
+                      </a:solidFill>
+                      <a:prstDash val="solid"/>
+                      <a:round/>
+                      <a:headEnd type="none" w="med" len="med"/>
+                      <a:tailEnd type="none" w="med" len="med"/>
+                    </a:lnR>
+                    <a:lnT w="9525" cap="flat" cmpd="sng" algn="ctr">
+                      <a:solidFill>
+                        <a:srgbClr val="D5DEF0"/>
+                      </a:solidFill>
+                      <a:prstDash val="solid"/>
+                      <a:round/>
+                      <a:headEnd type="none" w="med" len="med"/>
+                      <a:tailEnd type="none" w="med" len="med"/>
+                    </a:lnT>
+                    <a:lnB w="9525" cap="flat" cmpd="sng" algn="ctr">
+                      <a:solidFill>
+                        <a:srgbClr val="D5DEF0"/>
+                      </a:solidFill>
+                      <a:prstDash val="solid"/>
+                      <a:round/>
+                      <a:headEnd type="none" w="med" len="med"/>
+                      <a:tailEnd type="none" w="med" len="med"/>
+                    </a:lnB>
+                  </a:tcPr>
+                </a:tc>
+                <a:tc>
+                  <a:txBody>
+                    <a:bodyPr/>
+                    <a:lstStyle/>
+                    <a:p>
+                      <a:pPr indent="0" marL="0">
+                        <a:buNone/>
+                      </a:pPr>
+                      <a:r>
+                        <a:rPr lang="en-US" sz="1050" dirty="0">
+                          <a:solidFill>
+                            <a:srgbClr val="16224D"/>
+                          </a:solidFill>
+                          <a:latin typeface="Microsoft JhengHei" pitchFamily="34" charset="0"/>
+                          <a:ea typeface="Microsoft JhengHei" pitchFamily="34" charset="-122"/>
+                          <a:cs typeface="Microsoft JhengHei" pitchFamily="34" charset="-120"/>
+                        </a:rPr>
+                        <a:t>查詢零頭</a:t>
+                      </a:r>
+                      <a:endParaRPr lang="en-US" sz="1050" dirty="0">
+                        <a:latin typeface="Microsoft JhengHei" charset="0"/>
+                        <a:ea typeface="Microsoft JhengHei" charset="0"/>
+                        <a:cs typeface="Microsoft JhengHei" charset="0"/>
+                      </a:endParaRPr>
+                    </a:p>
+                  </a:txBody>
+                  <a:tcPr marL="54864" marR="54864" marT="54864" marB="54864" anchor="ctr">
+                    <a:lnL w="9525" cap="flat" cmpd="sng" algn="ctr">
+                      <a:solidFill>
+                        <a:srgbClr val="D5DEF0"/>
+                      </a:solidFill>
+                      <a:prstDash val="solid"/>
+                      <a:round/>
+                      <a:headEnd type="none" w="med" len="med"/>
+                      <a:tailEnd type="none" w="med" len="med"/>
+                    </a:lnL>
+                    <a:lnR w="9525" cap="flat" cmpd="sng" algn="ctr">
+                      <a:solidFill>
+                        <a:srgbClr val="D5DEF0"/>
+                      </a:solidFill>
+                      <a:prstDash val="solid"/>
+                      <a:round/>
+                      <a:headEnd type="none" w="med" len="med"/>
+                      <a:tailEnd type="none" w="med" len="med"/>
+                    </a:lnR>
+                    <a:lnT w="9525" cap="flat" cmpd="sng" algn="ctr">
+                      <a:solidFill>
+                        <a:srgbClr val="D5DEF0"/>
+                      </a:solidFill>
+                      <a:prstDash val="solid"/>
+                      <a:round/>
+                      <a:headEnd type="none" w="med" len="med"/>
+                      <a:tailEnd type="none" w="med" len="med"/>
+                    </a:lnT>
+                    <a:lnB w="9525" cap="flat" cmpd="sng" algn="ctr">
+                      <a:solidFill>
+                        <a:srgbClr val="D5DEF0"/>
+                      </a:solidFill>
+                      <a:prstDash val="solid"/>
+                      <a:round/>
+                      <a:headEnd type="none" w="med" len="med"/>
+                      <a:tailEnd type="none" w="med" len="med"/>
+                    </a:lnB>
+                  </a:tcPr>
+                </a:tc>
+                <a:tc>
+                  <a:txBody>
+                    <a:bodyPr/>
+                    <a:lstStyle/>
+                    <a:p>
+                      <a:pPr indent="0" marL="0">
+                        <a:buNone/>
+                      </a:pPr>
+                      <a:r>
+                        <a:rPr lang="en-US" sz="1050" dirty="0">
+                          <a:solidFill>
+                            <a:srgbClr val="16224D"/>
+                          </a:solidFill>
+                          <a:latin typeface="Microsoft JhengHei" pitchFamily="34" charset="0"/>
+                          <a:ea typeface="Microsoft JhengHei" pitchFamily="34" charset="-122"/>
+                          <a:cs typeface="Microsoft JhengHei" pitchFamily="34" charset="-120"/>
+                        </a:rPr>
+                        <a:t>&lt;NT$700</a:t>
+                      </a:r>
+                      <a:endParaRPr lang="en-US" sz="1050" dirty="0">
+                        <a:latin typeface="Microsoft JhengHei" charset="0"/>
+                        <a:ea typeface="Microsoft JhengHei" charset="0"/>
+                        <a:cs typeface="Microsoft JhengHei" charset="0"/>
+                      </a:endParaRPr>
+                    </a:p>
+                  </a:txBody>
+                  <a:tcPr marL="54864" marR="54864" marT="54864" marB="54864" anchor="ctr">
+                    <a:lnL w="9525" cap="flat" cmpd="sng" algn="ctr">
+                      <a:solidFill>
+                        <a:srgbClr val="D5DEF0"/>
+                      </a:solidFill>
+                      <a:prstDash val="solid"/>
+                      <a:round/>
+                      <a:headEnd type="none" w="med" len="med"/>
+                      <a:tailEnd type="none" w="med" len="med"/>
+                    </a:lnL>
+                    <a:lnR w="9525" cap="flat" cmpd="sng" algn="ctr">
+                      <a:solidFill>
+                        <a:srgbClr val="D5DEF0"/>
+                      </a:solidFill>
+                      <a:prstDash val="solid"/>
+                      <a:round/>
+                      <a:headEnd type="none" w="med" len="med"/>
+                      <a:tailEnd type="none" w="med" len="med"/>
+                    </a:lnR>
+                    <a:lnT w="9525" cap="flat" cmpd="sng" algn="ctr">
+                      <a:solidFill>
+                        <a:srgbClr val="D5DEF0"/>
+                      </a:solidFill>
+                      <a:prstDash val="solid"/>
+                      <a:round/>
+                      <a:headEnd type="none" w="med" len="med"/>
+                      <a:tailEnd type="none" w="med" len="med"/>
+                    </a:lnT>
+                    <a:lnB w="9525" cap="flat" cmpd="sng" algn="ctr">
+                      <a:solidFill>
+                        <a:srgbClr val="D5DEF0"/>
+                      </a:solidFill>
+                      <a:prstDash val="solid"/>
+                      <a:round/>
+                      <a:headEnd type="none" w="med" len="med"/>
+                      <a:tailEnd type="none" w="med" len="med"/>
+                    </a:lnB>
+                  </a:tcPr>
+                </a:tc>
+              </a:tr>
+              <a:tr h="530352">
+                <a:tc>
+                  <a:txBody>
+                    <a:bodyPr/>
+                    <a:lstStyle/>
+                    <a:p>
+                      <a:pPr indent="0" marL="0">
+                        <a:buNone/>
+                      </a:pPr>
+                      <a:r>
+                        <a:rPr lang="en-US" sz="1050" b="1" dirty="0">
+                          <a:solidFill>
+                            <a:srgbClr val="1F2937"/>
+                          </a:solidFill>
+                          <a:latin typeface="Microsoft JhengHei" pitchFamily="34" charset="0"/>
+                          <a:ea typeface="Microsoft JhengHei" pitchFamily="34" charset="-122"/>
+                          <a:cs typeface="Microsoft JhengHei" pitchFamily="34" charset="-120"/>
+                        </a:rPr>
+                        <a:t>MAX API</a:t>
+                      </a:r>
+                      <a:endParaRPr lang="en-US" sz="1050" dirty="0">
+                        <a:latin typeface="Microsoft JhengHei" charset="0"/>
+                        <a:ea typeface="Microsoft JhengHei" charset="0"/>
+                        <a:cs typeface="Microsoft JhengHei" charset="0"/>
+                      </a:endParaRPr>
+                    </a:p>
+                  </a:txBody>
+                  <a:tcPr marL="54864" marR="54864" marT="54864" marB="54864" anchor="ctr">
+                    <a:lnL w="9525" cap="flat" cmpd="sng" algn="ctr">
+                      <a:solidFill>
+                        <a:srgbClr val="D5DEF0"/>
+                      </a:solidFill>
+                      <a:prstDash val="solid"/>
+                      <a:round/>
+                      <a:headEnd type="none" w="med" len="med"/>
+                      <a:tailEnd type="none" w="med" len="med"/>
+                    </a:lnL>
+                    <a:lnR w="9525" cap="flat" cmpd="sng" algn="ctr">
+                      <a:solidFill>
+                        <a:srgbClr val="D5DEF0"/>
+                      </a:solidFill>
+                      <a:prstDash val="solid"/>
+                      <a:round/>
+                      <a:headEnd type="none" w="med" len="med"/>
+                      <a:tailEnd type="none" w="med" len="med"/>
+                    </a:lnR>
+                    <a:lnT w="9525" cap="flat" cmpd="sng" algn="ctr">
+                      <a:solidFill>
+                        <a:srgbClr val="D5DEF0"/>
+                      </a:solidFill>
+                      <a:prstDash val="solid"/>
+                      <a:round/>
+                      <a:headEnd type="none" w="med" len="med"/>
+                      <a:tailEnd type="none" w="med" len="med"/>
+                    </a:lnT>
+                    <a:lnB w="9525" cap="flat" cmpd="sng" algn="ctr">
+                      <a:solidFill>
+                        <a:srgbClr val="D5DEF0"/>
+                      </a:solidFill>
+                      <a:prstDash val="solid"/>
+                      <a:round/>
+                      <a:headEnd type="none" w="med" len="med"/>
+                      <a:tailEnd type="none" w="med" len="med"/>
+                    </a:lnB>
+                  </a:tcPr>
+                </a:tc>
+                <a:tc>
+                  <a:txBody>
+                    <a:bodyPr/>
+                    <a:lstStyle/>
+                    <a:p>
+                      <a:pPr indent="0" marL="0">
+                        <a:buNone/>
+                      </a:pPr>
+                      <a:r>
+                        <a:rPr lang="en-US" sz="1050" dirty="0">
+                          <a:solidFill>
+                            <a:srgbClr val="6B7280"/>
+                          </a:solidFill>
+                          <a:latin typeface="Microsoft JhengHei" pitchFamily="34" charset="0"/>
+                          <a:ea typeface="Microsoft JhengHei" pitchFamily="34" charset="-122"/>
+                          <a:cs typeface="Microsoft JhengHei" pitchFamily="34" charset="-120"/>
+                        </a:rPr>
+                        <a:t>呼叫免費；成交才收手續費</a:t>
+                      </a:r>
+                      <a:endParaRPr lang="en-US" sz="1050" dirty="0">
+                        <a:latin typeface="Microsoft JhengHei" charset="0"/>
+                        <a:ea typeface="Microsoft JhengHei" charset="0"/>
+                        <a:cs typeface="Microsoft JhengHei" charset="0"/>
+                      </a:endParaRPr>
+                    </a:p>
+                  </a:txBody>
+                  <a:tcPr marL="54864" marR="54864" marT="54864" marB="54864" anchor="ctr">
+                    <a:lnL w="9525" cap="flat" cmpd="sng" algn="ctr">
+                      <a:solidFill>
+                        <a:srgbClr val="D5DEF0"/>
+                      </a:solidFill>
+                      <a:prstDash val="solid"/>
+                      <a:round/>
+                      <a:headEnd type="none" w="med" len="med"/>
+                      <a:tailEnd type="none" w="med" len="med"/>
+                    </a:lnL>
+                    <a:lnR w="9525" cap="flat" cmpd="sng" algn="ctr">
+                      <a:solidFill>
+                        <a:srgbClr val="D5DEF0"/>
+                      </a:solidFill>
+                      <a:prstDash val="solid"/>
+                      <a:round/>
+                      <a:headEnd type="none" w="med" len="med"/>
+                      <a:tailEnd type="none" w="med" len="med"/>
+                    </a:lnR>
+                    <a:lnT w="9525" cap="flat" cmpd="sng" algn="ctr">
+                      <a:solidFill>
+                        <a:srgbClr val="D5DEF0"/>
+                      </a:solidFill>
+                      <a:prstDash val="solid"/>
+                      <a:round/>
+                      <a:headEnd type="none" w="med" len="med"/>
+                      <a:tailEnd type="none" w="med" len="med"/>
+                    </a:lnT>
+                    <a:lnB w="9525" cap="flat" cmpd="sng" algn="ctr">
+                      <a:solidFill>
+                        <a:srgbClr val="D5DEF0"/>
+                      </a:solidFill>
+                      <a:prstDash val="solid"/>
+                      <a:round/>
+                      <a:headEnd type="none" w="med" len="med"/>
+                      <a:tailEnd type="none" w="med" len="med"/>
+                    </a:lnB>
+                  </a:tcPr>
+                </a:tc>
+                <a:tc>
+                  <a:txBody>
+                    <a:bodyPr/>
+                    <a:lstStyle/>
+                    <a:p>
+                      <a:pPr indent="0" marL="0">
+                        <a:buNone/>
+                      </a:pPr>
+                      <a:r>
+                        <a:rPr lang="en-US" sz="1050" dirty="0">
+                          <a:solidFill>
+                            <a:srgbClr val="16224D"/>
+                          </a:solidFill>
+                          <a:latin typeface="Microsoft JhengHei" pitchFamily="34" charset="0"/>
+                          <a:ea typeface="Microsoft JhengHei" pitchFamily="34" charset="-122"/>
+                          <a:cs typeface="Microsoft JhengHei" pitchFamily="34" charset="-120"/>
+                        </a:rPr>
+                        <a:t>NT$0</a:t>
+                      </a:r>
+                      <a:endParaRPr lang="en-US" sz="1050" dirty="0">
+                        <a:latin typeface="Microsoft JhengHei" charset="0"/>
+                        <a:ea typeface="Microsoft JhengHei" charset="0"/>
+                        <a:cs typeface="Microsoft JhengHei" charset="0"/>
+                      </a:endParaRPr>
+                    </a:p>
+                  </a:txBody>
+                  <a:tcPr marL="54864" marR="54864" marT="54864" marB="54864" anchor="ctr">
+                    <a:lnL w="9525" cap="flat" cmpd="sng" algn="ctr">
+                      <a:solidFill>
+                        <a:srgbClr val="D5DEF0"/>
+                      </a:solidFill>
+                      <a:prstDash val="solid"/>
+                      <a:round/>
+                      <a:headEnd type="none" w="med" len="med"/>
+                      <a:tailEnd type="none" w="med" len="med"/>
+                    </a:lnL>
+                    <a:lnR w="9525" cap="flat" cmpd="sng" algn="ctr">
+                      <a:solidFill>
+                        <a:srgbClr val="D5DEF0"/>
+                      </a:solidFill>
+                      <a:prstDash val="solid"/>
+                      <a:round/>
+                      <a:headEnd type="none" w="med" len="med"/>
+                      <a:tailEnd type="none" w="med" len="med"/>
+                    </a:lnR>
+                    <a:lnT w="9525" cap="flat" cmpd="sng" algn="ctr">
+                      <a:solidFill>
+                        <a:srgbClr val="D5DEF0"/>
+                      </a:solidFill>
+                      <a:prstDash val="solid"/>
+                      <a:round/>
+                      <a:headEnd type="none" w="med" len="med"/>
+                      <a:tailEnd type="none" w="med" len="med"/>
+                    </a:lnT>
+                    <a:lnB w="9525" cap="flat" cmpd="sng" algn="ctr">
+                      <a:solidFill>
+                        <a:srgbClr val="D5DEF0"/>
+                      </a:solidFill>
+                      <a:prstDash val="solid"/>
+                      <a:round/>
+                      <a:headEnd type="none" w="med" len="med"/>
+                      <a:tailEnd type="none" w="med" len="med"/>
+                    </a:lnB>
+                  </a:tcPr>
+                </a:tc>
+                <a:tc>
+                  <a:txBody>
+                    <a:bodyPr/>
+                    <a:lstStyle/>
+                    <a:p>
+                      <a:pPr indent="0" marL="0">
+                        <a:buNone/>
+                      </a:pPr>
+                      <a:r>
+                        <a:rPr lang="en-US" sz="1050" dirty="0">
+                          <a:solidFill>
+                            <a:srgbClr val="16224D"/>
+                          </a:solidFill>
+                          <a:latin typeface="Microsoft JhengHei" pitchFamily="34" charset="0"/>
+                          <a:ea typeface="Microsoft JhengHei" pitchFamily="34" charset="-122"/>
+                          <a:cs typeface="Microsoft JhengHei" pitchFamily="34" charset="-120"/>
+                        </a:rPr>
+                        <a:t>最小額度手續費 &lt;NT$10</a:t>
+                      </a:r>
+                      <a:endParaRPr lang="en-US" sz="1050" dirty="0">
+                        <a:latin typeface="Microsoft JhengHei" charset="0"/>
+                        <a:ea typeface="Microsoft JhengHei" charset="0"/>
+                        <a:cs typeface="Microsoft JhengHei" charset="0"/>
+                      </a:endParaRPr>
+                    </a:p>
+                  </a:txBody>
+                  <a:tcPr marL="54864" marR="54864" marT="54864" marB="54864" anchor="ctr">
+                    <a:lnL w="9525" cap="flat" cmpd="sng" algn="ctr">
+                      <a:solidFill>
+                        <a:srgbClr val="D5DEF0"/>
+                      </a:solidFill>
+                      <a:prstDash val="solid"/>
+                      <a:round/>
+                      <a:headEnd type="none" w="med" len="med"/>
+                      <a:tailEnd type="none" w="med" len="med"/>
+                    </a:lnL>
+                    <a:lnR w="9525" cap="flat" cmpd="sng" algn="ctr">
+                      <a:solidFill>
+                        <a:srgbClr val="D5DEF0"/>
+                      </a:solidFill>
+                      <a:prstDash val="solid"/>
+                      <a:round/>
+                      <a:headEnd type="none" w="med" len="med"/>
+                      <a:tailEnd type="none" w="med" len="med"/>
+                    </a:lnR>
+                    <a:lnT w="9525" cap="flat" cmpd="sng" algn="ctr">
+                      <a:solidFill>
+                        <a:srgbClr val="D5DEF0"/>
+                      </a:solidFill>
+                      <a:prstDash val="solid"/>
+                      <a:round/>
+                      <a:headEnd type="none" w="med" len="med"/>
+                      <a:tailEnd type="none" w="med" len="med"/>
+                    </a:lnT>
+                    <a:lnB w="9525" cap="flat" cmpd="sng" algn="ctr">
+                      <a:solidFill>
+                        <a:srgbClr val="D5DEF0"/>
+                      </a:solidFill>
+                      <a:prstDash val="solid"/>
+                      <a:round/>
+                      <a:headEnd type="none" w="med" len="med"/>
+                      <a:tailEnd type="none" w="med" len="med"/>
+                    </a:lnB>
+                  </a:tcPr>
+                </a:tc>
+                <a:tc>
+                  <a:txBody>
+                    <a:bodyPr/>
+                    <a:lstStyle/>
+                    <a:p>
+                      <a:pPr indent="0" marL="0">
+                        <a:buNone/>
+                      </a:pPr>
+                      <a:r>
+                        <a:rPr lang="en-US" sz="1050" dirty="0">
+                          <a:solidFill>
+                            <a:srgbClr val="16224D"/>
+                          </a:solidFill>
+                          <a:latin typeface="Microsoft JhengHei" pitchFamily="34" charset="0"/>
+                          <a:ea typeface="Microsoft JhengHei" pitchFamily="34" charset="-122"/>
+                          <a:cs typeface="Microsoft JhengHei" pitchFamily="34" charset="-120"/>
+                        </a:rPr>
+                        <a:t>使用者自付</a:t>
+                      </a:r>
+                      <a:endParaRPr lang="en-US" sz="1050" dirty="0">
+                        <a:latin typeface="Microsoft JhengHei" charset="0"/>
+                        <a:ea typeface="Microsoft JhengHei" charset="0"/>
+                        <a:cs typeface="Microsoft JhengHei" charset="0"/>
+                      </a:endParaRPr>
+                    </a:p>
+                  </a:txBody>
+                  <a:tcPr marL="54864" marR="54864" marT="54864" marB="54864" anchor="ctr">
+                    <a:lnL w="9525" cap="flat" cmpd="sng" algn="ctr">
+                      <a:solidFill>
+                        <a:srgbClr val="D5DEF0"/>
+                      </a:solidFill>
+                      <a:prstDash val="solid"/>
+                      <a:round/>
+                      <a:headEnd type="none" w="med" len="med"/>
+                      <a:tailEnd type="none" w="med" len="med"/>
+                    </a:lnL>
+                    <a:lnR w="9525" cap="flat" cmpd="sng" algn="ctr">
+                      <a:solidFill>
+                        <a:srgbClr val="D5DEF0"/>
+                      </a:solidFill>
+                      <a:prstDash val="solid"/>
+                      <a:round/>
+                      <a:headEnd type="none" w="med" len="med"/>
+                      <a:tailEnd type="none" w="med" len="med"/>
+                    </a:lnR>
+                    <a:lnT w="9525" cap="flat" cmpd="sng" algn="ctr">
+                      <a:solidFill>
+                        <a:srgbClr val="D5DEF0"/>
+                      </a:solidFill>
+                      <a:prstDash val="solid"/>
+                      <a:round/>
+                      <a:headEnd type="none" w="med" len="med"/>
+                      <a:tailEnd type="none" w="med" len="med"/>
+                    </a:lnT>
+                    <a:lnB w="9525" cap="flat" cmpd="sng" algn="ctr">
+                      <a:solidFill>
+                        <a:srgbClr val="D5DEF0"/>
+                      </a:solidFill>
+                      <a:prstDash val="solid"/>
+                      <a:round/>
+                      <a:headEnd type="none" w="med" len="med"/>
+                      <a:tailEnd type="none" w="med" len="med"/>
+                    </a:lnB>
+                  </a:tcPr>
+                </a:tc>
+              </a:tr>
+              <a:tr h="530352">
+                <a:tc>
+                  <a:txBody>
+                    <a:bodyPr/>
+                    <a:lstStyle/>
+                    <a:p>
+                      <a:pPr indent="0" marL="0">
+                        <a:buNone/>
+                      </a:pPr>
+                      <a:r>
+                        <a:rPr lang="en-US" sz="1050" b="1" dirty="0">
+                          <a:solidFill>
+                            <a:srgbClr val="1F2937"/>
+                          </a:solidFill>
+                          <a:latin typeface="Microsoft JhengHei" pitchFamily="34" charset="0"/>
+                          <a:ea typeface="Microsoft JhengHei" pitchFamily="34" charset="-122"/>
+                          <a:cs typeface="Microsoft JhengHei" pitchFamily="34" charset="-120"/>
+                        </a:rPr>
+                        <a:t>Kiro（開發工具）</a:t>
+                      </a:r>
+                      <a:endParaRPr lang="en-US" sz="1050" dirty="0">
+                        <a:latin typeface="Microsoft JhengHei" charset="0"/>
+                        <a:ea typeface="Microsoft JhengHei" charset="0"/>
+                        <a:cs typeface="Microsoft JhengHei" charset="0"/>
+                      </a:endParaRPr>
+                    </a:p>
+                  </a:txBody>
+                  <a:tcPr marL="54864" marR="54864" marT="54864" marB="54864" anchor="ctr">
+                    <a:lnL w="9525" cap="flat" cmpd="sng" algn="ctr">
+                      <a:solidFill>
+                        <a:srgbClr val="D5DEF0"/>
+                      </a:solidFill>
+                      <a:prstDash val="solid"/>
+                      <a:round/>
+                      <a:headEnd type="none" w="med" len="med"/>
+                      <a:tailEnd type="none" w="med" len="med"/>
+                    </a:lnL>
+                    <a:lnR w="9525" cap="flat" cmpd="sng" algn="ctr">
+                      <a:solidFill>
+                        <a:srgbClr val="D5DEF0"/>
+                      </a:solidFill>
+                      <a:prstDash val="solid"/>
+                      <a:round/>
+                      <a:headEnd type="none" w="med" len="med"/>
+                      <a:tailEnd type="none" w="med" len="med"/>
+                    </a:lnR>
+                    <a:lnT w="9525" cap="flat" cmpd="sng" algn="ctr">
+                      <a:solidFill>
+                        <a:srgbClr val="D5DEF0"/>
+                      </a:solidFill>
+                      <a:prstDash val="solid"/>
+                      <a:round/>
+                      <a:headEnd type="none" w="med" len="med"/>
+                      <a:tailEnd type="none" w="med" len="med"/>
+                    </a:lnT>
+                    <a:lnB w="9525" cap="flat" cmpd="sng" algn="ctr">
+                      <a:solidFill>
+                        <a:srgbClr val="D5DEF0"/>
+                      </a:solidFill>
+                      <a:prstDash val="solid"/>
+                      <a:round/>
+                      <a:headEnd type="none" w="med" len="med"/>
+                      <a:tailEnd type="none" w="med" len="med"/>
+                    </a:lnB>
+                  </a:tcPr>
+                </a:tc>
+                <a:tc>
+                  <a:txBody>
+                    <a:bodyPr/>
+                    <a:lstStyle/>
+                    <a:p>
+                      <a:pPr indent="0" marL="0">
+                        <a:buNone/>
+                      </a:pPr>
+                      <a:r>
+                        <a:rPr lang="en-US" sz="1050" dirty="0">
+                          <a:solidFill>
+                            <a:srgbClr val="6B7280"/>
+                          </a:solidFill>
+                          <a:latin typeface="Microsoft JhengHei" pitchFamily="34" charset="0"/>
+                          <a:ea typeface="Microsoft JhengHei" pitchFamily="34" charset="-122"/>
+                          <a:cs typeface="Microsoft JhengHei" pitchFamily="34" charset="-120"/>
+                        </a:rPr>
+                        <a:t>黑客松贈點 2000/人</a:t>
+                      </a:r>
+                      <a:endParaRPr lang="en-US" sz="1050" dirty="0">
+                        <a:latin typeface="Microsoft JhengHei" charset="0"/>
+                        <a:ea typeface="Microsoft JhengHei" charset="0"/>
+                        <a:cs typeface="Microsoft JhengHei" charset="0"/>
+                      </a:endParaRPr>
+                    </a:p>
+                  </a:txBody>
+                  <a:tcPr marL="54864" marR="54864" marT="54864" marB="54864" anchor="ctr">
+                    <a:lnL w="9525" cap="flat" cmpd="sng" algn="ctr">
+                      <a:solidFill>
+                        <a:srgbClr val="D5DEF0"/>
+                      </a:solidFill>
+                      <a:prstDash val="solid"/>
+                      <a:round/>
+                      <a:headEnd type="none" w="med" len="med"/>
+                      <a:tailEnd type="none" w="med" len="med"/>
+                    </a:lnL>
+                    <a:lnR w="9525" cap="flat" cmpd="sng" algn="ctr">
+                      <a:solidFill>
+                        <a:srgbClr val="D5DEF0"/>
+                      </a:solidFill>
+                      <a:prstDash val="solid"/>
+                      <a:round/>
+                      <a:headEnd type="none" w="med" len="med"/>
+                      <a:tailEnd type="none" w="med" len="med"/>
+                    </a:lnR>
+                    <a:lnT w="9525" cap="flat" cmpd="sng" algn="ctr">
+                      <a:solidFill>
+                        <a:srgbClr val="D5DEF0"/>
+                      </a:solidFill>
+                      <a:prstDash val="solid"/>
+                      <a:round/>
+                      <a:headEnd type="none" w="med" len="med"/>
+                      <a:tailEnd type="none" w="med" len="med"/>
+                    </a:lnT>
+                    <a:lnB w="9525" cap="flat" cmpd="sng" algn="ctr">
+                      <a:solidFill>
+                        <a:srgbClr val="D5DEF0"/>
+                      </a:solidFill>
+                      <a:prstDash val="solid"/>
+                      <a:round/>
+                      <a:headEnd type="none" w="med" len="med"/>
+                      <a:tailEnd type="none" w="med" len="med"/>
+                    </a:lnB>
+                  </a:tcPr>
+                </a:tc>
+                <a:tc>
+                  <a:txBody>
+                    <a:bodyPr/>
+                    <a:lstStyle/>
+                    <a:p>
+                      <a:pPr indent="0" marL="0">
+                        <a:buNone/>
+                      </a:pPr>
+                      <a:r>
+                        <a:rPr lang="en-US" sz="1050" dirty="0">
+                          <a:solidFill>
+                            <a:srgbClr val="16224D"/>
+                          </a:solidFill>
+                          <a:latin typeface="Microsoft JhengHei" pitchFamily="34" charset="0"/>
+                          <a:ea typeface="Microsoft JhengHei" pitchFamily="34" charset="-122"/>
+                          <a:cs typeface="Microsoft JhengHei" pitchFamily="34" charset="-120"/>
+                        </a:rPr>
+                        <a:t>NT$0（贈點內）</a:t>
+                      </a:r>
+                      <a:endParaRPr lang="en-US" sz="1050" dirty="0">
+                        <a:latin typeface="Microsoft JhengHei" charset="0"/>
+                        <a:ea typeface="Microsoft JhengHei" charset="0"/>
+                        <a:cs typeface="Microsoft JhengHei" charset="0"/>
+                      </a:endParaRPr>
+                    </a:p>
+                  </a:txBody>
+                  <a:tcPr marL="54864" marR="54864" marT="54864" marB="54864" anchor="ctr">
+                    <a:lnL w="9525" cap="flat" cmpd="sng" algn="ctr">
+                      <a:solidFill>
+                        <a:srgbClr val="D5DEF0"/>
+                      </a:solidFill>
+                      <a:prstDash val="solid"/>
+                      <a:round/>
+                      <a:headEnd type="none" w="med" len="med"/>
+                      <a:tailEnd type="none" w="med" len="med"/>
+                    </a:lnL>
+                    <a:lnR w="9525" cap="flat" cmpd="sng" algn="ctr">
+                      <a:solidFill>
+                        <a:srgbClr val="D5DEF0"/>
+                      </a:solidFill>
+                      <a:prstDash val="solid"/>
+                      <a:round/>
+                      <a:headEnd type="none" w="med" len="med"/>
+                      <a:tailEnd type="none" w="med" len="med"/>
+                    </a:lnR>
+                    <a:lnT w="9525" cap="flat" cmpd="sng" algn="ctr">
+                      <a:solidFill>
+                        <a:srgbClr val="D5DEF0"/>
+                      </a:solidFill>
+                      <a:prstDash val="solid"/>
+                      <a:round/>
+                      <a:headEnd type="none" w="med" len="med"/>
+                      <a:tailEnd type="none" w="med" len="med"/>
+                    </a:lnT>
+                    <a:lnB w="9525" cap="flat" cmpd="sng" algn="ctr">
+                      <a:solidFill>
+                        <a:srgbClr val="D5DEF0"/>
+                      </a:solidFill>
+                      <a:prstDash val="solid"/>
+                      <a:round/>
+                      <a:headEnd type="none" w="med" len="med"/>
+                      <a:tailEnd type="none" w="med" len="med"/>
+                    </a:lnB>
+                  </a:tcPr>
+                </a:tc>
+                <a:tc>
+                  <a:txBody>
+                    <a:bodyPr/>
+                    <a:lstStyle/>
+                    <a:p>
+                      <a:pPr indent="0" marL="0">
+                        <a:buNone/>
+                      </a:pPr>
+                      <a:r>
+                        <a:rPr lang="en-US" sz="1050" dirty="0">
+                          <a:solidFill>
+                            <a:srgbClr val="16224D"/>
+                          </a:solidFill>
+                          <a:latin typeface="Microsoft JhengHei" pitchFamily="34" charset="0"/>
+                          <a:ea typeface="Microsoft JhengHei" pitchFamily="34" charset="-122"/>
+                          <a:cs typeface="Microsoft JhengHei" pitchFamily="34" charset="-120"/>
+                        </a:rPr>
+                        <a:t>NT$0</a:t>
+                      </a:r>
+                      <a:endParaRPr lang="en-US" sz="1050" dirty="0">
+                        <a:latin typeface="Microsoft JhengHei" charset="0"/>
+                        <a:ea typeface="Microsoft JhengHei" charset="0"/>
+                        <a:cs typeface="Microsoft JhengHei" charset="0"/>
+                      </a:endParaRPr>
+                    </a:p>
+                  </a:txBody>
+                  <a:tcPr marL="54864" marR="54864" marT="54864" marB="54864" anchor="ctr">
+                    <a:lnL w="9525" cap="flat" cmpd="sng" algn="ctr">
+                      <a:solidFill>
+                        <a:srgbClr val="D5DEF0"/>
+                      </a:solidFill>
+                      <a:prstDash val="solid"/>
+                      <a:round/>
+                      <a:headEnd type="none" w="med" len="med"/>
+                      <a:tailEnd type="none" w="med" len="med"/>
+                    </a:lnL>
+                    <a:lnR w="9525" cap="flat" cmpd="sng" algn="ctr">
+                      <a:solidFill>
+                        <a:srgbClr val="D5DEF0"/>
+                      </a:solidFill>
+                      <a:prstDash val="solid"/>
+                      <a:round/>
+                      <a:headEnd type="none" w="med" len="med"/>
+                      <a:tailEnd type="none" w="med" len="med"/>
+                    </a:lnR>
+                    <a:lnT w="9525" cap="flat" cmpd="sng" algn="ctr">
+                      <a:solidFill>
+                        <a:srgbClr val="D5DEF0"/>
+                      </a:solidFill>
+                      <a:prstDash val="solid"/>
+                      <a:round/>
+                      <a:headEnd type="none" w="med" len="med"/>
+                      <a:tailEnd type="none" w="med" len="med"/>
+                    </a:lnT>
+                    <a:lnB w="9525" cap="flat" cmpd="sng" algn="ctr">
+                      <a:solidFill>
+                        <a:srgbClr val="D5DEF0"/>
+                      </a:solidFill>
+                      <a:prstDash val="solid"/>
+                      <a:round/>
+                      <a:headEnd type="none" w="med" len="med"/>
+                      <a:tailEnd type="none" w="med" len="med"/>
+                    </a:lnB>
+                  </a:tcPr>
+                </a:tc>
+                <a:tc>
+                  <a:txBody>
+                    <a:bodyPr/>
+                    <a:lstStyle/>
+                    <a:p>
+                      <a:pPr indent="0" marL="0">
+                        <a:buNone/>
+                      </a:pPr>
+                      <a:r>
+                        <a:rPr lang="en-US" sz="1050" dirty="0">
+                          <a:solidFill>
+                            <a:srgbClr val="16224D"/>
+                          </a:solidFill>
+                          <a:latin typeface="Microsoft JhengHei" pitchFamily="34" charset="0"/>
+                          <a:ea typeface="Microsoft JhengHei" pitchFamily="34" charset="-122"/>
+                          <a:cs typeface="Microsoft JhengHei" pitchFamily="34" charset="-120"/>
+                        </a:rPr>
+                        <a:t>—（開發工具）</a:t>
+                      </a:r>
+                      <a:endParaRPr lang="en-US" sz="1050" dirty="0">
+                        <a:latin typeface="Microsoft JhengHei" charset="0"/>
+                        <a:ea typeface="Microsoft JhengHei" charset="0"/>
+                        <a:cs typeface="Microsoft JhengHei" charset="0"/>
+                      </a:endParaRPr>
+                    </a:p>
+                  </a:txBody>
+                  <a:tcPr marL="54864" marR="54864" marT="54864" marB="54864" anchor="ctr">
+                    <a:lnL w="9525" cap="flat" cmpd="sng" algn="ctr">
+                      <a:solidFill>
+                        <a:srgbClr val="D5DEF0"/>
+                      </a:solidFill>
+                      <a:prstDash val="solid"/>
+                      <a:round/>
+                      <a:headEnd type="none" w="med" len="med"/>
+                      <a:tailEnd type="none" w="med" len="med"/>
+                    </a:lnL>
+                    <a:lnR w="9525" cap="flat" cmpd="sng" algn="ctr">
+                      <a:solidFill>
+                        <a:srgbClr val="D5DEF0"/>
+                      </a:solidFill>
+                      <a:prstDash val="solid"/>
+                      <a:round/>
+                      <a:headEnd type="none" w="med" len="med"/>
+                      <a:tailEnd type="none" w="med" len="med"/>
+                    </a:lnR>
+                    <a:lnT w="9525" cap="flat" cmpd="sng" algn="ctr">
+                      <a:solidFill>
+                        <a:srgbClr val="D5DEF0"/>
+                      </a:solidFill>
+                      <a:prstDash val="solid"/>
+                      <a:round/>
+                      <a:headEnd type="none" w="med" len="med"/>
+                      <a:tailEnd type="none" w="med" len="med"/>
+                    </a:lnT>
+                    <a:lnB w="9525" cap="flat" cmpd="sng" algn="ctr">
+                      <a:solidFill>
+                        <a:srgbClr val="D5DEF0"/>
+                      </a:solidFill>
+                      <a:prstDash val="solid"/>
+                      <a:round/>
+                      <a:headEnd type="none" w="med" len="med"/>
+                      <a:tailEnd type="none" w="med" len="med"/>
+                    </a:lnB>
+                  </a:tcPr>
+                </a:tc>
+              </a:tr>
+            </a:tbl>
+          </a:graphicData>
+        </a:graphic>
+      </p:graphicFrame>
+      <p:sp>
+        <p:nvSpPr>
+          <p:cNvPr id="5" name="Shape 2"/>
+          <p:cNvSpPr/>
+          <p:nvPr/>
+        </p:nvSpPr>
+        <p:spPr>
+          <a:xfrm>
+            <a:off x="548640" y="5669280"/>
+            <a:ext cx="11091672" cy="777240"/>
+          </a:xfrm>
+          <a:prstGeom prst="roundRect">
+            <a:avLst>
+              <a:gd name="adj" fmla="val 10588"/>
+            </a:avLst>
+          </a:prstGeom>
+          <a:solidFill>
+            <a:srgbClr val="EAF0FB"/>
+          </a:solidFill>
+          <a:ln/>
+        </p:spPr>
+      </p:sp>
+      <p:sp>
+        <p:nvSpPr>
+          <p:cNvPr id="6" name="Text 3"/>
+          <p:cNvSpPr/>
+          <p:nvPr/>
+        </p:nvSpPr>
+        <p:spPr>
+          <a:xfrm>
+            <a:off x="822960" y="5779008"/>
+            <a:ext cx="10543032" cy="566928"/>
+          </a:xfrm>
+          <a:prstGeom prst="rect">
+            <a:avLst/>
+          </a:prstGeom>
+          <a:noFill/>
+          <a:ln/>
+        </p:spPr>
+        <p:txBody>
+          <a:bodyPr wrap="square" lIns="0" tIns="0" rIns="0" bIns="0" rtlCol="0" anchor="ctr"/>
+          <a:lstStyle/>
+          <a:p>
+            <a:pPr indent="0" marL="0">
+              <a:buNone/>
+            </a:pPr>
+            <a:r>
+              <a:rPr lang="en-US" sz="1500" b="1" dirty="0">
+                <a:solidFill>
+                  <a:srgbClr val="1F9D66"/>
+                </a:solidFill>
+                <a:latin typeface="Microsoft JhengHei" pitchFamily="34" charset="0"/>
+                <a:ea typeface="Microsoft JhengHei" pitchFamily="34" charset="-122"/>
+                <a:cs typeface="Microsoft JhengHei" pitchFamily="34" charset="-120"/>
+              </a:rPr>
+              <a:t>全隊賽前總花費 &lt; NT$500</a:t>
+            </a:r>
+            <a:pPr indent="0" marL="0">
+              <a:buNone/>
+            </a:pPr>
+            <a:r>
+              <a:rPr lang="en-US" sz="1250" dirty="0">
+                <a:solidFill>
+                  <a:srgbClr val="1F2937"/>
+                </a:solidFill>
+                <a:latin typeface="Microsoft JhengHei" pitchFamily="34" charset="0"/>
+                <a:ea typeface="Microsoft JhengHei" pitchFamily="34" charset="-122"/>
+                <a:cs typeface="Microsoft JhengHei" pitchFamily="34" charset="-120"/>
+              </a:rPr>
+              <a:t>（幾乎只有 Bedrock 測試呼叫）；千人規模基礎設施 &lt; NT$3,000/月＋模型依用量——本頁同時是可行性 20% 的簡報素材。</a:t>
+            </a:r>
+            <a:endParaRPr lang="en-US" sz="1500" dirty="0"/>
+          </a:p>
+        </p:txBody>
+      </p:sp>
+    </p:spTree>
+  </p:cSld>
+  <p:clrMapOvr>
+    <a:masterClrMapping/>
+  </p:clrMapOvr>
+</p:sld>
+</file>
+
+<file path=ppt/slides/slide12.xml><?xml version="1.0" encoding="utf-8"?>
+<p:sld xmlns:a="http://schemas.openxmlformats.org/drawingml/2006/main" xmlns:r="http://schemas.openxmlformats.org/officeDocument/2006/relationships" xmlns:p="http://schemas.openxmlformats.org/presentationml/2006/main">
+  <p:cSld name="Slide 12">
+    <p:bg>
+      <p:bgPr>
+        <a:solidFill>
+          <a:srgbClr val="0D1530"/>
+        </a:solidFill>
+      </p:bgPr>
+    </p:bg>
+    <p:spTree>
+      <p:nvGrpSpPr>
+        <p:cNvPr id="1" name=""/>
+        <p:cNvGrpSpPr/>
+        <p:nvPr/>
+      </p:nvGrpSpPr>
+      <p:grpSpPr>
+        <a:xfrm>
+          <a:off x="0" y="0"/>
+          <a:ext cx="0" cy="0"/>
+          <a:chOff x="0" y="0"/>
+          <a:chExt cx="0" cy="0"/>
+        </a:xfrm>
+      </p:grpSpPr>
+      <p:sp>
+        <p:nvSpPr>
+          <p:cNvPr id="2" name="Text 0"/>
+          <p:cNvSpPr/>
+          <p:nvPr/>
+        </p:nvSpPr>
+        <p:spPr>
+          <a:xfrm>
+            <a:off x="548640" y="502920"/>
+            <a:ext cx="11091672" cy="640080"/>
+          </a:xfrm>
+          <a:prstGeom prst="rect">
+            <a:avLst/>
+          </a:prstGeom>
+          <a:noFill/>
+          <a:ln/>
+        </p:spPr>
+        <p:txBody>
+          <a:bodyPr wrap="square" lIns="0" tIns="0" rIns="0" bIns="0" rtlCol="0" anchor="ctr"/>
+          <a:lstStyle/>
+          <a:p>
+            <a:pPr indent="0" marL="0">
+              <a:buNone/>
+            </a:pPr>
+            <a:r>
+              <a:rPr lang="en-US" sz="2600" b="1" dirty="0">
+                <a:solidFill>
+                  <a:srgbClr val="FFFFFF"/>
+                </a:solidFill>
+                <a:latin typeface="Microsoft JhengHei" pitchFamily="34" charset="0"/>
+                <a:ea typeface="Microsoft JhengHei" pitchFamily="34" charset="-122"/>
+                <a:cs typeface="Microsoft JhengHei" pitchFamily="34" charset="-120"/>
+              </a:rPr>
+              <a:t>成本效益：我們主動避開的三個坑，和一句話的價值</a:t>
+            </a:r>
+            <a:endParaRPr lang="en-US" sz="2600" dirty="0"/>
+          </a:p>
+        </p:txBody>
+      </p:sp>
+      <p:sp>
+        <p:nvSpPr>
+          <p:cNvPr id="3" name="Shape 1"/>
+          <p:cNvSpPr/>
+          <p:nvPr/>
+        </p:nvSpPr>
+        <p:spPr>
+          <a:xfrm>
+            <a:off x="548640" y="1463040"/>
+            <a:ext cx="3520440" cy="2651760"/>
+          </a:xfrm>
+          <a:prstGeom prst="roundRect">
+            <a:avLst>
+              <a:gd name="adj" fmla="val 3103"/>
+            </a:avLst>
+          </a:prstGeom>
+          <a:solidFill>
+            <a:srgbClr val="16224D"/>
+          </a:solidFill>
+          <a:ln/>
+        </p:spPr>
+      </p:sp>
+      <p:sp>
+        <p:nvSpPr>
+          <p:cNvPr id="4" name="Text 2"/>
+          <p:cNvSpPr/>
+          <p:nvPr/>
+        </p:nvSpPr>
+        <p:spPr>
+          <a:xfrm>
+            <a:off x="822960" y="1691640"/>
+            <a:ext cx="3017520" cy="457200"/>
+          </a:xfrm>
+          <a:prstGeom prst="rect">
+            <a:avLst/>
+          </a:prstGeom>
+          <a:noFill/>
+          <a:ln/>
+        </p:spPr>
+        <p:txBody>
+          <a:bodyPr wrap="square" lIns="0" tIns="0" rIns="0" bIns="0" rtlCol="0" anchor="ctr"/>
+          <a:lstStyle/>
+          <a:p>
+            <a:pPr indent="0" marL="0">
+              <a:buNone/>
+            </a:pPr>
+            <a:r>
+              <a:rPr lang="en-US" sz="1600" b="1" dirty="0">
+                <a:solidFill>
+                  <a:srgbClr val="E8A13A"/>
+                </a:solidFill>
+                <a:latin typeface="Microsoft JhengHei" pitchFamily="34" charset="0"/>
+                <a:ea typeface="Microsoft JhengHei" pitchFamily="34" charset="-122"/>
+                <a:cs typeface="Microsoft JhengHei" pitchFamily="34" charset="-120"/>
+              </a:rPr>
+              <a:t>向量庫選 S3 Vectors</a:t>
+            </a:r>
+            <a:endParaRPr lang="en-US" sz="1600" dirty="0"/>
+          </a:p>
+        </p:txBody>
+      </p:sp>
+      <p:sp>
+        <p:nvSpPr>
+          <p:cNvPr id="5" name="Text 3"/>
+          <p:cNvSpPr/>
+          <p:nvPr/>
+        </p:nvSpPr>
+        <p:spPr>
+          <a:xfrm>
+            <a:off x="822960" y="2240280"/>
+            <a:ext cx="3017520" cy="1737360"/>
+          </a:xfrm>
+          <a:prstGeom prst="rect">
+            <a:avLst/>
+          </a:prstGeom>
+          <a:noFill/>
+          <a:ln/>
+        </p:spPr>
+        <p:txBody>
+          <a:bodyPr wrap="square" lIns="0" tIns="0" rIns="0" bIns="0" rtlCol="0" anchor="ctr"/>
+          <a:lstStyle/>
+          <a:p>
+            <a:pPr indent="0" marL="0">
+              <a:buNone/>
+            </a:pPr>
+            <a:r>
+              <a:rPr lang="en-US" sz="1200" dirty="0">
+                <a:solidFill>
+                  <a:srgbClr val="E8A5AC"/>
+                </a:solidFill>
+                <a:latin typeface="Microsoft JhengHei" pitchFamily="34" charset="0"/>
+                <a:ea typeface="Microsoft JhengHei" pitchFamily="34" charset="-122"/>
+                <a:cs typeface="Microsoft JhengHei" pitchFamily="34" charset="-120"/>
+              </a:rPr>
+              <a:t>✘ 預設 OpenSearch Serverless 最低月費 ≈ NT$1 萬起</a:t>
+            </a:r>
+            <a:endParaRPr lang="en-US" sz="1200" dirty="0"/>
+          </a:p>
+          <a:p>
+            <a:pPr indent="0" marL="0">
+              <a:buNone/>
+            </a:pPr>
+            <a:endParaRPr lang="en-US" sz="1200" dirty="0"/>
+          </a:p>
+          <a:p>
+            <a:pPr indent="0" marL="0">
+              <a:buNone/>
+            </a:pPr>
+            <a:r>
+              <a:rPr lang="en-US" sz="1200" dirty="0">
+                <a:solidFill>
+                  <a:srgbClr val="9FE5B0"/>
+                </a:solidFill>
+                <a:latin typeface="Microsoft JhengHei" pitchFamily="34" charset="0"/>
+                <a:ea typeface="Microsoft JhengHei" pitchFamily="34" charset="-122"/>
+                <a:cs typeface="Microsoft JhengHei" pitchFamily="34" charset="-120"/>
+              </a:rPr>
+              <a:t>✔ S3 Vectors 幾十元搞定小語料——省 9 成以上</a:t>
+            </a:r>
+            <a:endParaRPr lang="en-US" sz="1200" dirty="0"/>
+          </a:p>
+        </p:txBody>
+      </p:sp>
+      <p:sp>
+        <p:nvSpPr>
+          <p:cNvPr id="6" name="Shape 4"/>
+          <p:cNvSpPr/>
+          <p:nvPr/>
+        </p:nvSpPr>
+        <p:spPr>
+          <a:xfrm>
+            <a:off x="4297680" y="1463040"/>
+            <a:ext cx="3520440" cy="2651760"/>
+          </a:xfrm>
+          <a:prstGeom prst="roundRect">
+            <a:avLst>
+              <a:gd name="adj" fmla="val 3103"/>
+            </a:avLst>
+          </a:prstGeom>
+          <a:solidFill>
+            <a:srgbClr val="16224D"/>
+          </a:solidFill>
+          <a:ln/>
+        </p:spPr>
+      </p:sp>
+      <p:sp>
+        <p:nvSpPr>
+          <p:cNvPr id="7" name="Text 5"/>
+          <p:cNvSpPr/>
+          <p:nvPr/>
+        </p:nvSpPr>
+        <p:spPr>
+          <a:xfrm>
+            <a:off x="4572000" y="1691640"/>
+            <a:ext cx="3017520" cy="457200"/>
+          </a:xfrm>
+          <a:prstGeom prst="rect">
+            <a:avLst/>
+          </a:prstGeom>
+          <a:noFill/>
+          <a:ln/>
+        </p:spPr>
+        <p:txBody>
+          <a:bodyPr wrap="square" lIns="0" tIns="0" rIns="0" bIns="0" rtlCol="0" anchor="ctr"/>
+          <a:lstStyle/>
+          <a:p>
+            <a:pPr indent="0" marL="0">
+              <a:buNone/>
+            </a:pPr>
+            <a:r>
+              <a:rPr lang="en-US" sz="1600" b="1" dirty="0">
+                <a:solidFill>
+                  <a:srgbClr val="E8A13A"/>
+                </a:solidFill>
+                <a:latin typeface="Microsoft JhengHei" pitchFamily="34" charset="0"/>
+                <a:ea typeface="Microsoft JhengHei" pitchFamily="34" charset="-122"/>
+                <a:cs typeface="Microsoft JhengHei" pitchFamily="34" charset="-120"/>
+              </a:rPr>
+              <a:t>全 serverless</a:t>
+            </a:r>
+            <a:endParaRPr lang="en-US" sz="1600" dirty="0"/>
+          </a:p>
+        </p:txBody>
+      </p:sp>
+      <p:sp>
+        <p:nvSpPr>
+          <p:cNvPr id="8" name="Text 6"/>
+          <p:cNvSpPr/>
+          <p:nvPr/>
+        </p:nvSpPr>
+        <p:spPr>
+          <a:xfrm>
+            <a:off x="4572000" y="2240280"/>
+            <a:ext cx="3017520" cy="1737360"/>
+          </a:xfrm>
+          <a:prstGeom prst="rect">
+            <a:avLst/>
+          </a:prstGeom>
+          <a:noFill/>
+          <a:ln/>
+        </p:spPr>
+        <p:txBody>
+          <a:bodyPr wrap="square" lIns="0" tIns="0" rIns="0" bIns="0" rtlCol="0" anchor="ctr"/>
+          <a:lstStyle/>
+          <a:p>
+            <a:pPr indent="0" marL="0">
+              <a:buNone/>
+            </a:pPr>
+            <a:r>
+              <a:rPr lang="en-US" sz="1200" dirty="0">
+                <a:solidFill>
+                  <a:srgbClr val="E8A5AC"/>
+                </a:solidFill>
+                <a:latin typeface="Microsoft JhengHei" pitchFamily="34" charset="0"/>
+                <a:ea typeface="Microsoft JhengHei" pitchFamily="34" charset="-122"/>
+                <a:cs typeface="Microsoft JhengHei" pitchFamily="34" charset="-120"/>
+              </a:rPr>
+              <a:t>✘ EC2/容器要付閒置時間＋有人要顧機器</a:t>
+            </a:r>
+            <a:endParaRPr lang="en-US" sz="1200" dirty="0"/>
+          </a:p>
+          <a:p>
+            <a:pPr indent="0" marL="0">
+              <a:buNone/>
+            </a:pPr>
+            <a:endParaRPr lang="en-US" sz="1200" dirty="0"/>
+          </a:p>
+          <a:p>
+            <a:pPr indent="0" marL="0">
+              <a:buNone/>
+            </a:pPr>
+            <a:r>
+              <a:rPr lang="en-US" sz="1200" dirty="0">
+                <a:solidFill>
+                  <a:srgbClr val="9FE5B0"/>
+                </a:solidFill>
+                <a:latin typeface="Microsoft JhengHei" pitchFamily="34" charset="0"/>
+                <a:ea typeface="Microsoft JhengHei" pitchFamily="34" charset="-122"/>
+                <a:cs typeface="Microsoft JhengHei" pitchFamily="34" charset="-120"/>
+              </a:rPr>
+              <a:t>✔ Lambda 用多少付多少；30 小時裡零運維</a:t>
+            </a:r>
+            <a:endParaRPr lang="en-US" sz="1200" dirty="0"/>
+          </a:p>
+        </p:txBody>
+      </p:sp>
+      <p:sp>
+        <p:nvSpPr>
+          <p:cNvPr id="9" name="Shape 7"/>
+          <p:cNvSpPr/>
+          <p:nvPr/>
+        </p:nvSpPr>
+        <p:spPr>
+          <a:xfrm>
+            <a:off x="8046720" y="1463040"/>
+            <a:ext cx="3520440" cy="2651760"/>
+          </a:xfrm>
+          <a:prstGeom prst="roundRect">
+            <a:avLst>
+              <a:gd name="adj" fmla="val 3103"/>
+            </a:avLst>
+          </a:prstGeom>
+          <a:solidFill>
+            <a:srgbClr val="16224D"/>
+          </a:solidFill>
+          <a:ln/>
+        </p:spPr>
+      </p:sp>
+      <p:sp>
+        <p:nvSpPr>
+          <p:cNvPr id="10" name="Text 8"/>
+          <p:cNvSpPr/>
+          <p:nvPr/>
+        </p:nvSpPr>
+        <p:spPr>
+          <a:xfrm>
+            <a:off x="8321040" y="1691640"/>
+            <a:ext cx="3017520" cy="457200"/>
+          </a:xfrm>
+          <a:prstGeom prst="rect">
+            <a:avLst/>
+          </a:prstGeom>
+          <a:noFill/>
+          <a:ln/>
+        </p:spPr>
+        <p:txBody>
+          <a:bodyPr wrap="square" lIns="0" tIns="0" rIns="0" bIns="0" rtlCol="0" anchor="ctr"/>
+          <a:lstStyle/>
+          <a:p>
+            <a:pPr indent="0" marL="0">
+              <a:buNone/>
+            </a:pPr>
+            <a:r>
+              <a:rPr lang="en-US" sz="1600" b="1" dirty="0">
+                <a:solidFill>
+                  <a:srgbClr val="E8A13A"/>
+                </a:solidFill>
+                <a:latin typeface="Microsoft JhengHei" pitchFamily="34" charset="0"/>
+                <a:ea typeface="Microsoft JhengHei" pitchFamily="34" charset="-122"/>
+                <a:cs typeface="Microsoft JhengHei" pitchFamily="34" charset="-120"/>
+              </a:rPr>
+              <a:t>模型分層＋快取</a:t>
+            </a:r>
+            <a:endParaRPr lang="en-US" sz="1600" dirty="0"/>
+          </a:p>
+        </p:txBody>
+      </p:sp>
+      <p:sp>
+        <p:nvSpPr>
+          <p:cNvPr id="11" name="Text 9"/>
+          <p:cNvSpPr/>
+          <p:nvPr/>
+        </p:nvSpPr>
+        <p:spPr>
+          <a:xfrm>
+            <a:off x="8321040" y="2240280"/>
+            <a:ext cx="3017520" cy="1737360"/>
+          </a:xfrm>
+          <a:prstGeom prst="rect">
+            <a:avLst/>
+          </a:prstGeom>
+          <a:noFill/>
+          <a:ln/>
+        </p:spPr>
+        <p:txBody>
+          <a:bodyPr wrap="square" lIns="0" tIns="0" rIns="0" bIns="0" rtlCol="0" anchor="ctr"/>
+          <a:lstStyle/>
+          <a:p>
+            <a:pPr indent="0" marL="0">
+              <a:buNone/>
+            </a:pPr>
+            <a:r>
+              <a:rPr lang="en-US" sz="1200" dirty="0">
+                <a:solidFill>
+                  <a:srgbClr val="E8A5AC"/>
+                </a:solidFill>
+                <a:latin typeface="Microsoft JhengHei" pitchFamily="34" charset="0"/>
+                <a:ea typeface="Microsoft JhengHei" pitchFamily="34" charset="-122"/>
+                <a:cs typeface="Microsoft JhengHei" pitchFamily="34" charset="-120"/>
+              </a:rPr>
+              <a:t>✘ 全用大模型：每次對話 ≈ NT$2.2</a:t>
+            </a:r>
+            <a:endParaRPr lang="en-US" sz="1200" dirty="0"/>
+          </a:p>
+          <a:p>
+            <a:pPr indent="0" marL="0">
+              <a:buNone/>
+            </a:pPr>
+            <a:endParaRPr lang="en-US" sz="1200" dirty="0"/>
+          </a:p>
+          <a:p>
+            <a:pPr indent="0" marL="0">
+              <a:buNone/>
+            </a:pPr>
+            <a:r>
+              <a:rPr lang="en-US" sz="1200" dirty="0">
+                <a:solidFill>
+                  <a:srgbClr val="9FE5B0"/>
+                </a:solidFill>
+                <a:latin typeface="Microsoft JhengHei" pitchFamily="34" charset="0"/>
+                <a:ea typeface="Microsoft JhengHei" pitchFamily="34" charset="-122"/>
+                <a:cs typeface="Microsoft JhengHei" pitchFamily="34" charset="-120"/>
+              </a:rPr>
+              <a:t>✔ Haiku 日常＋Sonnet 深度＋prompt caching → 混合 &lt;NT$0.6/次</a:t>
+            </a:r>
+            <a:endParaRPr lang="en-US" sz="1200" dirty="0"/>
+          </a:p>
+        </p:txBody>
+      </p:sp>
+      <p:sp>
+        <p:nvSpPr>
+          <p:cNvPr id="12" name="Shape 10"/>
+          <p:cNvSpPr/>
+          <p:nvPr/>
+        </p:nvSpPr>
+        <p:spPr>
+          <a:xfrm>
+            <a:off x="548640" y="4434840"/>
+            <a:ext cx="11091672" cy="1737360"/>
+          </a:xfrm>
+          <a:prstGeom prst="roundRect">
+            <a:avLst>
+              <a:gd name="adj" fmla="val 4737"/>
+            </a:avLst>
+          </a:prstGeom>
+          <a:solidFill>
+            <a:srgbClr val="22315E"/>
+          </a:solidFill>
+          <a:ln/>
+        </p:spPr>
+      </p:sp>
+      <p:sp>
+        <p:nvSpPr>
+          <p:cNvPr id="13" name="Text 11"/>
+          <p:cNvSpPr/>
+          <p:nvPr/>
+        </p:nvSpPr>
+        <p:spPr>
+          <a:xfrm>
+            <a:off x="914400" y="4617720"/>
+            <a:ext cx="5486400" cy="365760"/>
+          </a:xfrm>
+          <a:prstGeom prst="rect">
+            <a:avLst/>
+          </a:prstGeom>
+          <a:noFill/>
+          <a:ln/>
+        </p:spPr>
+        <p:txBody>
+          <a:bodyPr wrap="square" lIns="0" tIns="0" rIns="0" bIns="0" rtlCol="0" anchor="ctr"/>
+          <a:lstStyle/>
+          <a:p>
+            <a:pPr indent="0" marL="0">
+              <a:buNone/>
+            </a:pPr>
+            <a:r>
+              <a:rPr lang="en-US" sz="1300" b="1" dirty="0">
+                <a:solidFill>
+                  <a:srgbClr val="E8A13A"/>
+                </a:solidFill>
+                <a:latin typeface="Microsoft JhengHei" pitchFamily="34" charset="0"/>
+                <a:ea typeface="Microsoft JhengHei" pitchFamily="34" charset="-122"/>
+                <a:cs typeface="Microsoft JhengHei" pitchFamily="34" charset="-120"/>
+              </a:rPr>
+              <a:t>價值錨點（上台就講這句）</a:t>
+            </a:r>
+            <a:endParaRPr lang="en-US" sz="1300" dirty="0"/>
+          </a:p>
+        </p:txBody>
+      </p:sp>
+      <p:sp>
+        <p:nvSpPr>
+          <p:cNvPr id="14" name="Text 12"/>
+          <p:cNvSpPr/>
+          <p:nvPr/>
+        </p:nvSpPr>
+        <p:spPr>
+          <a:xfrm>
+            <a:off x="914400" y="5029200"/>
+            <a:ext cx="10360152" cy="1005840"/>
+          </a:xfrm>
+          <a:prstGeom prst="rect">
+            <a:avLst/>
+          </a:prstGeom>
+          <a:noFill/>
+          <a:ln/>
+        </p:spPr>
+        <p:txBody>
+          <a:bodyPr wrap="square" lIns="0" tIns="0" rIns="0" bIns="0" rtlCol="0" anchor="ctr"/>
+          <a:lstStyle/>
+          <a:p>
+            <a:pPr indent="0" marL="0">
+              <a:buNone/>
+            </a:pPr>
+            <a:r>
+              <a:rPr lang="en-US" sz="1600" dirty="0">
+                <a:solidFill>
+                  <a:srgbClr val="FFFFFF"/>
+                </a:solidFill>
+                <a:latin typeface="Microsoft JhengHei" pitchFamily="34" charset="0"/>
+                <a:ea typeface="Microsoft JhengHei" pitchFamily="34" charset="-122"/>
+                <a:cs typeface="Microsoft JhengHei" pitchFamily="34" charset="-120"/>
+              </a:rPr>
+              <a:t>每次對話 &lt;NT$0.6；這個帳戶平均每筆賣出的機會成本 NT$11,480。</a:t>
+            </a:r>
+            <a:endParaRPr lang="en-US" sz="1600" dirty="0"/>
+          </a:p>
+          <a:p>
+            <a:pPr indent="0" marL="0">
+              <a:buNone/>
+            </a:pPr>
+            <a:r>
+              <a:rPr lang="en-US" sz="2000" b="1" dirty="0">
+                <a:solidFill>
+                  <a:srgbClr val="FFFFFF"/>
+                </a:solidFill>
+                <a:latin typeface="Microsoft JhengHei" pitchFamily="34" charset="0"/>
+                <a:ea typeface="Microsoft JhengHei" pitchFamily="34" charset="-122"/>
+                <a:cs typeface="Microsoft JhengHei" pitchFamily="34" charset="-120"/>
+              </a:rPr>
+              <a:t>一年只要攔下「一筆」衝動交易，就抵掉這位用戶 16 年的 AI 成本。</a:t>
+            </a:r>
+            <a:endParaRPr lang="en-US" sz="1600" dirty="0"/>
+          </a:p>
+        </p:txBody>
+      </p:sp>
+    </p:spTree>
+  </p:cSld>
+  <p:clrMapOvr>
+    <a:masterClrMapping/>
+  </p:clrMapOvr>
+</p:sld>
+</file>
+
+<file path=ppt/slides/slide13.xml><?xml version="1.0" encoding="utf-8"?>
+<p:sld xmlns:a="http://schemas.openxmlformats.org/drawingml/2006/main" xmlns:r="http://schemas.openxmlformats.org/officeDocument/2006/relationships" xmlns:p="http://schemas.openxmlformats.org/presentationml/2006/main">
+  <p:cSld name="Slide 13">
+    <p:bg>
+      <p:bgPr>
+        <a:solidFill>
+          <a:srgbClr val="FFFFFF"/>
+        </a:solidFill>
+      </p:bgPr>
+    </p:bg>
+    <p:spTree>
+      <p:nvGrpSpPr>
+        <p:cNvPr id="1" name=""/>
+        <p:cNvGrpSpPr/>
+        <p:nvPr/>
+      </p:nvGrpSpPr>
+      <p:grpSpPr>
+        <a:xfrm>
+          <a:off x="0" y="0"/>
+          <a:ext cx="0" cy="0"/>
+          <a:chOff x="0" y="0"/>
+          <a:chExt cx="0" cy="0"/>
+        </a:xfrm>
+      </p:grpSpPr>
+      <p:sp>
+        <p:nvSpPr>
+          <p:cNvPr id="2" name="Text 0"/>
+          <p:cNvSpPr/>
+          <p:nvPr/>
+        </p:nvSpPr>
+        <p:spPr>
+          <a:xfrm>
+            <a:off x="548640" y="411480"/>
+            <a:ext cx="11091672" cy="640080"/>
+          </a:xfrm>
+          <a:prstGeom prst="rect">
+            <a:avLst/>
+          </a:prstGeom>
+          <a:noFill/>
+          <a:ln/>
+        </p:spPr>
+        <p:txBody>
+          <a:bodyPr wrap="square" lIns="0" tIns="0" rIns="0" bIns="0" rtlCol="0" anchor="ctr"/>
+          <a:lstStyle/>
+          <a:p>
+            <a:pPr indent="0" marL="0">
+              <a:buNone/>
+            </a:pPr>
+            <a:r>
+              <a:rPr lang="en-US" sz="2700" b="1" dirty="0">
+                <a:solidFill>
+                  <a:srgbClr val="16224D"/>
+                </a:solidFill>
+                <a:latin typeface="Microsoft JhengHei" pitchFamily="34" charset="0"/>
+                <a:ea typeface="Microsoft JhengHei" pitchFamily="34" charset="-122"/>
+                <a:cs typeface="Microsoft JhengHei" pitchFamily="34" charset="-120"/>
+              </a:rPr>
               <a:t>Kiro 部署｜每人一次設定（約 15 分鐘）</a:t>
             </a:r>
             <a:endParaRPr lang="en-US" sz="2700" dirty="0"/>
@@ -5389,9 +8973,9 @@
 </p:sld>
 </file>
 
-<file path=ppt/slides/slide12.xml><?xml version="1.0" encoding="utf-8"?>
+<file path=ppt/slides/slide14.xml><?xml version="1.0" encoding="utf-8"?>
 <p:sld xmlns:a="http://schemas.openxmlformats.org/drawingml/2006/main" xmlns:r="http://schemas.openxmlformats.org/officeDocument/2006/relationships" xmlns:p="http://schemas.openxmlformats.org/presentationml/2006/main">
-  <p:cSld name="Slide 12">
+  <p:cSld name="Slide 14">
     <p:bg>
       <p:bgPr>
         <a:solidFill>
@@ -5955,9 +9539,9 @@
 </p:sld>
 </file>
 
-<file path=ppt/slides/slide13.xml><?xml version="1.0" encoding="utf-8"?>
+<file path=ppt/slides/slide15.xml><?xml version="1.0" encoding="utf-8"?>
 <p:sld xmlns:a="http://schemas.openxmlformats.org/drawingml/2006/main" xmlns:r="http://schemas.openxmlformats.org/officeDocument/2006/relationships" xmlns:p="http://schemas.openxmlformats.org/presentationml/2006/main">
-  <p:cSld name="Slide 13">
+  <p:cSld name="Slide 15">
     <p:bg>
       <p:bgPr>
         <a:solidFill>
@@ -6786,9 +10370,9 @@
 </p:sld>
 </file>
 
-<file path=ppt/slides/slide14.xml><?xml version="1.0" encoding="utf-8"?>
+<file path=ppt/slides/slide16.xml><?xml version="1.0" encoding="utf-8"?>
 <p:sld xmlns:a="http://schemas.openxmlformats.org/drawingml/2006/main" xmlns:r="http://schemas.openxmlformats.org/officeDocument/2006/relationships" xmlns:p="http://schemas.openxmlformats.org/presentationml/2006/main">
-  <p:cSld name="Slide 14">
+  <p:cSld name="Slide 16">
     <p:bg>
       <p:bgPr>
         <a:solidFill>
@@ -7463,9 +11047,9 @@
 </p:sld>
 </file>
 
-<file path=ppt/slides/slide15.xml><?xml version="1.0" encoding="utf-8"?>
+<file path=ppt/slides/slide17.xml><?xml version="1.0" encoding="utf-8"?>
 <p:sld xmlns:a="http://schemas.openxmlformats.org/drawingml/2006/main" xmlns:r="http://schemas.openxmlformats.org/officeDocument/2006/relationships" xmlns:p="http://schemas.openxmlformats.org/presentationml/2006/main">
-  <p:cSld name="Slide 15">
+  <p:cSld name="Slide 17">
     <p:bg>
       <p:bgPr>
         <a:solidFill>

--- a/docs/工作項目狀態.pptx
+++ b/docs/工作項目狀態.pptx
@@ -22,9 +22,10 @@
     <p:sldId id="270" r:id="rId16"/>
     <p:sldId id="271" r:id="rId17"/>
     <p:sldId id="272" r:id="rId18"/>
+    <p:sldId id="273" r:id="rId19"/>
   </p:sldIdLst>
   <p:notesMasterIdLst>
-    <p:notesMasterId r:id="rId19"/>
+    <p:notesMasterId r:id="rId20"/>
   </p:notesMasterIdLst>
   <p:sldSz cx="12192000" cy="6858000"/>
   <p:notesSz cx="6858000" cy="12192000"/>
@@ -1246,6 +1247,94 @@
             <a:fld id="{F7021451-1387-4CA6-816F-3879F97B5CBC}" type="slidenum">
               <a:rPr lang="en-US"/>
               <a:t>17</a:t>
+            </a:fld>
+            <a:endParaRPr lang="en-US"/>
+          </a:p>
+        </p:txBody>
+      </p:sp>
+    </p:spTree>
+    <p:extLst>
+      <p:ext uri="{BB962C8B-B14F-4D97-AF65-F5344CB8AC3E}">
+        <p14:creationId xmlns:p14="http://schemas.microsoft.com/office/powerpoint/2010/main" val="1024086991"/>
+      </p:ext>
+    </p:extLst>
+  </p:cSld>
+  <p:clrMapOvr>
+    <a:masterClrMapping/>
+  </p:clrMapOvr>
+</p:notes>
+</file>
+
+<file path=ppt/notesSlides/notesSlide18.xml><?xml version="1.0" encoding="utf-8"?>
+<p:notes xmlns:a="http://schemas.openxmlformats.org/drawingml/2006/main" xmlns:r="http://schemas.openxmlformats.org/officeDocument/2006/relationships" xmlns:p="http://schemas.openxmlformats.org/presentationml/2006/main">
+  <p:cSld>
+    <p:spTree>
+      <p:nvGrpSpPr>
+        <p:cNvPr id="1" name=""/>
+        <p:cNvGrpSpPr/>
+        <p:nvPr/>
+      </p:nvGrpSpPr>
+      <p:grpSpPr>
+        <a:xfrm>
+          <a:off x="0" y="0"/>
+          <a:ext cx="0" cy="0"/>
+          <a:chOff x="0" y="0"/>
+          <a:chExt cx="0" cy="0"/>
+        </a:xfrm>
+      </p:grpSpPr>
+      <p:sp>
+        <p:nvSpPr>
+          <p:cNvPr id="2" name="Slide Image Placeholder 1"/>
+          <p:cNvSpPr>
+            <a:spLocks noGrp="1" noRot="1" noChangeAspect="1"/>
+          </p:cNvSpPr>
+          <p:nvPr>
+            <p:ph type="sldImg"/>
+          </p:nvPr>
+        </p:nvSpPr>
+        <p:spPr/>
+      </p:sp>
+      <p:sp>
+        <p:nvSpPr>
+          <p:cNvPr id="3" name="Notes Placeholder 2"/>
+          <p:cNvSpPr>
+            <a:spLocks noGrp="1"/>
+          </p:cNvSpPr>
+          <p:nvPr>
+            <p:ph type="body" idx="1"/>
+          </p:nvPr>
+        </p:nvSpPr>
+        <p:spPr/>
+        <p:txBody>
+          <a:bodyPr/>
+          <a:lstStyle/>
+          <a:p>
+            <a:r>
+              <a:rPr lang="en-US" dirty="0"/>
+              <a:t/>
+            </a:r>
+            <a:endParaRPr lang="en-US" dirty="0"/>
+          </a:p>
+        </p:txBody>
+      </p:sp>
+      <p:sp>
+        <p:nvSpPr>
+          <p:cNvPr id="4" name="Slide Number Placeholder 3"/>
+          <p:cNvSpPr>
+            <a:spLocks noGrp="1"/>
+          </p:cNvSpPr>
+          <p:nvPr>
+            <p:ph type="sldNum" sz="quarter" idx="10"/>
+          </p:nvPr>
+        </p:nvSpPr>
+        <p:spPr/>
+        <p:txBody>
+          <a:bodyPr/>
+          <a:lstStyle/>
+          <a:p>
+            <a:fld id="{F7021451-1387-4CA6-816F-3879F97B5CBC}" type="slidenum">
+              <a:rPr lang="en-US"/>
+              <a:t>18</a:t>
             </a:fld>
             <a:endParaRPr lang="en-US"/>
           </a:p>
@@ -2489,6 +2578,422 @@
     <p:bg>
       <p:bgPr>
         <a:solidFill>
+          <a:srgbClr val="0D1530"/>
+        </a:solidFill>
+      </p:bgPr>
+    </p:bg>
+    <p:spTree>
+      <p:nvGrpSpPr>
+        <p:cNvPr id="1" name=""/>
+        <p:cNvGrpSpPr/>
+        <p:nvPr/>
+      </p:nvGrpSpPr>
+      <p:grpSpPr>
+        <a:xfrm>
+          <a:off x="0" y="0"/>
+          <a:ext cx="0" cy="0"/>
+          <a:chOff x="0" y="0"/>
+          <a:chExt cx="0" cy="0"/>
+        </a:xfrm>
+      </p:grpSpPr>
+      <p:sp>
+        <p:nvSpPr>
+          <p:cNvPr id="2" name="Text 0"/>
+          <p:cNvSpPr/>
+          <p:nvPr/>
+        </p:nvSpPr>
+        <p:spPr>
+          <a:xfrm>
+            <a:off x="548640" y="365760"/>
+            <a:ext cx="11091672" cy="548640"/>
+          </a:xfrm>
+          <a:prstGeom prst="rect">
+            <a:avLst/>
+          </a:prstGeom>
+          <a:noFill/>
+          <a:ln/>
+        </p:spPr>
+        <p:txBody>
+          <a:bodyPr wrap="square" lIns="0" tIns="0" rIns="0" bIns="0" rtlCol="0" anchor="ctr"/>
+          <a:lstStyle/>
+          <a:p>
+            <a:pPr indent="0" marL="0">
+              <a:buNone/>
+            </a:pPr>
+            <a:r>
+              <a:rPr lang="en-US" sz="2600" b="1" dirty="0">
+                <a:solidFill>
+                  <a:srgbClr val="FFFFFF"/>
+                </a:solidFill>
+                <a:latin typeface="Microsoft JhengHei" pitchFamily="34" charset="0"/>
+                <a:ea typeface="Microsoft JhengHei" pitchFamily="34" charset="-122"/>
+                <a:cs typeface="Microsoft JhengHei" pitchFamily="34" charset="-120"/>
+              </a:rPr>
+              <a:t>Demo 實際畫面：Golden Path 三階段</a:t>
+            </a:r>
+            <a:endParaRPr lang="en-US" sz="2600" dirty="0"/>
+          </a:p>
+        </p:txBody>
+      </p:sp>
+      <p:sp>
+        <p:nvSpPr>
+          <p:cNvPr id="3" name="Text 1"/>
+          <p:cNvSpPr/>
+          <p:nvPr/>
+        </p:nvSpPr>
+        <p:spPr>
+          <a:xfrm>
+            <a:off x="548640" y="914400"/>
+            <a:ext cx="11091672" cy="320040"/>
+          </a:xfrm>
+          <a:prstGeom prst="rect">
+            <a:avLst/>
+          </a:prstGeom>
+          <a:noFill/>
+          <a:ln/>
+        </p:spPr>
+        <p:txBody>
+          <a:bodyPr wrap="square" lIns="0" tIns="0" rIns="0" bIns="0" rtlCol="0" anchor="ctr"/>
+          <a:lstStyle/>
+          <a:p>
+            <a:pPr indent="0" marL="0">
+              <a:buNone/>
+            </a:pPr>
+            <a:r>
+              <a:rPr lang="en-US" sz="1200" dirty="0">
+                <a:solidFill>
+                  <a:srgbClr val="8FA0C9"/>
+                </a:solidFill>
+                <a:latin typeface="Microsoft JhengHei" pitchFamily="34" charset="0"/>
+                <a:ea typeface="Microsoft JhengHei" pitchFamily="34" charset="-122"/>
+                <a:cs typeface="Microsoft JhengHei" pitchFamily="34" charset="-120"/>
+              </a:rPr>
+              <a:t>視覺 mockup＝C 包實作規格｜畫面中所有數字皆來自真實資料計算</a:t>
+            </a:r>
+            <a:endParaRPr lang="en-US" sz="1200" dirty="0"/>
+          </a:p>
+        </p:txBody>
+      </p:sp>
+      <p:pic>
+        <p:nvPicPr>
+          <p:cNvPr id="4" name="Image 0" descr="/workspace/maimate/docs/mockups/screen1.png">    </p:cNvPr>
+          <p:cNvPicPr>
+            <a:picLocks noChangeAspect="1"/>
+          </p:cNvPicPr>
+          <p:nvPr/>
+        </p:nvPicPr>
+        <p:blipFill>
+          <a:blip r:embed="rId1"/>
+          <a:stretch>
+            <a:fillRect/>
+          </a:stretch>
+        </p:blipFill>
+        <p:spPr>
+          <a:xfrm>
+            <a:off x="2002536" y="1325880"/>
+            <a:ext cx="2240280" cy="4846320"/>
+          </a:xfrm>
+          <a:prstGeom prst="rect">
+            <a:avLst/>
+          </a:prstGeom>
+        </p:spPr>
+      </p:pic>
+      <p:sp>
+        <p:nvSpPr>
+          <p:cNvPr id="5" name="Text 2"/>
+          <p:cNvSpPr/>
+          <p:nvPr/>
+        </p:nvSpPr>
+        <p:spPr>
+          <a:xfrm>
+            <a:off x="1682496" y="6217920"/>
+            <a:ext cx="2880360" cy="320040"/>
+          </a:xfrm>
+          <a:prstGeom prst="rect">
+            <a:avLst/>
+          </a:prstGeom>
+          <a:noFill/>
+          <a:ln/>
+        </p:spPr>
+        <p:txBody>
+          <a:bodyPr wrap="square" lIns="0" tIns="0" rIns="0" bIns="0" rtlCol="0" anchor="ctr"/>
+          <a:lstStyle/>
+          <a:p>
+            <a:pPr algn="ctr" indent="0" marL="0">
+              <a:buNone/>
+            </a:pPr>
+            <a:r>
+              <a:rPr lang="en-US" sz="1150" b="1" dirty="0">
+                <a:solidFill>
+                  <a:srgbClr val="FFFFFF"/>
+                </a:solidFill>
+                <a:latin typeface="Microsoft JhengHei" pitchFamily="34" charset="0"/>
+                <a:ea typeface="Microsoft JhengHei" pitchFamily="34" charset="-122"/>
+                <a:cs typeface="Microsoft JhengHei" pitchFamily="34" charset="-120"/>
+              </a:rPr>
+              <a:t>① 健檢首屏：健康分＋行為洞察</a:t>
+            </a:r>
+            <a:endParaRPr lang="en-US" sz="1150" dirty="0"/>
+          </a:p>
+        </p:txBody>
+      </p:sp>
+      <p:sp>
+        <p:nvSpPr>
+          <p:cNvPr id="6" name="Text 3"/>
+          <p:cNvSpPr/>
+          <p:nvPr/>
+        </p:nvSpPr>
+        <p:spPr>
+          <a:xfrm>
+            <a:off x="1682496" y="6510528"/>
+            <a:ext cx="2880360" cy="274320"/>
+          </a:xfrm>
+          <a:prstGeom prst="rect">
+            <a:avLst/>
+          </a:prstGeom>
+          <a:noFill/>
+          <a:ln/>
+        </p:spPr>
+        <p:txBody>
+          <a:bodyPr wrap="square" lIns="0" tIns="0" rIns="0" bIns="0" rtlCol="0" anchor="ctr"/>
+          <a:lstStyle/>
+          <a:p>
+            <a:pPr algn="ctr" indent="0" marL="0">
+              <a:buNone/>
+            </a:pPr>
+            <a:r>
+              <a:rPr lang="en-US" sz="950" dirty="0">
+                <a:solidFill>
+                  <a:srgbClr val="E8A13A"/>
+                </a:solidFill>
+                <a:latin typeface="Microsoft JhengHei" pitchFamily="34" charset="0"/>
+                <a:ea typeface="Microsoft JhengHei" pitchFamily="34" charset="-122"/>
+                <a:cs typeface="Microsoft JhengHei" pitchFamily="34" charset="-120"/>
+              </a:rPr>
+              <a:t>開場 10 秒抓住評審</a:t>
+            </a:r>
+            <a:endParaRPr lang="en-US" sz="950" dirty="0"/>
+          </a:p>
+        </p:txBody>
+      </p:sp>
+      <p:pic>
+        <p:nvPicPr>
+          <p:cNvPr id="7" name="Image 1" descr="/workspace/maimate/docs/mockups/screen2.png">    </p:cNvPr>
+          <p:cNvPicPr>
+            <a:picLocks noChangeAspect="1"/>
+          </p:cNvPicPr>
+          <p:nvPr/>
+        </p:nvPicPr>
+        <p:blipFill>
+          <a:blip r:embed="rId2"/>
+          <a:stretch>
+            <a:fillRect/>
+          </a:stretch>
+        </p:blipFill>
+        <p:spPr>
+          <a:xfrm>
+            <a:off x="4974336" y="1325880"/>
+            <a:ext cx="2240280" cy="4846320"/>
+          </a:xfrm>
+          <a:prstGeom prst="rect">
+            <a:avLst/>
+          </a:prstGeom>
+        </p:spPr>
+      </p:pic>
+      <p:sp>
+        <p:nvSpPr>
+          <p:cNvPr id="8" name="Text 4"/>
+          <p:cNvSpPr/>
+          <p:nvPr/>
+        </p:nvSpPr>
+        <p:spPr>
+          <a:xfrm>
+            <a:off x="4654296" y="6217920"/>
+            <a:ext cx="2880360" cy="320040"/>
+          </a:xfrm>
+          <a:prstGeom prst="rect">
+            <a:avLst/>
+          </a:prstGeom>
+          <a:noFill/>
+          <a:ln/>
+        </p:spPr>
+        <p:txBody>
+          <a:bodyPr wrap="square" lIns="0" tIns="0" rIns="0" bIns="0" rtlCol="0" anchor="ctr"/>
+          <a:lstStyle/>
+          <a:p>
+            <a:pPr algn="ctr" indent="0" marL="0">
+              <a:buNone/>
+            </a:pPr>
+            <a:r>
+              <a:rPr lang="en-US" sz="1150" b="1" dirty="0">
+                <a:solidFill>
+                  <a:srgbClr val="FFFFFF"/>
+                </a:solidFill>
+                <a:latin typeface="Microsoft JhengHei" pitchFamily="34" charset="0"/>
+                <a:ea typeface="Microsoft JhengHei" pitchFamily="34" charset="-122"/>
+                <a:cs typeface="Microsoft JhengHei" pitchFamily="34" charset="-120"/>
+              </a:rPr>
+              <a:t>② 恐慌攔截：工具鏈＋三方案</a:t>
+            </a:r>
+            <a:endParaRPr lang="en-US" sz="1150" dirty="0"/>
+          </a:p>
+        </p:txBody>
+      </p:sp>
+      <p:sp>
+        <p:nvSpPr>
+          <p:cNvPr id="9" name="Text 5"/>
+          <p:cNvSpPr/>
+          <p:nvPr/>
+        </p:nvSpPr>
+        <p:spPr>
+          <a:xfrm>
+            <a:off x="4654296" y="6510528"/>
+            <a:ext cx="2880360" cy="274320"/>
+          </a:xfrm>
+          <a:prstGeom prst="rect">
+            <a:avLst/>
+          </a:prstGeom>
+          <a:noFill/>
+          <a:ln/>
+        </p:spPr>
+        <p:txBody>
+          <a:bodyPr wrap="square" lIns="0" tIns="0" rIns="0" bIns="0" rtlCol="0" anchor="ctr"/>
+          <a:lstStyle/>
+          <a:p>
+            <a:pPr algn="ctr" indent="0" marL="0">
+              <a:buNone/>
+            </a:pPr>
+            <a:r>
+              <a:rPr lang="en-US" sz="950" dirty="0">
+                <a:solidFill>
+                  <a:srgbClr val="E8A13A"/>
+                </a:solidFill>
+                <a:latin typeface="Microsoft JhengHei" pitchFamily="34" charset="0"/>
+                <a:ea typeface="Microsoft JhengHei" pitchFamily="34" charset="-122"/>
+                <a:cs typeface="Microsoft JhengHei" pitchFamily="34" charset="-120"/>
+              </a:rPr>
+              <a:t>全場最重一擊（1/8 少賺 31 萬）</a:t>
+            </a:r>
+            <a:endParaRPr lang="en-US" sz="950" dirty="0"/>
+          </a:p>
+        </p:txBody>
+      </p:sp>
+      <p:pic>
+        <p:nvPicPr>
+          <p:cNvPr id="10" name="Image 2" descr="/workspace/maimate/docs/mockups/screen3.png">    </p:cNvPr>
+          <p:cNvPicPr>
+            <a:picLocks noChangeAspect="1"/>
+          </p:cNvPicPr>
+          <p:nvPr/>
+        </p:nvPicPr>
+        <p:blipFill>
+          <a:blip r:embed="rId3"/>
+          <a:stretch>
+            <a:fillRect/>
+          </a:stretch>
+        </p:blipFill>
+        <p:spPr>
+          <a:xfrm>
+            <a:off x="7946136" y="1325880"/>
+            <a:ext cx="2240280" cy="4846320"/>
+          </a:xfrm>
+          <a:prstGeom prst="rect">
+            <a:avLst/>
+          </a:prstGeom>
+        </p:spPr>
+      </p:pic>
+      <p:sp>
+        <p:nvSpPr>
+          <p:cNvPr id="11" name="Text 6"/>
+          <p:cNvSpPr/>
+          <p:nvPr/>
+        </p:nvSpPr>
+        <p:spPr>
+          <a:xfrm>
+            <a:off x="7626096" y="6217920"/>
+            <a:ext cx="2880360" cy="320040"/>
+          </a:xfrm>
+          <a:prstGeom prst="rect">
+            <a:avLst/>
+          </a:prstGeom>
+          <a:noFill/>
+          <a:ln/>
+        </p:spPr>
+        <p:txBody>
+          <a:bodyPr wrap="square" lIns="0" tIns="0" rIns="0" bIns="0" rtlCol="0" anchor="ctr"/>
+          <a:lstStyle/>
+          <a:p>
+            <a:pPr algn="ctr" indent="0" marL="0">
+              <a:buNone/>
+            </a:pPr>
+            <a:r>
+              <a:rPr lang="en-US" sz="1150" b="1" dirty="0">
+                <a:solidFill>
+                  <a:srgbClr val="FFFFFF"/>
+                </a:solidFill>
+                <a:latin typeface="Microsoft JhengHei" pitchFamily="34" charset="0"/>
+                <a:ea typeface="Microsoft JhengHei" pitchFamily="34" charset="-122"/>
+                <a:cs typeface="Microsoft JhengHei" pitchFamily="34" charset="-120"/>
+              </a:rPr>
+              <a:t>③ 確認卡→成交→決策軌跡</a:t>
+            </a:r>
+            <a:endParaRPr lang="en-US" sz="1150" dirty="0"/>
+          </a:p>
+        </p:txBody>
+      </p:sp>
+      <p:sp>
+        <p:nvSpPr>
+          <p:cNvPr id="12" name="Text 7"/>
+          <p:cNvSpPr/>
+          <p:nvPr/>
+        </p:nvSpPr>
+        <p:spPr>
+          <a:xfrm>
+            <a:off x="7626096" y="6510528"/>
+            <a:ext cx="2880360" cy="274320"/>
+          </a:xfrm>
+          <a:prstGeom prst="rect">
+            <a:avLst/>
+          </a:prstGeom>
+          <a:noFill/>
+          <a:ln/>
+        </p:spPr>
+        <p:txBody>
+          <a:bodyPr wrap="square" lIns="0" tIns="0" rIns="0" bIns="0" rtlCol="0" anchor="ctr"/>
+          <a:lstStyle/>
+          <a:p>
+            <a:pPr algn="ctr" indent="0" marL="0">
+              <a:buNone/>
+            </a:pPr>
+            <a:r>
+              <a:rPr lang="en-US" sz="950" dirty="0">
+                <a:solidFill>
+                  <a:srgbClr val="E8A13A"/>
+                </a:solidFill>
+                <a:latin typeface="Microsoft JhengHei" pitchFamily="34" charset="0"/>
+                <a:ea typeface="Microsoft JhengHei" pitchFamily="34" charset="-122"/>
+                <a:cs typeface="Microsoft JhengHei" pitchFamily="34" charset="-120"/>
+              </a:rPr>
+              <a:t>AI 有手，方向盤在人手上</a:t>
+            </a:r>
+            <a:endParaRPr lang="en-US" sz="950" dirty="0"/>
+          </a:p>
+        </p:txBody>
+      </p:sp>
+    </p:spTree>
+  </p:cSld>
+  <p:clrMapOvr>
+    <a:masterClrMapping/>
+  </p:clrMapOvr>
+</p:sld>
+</file>
+
+<file path=ppt/slides/slide11.xml><?xml version="1.0" encoding="utf-8"?>
+<p:sld xmlns:a="http://schemas.openxmlformats.org/drawingml/2006/main" xmlns:r="http://schemas.openxmlformats.org/officeDocument/2006/relationships" xmlns:p="http://schemas.openxmlformats.org/presentationml/2006/main">
+  <p:cSld name="Slide 11">
+    <p:bg>
+      <p:bgPr>
+        <a:solidFill>
           <a:srgbClr val="FFFFFF"/>
         </a:solidFill>
       </p:bgPr>
@@ -2548,7 +3053,7 @@
       </p:sp>
       <p:graphicFrame>
         <p:nvGraphicFramePr>
-          <p:cNvPr id="11" name="Table 0"/>
+          <p:cNvPr id="12" name="Table 0"/>
           <p:cNvGraphicFramePr>
             <a:graphicFrameLocks noGrp="1"/>
           </p:cNvGraphicFramePr>
@@ -4733,9 +5238,9 @@
 </p:sld>
 </file>
 
-<file path=ppt/slides/slide11.xml><?xml version="1.0" encoding="utf-8"?>
+<file path=ppt/slides/slide12.xml><?xml version="1.0" encoding="utf-8"?>
 <p:sld xmlns:a="http://schemas.openxmlformats.org/drawingml/2006/main" xmlns:r="http://schemas.openxmlformats.org/officeDocument/2006/relationships" xmlns:p="http://schemas.openxmlformats.org/presentationml/2006/main">
-  <p:cSld name="Slide 11">
+  <p:cSld name="Slide 12">
     <p:bg>
       <p:bgPr>
         <a:solidFill>
@@ -4837,7 +5342,7 @@
       </p:sp>
       <p:graphicFrame>
         <p:nvGraphicFramePr>
-          <p:cNvPr id="12" name="Table 0"/>
+          <p:cNvPr id="13" name="Table 0"/>
           <p:cNvGraphicFramePr>
             <a:graphicFrameLocks noGrp="1"/>
           </p:cNvGraphicFramePr>
@@ -7582,9 +8087,9 @@
 </p:sld>
 </file>
 
-<file path=ppt/slides/slide12.xml><?xml version="1.0" encoding="utf-8"?>
+<file path=ppt/slides/slide13.xml><?xml version="1.0" encoding="utf-8"?>
 <p:sld xmlns:a="http://schemas.openxmlformats.org/drawingml/2006/main" xmlns:r="http://schemas.openxmlformats.org/officeDocument/2006/relationships" xmlns:p="http://schemas.openxmlformats.org/presentationml/2006/main">
-  <p:cSld name="Slide 12">
+  <p:cSld name="Slide 13">
     <p:bg>
       <p:bgPr>
         <a:solidFill>
@@ -8139,9 +8644,9 @@
 </p:sld>
 </file>
 
-<file path=ppt/slides/slide13.xml><?xml version="1.0" encoding="utf-8"?>
+<file path=ppt/slides/slide14.xml><?xml version="1.0" encoding="utf-8"?>
 <p:sld xmlns:a="http://schemas.openxmlformats.org/drawingml/2006/main" xmlns:r="http://schemas.openxmlformats.org/officeDocument/2006/relationships" xmlns:p="http://schemas.openxmlformats.org/presentationml/2006/main">
-  <p:cSld name="Slide 13">
+  <p:cSld name="Slide 14">
     <p:bg>
       <p:bgPr>
         <a:solidFill>
@@ -8973,9 +9478,9 @@
 </p:sld>
 </file>
 
-<file path=ppt/slides/slide14.xml><?xml version="1.0" encoding="utf-8"?>
+<file path=ppt/slides/slide15.xml><?xml version="1.0" encoding="utf-8"?>
 <p:sld xmlns:a="http://schemas.openxmlformats.org/drawingml/2006/main" xmlns:r="http://schemas.openxmlformats.org/officeDocument/2006/relationships" xmlns:p="http://schemas.openxmlformats.org/presentationml/2006/main">
-  <p:cSld name="Slide 14">
+  <p:cSld name="Slide 15">
     <p:bg>
       <p:bgPr>
         <a:solidFill>
@@ -9539,9 +10044,9 @@
 </p:sld>
 </file>
 
-<file path=ppt/slides/slide15.xml><?xml version="1.0" encoding="utf-8"?>
+<file path=ppt/slides/slide16.xml><?xml version="1.0" encoding="utf-8"?>
 <p:sld xmlns:a="http://schemas.openxmlformats.org/drawingml/2006/main" xmlns:r="http://schemas.openxmlformats.org/officeDocument/2006/relationships" xmlns:p="http://schemas.openxmlformats.org/presentationml/2006/main">
-  <p:cSld name="Slide 15">
+  <p:cSld name="Slide 16">
     <p:bg>
       <p:bgPr>
         <a:solidFill>
@@ -10370,9 +10875,9 @@
 </p:sld>
 </file>
 
-<file path=ppt/slides/slide16.xml><?xml version="1.0" encoding="utf-8"?>
+<file path=ppt/slides/slide17.xml><?xml version="1.0" encoding="utf-8"?>
 <p:sld xmlns:a="http://schemas.openxmlformats.org/drawingml/2006/main" xmlns:r="http://schemas.openxmlformats.org/officeDocument/2006/relationships" xmlns:p="http://schemas.openxmlformats.org/presentationml/2006/main">
-  <p:cSld name="Slide 16">
+  <p:cSld name="Slide 17">
     <p:bg>
       <p:bgPr>
         <a:solidFill>
@@ -11047,9 +11552,9 @@
 </p:sld>
 </file>
 
-<file path=ppt/slides/slide17.xml><?xml version="1.0" encoding="utf-8"?>
+<file path=ppt/slides/slide18.xml><?xml version="1.0" encoding="utf-8"?>
 <p:sld xmlns:a="http://schemas.openxmlformats.org/drawingml/2006/main" xmlns:r="http://schemas.openxmlformats.org/officeDocument/2006/relationships" xmlns:p="http://schemas.openxmlformats.org/presentationml/2006/main">
-  <p:cSld name="Slide 17">
+  <p:cSld name="Slide 18">
     <p:bg>
       <p:bgPr>
         <a:solidFill>
